--- a/Presentacion/EDA_Goodreads.pptx
+++ b/Presentacion/EDA_Goodreads.pptx
@@ -4,6 +4,9 @@
   <p:sldMasterIdLst>
     <p:sldMasterId id="2147483648" r:id="rId1"/>
   </p:sldMasterIdLst>
+  <p:notesMasterIdLst>
+    <p:notesMasterId r:id="rId14"/>
+  </p:notesMasterIdLst>
   <p:sldIdLst>
     <p:sldId id="256" r:id="rId2"/>
     <p:sldId id="257" r:id="rId3"/>
@@ -18,10 +21,7 @@
     <p:sldId id="266" r:id="rId12"/>
     <p:sldId id="267" r:id="rId13"/>
   </p:sldIdLst>
-  <p:notesMasterIdLst>
-    <p:notesMasterId r:id="rId14"/>
-  </p:notesMasterIdLst>
-  <p:sldSz cx="9144000" cy="5143500"/>
+  <p:sldSz cx="9144000" cy="5143500" type="screen16x9"/>
   <p:notesSz cx="5143500" cy="9144000"/>
   <p:defaultTextStyle>
     <a:lvl1pPr marL="0" algn="l" defTabSz="914400" rtl="0" eaLnBrk="1" latinLnBrk="0" hangingPunct="1">
@@ -115,6 +115,11 @@
       </a:defRPr>
     </a:lvl9pPr>
   </p:defaultTextStyle>
+  <p:extLst>
+    <p:ext uri="{EFAFB233-063F-42B5-8137-9DF3F51BA10A}">
+      <p15:sldGuideLst xmlns:p15="http://schemas.microsoft.com/office/powerpoint/2012/main"/>
+    </p:ext>
+  </p:extLst>
 </p:presentation>
 </file>
 
@@ -140,234 +145,10 @@
           <a:chExt cx="0" cy="0"/>
         </a:xfrm>
       </p:grpSpPr>
-      <p:sp>
-        <p:nvSpPr>
-          <p:cNvPr id="2" name="Header Placeholder 1"/>
-          <p:cNvSpPr>
-            <a:spLocks noGrp="1"/>
-          </p:cNvSpPr>
-          <p:nvPr>
-            <p:ph type="hdr" sz="quarter"/>
-          </p:nvPr>
-        </p:nvSpPr>
-        <p:spPr>
-          <a:xfrm>
-            <a:off x="0" y="0"/>
-            <a:ext cx="2971800" cy="458788"/>
-          </a:xfrm>
-          <a:prstGeom prst="rect">
-            <a:avLst/>
-          </a:prstGeom>
-        </p:spPr>
-        <p:txBody>
-          <a:bodyPr vert="horz" lIns="91440" tIns="45720" rIns="91440" bIns="45720" rtlCol="0"/>
-          <a:lstStyle>
-            <a:lvl1pPr algn="l">
-              <a:defRPr sz="1200"/>
-            </a:lvl1pPr>
-          </a:lstStyle>
-          <a:p>
-            <a:endParaRPr lang="en-US"/>
-          </a:p>
-        </p:txBody>
-      </p:sp>
-      <p:sp>
-        <p:nvSpPr>
-          <p:cNvPr id="3" name="Date Placeholder 2"/>
-          <p:cNvSpPr>
-            <a:spLocks noGrp="1"/>
-          </p:cNvSpPr>
-          <p:nvPr>
-            <p:ph type="dt" idx="1"/>
-          </p:nvPr>
-        </p:nvSpPr>
-        <p:spPr>
-          <a:xfrm>
-            <a:off x="3884613" y="0"/>
-            <a:ext cx="2971800" cy="458788"/>
-          </a:xfrm>
-          <a:prstGeom prst="rect">
-            <a:avLst/>
-          </a:prstGeom>
-        </p:spPr>
-        <p:txBody>
-          <a:bodyPr vert="horz" lIns="91440" tIns="45720" rIns="91440" bIns="45720" rtlCol="0"/>
-          <a:lstStyle>
-            <a:lvl1pPr algn="r">
-              <a:defRPr sz="1200"/>
-            </a:lvl1pPr>
-          </a:lstStyle>
-          <a:p>
-            <a:fld id="{5282F153-3F37-0F45-9E97-73ACFA13230C}" type="datetimeFigureOut">
-              <a:rPr lang="en-US"/>
-              <a:t>7/23/19</a:t>
-            </a:fld>
-            <a:endParaRPr lang="en-US"/>
-          </a:p>
-        </p:txBody>
-      </p:sp>
-      <p:sp>
-        <p:nvSpPr>
-          <p:cNvPr id="4" name="Slide Image Placeholder 3"/>
-          <p:cNvSpPr>
-            <a:spLocks noGrp="1" noRot="1" noChangeAspect="1"/>
-          </p:cNvSpPr>
-          <p:nvPr>
-            <p:ph type="sldImg" idx="2"/>
-          </p:nvPr>
-        </p:nvSpPr>
-        <p:spPr>
-          <a:xfrm>
-            <a:off x="685800" y="1143000"/>
-            <a:ext cx="5486400" cy="3086100"/>
-          </a:xfrm>
-          <a:prstGeom prst="rect">
-            <a:avLst/>
-          </a:prstGeom>
-          <a:noFill/>
-          <a:ln w="12700">
-            <a:solidFill>
-              <a:prstClr val="black"/>
-            </a:solidFill>
-          </a:ln>
-        </p:spPr>
-        <p:txBody>
-          <a:bodyPr vert="horz" lIns="91440" tIns="45720" rIns="91440" bIns="45720" rtlCol="0" anchor="ctr"/>
-          <a:lstStyle/>
-          <a:p>
-            <a:endParaRPr lang="en-US"/>
-          </a:p>
-        </p:txBody>
-      </p:sp>
-      <p:sp>
-        <p:nvSpPr>
-          <p:cNvPr id="5" name="Notes Placeholder 4"/>
-          <p:cNvSpPr>
-            <a:spLocks noGrp="1"/>
-          </p:cNvSpPr>
-          <p:nvPr>
-            <p:ph type="body" sz="quarter" idx="3"/>
-          </p:nvPr>
-        </p:nvSpPr>
-        <p:spPr>
-          <a:xfrm>
-            <a:off x="685800" y="4400550"/>
-            <a:ext cx="5486400" cy="3600450"/>
-          </a:xfrm>
-          <a:prstGeom prst="rect">
-            <a:avLst/>
-          </a:prstGeom>
-        </p:spPr>
-        <p:txBody>
-          <a:bodyPr vert="horz" lIns="91440" tIns="45720" rIns="91440" bIns="45720" rtlCol="0"/>
-          <a:lstStyle/>
-          <a:p>
-            <a:pPr lvl="0"/>
-            <a:r>
-              <a:rPr lang="en-US"/>
-              <a:t>Click to edit Master text styles</a:t>
-            </a:r>
-          </a:p>
-          <a:p>
-            <a:pPr lvl="1"/>
-            <a:r>
-              <a:rPr lang="en-US"/>
-              <a:t>Second level</a:t>
-            </a:r>
-          </a:p>
-          <a:p>
-            <a:pPr lvl="2"/>
-            <a:r>
-              <a:rPr lang="en-US"/>
-              <a:t>Third level</a:t>
-            </a:r>
-          </a:p>
-          <a:p>
-            <a:pPr lvl="3"/>
-            <a:r>
-              <a:rPr lang="en-US"/>
-              <a:t>Fourth level</a:t>
-            </a:r>
-          </a:p>
-          <a:p>
-            <a:pPr lvl="4"/>
-            <a:r>
-              <a:rPr lang="en-US"/>
-              <a:t>Fifth level</a:t>
-            </a:r>
-          </a:p>
-        </p:txBody>
-      </p:sp>
-      <p:sp>
-        <p:nvSpPr>
-          <p:cNvPr id="6" name="Footer Placeholder 5"/>
-          <p:cNvSpPr>
-            <a:spLocks noGrp="1"/>
-          </p:cNvSpPr>
-          <p:nvPr>
-            <p:ph type="ftr" sz="quarter" idx="4"/>
-          </p:nvPr>
-        </p:nvSpPr>
-        <p:spPr>
-          <a:xfrm>
-            <a:off x="0" y="8685213"/>
-            <a:ext cx="2971800" cy="458787"/>
-          </a:xfrm>
-          <a:prstGeom prst="rect">
-            <a:avLst/>
-          </a:prstGeom>
-        </p:spPr>
-        <p:txBody>
-          <a:bodyPr vert="horz" lIns="91440" tIns="45720" rIns="91440" bIns="45720" rtlCol="0" anchor="b"/>
-          <a:lstStyle>
-            <a:lvl1pPr algn="l">
-              <a:defRPr sz="1200"/>
-            </a:lvl1pPr>
-          </a:lstStyle>
-          <a:p>
-            <a:endParaRPr lang="en-US"/>
-          </a:p>
-        </p:txBody>
-      </p:sp>
-      <p:sp>
-        <p:nvSpPr>
-          <p:cNvPr id="7" name="Slide Number Placeholder 6"/>
-          <p:cNvSpPr>
-            <a:spLocks noGrp="1"/>
-          </p:cNvSpPr>
-          <p:nvPr>
-            <p:ph type="sldNum" sz="quarter" idx="5"/>
-          </p:nvPr>
-        </p:nvSpPr>
-        <p:spPr>
-          <a:xfrm>
-            <a:off x="3884613" y="8685213"/>
-            <a:ext cx="2971800" cy="458787"/>
-          </a:xfrm>
-          <a:prstGeom prst="rect">
-            <a:avLst/>
-          </a:prstGeom>
-        </p:spPr>
-        <p:txBody>
-          <a:bodyPr vert="horz" lIns="91440" tIns="45720" rIns="91440" bIns="45720" rtlCol="0" anchor="b"/>
-          <a:lstStyle>
-            <a:lvl1pPr algn="r">
-              <a:defRPr sz="1200"/>
-            </a:lvl1pPr>
-          </a:lstStyle>
-          <a:p>
-            <a:fld id="{CE5E9CC1-C706-0F49-92D6-E571CC5EEA8F}" type="slidenum">
-              <a:rPr lang="en-US"/>
-              <a:t>‹#›</a:t>
-            </a:fld>
-            <a:endParaRPr lang="en-US"/>
-          </a:p>
-        </p:txBody>
-      </p:sp>
     </p:spTree>
     <p:extLst>
       <p:ext uri="{BB962C8B-B14F-4D97-AF65-F5344CB8AC3E}">
-        <p14:creationId xmlns:p14="http://schemas.microsoft.com/office/powerpoint/2010/main" val="1024086991"/>
+        <p14:creationId xmlns:p14="http://schemas.microsoft.com/office/powerpoint/2010/main" val="3875658035"/>
       </p:ext>
     </p:extLst>
   </p:cSld>
@@ -511,10 +292,6 @@
           <a:bodyPr/>
           <a:lstStyle/>
           <a:p>
-            <a:r>
-              <a:rPr lang="en-US" dirty="0"/>
-              <a:t/>
-            </a:r>
             <a:endParaRPr lang="en-US" dirty="0"/>
           </a:p>
         </p:txBody>
@@ -599,10 +376,6 @@
           <a:bodyPr/>
           <a:lstStyle/>
           <a:p>
-            <a:r>
-              <a:rPr lang="en-US" dirty="0"/>
-              <a:t/>
-            </a:r>
             <a:endParaRPr lang="en-US" dirty="0"/>
           </a:p>
         </p:txBody>
@@ -687,10 +460,6 @@
           <a:bodyPr/>
           <a:lstStyle/>
           <a:p>
-            <a:r>
-              <a:rPr lang="en-US" dirty="0"/>
-              <a:t/>
-            </a:r>
             <a:endParaRPr lang="en-US" dirty="0"/>
           </a:p>
         </p:txBody>
@@ -775,10 +544,6 @@
           <a:bodyPr/>
           <a:lstStyle/>
           <a:p>
-            <a:r>
-              <a:rPr lang="en-US" dirty="0"/>
-              <a:t/>
-            </a:r>
             <a:endParaRPr lang="en-US" dirty="0"/>
           </a:p>
         </p:txBody>
@@ -863,10 +628,6 @@
           <a:bodyPr/>
           <a:lstStyle/>
           <a:p>
-            <a:r>
-              <a:rPr lang="en-US" dirty="0"/>
-              <a:t/>
-            </a:r>
             <a:endParaRPr lang="en-US" dirty="0"/>
           </a:p>
         </p:txBody>
@@ -951,10 +712,6 @@
           <a:bodyPr/>
           <a:lstStyle/>
           <a:p>
-            <a:r>
-              <a:rPr lang="en-US" dirty="0"/>
-              <a:t/>
-            </a:r>
             <a:endParaRPr lang="en-US" dirty="0"/>
           </a:p>
         </p:txBody>
@@ -1039,10 +796,6 @@
           <a:bodyPr/>
           <a:lstStyle/>
           <a:p>
-            <a:r>
-              <a:rPr lang="en-US" dirty="0"/>
-              <a:t/>
-            </a:r>
             <a:endParaRPr lang="en-US" dirty="0"/>
           </a:p>
         </p:txBody>
@@ -1127,10 +880,6 @@
           <a:bodyPr/>
           <a:lstStyle/>
           <a:p>
-            <a:r>
-              <a:rPr lang="en-US" dirty="0"/>
-              <a:t/>
-            </a:r>
             <a:endParaRPr lang="en-US" dirty="0"/>
           </a:p>
         </p:txBody>
@@ -1215,10 +964,6 @@
           <a:bodyPr/>
           <a:lstStyle/>
           <a:p>
-            <a:r>
-              <a:rPr lang="en-US" dirty="0"/>
-              <a:t/>
-            </a:r>
             <a:endParaRPr lang="en-US" dirty="0"/>
           </a:p>
         </p:txBody>
@@ -1303,10 +1048,6 @@
           <a:bodyPr/>
           <a:lstStyle/>
           <a:p>
-            <a:r>
-              <a:rPr lang="en-US" dirty="0"/>
-              <a:t/>
-            </a:r>
             <a:endParaRPr lang="en-US" dirty="0"/>
           </a:p>
         </p:txBody>
@@ -1391,10 +1132,6 @@
           <a:bodyPr/>
           <a:lstStyle/>
           <a:p>
-            <a:r>
-              <a:rPr lang="en-US" dirty="0"/>
-              <a:t/>
-            </a:r>
             <a:endParaRPr lang="en-US" dirty="0"/>
           </a:p>
         </p:txBody>
@@ -1479,10 +1216,6 @@
           <a:bodyPr/>
           <a:lstStyle/>
           <a:p>
-            <a:r>
-              <a:rPr lang="en-US" dirty="0"/>
-              <a:t/>
-            </a:r>
             <a:endParaRPr lang="en-US" dirty="0"/>
           </a:p>
         </p:txBody>
@@ -1556,6 +1289,11 @@
 <file path=ppt/slideMasters/slideMaster1.xml><?xml version="1.0" encoding="utf-8"?>
 <p:sldMaster xmlns:a="http://schemas.openxmlformats.org/drawingml/2006/main" xmlns:r="http://schemas.openxmlformats.org/officeDocument/2006/relationships" xmlns:p="http://schemas.openxmlformats.org/presentationml/2006/main">
   <p:cSld>
+    <p:bg>
+      <p:bgRef idx="1001">
+        <a:schemeClr val="bg1"/>
+      </p:bgRef>
+    </p:bg>
     <p:spTree>
       <p:nvGrpSpPr>
         <p:cNvPr id="1" name=""/>
@@ -1838,6 +1576,7 @@
         <a:solidFill>
           <a:srgbClr val="2C1A0E"/>
         </a:solidFill>
+        <a:effectLst/>
       </p:bgPr>
     </p:bg>
     <p:spTree>
@@ -1878,6 +1617,13 @@
             <a:prstDash val="solid"/>
           </a:ln>
         </p:spPr>
+        <p:txBody>
+          <a:bodyPr/>
+          <a:lstStyle/>
+          <a:p>
+            <a:endParaRPr lang="es-ES"/>
+          </a:p>
+        </p:txBody>
       </p:sp>
       <p:sp>
         <p:nvSpPr>
@@ -1900,7 +1646,7 @@
           <a:bodyPr wrap="square" rtlCol="0" anchor="ctr"/>
           <a:lstStyle/>
           <a:p>
-            <a:pPr algn="l" indent="0" marL="0">
+            <a:pPr marL="0" indent="0" algn="l">
               <a:buNone/>
             </a:pPr>
             <a:r>
@@ -1917,7 +1663,7 @@
             <a:endParaRPr lang="en-US" sz="4400" dirty="0"/>
           </a:p>
           <a:p>
-            <a:pPr algn="l" indent="0" marL="0">
+            <a:pPr marL="0" indent="0" algn="l">
               <a:buNone/>
             </a:pPr>
             <a:r>
@@ -1956,7 +1702,7 @@
           <a:bodyPr wrap="square" rtlCol="0" anchor="ctr"/>
           <a:lstStyle/>
           <a:p>
-            <a:pPr algn="l" indent="0" marL="0">
+            <a:pPr marL="0" indent="0" algn="l">
               <a:buNone/>
             </a:pPr>
             <a:r>
@@ -1998,6 +1744,13 @@
             <a:prstDash val="solid"/>
           </a:ln>
         </p:spPr>
+        <p:txBody>
+          <a:bodyPr/>
+          <a:lstStyle/>
+          <a:p>
+            <a:endParaRPr lang="es-ES"/>
+          </a:p>
+        </p:txBody>
       </p:sp>
       <p:sp>
         <p:nvSpPr>
@@ -2020,7 +1773,7 @@
           <a:bodyPr wrap="square" rtlCol="0" anchor="ctr"/>
           <a:lstStyle/>
           <a:p>
-            <a:pPr algn="l" indent="0" marL="0">
+            <a:pPr marL="0" indent="0" algn="l">
               <a:buNone/>
             </a:pPr>
             <a:r>
@@ -2032,9 +1785,8 @@
                 <a:ea typeface="Calibri" pitchFamily="34" charset="-122"/>
                 <a:cs typeface="Calibri" pitchFamily="34" charset="-120"/>
               </a:rPr>
-              <a:t>EDA | Curso de Data Science  •  2025</a:t>
-            </a:r>
-            <a:endParaRPr lang="en-US" sz="1200" dirty="0"/>
+              <a:t>EDA | Bootcamp Data Science  •  2026</a:t>
+            </a:r>
           </a:p>
         </p:txBody>
       </p:sp>
@@ -2054,6 +1806,7 @@
         <a:solidFill>
           <a:srgbClr val="FDF6EC"/>
         </a:solidFill>
+        <a:effectLst/>
       </p:bgPr>
     </p:bg>
     <p:spTree>
@@ -2094,6 +1847,13 @@
             <a:prstDash val="solid"/>
           </a:ln>
         </p:spPr>
+        <p:txBody>
+          <a:bodyPr/>
+          <a:lstStyle/>
+          <a:p>
+            <a:endParaRPr lang="es-ES"/>
+          </a:p>
+        </p:txBody>
       </p:sp>
       <p:sp>
         <p:nvSpPr>
@@ -2119,6 +1879,13 @@
             <a:prstDash val="solid"/>
           </a:ln>
         </p:spPr>
+        <p:txBody>
+          <a:bodyPr/>
+          <a:lstStyle/>
+          <a:p>
+            <a:endParaRPr lang="es-ES"/>
+          </a:p>
+        </p:txBody>
       </p:sp>
       <p:sp>
         <p:nvSpPr>
@@ -2141,7 +1908,7 @@
           <a:bodyPr wrap="square" lIns="0" tIns="0" rIns="0" bIns="0" rtlCol="0" anchor="ctr"/>
           <a:lstStyle/>
           <a:p>
-            <a:pPr algn="l" indent="0" marL="0">
+            <a:pPr marL="0" indent="0" algn="l">
               <a:buNone/>
             </a:pPr>
             <a:r>
@@ -2183,6 +1950,13 @@
             <a:prstDash val="solid"/>
           </a:ln>
         </p:spPr>
+        <p:txBody>
+          <a:bodyPr/>
+          <a:lstStyle/>
+          <a:p>
+            <a:endParaRPr lang="es-ES"/>
+          </a:p>
+        </p:txBody>
       </p:sp>
       <p:sp>
         <p:nvSpPr>
@@ -2205,7 +1979,7 @@
           <a:bodyPr wrap="square" rtlCol="0" anchor="ctr"/>
           <a:lstStyle/>
           <a:p>
-            <a:pPr algn="ctr" indent="0" marL="0">
+            <a:pPr marL="0" indent="0" algn="ctr">
               <a:buNone/>
             </a:pPr>
             <a:r>
@@ -2222,7 +1996,7 @@
             <a:endParaRPr lang="en-US" sz="1200" dirty="0"/>
           </a:p>
           <a:p>
-            <a:pPr algn="ctr" indent="0" marL="0">
+            <a:pPr marL="0" indent="0" algn="ctr">
               <a:buNone/>
             </a:pPr>
             <a:r>
@@ -2239,7 +2013,7 @@
             <a:endParaRPr lang="en-US" sz="1200" dirty="0"/>
           </a:p>
           <a:p>
-            <a:pPr algn="ctr" indent="0" marL="0">
+            <a:pPr marL="0" indent="0" algn="ctr">
               <a:buNone/>
             </a:pPr>
             <a:r>
@@ -2256,7 +2030,7 @@
             <a:endParaRPr lang="en-US" sz="1200" dirty="0"/>
           </a:p>
           <a:p>
-            <a:pPr algn="ctr" indent="0" marL="0">
+            <a:pPr marL="0" indent="0" algn="ctr">
               <a:buNone/>
             </a:pPr>
             <a:r>
@@ -2298,13 +2072,20 @@
             <a:prstDash val="solid"/>
           </a:ln>
           <a:effectLst>
-            <a:outerShdw sx="100000" sy="100000" kx="0" ky="0" algn="bl" rotWithShape="0" blurRad="101600" dist="38100" dir="8100000">
+            <a:outerShdw blurRad="101600" dist="38100" dir="8100000" algn="bl" rotWithShape="0">
               <a:srgbClr val="000000">
                 <a:alpha val="12000"/>
               </a:srgbClr>
             </a:outerShdw>
           </a:effectLst>
         </p:spPr>
+        <p:txBody>
+          <a:bodyPr/>
+          <a:lstStyle/>
+          <a:p>
+            <a:endParaRPr lang="es-ES"/>
+          </a:p>
+        </p:txBody>
       </p:sp>
       <p:sp>
         <p:nvSpPr>
@@ -2327,7 +2108,7 @@
           <a:bodyPr wrap="square" rtlCol="0" anchor="ctr"/>
           <a:lstStyle/>
           <a:p>
-            <a:pPr algn="ctr" indent="0" marL="0">
+            <a:pPr marL="0" indent="0" algn="ctr">
               <a:buNone/>
             </a:pPr>
             <a:r>
@@ -2344,7 +2125,7 @@
             <a:endParaRPr lang="en-US" sz="1000" dirty="0"/>
           </a:p>
           <a:p>
-            <a:pPr algn="ctr" indent="0" marL="0">
+            <a:pPr marL="0" indent="0" algn="ctr">
               <a:buNone/>
             </a:pPr>
             <a:r>
@@ -2383,7 +2164,7 @@
           <a:bodyPr wrap="square" rtlCol="0" anchor="ctr"/>
           <a:lstStyle/>
           <a:p>
-            <a:pPr algn="ctr" indent="0" marL="0">
+            <a:pPr marL="0" indent="0" algn="ctr">
               <a:buNone/>
             </a:pPr>
             <a:r>
@@ -2422,7 +2203,7 @@
           <a:bodyPr wrap="square" rtlCol="0" anchor="ctr"/>
           <a:lstStyle/>
           <a:p>
-            <a:pPr algn="ctr" indent="0" marL="0">
+            <a:pPr marL="0" indent="0" algn="ctr">
               <a:buNone/>
             </a:pPr>
             <a:r>
@@ -2464,6 +2245,13 @@
             <a:prstDash val="solid"/>
           </a:ln>
         </p:spPr>
+        <p:txBody>
+          <a:bodyPr/>
+          <a:lstStyle/>
+          <a:p>
+            <a:endParaRPr lang="es-ES"/>
+          </a:p>
+        </p:txBody>
       </p:sp>
       <p:sp>
         <p:nvSpPr>
@@ -2486,7 +2274,7 @@
           <a:bodyPr wrap="square" rtlCol="0" anchor="ctr"/>
           <a:lstStyle/>
           <a:p>
-            <a:pPr algn="ctr" indent="0" marL="0">
+            <a:pPr marL="0" indent="0" algn="ctr">
               <a:buNone/>
             </a:pPr>
             <a:r>
@@ -2520,6 +2308,7 @@
         <a:solidFill>
           <a:srgbClr val="2C1A0E"/>
         </a:solidFill>
+        <a:effectLst/>
       </p:bgPr>
     </p:bg>
     <p:spTree>
@@ -2560,6 +2349,13 @@
             <a:prstDash val="solid"/>
           </a:ln>
         </p:spPr>
+        <p:txBody>
+          <a:bodyPr/>
+          <a:lstStyle/>
+          <a:p>
+            <a:endParaRPr lang="es-ES"/>
+          </a:p>
+        </p:txBody>
       </p:sp>
       <p:sp>
         <p:nvSpPr>
@@ -2582,7 +2378,7 @@
           <a:bodyPr wrap="square" rtlCol="0" anchor="ctr"/>
           <a:lstStyle/>
           <a:p>
-            <a:pPr algn="l" indent="0" marL="0">
+            <a:pPr marL="0" indent="0" algn="l">
               <a:buNone/>
             </a:pPr>
             <a:r>
@@ -2624,6 +2420,13 @@
             <a:prstDash val="solid"/>
           </a:ln>
         </p:spPr>
+        <p:txBody>
+          <a:bodyPr/>
+          <a:lstStyle/>
+          <a:p>
+            <a:endParaRPr lang="es-ES"/>
+          </a:p>
+        </p:txBody>
       </p:sp>
       <p:sp>
         <p:nvSpPr>
@@ -2649,6 +2452,13 @@
             <a:prstDash val="solid"/>
           </a:ln>
         </p:spPr>
+        <p:txBody>
+          <a:bodyPr/>
+          <a:lstStyle/>
+          <a:p>
+            <a:endParaRPr lang="es-ES"/>
+          </a:p>
+        </p:txBody>
       </p:sp>
       <p:sp>
         <p:nvSpPr>
@@ -2671,7 +2481,7 @@
           <a:bodyPr wrap="square" rtlCol="0" anchor="ctr"/>
           <a:lstStyle/>
           <a:p>
-            <a:pPr algn="ctr" indent="0" marL="0">
+            <a:pPr marL="0" indent="0" algn="ctr">
               <a:buNone/>
             </a:pPr>
             <a:r>
@@ -2710,7 +2520,7 @@
           <a:bodyPr wrap="square" rtlCol="0" anchor="ctr"/>
           <a:lstStyle/>
           <a:p>
-            <a:pPr algn="ctr" indent="0" marL="0">
+            <a:pPr marL="0" indent="0" algn="ctr">
               <a:buNone/>
             </a:pPr>
             <a:r>
@@ -2727,7 +2537,7 @@
             <a:endParaRPr lang="en-US" sz="1000" dirty="0"/>
           </a:p>
           <a:p>
-            <a:pPr algn="ctr" indent="0" marL="0">
+            <a:pPr marL="0" indent="0" algn="ctr">
               <a:buNone/>
             </a:pPr>
             <a:r>
@@ -2769,6 +2579,13 @@
             <a:prstDash val="solid"/>
           </a:ln>
         </p:spPr>
+        <p:txBody>
+          <a:bodyPr/>
+          <a:lstStyle/>
+          <a:p>
+            <a:endParaRPr lang="es-ES"/>
+          </a:p>
+        </p:txBody>
       </p:sp>
       <p:sp>
         <p:nvSpPr>
@@ -2791,7 +2608,7 @@
           <a:bodyPr wrap="square" rtlCol="0" anchor="ctr"/>
           <a:lstStyle/>
           <a:p>
-            <a:pPr algn="ctr" indent="0" marL="0">
+            <a:pPr marL="0" indent="0" algn="ctr">
               <a:buNone/>
             </a:pPr>
             <a:r>
@@ -2808,7 +2625,7 @@
             <a:endParaRPr lang="en-US" sz="1000" dirty="0"/>
           </a:p>
           <a:p>
-            <a:pPr algn="ctr" indent="0" marL="0">
+            <a:pPr marL="0" indent="0" algn="ctr">
               <a:buNone/>
             </a:pPr>
             <a:r>
@@ -2850,6 +2667,13 @@
             <a:prstDash val="solid"/>
           </a:ln>
         </p:spPr>
+        <p:txBody>
+          <a:bodyPr/>
+          <a:lstStyle/>
+          <a:p>
+            <a:endParaRPr lang="es-ES"/>
+          </a:p>
+        </p:txBody>
       </p:sp>
       <p:sp>
         <p:nvSpPr>
@@ -2875,6 +2699,13 @@
             <a:prstDash val="solid"/>
           </a:ln>
         </p:spPr>
+        <p:txBody>
+          <a:bodyPr/>
+          <a:lstStyle/>
+          <a:p>
+            <a:endParaRPr lang="es-ES"/>
+          </a:p>
+        </p:txBody>
       </p:sp>
       <p:sp>
         <p:nvSpPr>
@@ -2897,7 +2728,7 @@
           <a:bodyPr wrap="square" rtlCol="0" anchor="ctr"/>
           <a:lstStyle/>
           <a:p>
-            <a:pPr algn="ctr" indent="0" marL="0">
+            <a:pPr marL="0" indent="0" algn="ctr">
               <a:buNone/>
             </a:pPr>
             <a:r>
@@ -2936,7 +2767,7 @@
           <a:bodyPr wrap="square" rtlCol="0" anchor="ctr"/>
           <a:lstStyle/>
           <a:p>
-            <a:pPr algn="ctr" indent="0" marL="0">
+            <a:pPr marL="0" indent="0" algn="ctr">
               <a:buNone/>
             </a:pPr>
             <a:r>
@@ -2953,7 +2784,7 @@
             <a:endParaRPr lang="en-US" sz="1000" dirty="0"/>
           </a:p>
           <a:p>
-            <a:pPr algn="ctr" indent="0" marL="0">
+            <a:pPr marL="0" indent="0" algn="ctr">
               <a:buNone/>
             </a:pPr>
             <a:r>
@@ -2995,6 +2826,13 @@
             <a:prstDash val="solid"/>
           </a:ln>
         </p:spPr>
+        <p:txBody>
+          <a:bodyPr/>
+          <a:lstStyle/>
+          <a:p>
+            <a:endParaRPr lang="es-ES"/>
+          </a:p>
+        </p:txBody>
       </p:sp>
       <p:sp>
         <p:nvSpPr>
@@ -3017,7 +2855,7 @@
           <a:bodyPr wrap="square" rtlCol="0" anchor="ctr"/>
           <a:lstStyle/>
           <a:p>
-            <a:pPr algn="ctr" indent="0" marL="0">
+            <a:pPr marL="0" indent="0" algn="ctr">
               <a:buNone/>
             </a:pPr>
             <a:r>
@@ -3034,7 +2872,7 @@
             <a:endParaRPr lang="en-US" sz="1000" dirty="0"/>
           </a:p>
           <a:p>
-            <a:pPr algn="ctr" indent="0" marL="0">
+            <a:pPr marL="0" indent="0" algn="ctr">
               <a:buNone/>
             </a:pPr>
             <a:r>
@@ -3076,6 +2914,13 @@
             <a:prstDash val="solid"/>
           </a:ln>
         </p:spPr>
+        <p:txBody>
+          <a:bodyPr/>
+          <a:lstStyle/>
+          <a:p>
+            <a:endParaRPr lang="es-ES"/>
+          </a:p>
+        </p:txBody>
       </p:sp>
       <p:sp>
         <p:nvSpPr>
@@ -3101,6 +2946,13 @@
             <a:prstDash val="solid"/>
           </a:ln>
         </p:spPr>
+        <p:txBody>
+          <a:bodyPr/>
+          <a:lstStyle/>
+          <a:p>
+            <a:endParaRPr lang="es-ES"/>
+          </a:p>
+        </p:txBody>
       </p:sp>
       <p:sp>
         <p:nvSpPr>
@@ -3123,7 +2975,7 @@
           <a:bodyPr wrap="square" rtlCol="0" anchor="ctr"/>
           <a:lstStyle/>
           <a:p>
-            <a:pPr algn="ctr" indent="0" marL="0">
+            <a:pPr marL="0" indent="0" algn="ctr">
               <a:buNone/>
             </a:pPr>
             <a:r>
@@ -3162,7 +3014,7 @@
           <a:bodyPr wrap="square" rtlCol="0" anchor="ctr"/>
           <a:lstStyle/>
           <a:p>
-            <a:pPr algn="ctr" indent="0" marL="0">
+            <a:pPr marL="0" indent="0" algn="ctr">
               <a:buNone/>
             </a:pPr>
             <a:r>
@@ -3179,7 +3031,7 @@
             <a:endParaRPr lang="en-US" sz="1000" dirty="0"/>
           </a:p>
           <a:p>
-            <a:pPr algn="ctr" indent="0" marL="0">
+            <a:pPr marL="0" indent="0" algn="ctr">
               <a:buNone/>
             </a:pPr>
             <a:r>
@@ -3221,6 +3073,13 @@
             <a:prstDash val="solid"/>
           </a:ln>
         </p:spPr>
+        <p:txBody>
+          <a:bodyPr/>
+          <a:lstStyle/>
+          <a:p>
+            <a:endParaRPr lang="es-ES"/>
+          </a:p>
+        </p:txBody>
       </p:sp>
       <p:sp>
         <p:nvSpPr>
@@ -3243,7 +3102,7 @@
           <a:bodyPr wrap="square" rtlCol="0" anchor="ctr"/>
           <a:lstStyle/>
           <a:p>
-            <a:pPr algn="ctr" indent="0" marL="0">
+            <a:pPr marL="0" indent="0" algn="ctr">
               <a:buNone/>
             </a:pPr>
             <a:r>
@@ -3260,7 +3119,7 @@
             <a:endParaRPr lang="en-US" sz="1000" dirty="0"/>
           </a:p>
           <a:p>
-            <a:pPr algn="ctr" indent="0" marL="0">
+            <a:pPr marL="0" indent="0" algn="ctr">
               <a:buNone/>
             </a:pPr>
             <a:r>
@@ -3302,6 +3161,13 @@
             <a:prstDash val="solid"/>
           </a:ln>
         </p:spPr>
+        <p:txBody>
+          <a:bodyPr/>
+          <a:lstStyle/>
+          <a:p>
+            <a:endParaRPr lang="es-ES"/>
+          </a:p>
+        </p:txBody>
       </p:sp>
       <p:sp>
         <p:nvSpPr>
@@ -3327,6 +3193,13 @@
             <a:prstDash val="solid"/>
           </a:ln>
         </p:spPr>
+        <p:txBody>
+          <a:bodyPr/>
+          <a:lstStyle/>
+          <a:p>
+            <a:endParaRPr lang="es-ES"/>
+          </a:p>
+        </p:txBody>
       </p:sp>
       <p:sp>
         <p:nvSpPr>
@@ -3349,7 +3222,7 @@
           <a:bodyPr wrap="square" rtlCol="0" anchor="ctr"/>
           <a:lstStyle/>
           <a:p>
-            <a:pPr algn="ctr" indent="0" marL="0">
+            <a:pPr marL="0" indent="0" algn="ctr">
               <a:buNone/>
             </a:pPr>
             <a:r>
@@ -3388,7 +3261,7 @@
           <a:bodyPr wrap="square" rtlCol="0" anchor="ctr"/>
           <a:lstStyle/>
           <a:p>
-            <a:pPr algn="ctr" indent="0" marL="0">
+            <a:pPr marL="0" indent="0" algn="ctr">
               <a:buNone/>
             </a:pPr>
             <a:r>
@@ -3405,7 +3278,7 @@
             <a:endParaRPr lang="en-US" sz="1000" dirty="0"/>
           </a:p>
           <a:p>
-            <a:pPr algn="ctr" indent="0" marL="0">
+            <a:pPr marL="0" indent="0" algn="ctr">
               <a:buNone/>
             </a:pPr>
             <a:r>
@@ -3447,6 +3320,13 @@
             <a:prstDash val="solid"/>
           </a:ln>
         </p:spPr>
+        <p:txBody>
+          <a:bodyPr/>
+          <a:lstStyle/>
+          <a:p>
+            <a:endParaRPr lang="es-ES"/>
+          </a:p>
+        </p:txBody>
       </p:sp>
       <p:sp>
         <p:nvSpPr>
@@ -3469,7 +3349,7 @@
           <a:bodyPr wrap="square" rtlCol="0" anchor="ctr"/>
           <a:lstStyle/>
           <a:p>
-            <a:pPr algn="ctr" indent="0" marL="0">
+            <a:pPr marL="0" indent="0" algn="ctr">
               <a:buNone/>
             </a:pPr>
             <a:r>
@@ -3486,7 +3366,7 @@
             <a:endParaRPr lang="en-US" sz="1000" dirty="0"/>
           </a:p>
           <a:p>
-            <a:pPr algn="ctr" indent="0" marL="0">
+            <a:pPr marL="0" indent="0" algn="ctr">
               <a:buNone/>
             </a:pPr>
             <a:r>
@@ -3528,6 +3408,13 @@
             <a:prstDash val="solid"/>
           </a:ln>
         </p:spPr>
+        <p:txBody>
+          <a:bodyPr/>
+          <a:lstStyle/>
+          <a:p>
+            <a:endParaRPr lang="es-ES"/>
+          </a:p>
+        </p:txBody>
       </p:sp>
       <p:sp>
         <p:nvSpPr>
@@ -3553,6 +3440,13 @@
             <a:prstDash val="solid"/>
           </a:ln>
         </p:spPr>
+        <p:txBody>
+          <a:bodyPr/>
+          <a:lstStyle/>
+          <a:p>
+            <a:endParaRPr lang="es-ES"/>
+          </a:p>
+        </p:txBody>
       </p:sp>
       <p:sp>
         <p:nvSpPr>
@@ -3575,7 +3469,7 @@
           <a:bodyPr wrap="square" rtlCol="0" anchor="ctr"/>
           <a:lstStyle/>
           <a:p>
-            <a:pPr algn="ctr" indent="0" marL="0">
+            <a:pPr marL="0" indent="0" algn="ctr">
               <a:buNone/>
             </a:pPr>
             <a:r>
@@ -3614,7 +3508,7 @@
           <a:bodyPr wrap="square" rtlCol="0" anchor="ctr"/>
           <a:lstStyle/>
           <a:p>
-            <a:pPr algn="ctr" indent="0" marL="0">
+            <a:pPr marL="0" indent="0" algn="ctr">
               <a:buNone/>
             </a:pPr>
             <a:r>
@@ -3631,7 +3525,7 @@
             <a:endParaRPr lang="en-US" sz="1000" dirty="0"/>
           </a:p>
           <a:p>
-            <a:pPr algn="ctr" indent="0" marL="0">
+            <a:pPr marL="0" indent="0" algn="ctr">
               <a:buNone/>
             </a:pPr>
             <a:r>
@@ -3673,6 +3567,13 @@
             <a:prstDash val="solid"/>
           </a:ln>
         </p:spPr>
+        <p:txBody>
+          <a:bodyPr/>
+          <a:lstStyle/>
+          <a:p>
+            <a:endParaRPr lang="es-ES"/>
+          </a:p>
+        </p:txBody>
       </p:sp>
       <p:sp>
         <p:nvSpPr>
@@ -3695,7 +3596,7 @@
           <a:bodyPr wrap="square" rtlCol="0" anchor="ctr"/>
           <a:lstStyle/>
           <a:p>
-            <a:pPr algn="ctr" indent="0" marL="0">
+            <a:pPr marL="0" indent="0" algn="ctr">
               <a:buNone/>
             </a:pPr>
             <a:r>
@@ -3712,7 +3613,7 @@
             <a:endParaRPr lang="en-US" sz="1000" dirty="0"/>
           </a:p>
           <a:p>
-            <a:pPr algn="ctr" indent="0" marL="0">
+            <a:pPr marL="0" indent="0" algn="ctr">
               <a:buNone/>
             </a:pPr>
             <a:r>
@@ -3754,6 +3655,13 @@
             <a:prstDash val="solid"/>
           </a:ln>
         </p:spPr>
+        <p:txBody>
+          <a:bodyPr/>
+          <a:lstStyle/>
+          <a:p>
+            <a:endParaRPr lang="es-ES"/>
+          </a:p>
+        </p:txBody>
       </p:sp>
       <p:sp>
         <p:nvSpPr>
@@ -3779,6 +3687,13 @@
             <a:prstDash val="solid"/>
           </a:ln>
         </p:spPr>
+        <p:txBody>
+          <a:bodyPr/>
+          <a:lstStyle/>
+          <a:p>
+            <a:endParaRPr lang="es-ES"/>
+          </a:p>
+        </p:txBody>
       </p:sp>
       <p:sp>
         <p:nvSpPr>
@@ -3801,7 +3716,7 @@
           <a:bodyPr wrap="square" rtlCol="0" anchor="ctr"/>
           <a:lstStyle/>
           <a:p>
-            <a:pPr algn="ctr" indent="0" marL="0">
+            <a:pPr marL="0" indent="0" algn="ctr">
               <a:buNone/>
             </a:pPr>
             <a:r>
@@ -3840,7 +3755,7 @@
           <a:bodyPr wrap="square" rtlCol="0" anchor="ctr"/>
           <a:lstStyle/>
           <a:p>
-            <a:pPr algn="ctr" indent="0" marL="0">
+            <a:pPr marL="0" indent="0" algn="ctr">
               <a:buNone/>
             </a:pPr>
             <a:r>
@@ -3857,7 +3772,7 @@
             <a:endParaRPr lang="en-US" sz="1000" dirty="0"/>
           </a:p>
           <a:p>
-            <a:pPr algn="ctr" indent="0" marL="0">
+            <a:pPr marL="0" indent="0" algn="ctr">
               <a:buNone/>
             </a:pPr>
             <a:r>
@@ -3899,6 +3814,13 @@
             <a:prstDash val="solid"/>
           </a:ln>
         </p:spPr>
+        <p:txBody>
+          <a:bodyPr/>
+          <a:lstStyle/>
+          <a:p>
+            <a:endParaRPr lang="es-ES"/>
+          </a:p>
+        </p:txBody>
       </p:sp>
       <p:sp>
         <p:nvSpPr>
@@ -3921,7 +3843,7 @@
           <a:bodyPr wrap="square" rtlCol="0" anchor="ctr"/>
           <a:lstStyle/>
           <a:p>
-            <a:pPr algn="ctr" indent="0" marL="0">
+            <a:pPr marL="0" indent="0" algn="ctr">
               <a:buNone/>
             </a:pPr>
             <a:r>
@@ -3938,7 +3860,7 @@
             <a:endParaRPr lang="en-US" sz="1000" dirty="0"/>
           </a:p>
           <a:p>
-            <a:pPr algn="ctr" indent="0" marL="0">
+            <a:pPr marL="0" indent="0" algn="ctr">
               <a:buNone/>
             </a:pPr>
             <a:r>
@@ -3977,7 +3899,7 @@
           <a:bodyPr wrap="square" rtlCol="0" anchor="ctr"/>
           <a:lstStyle/>
           <a:p>
-            <a:pPr algn="l" indent="0" marL="0">
+            <a:pPr marL="0" indent="0" algn="l">
               <a:buNone/>
             </a:pPr>
             <a:r>
@@ -4011,6 +3933,7 @@
         <a:solidFill>
           <a:srgbClr val="2C1A0E"/>
         </a:solidFill>
+        <a:effectLst/>
       </p:bgPr>
     </p:bg>
     <p:spTree>
@@ -4051,6 +3974,13 @@
             <a:prstDash val="solid"/>
           </a:ln>
         </p:spPr>
+        <p:txBody>
+          <a:bodyPr/>
+          <a:lstStyle/>
+          <a:p>
+            <a:endParaRPr lang="es-ES"/>
+          </a:p>
+        </p:txBody>
       </p:sp>
       <p:sp>
         <p:nvSpPr>
@@ -4073,7 +4003,7 @@
           <a:bodyPr wrap="square" rtlCol="0" anchor="ctr"/>
           <a:lstStyle/>
           <a:p>
-            <a:pPr algn="l" indent="0" marL="0">
+            <a:pPr marL="0" indent="0" algn="l">
               <a:buNone/>
             </a:pPr>
             <a:r>
@@ -4115,6 +4045,13 @@
             <a:prstDash val="solid"/>
           </a:ln>
         </p:spPr>
+        <p:txBody>
+          <a:bodyPr/>
+          <a:lstStyle/>
+          <a:p>
+            <a:endParaRPr lang="es-ES"/>
+          </a:p>
+        </p:txBody>
       </p:sp>
       <p:sp>
         <p:nvSpPr>
@@ -4137,7 +4074,7 @@
           <a:bodyPr wrap="square" rtlCol="0" anchor="ctr"/>
           <a:lstStyle/>
           <a:p>
-            <a:pPr algn="l" indent="0" marL="0">
+            <a:pPr marL="0" indent="0" algn="l">
               <a:buNone/>
             </a:pPr>
             <a:r>
@@ -4154,7 +4091,7 @@
             <a:endParaRPr lang="en-US" sz="1300" dirty="0"/>
           </a:p>
           <a:p>
-            <a:pPr algn="l" indent="0" marL="0">
+            <a:pPr marL="0" indent="0" algn="l">
               <a:buNone/>
             </a:pPr>
             <a:r>
@@ -4193,7 +4130,7 @@
           <a:bodyPr wrap="square" rtlCol="0" anchor="ctr"/>
           <a:lstStyle/>
           <a:p>
-            <a:pPr algn="l" indent="0" marL="0">
+            <a:pPr marL="0" indent="0" algn="l">
               <a:buNone/>
             </a:pPr>
             <a:r>
@@ -4227,6 +4164,7 @@
         <a:solidFill>
           <a:srgbClr val="FDF6EC"/>
         </a:solidFill>
+        <a:effectLst/>
       </p:bgPr>
     </p:bg>
     <p:spTree>
@@ -4267,6 +4205,13 @@
             <a:prstDash val="solid"/>
           </a:ln>
         </p:spPr>
+        <p:txBody>
+          <a:bodyPr/>
+          <a:lstStyle/>
+          <a:p>
+            <a:endParaRPr lang="es-ES"/>
+          </a:p>
+        </p:txBody>
       </p:sp>
       <p:sp>
         <p:nvSpPr>
@@ -4292,6 +4237,13 @@
             <a:prstDash val="solid"/>
           </a:ln>
         </p:spPr>
+        <p:txBody>
+          <a:bodyPr/>
+          <a:lstStyle/>
+          <a:p>
+            <a:endParaRPr lang="es-ES"/>
+          </a:p>
+        </p:txBody>
       </p:sp>
       <p:sp>
         <p:nvSpPr>
@@ -4314,7 +4266,7 @@
           <a:bodyPr wrap="square" lIns="0" tIns="0" rIns="0" bIns="0" rtlCol="0" anchor="ctr"/>
           <a:lstStyle/>
           <a:p>
-            <a:pPr algn="l" indent="0" marL="0">
+            <a:pPr marL="0" indent="0" algn="l">
               <a:buNone/>
             </a:pPr>
             <a:r>
@@ -4353,7 +4305,7 @@
           <a:bodyPr wrap="square" rtlCol="0" anchor="ctr"/>
           <a:lstStyle/>
           <a:p>
-            <a:pPr algn="l" indent="0" marL="0">
+            <a:pPr marL="0" indent="0" algn="l">
               <a:buNone/>
             </a:pPr>
             <a:r>
@@ -4370,7 +4322,7 @@
             <a:endParaRPr lang="en-US" sz="1400" dirty="0"/>
           </a:p>
           <a:p>
-            <a:pPr algn="l" indent="0" marL="0">
+            <a:pPr marL="0" indent="0" algn="l">
               <a:buNone/>
             </a:pPr>
             <a:r>
@@ -4412,13 +4364,20 @@
             <a:prstDash val="solid"/>
           </a:ln>
           <a:effectLst>
-            <a:outerShdw sx="100000" sy="100000" kx="0" ky="0" algn="bl" rotWithShape="0" blurRad="101600" dist="38100" dir="8100000">
+            <a:outerShdw blurRad="101600" dist="38100" dir="8100000" algn="bl" rotWithShape="0">
               <a:srgbClr val="000000">
                 <a:alpha val="12000"/>
               </a:srgbClr>
             </a:outerShdw>
           </a:effectLst>
         </p:spPr>
+        <p:txBody>
+          <a:bodyPr/>
+          <a:lstStyle/>
+          <a:p>
+            <a:endParaRPr lang="es-ES"/>
+          </a:p>
+        </p:txBody>
       </p:sp>
       <p:sp>
         <p:nvSpPr>
@@ -4441,7 +4400,7 @@
           <a:bodyPr wrap="square" rtlCol="0" anchor="ctr"/>
           <a:lstStyle/>
           <a:p>
-            <a:pPr algn="ctr" indent="0" marL="0">
+            <a:pPr marL="0" indent="0" algn="ctr">
               <a:buNone/>
             </a:pPr>
             <a:r>
@@ -4480,7 +4439,7 @@
           <a:bodyPr wrap="square" rtlCol="0" anchor="ctr"/>
           <a:lstStyle/>
           <a:p>
-            <a:pPr algn="ctr" indent="0" marL="0">
+            <a:pPr marL="0" indent="0" algn="ctr">
               <a:buNone/>
             </a:pPr>
             <a:r>
@@ -4522,13 +4481,20 @@
             <a:prstDash val="solid"/>
           </a:ln>
           <a:effectLst>
-            <a:outerShdw sx="100000" sy="100000" kx="0" ky="0" algn="bl" rotWithShape="0" blurRad="101600" dist="38100" dir="8100000">
+            <a:outerShdw blurRad="101600" dist="38100" dir="8100000" algn="bl" rotWithShape="0">
               <a:srgbClr val="000000">
                 <a:alpha val="12000"/>
               </a:srgbClr>
             </a:outerShdw>
           </a:effectLst>
         </p:spPr>
+        <p:txBody>
+          <a:bodyPr/>
+          <a:lstStyle/>
+          <a:p>
+            <a:endParaRPr lang="es-ES"/>
+          </a:p>
+        </p:txBody>
       </p:sp>
       <p:sp>
         <p:nvSpPr>
@@ -4551,7 +4517,7 @@
           <a:bodyPr wrap="square" rtlCol="0" anchor="ctr"/>
           <a:lstStyle/>
           <a:p>
-            <a:pPr algn="ctr" indent="0" marL="0">
+            <a:pPr marL="0" indent="0" algn="ctr">
               <a:buNone/>
             </a:pPr>
             <a:r>
@@ -4590,7 +4556,7 @@
           <a:bodyPr wrap="square" rtlCol="0" anchor="ctr"/>
           <a:lstStyle/>
           <a:p>
-            <a:pPr algn="ctr" indent="0" marL="0">
+            <a:pPr marL="0" indent="0" algn="ctr">
               <a:buNone/>
             </a:pPr>
             <a:r>
@@ -4632,13 +4598,20 @@
             <a:prstDash val="solid"/>
           </a:ln>
           <a:effectLst>
-            <a:outerShdw sx="100000" sy="100000" kx="0" ky="0" algn="bl" rotWithShape="0" blurRad="101600" dist="38100" dir="8100000">
+            <a:outerShdw blurRad="101600" dist="38100" dir="8100000" algn="bl" rotWithShape="0">
               <a:srgbClr val="000000">
                 <a:alpha val="12000"/>
               </a:srgbClr>
             </a:outerShdw>
           </a:effectLst>
         </p:spPr>
+        <p:txBody>
+          <a:bodyPr/>
+          <a:lstStyle/>
+          <a:p>
+            <a:endParaRPr lang="es-ES"/>
+          </a:p>
+        </p:txBody>
       </p:sp>
       <p:sp>
         <p:nvSpPr>
@@ -4661,7 +4634,7 @@
           <a:bodyPr wrap="square" rtlCol="0" anchor="ctr"/>
           <a:lstStyle/>
           <a:p>
-            <a:pPr algn="ctr" indent="0" marL="0">
+            <a:pPr marL="0" indent="0" algn="ctr">
               <a:buNone/>
             </a:pPr>
             <a:r>
@@ -4700,7 +4673,7 @@
           <a:bodyPr wrap="square" rtlCol="0" anchor="ctr"/>
           <a:lstStyle/>
           <a:p>
-            <a:pPr algn="ctr" indent="0" marL="0">
+            <a:pPr marL="0" indent="0" algn="ctr">
               <a:buNone/>
             </a:pPr>
             <a:r>
@@ -4742,13 +4715,20 @@
             <a:prstDash val="solid"/>
           </a:ln>
           <a:effectLst>
-            <a:outerShdw sx="100000" sy="100000" kx="0" ky="0" algn="bl" rotWithShape="0" blurRad="101600" dist="38100" dir="8100000">
+            <a:outerShdw blurRad="101600" dist="38100" dir="8100000" algn="bl" rotWithShape="0">
               <a:srgbClr val="000000">
                 <a:alpha val="12000"/>
               </a:srgbClr>
             </a:outerShdw>
           </a:effectLst>
         </p:spPr>
+        <p:txBody>
+          <a:bodyPr/>
+          <a:lstStyle/>
+          <a:p>
+            <a:endParaRPr lang="es-ES"/>
+          </a:p>
+        </p:txBody>
       </p:sp>
       <p:sp>
         <p:nvSpPr>
@@ -4771,7 +4751,7 @@
           <a:bodyPr wrap="square" rtlCol="0" anchor="ctr"/>
           <a:lstStyle/>
           <a:p>
-            <a:pPr algn="ctr" indent="0" marL="0">
+            <a:pPr marL="0" indent="0" algn="ctr">
               <a:buNone/>
             </a:pPr>
             <a:r>
@@ -4810,7 +4790,7 @@
           <a:bodyPr wrap="square" rtlCol="0" anchor="ctr"/>
           <a:lstStyle/>
           <a:p>
-            <a:pPr algn="ctr" indent="0" marL="0">
+            <a:pPr marL="0" indent="0" algn="ctr">
               <a:buNone/>
             </a:pPr>
             <a:r>
@@ -4849,7 +4829,7 @@
           <a:bodyPr wrap="square" rtlCol="0" anchor="ctr"/>
           <a:lstStyle/>
           <a:p>
-            <a:pPr algn="l" indent="0" marL="0">
+            <a:pPr marL="0" indent="0" algn="l">
               <a:buNone/>
             </a:pPr>
             <a:r>
@@ -4883,6 +4863,7 @@
         <a:solidFill>
           <a:srgbClr val="FDF6EC"/>
         </a:solidFill>
+        <a:effectLst/>
       </p:bgPr>
     </p:bg>
     <p:spTree>
@@ -4923,6 +4904,13 @@
             <a:prstDash val="solid"/>
           </a:ln>
         </p:spPr>
+        <p:txBody>
+          <a:bodyPr/>
+          <a:lstStyle/>
+          <a:p>
+            <a:endParaRPr lang="es-ES"/>
+          </a:p>
+        </p:txBody>
       </p:sp>
       <p:sp>
         <p:nvSpPr>
@@ -4948,6 +4936,13 @@
             <a:prstDash val="solid"/>
           </a:ln>
         </p:spPr>
+        <p:txBody>
+          <a:bodyPr/>
+          <a:lstStyle/>
+          <a:p>
+            <a:endParaRPr lang="es-ES"/>
+          </a:p>
+        </p:txBody>
       </p:sp>
       <p:sp>
         <p:nvSpPr>
@@ -4970,7 +4965,7 @@
           <a:bodyPr wrap="square" lIns="0" tIns="0" rIns="0" bIns="0" rtlCol="0" anchor="ctr"/>
           <a:lstStyle/>
           <a:p>
-            <a:pPr algn="l" indent="0" marL="0">
+            <a:pPr marL="0" indent="0" algn="l">
               <a:buNone/>
             </a:pPr>
             <a:r>
@@ -5012,13 +5007,20 @@
             <a:prstDash val="solid"/>
           </a:ln>
           <a:effectLst>
-            <a:outerShdw sx="100000" sy="100000" kx="0" ky="0" algn="bl" rotWithShape="0" blurRad="101600" dist="38100" dir="8100000">
+            <a:outerShdw blurRad="101600" dist="38100" dir="8100000" algn="bl" rotWithShape="0">
               <a:srgbClr val="000000">
                 <a:alpha val="12000"/>
               </a:srgbClr>
             </a:outerShdw>
           </a:effectLst>
         </p:spPr>
+        <p:txBody>
+          <a:bodyPr/>
+          <a:lstStyle/>
+          <a:p>
+            <a:endParaRPr lang="es-ES"/>
+          </a:p>
+        </p:txBody>
       </p:sp>
       <p:sp>
         <p:nvSpPr>
@@ -5044,6 +5046,13 @@
             <a:prstDash val="solid"/>
           </a:ln>
         </p:spPr>
+        <p:txBody>
+          <a:bodyPr/>
+          <a:lstStyle/>
+          <a:p>
+            <a:endParaRPr lang="es-ES"/>
+          </a:p>
+        </p:txBody>
       </p:sp>
       <p:sp>
         <p:nvSpPr>
@@ -5066,7 +5075,7 @@
           <a:bodyPr wrap="square" rtlCol="0" anchor="ctr"/>
           <a:lstStyle/>
           <a:p>
-            <a:pPr algn="ctr" indent="0" marL="0">
+            <a:pPr marL="0" indent="0" algn="ctr">
               <a:buNone/>
             </a:pPr>
             <a:r>
@@ -5105,7 +5114,7 @@
           <a:bodyPr wrap="square" rtlCol="0" anchor="ctr"/>
           <a:lstStyle/>
           <a:p>
-            <a:pPr indent="0" marL="0">
+            <a:pPr marL="0" indent="0">
               <a:buNone/>
             </a:pPr>
             <a:r>
@@ -5147,13 +5156,20 @@
             <a:prstDash val="solid"/>
           </a:ln>
           <a:effectLst>
-            <a:outerShdw sx="100000" sy="100000" kx="0" ky="0" algn="bl" rotWithShape="0" blurRad="101600" dist="38100" dir="8100000">
+            <a:outerShdw blurRad="101600" dist="38100" dir="8100000" algn="bl" rotWithShape="0">
               <a:srgbClr val="000000">
                 <a:alpha val="12000"/>
               </a:srgbClr>
             </a:outerShdw>
           </a:effectLst>
         </p:spPr>
+        <p:txBody>
+          <a:bodyPr/>
+          <a:lstStyle/>
+          <a:p>
+            <a:endParaRPr lang="es-ES"/>
+          </a:p>
+        </p:txBody>
       </p:sp>
       <p:sp>
         <p:nvSpPr>
@@ -5179,6 +5195,13 @@
             <a:prstDash val="solid"/>
           </a:ln>
         </p:spPr>
+        <p:txBody>
+          <a:bodyPr/>
+          <a:lstStyle/>
+          <a:p>
+            <a:endParaRPr lang="es-ES"/>
+          </a:p>
+        </p:txBody>
       </p:sp>
       <p:sp>
         <p:nvSpPr>
@@ -5201,7 +5224,7 @@
           <a:bodyPr wrap="square" rtlCol="0" anchor="ctr"/>
           <a:lstStyle/>
           <a:p>
-            <a:pPr algn="ctr" indent="0" marL="0">
+            <a:pPr marL="0" indent="0" algn="ctr">
               <a:buNone/>
             </a:pPr>
             <a:r>
@@ -5240,7 +5263,7 @@
           <a:bodyPr wrap="square" rtlCol="0" anchor="ctr"/>
           <a:lstStyle/>
           <a:p>
-            <a:pPr indent="0" marL="0">
+            <a:pPr marL="0" indent="0">
               <a:buNone/>
             </a:pPr>
             <a:r>
@@ -5282,13 +5305,20 @@
             <a:prstDash val="solid"/>
           </a:ln>
           <a:effectLst>
-            <a:outerShdw sx="100000" sy="100000" kx="0" ky="0" algn="bl" rotWithShape="0" blurRad="101600" dist="38100" dir="8100000">
+            <a:outerShdw blurRad="101600" dist="38100" dir="8100000" algn="bl" rotWithShape="0">
               <a:srgbClr val="000000">
                 <a:alpha val="12000"/>
               </a:srgbClr>
             </a:outerShdw>
           </a:effectLst>
         </p:spPr>
+        <p:txBody>
+          <a:bodyPr/>
+          <a:lstStyle/>
+          <a:p>
+            <a:endParaRPr lang="es-ES"/>
+          </a:p>
+        </p:txBody>
       </p:sp>
       <p:sp>
         <p:nvSpPr>
@@ -5314,6 +5344,13 @@
             <a:prstDash val="solid"/>
           </a:ln>
         </p:spPr>
+        <p:txBody>
+          <a:bodyPr/>
+          <a:lstStyle/>
+          <a:p>
+            <a:endParaRPr lang="es-ES"/>
+          </a:p>
+        </p:txBody>
       </p:sp>
       <p:sp>
         <p:nvSpPr>
@@ -5336,7 +5373,7 @@
           <a:bodyPr wrap="square" rtlCol="0" anchor="ctr"/>
           <a:lstStyle/>
           <a:p>
-            <a:pPr algn="ctr" indent="0" marL="0">
+            <a:pPr marL="0" indent="0" algn="ctr">
               <a:buNone/>
             </a:pPr>
             <a:r>
@@ -5375,7 +5412,7 @@
           <a:bodyPr wrap="square" rtlCol="0" anchor="ctr"/>
           <a:lstStyle/>
           <a:p>
-            <a:pPr indent="0" marL="0">
+            <a:pPr marL="0" indent="0">
               <a:buNone/>
             </a:pPr>
             <a:r>
@@ -5417,13 +5454,20 @@
             <a:prstDash val="solid"/>
           </a:ln>
           <a:effectLst>
-            <a:outerShdw sx="100000" sy="100000" kx="0" ky="0" algn="bl" rotWithShape="0" blurRad="101600" dist="38100" dir="8100000">
+            <a:outerShdw blurRad="101600" dist="38100" dir="8100000" algn="bl" rotWithShape="0">
               <a:srgbClr val="000000">
                 <a:alpha val="12000"/>
               </a:srgbClr>
             </a:outerShdw>
           </a:effectLst>
         </p:spPr>
+        <p:txBody>
+          <a:bodyPr/>
+          <a:lstStyle/>
+          <a:p>
+            <a:endParaRPr lang="es-ES"/>
+          </a:p>
+        </p:txBody>
       </p:sp>
       <p:sp>
         <p:nvSpPr>
@@ -5449,6 +5493,13 @@
             <a:prstDash val="solid"/>
           </a:ln>
         </p:spPr>
+        <p:txBody>
+          <a:bodyPr/>
+          <a:lstStyle/>
+          <a:p>
+            <a:endParaRPr lang="es-ES"/>
+          </a:p>
+        </p:txBody>
       </p:sp>
       <p:sp>
         <p:nvSpPr>
@@ -5471,7 +5522,7 @@
           <a:bodyPr wrap="square" rtlCol="0" anchor="ctr"/>
           <a:lstStyle/>
           <a:p>
-            <a:pPr algn="ctr" indent="0" marL="0">
+            <a:pPr marL="0" indent="0" algn="ctr">
               <a:buNone/>
             </a:pPr>
             <a:r>
@@ -5510,7 +5561,7 @@
           <a:bodyPr wrap="square" rtlCol="0" anchor="ctr"/>
           <a:lstStyle/>
           <a:p>
-            <a:pPr indent="0" marL="0">
+            <a:pPr marL="0" indent="0">
               <a:buNone/>
             </a:pPr>
             <a:r>
@@ -5552,13 +5603,20 @@
             <a:prstDash val="solid"/>
           </a:ln>
           <a:effectLst>
-            <a:outerShdw sx="100000" sy="100000" kx="0" ky="0" algn="bl" rotWithShape="0" blurRad="101600" dist="38100" dir="8100000">
+            <a:outerShdw blurRad="101600" dist="38100" dir="8100000" algn="bl" rotWithShape="0">
               <a:srgbClr val="000000">
                 <a:alpha val="12000"/>
               </a:srgbClr>
             </a:outerShdw>
           </a:effectLst>
         </p:spPr>
+        <p:txBody>
+          <a:bodyPr/>
+          <a:lstStyle/>
+          <a:p>
+            <a:endParaRPr lang="es-ES"/>
+          </a:p>
+        </p:txBody>
       </p:sp>
       <p:sp>
         <p:nvSpPr>
@@ -5584,6 +5642,13 @@
             <a:prstDash val="solid"/>
           </a:ln>
         </p:spPr>
+        <p:txBody>
+          <a:bodyPr/>
+          <a:lstStyle/>
+          <a:p>
+            <a:endParaRPr lang="es-ES"/>
+          </a:p>
+        </p:txBody>
       </p:sp>
       <p:sp>
         <p:nvSpPr>
@@ -5606,7 +5671,7 @@
           <a:bodyPr wrap="square" rtlCol="0" anchor="ctr"/>
           <a:lstStyle/>
           <a:p>
-            <a:pPr algn="ctr" indent="0" marL="0">
+            <a:pPr marL="0" indent="0" algn="ctr">
               <a:buNone/>
             </a:pPr>
             <a:r>
@@ -5645,7 +5710,7 @@
           <a:bodyPr wrap="square" rtlCol="0" anchor="ctr"/>
           <a:lstStyle/>
           <a:p>
-            <a:pPr indent="0" marL="0">
+            <a:pPr marL="0" indent="0">
               <a:buNone/>
             </a:pPr>
             <a:r>
@@ -5687,13 +5752,20 @@
             <a:prstDash val="solid"/>
           </a:ln>
           <a:effectLst>
-            <a:outerShdw sx="100000" sy="100000" kx="0" ky="0" algn="bl" rotWithShape="0" blurRad="101600" dist="38100" dir="8100000">
+            <a:outerShdw blurRad="101600" dist="38100" dir="8100000" algn="bl" rotWithShape="0">
               <a:srgbClr val="000000">
                 <a:alpha val="12000"/>
               </a:srgbClr>
             </a:outerShdw>
           </a:effectLst>
         </p:spPr>
+        <p:txBody>
+          <a:bodyPr/>
+          <a:lstStyle/>
+          <a:p>
+            <a:endParaRPr lang="es-ES"/>
+          </a:p>
+        </p:txBody>
       </p:sp>
       <p:sp>
         <p:nvSpPr>
@@ -5719,6 +5791,13 @@
             <a:prstDash val="solid"/>
           </a:ln>
         </p:spPr>
+        <p:txBody>
+          <a:bodyPr/>
+          <a:lstStyle/>
+          <a:p>
+            <a:endParaRPr lang="es-ES"/>
+          </a:p>
+        </p:txBody>
       </p:sp>
       <p:sp>
         <p:nvSpPr>
@@ -5741,7 +5820,7 @@
           <a:bodyPr wrap="square" rtlCol="0" anchor="ctr"/>
           <a:lstStyle/>
           <a:p>
-            <a:pPr algn="ctr" indent="0" marL="0">
+            <a:pPr marL="0" indent="0" algn="ctr">
               <a:buNone/>
             </a:pPr>
             <a:r>
@@ -5780,7 +5859,7 @@
           <a:bodyPr wrap="square" rtlCol="0" anchor="ctr"/>
           <a:lstStyle/>
           <a:p>
-            <a:pPr indent="0" marL="0">
+            <a:pPr marL="0" indent="0">
               <a:buNone/>
             </a:pPr>
             <a:r>
@@ -5814,6 +5893,7 @@
         <a:solidFill>
           <a:srgbClr val="FDF6EC"/>
         </a:solidFill>
+        <a:effectLst/>
       </p:bgPr>
     </p:bg>
     <p:spTree>
@@ -5854,6 +5934,13 @@
             <a:prstDash val="solid"/>
           </a:ln>
         </p:spPr>
+        <p:txBody>
+          <a:bodyPr/>
+          <a:lstStyle/>
+          <a:p>
+            <a:endParaRPr lang="es-ES"/>
+          </a:p>
+        </p:txBody>
       </p:sp>
       <p:sp>
         <p:nvSpPr>
@@ -5879,6 +5966,13 @@
             <a:prstDash val="solid"/>
           </a:ln>
         </p:spPr>
+        <p:txBody>
+          <a:bodyPr/>
+          <a:lstStyle/>
+          <a:p>
+            <a:endParaRPr lang="es-ES"/>
+          </a:p>
+        </p:txBody>
       </p:sp>
       <p:sp>
         <p:nvSpPr>
@@ -5901,7 +5995,7 @@
           <a:bodyPr wrap="square" lIns="0" tIns="0" rIns="0" bIns="0" rtlCol="0" anchor="ctr"/>
           <a:lstStyle/>
           <a:p>
-            <a:pPr algn="l" indent="0" marL="0">
+            <a:pPr marL="0" indent="0" algn="l">
               <a:buNone/>
             </a:pPr>
             <a:r>
@@ -5943,6 +6037,13 @@
             <a:prstDash val="solid"/>
           </a:ln>
         </p:spPr>
+        <p:txBody>
+          <a:bodyPr/>
+          <a:lstStyle/>
+          <a:p>
+            <a:endParaRPr lang="es-ES"/>
+          </a:p>
+        </p:txBody>
       </p:sp>
       <p:sp>
         <p:nvSpPr>
@@ -5965,7 +6066,7 @@
           <a:bodyPr wrap="square" rtlCol="0" anchor="ctr"/>
           <a:lstStyle/>
           <a:p>
-            <a:pPr algn="ctr" indent="0" marL="0">
+            <a:pPr marL="0" indent="0" algn="ctr">
               <a:buNone/>
             </a:pPr>
             <a:r>
@@ -6004,7 +6105,7 @@
           <a:bodyPr wrap="square" rtlCol="0" anchor="ctr"/>
           <a:lstStyle/>
           <a:p>
-            <a:pPr indent="0" marL="0">
+            <a:pPr marL="0" indent="0">
               <a:buNone/>
             </a:pPr>
             <a:r>
@@ -6043,7 +6144,7 @@
           <a:bodyPr wrap="square" rtlCol="0" anchor="ctr"/>
           <a:lstStyle/>
           <a:p>
-            <a:pPr indent="0" marL="0">
+            <a:pPr marL="0" indent="0">
               <a:buNone/>
             </a:pPr>
             <a:r>
@@ -6082,7 +6183,7 @@
           <a:bodyPr wrap="square" rtlCol="0" anchor="ctr"/>
           <a:lstStyle/>
           <a:p>
-            <a:pPr indent="0" marL="0">
+            <a:pPr marL="0" indent="0">
               <a:buNone/>
             </a:pPr>
             <a:r>
@@ -6121,7 +6222,7 @@
           <a:bodyPr wrap="square" rtlCol="0" anchor="ctr"/>
           <a:lstStyle/>
           <a:p>
-            <a:pPr indent="0" marL="0">
+            <a:pPr marL="0" indent="0">
               <a:buNone/>
             </a:pPr>
             <a:r>
@@ -6160,7 +6261,7 @@
           <a:bodyPr wrap="square" rtlCol="0" anchor="ctr"/>
           <a:lstStyle/>
           <a:p>
-            <a:pPr indent="0" marL="0">
+            <a:pPr marL="0" indent="0">
               <a:buNone/>
             </a:pPr>
             <a:r>
@@ -6202,6 +6303,13 @@
             <a:prstDash val="solid"/>
           </a:ln>
         </p:spPr>
+        <p:txBody>
+          <a:bodyPr/>
+          <a:lstStyle/>
+          <a:p>
+            <a:endParaRPr lang="es-ES"/>
+          </a:p>
+        </p:txBody>
       </p:sp>
       <p:sp>
         <p:nvSpPr>
@@ -6224,7 +6332,7 @@
           <a:bodyPr wrap="square" rtlCol="0" anchor="ctr"/>
           <a:lstStyle/>
           <a:p>
-            <a:pPr algn="ctr" indent="0" marL="0">
+            <a:pPr marL="0" indent="0" algn="ctr">
               <a:buNone/>
             </a:pPr>
             <a:r>
@@ -6263,7 +6371,7 @@
           <a:bodyPr wrap="square" rtlCol="0" anchor="ctr"/>
           <a:lstStyle/>
           <a:p>
-            <a:pPr indent="0" marL="0">
+            <a:pPr marL="0" indent="0">
               <a:buNone/>
             </a:pPr>
             <a:r>
@@ -6302,7 +6410,7 @@
           <a:bodyPr wrap="square" rtlCol="0" anchor="ctr"/>
           <a:lstStyle/>
           <a:p>
-            <a:pPr indent="0" marL="0">
+            <a:pPr marL="0" indent="0">
               <a:buNone/>
             </a:pPr>
             <a:r>
@@ -6341,7 +6449,7 @@
           <a:bodyPr wrap="square" rtlCol="0" anchor="ctr"/>
           <a:lstStyle/>
           <a:p>
-            <a:pPr indent="0" marL="0">
+            <a:pPr marL="0" indent="0">
               <a:buNone/>
             </a:pPr>
             <a:r>
@@ -6380,7 +6488,7 @@
           <a:bodyPr wrap="square" rtlCol="0" anchor="ctr"/>
           <a:lstStyle/>
           <a:p>
-            <a:pPr indent="0" marL="0">
+            <a:pPr marL="0" indent="0">
               <a:buNone/>
             </a:pPr>
             <a:r>
@@ -6419,7 +6527,7 @@
           <a:bodyPr wrap="square" rtlCol="0" anchor="ctr"/>
           <a:lstStyle/>
           <a:p>
-            <a:pPr indent="0" marL="0">
+            <a:pPr marL="0" indent="0">
               <a:buNone/>
             </a:pPr>
             <a:r>
@@ -6461,6 +6569,13 @@
             <a:prstDash val="solid"/>
           </a:ln>
         </p:spPr>
+        <p:txBody>
+          <a:bodyPr/>
+          <a:lstStyle/>
+          <a:p>
+            <a:endParaRPr lang="es-ES"/>
+          </a:p>
+        </p:txBody>
       </p:sp>
       <p:sp>
         <p:nvSpPr>
@@ -6483,7 +6598,7 @@
           <a:bodyPr wrap="square" rtlCol="0" anchor="ctr"/>
           <a:lstStyle/>
           <a:p>
-            <a:pPr algn="ctr" indent="0" marL="0">
+            <a:pPr marL="0" indent="0" algn="ctr">
               <a:buNone/>
             </a:pPr>
             <a:r>
@@ -6517,6 +6632,7 @@
         <a:solidFill>
           <a:srgbClr val="FDF6EC"/>
         </a:solidFill>
+        <a:effectLst/>
       </p:bgPr>
     </p:bg>
     <p:spTree>
@@ -6557,6 +6673,13 @@
             <a:prstDash val="solid"/>
           </a:ln>
         </p:spPr>
+        <p:txBody>
+          <a:bodyPr/>
+          <a:lstStyle/>
+          <a:p>
+            <a:endParaRPr lang="es-ES"/>
+          </a:p>
+        </p:txBody>
       </p:sp>
       <p:sp>
         <p:nvSpPr>
@@ -6582,6 +6705,13 @@
             <a:prstDash val="solid"/>
           </a:ln>
         </p:spPr>
+        <p:txBody>
+          <a:bodyPr/>
+          <a:lstStyle/>
+          <a:p>
+            <a:endParaRPr lang="es-ES"/>
+          </a:p>
+        </p:txBody>
       </p:sp>
       <p:sp>
         <p:nvSpPr>
@@ -6604,7 +6734,7 @@
           <a:bodyPr wrap="square" lIns="0" tIns="0" rIns="0" bIns="0" rtlCol="0" anchor="ctr"/>
           <a:lstStyle/>
           <a:p>
-            <a:pPr algn="l" indent="0" marL="0">
+            <a:pPr marL="0" indent="0" algn="l">
               <a:buNone/>
             </a:pPr>
             <a:r>
@@ -6646,6 +6776,13 @@
             <a:prstDash val="solid"/>
           </a:ln>
         </p:spPr>
+        <p:txBody>
+          <a:bodyPr/>
+          <a:lstStyle/>
+          <a:p>
+            <a:endParaRPr lang="es-ES"/>
+          </a:p>
+        </p:txBody>
       </p:sp>
       <p:sp>
         <p:nvSpPr>
@@ -6668,7 +6805,7 @@
           <a:bodyPr wrap="square" rtlCol="0" anchor="ctr"/>
           <a:lstStyle/>
           <a:p>
-            <a:pPr algn="ctr" indent="0" marL="0">
+            <a:pPr marL="0" indent="0" algn="ctr">
               <a:buNone/>
             </a:pPr>
             <a:r>
@@ -6685,7 +6822,7 @@
             <a:endParaRPr lang="en-US" sz="1300" dirty="0"/>
           </a:p>
           <a:p>
-            <a:pPr algn="ctr" indent="0" marL="0">
+            <a:pPr marL="0" indent="0" algn="ctr">
               <a:buNone/>
             </a:pPr>
             <a:r>
@@ -6702,7 +6839,7 @@
             <a:endParaRPr lang="en-US" sz="1300" dirty="0"/>
           </a:p>
           <a:p>
-            <a:pPr algn="ctr" indent="0" marL="0">
+            <a:pPr marL="0" indent="0" algn="ctr">
               <a:buNone/>
             </a:pPr>
             <a:r>
@@ -6744,6 +6881,13 @@
             <a:prstDash val="solid"/>
           </a:ln>
         </p:spPr>
+        <p:txBody>
+          <a:bodyPr/>
+          <a:lstStyle/>
+          <a:p>
+            <a:endParaRPr lang="es-ES"/>
+          </a:p>
+        </p:txBody>
       </p:sp>
       <p:sp>
         <p:nvSpPr>
@@ -6766,7 +6910,7 @@
           <a:bodyPr wrap="square" rtlCol="0" anchor="ctr"/>
           <a:lstStyle/>
           <a:p>
-            <a:pPr algn="ctr" indent="0" marL="0">
+            <a:pPr marL="0" indent="0" algn="ctr">
               <a:buNone/>
             </a:pPr>
             <a:r>
@@ -6808,13 +6952,20 @@
             <a:prstDash val="solid"/>
           </a:ln>
           <a:effectLst>
-            <a:outerShdw sx="100000" sy="100000" kx="0" ky="0" algn="bl" rotWithShape="0" blurRad="101600" dist="38100" dir="8100000">
+            <a:outerShdw blurRad="101600" dist="38100" dir="8100000" algn="bl" rotWithShape="0">
               <a:srgbClr val="000000">
                 <a:alpha val="12000"/>
               </a:srgbClr>
             </a:outerShdw>
           </a:effectLst>
         </p:spPr>
+        <p:txBody>
+          <a:bodyPr/>
+          <a:lstStyle/>
+          <a:p>
+            <a:endParaRPr lang="es-ES"/>
+          </a:p>
+        </p:txBody>
       </p:sp>
       <p:sp>
         <p:nvSpPr>
@@ -6837,7 +6988,7 @@
           <a:bodyPr wrap="square" rtlCol="0" anchor="ctr"/>
           <a:lstStyle/>
           <a:p>
-            <a:pPr algn="ctr" indent="0" marL="0">
+            <a:pPr marL="0" indent="0" algn="ctr">
               <a:buNone/>
             </a:pPr>
             <a:r>
@@ -6879,13 +7030,20 @@
             <a:prstDash val="solid"/>
           </a:ln>
           <a:effectLst>
-            <a:outerShdw sx="100000" sy="100000" kx="0" ky="0" algn="bl" rotWithShape="0" blurRad="101600" dist="38100" dir="8100000">
+            <a:outerShdw blurRad="101600" dist="38100" dir="8100000" algn="bl" rotWithShape="0">
               <a:srgbClr val="000000">
                 <a:alpha val="12000"/>
               </a:srgbClr>
             </a:outerShdw>
           </a:effectLst>
         </p:spPr>
+        <p:txBody>
+          <a:bodyPr/>
+          <a:lstStyle/>
+          <a:p>
+            <a:endParaRPr lang="es-ES"/>
+          </a:p>
+        </p:txBody>
       </p:sp>
       <p:sp>
         <p:nvSpPr>
@@ -6908,7 +7066,7 @@
           <a:bodyPr wrap="square" rtlCol="0" anchor="ctr"/>
           <a:lstStyle/>
           <a:p>
-            <a:pPr algn="ctr" indent="0" marL="0">
+            <a:pPr marL="0" indent="0" algn="ctr">
               <a:buNone/>
             </a:pPr>
             <a:r>
@@ -6950,13 +7108,20 @@
             <a:prstDash val="solid"/>
           </a:ln>
           <a:effectLst>
-            <a:outerShdw sx="100000" sy="100000" kx="0" ky="0" algn="bl" rotWithShape="0" blurRad="101600" dist="38100" dir="8100000">
+            <a:outerShdw blurRad="101600" dist="38100" dir="8100000" algn="bl" rotWithShape="0">
               <a:srgbClr val="000000">
                 <a:alpha val="12000"/>
               </a:srgbClr>
             </a:outerShdw>
           </a:effectLst>
         </p:spPr>
+        <p:txBody>
+          <a:bodyPr/>
+          <a:lstStyle/>
+          <a:p>
+            <a:endParaRPr lang="es-ES"/>
+          </a:p>
+        </p:txBody>
       </p:sp>
       <p:sp>
         <p:nvSpPr>
@@ -6979,7 +7144,7 @@
           <a:bodyPr wrap="square" rtlCol="0" anchor="ctr"/>
           <a:lstStyle/>
           <a:p>
-            <a:pPr algn="ctr" indent="0" marL="0">
+            <a:pPr marL="0" indent="0" algn="ctr">
               <a:buNone/>
             </a:pPr>
             <a:r>
@@ -7021,13 +7186,20 @@
             <a:prstDash val="solid"/>
           </a:ln>
           <a:effectLst>
-            <a:outerShdw sx="100000" sy="100000" kx="0" ky="0" algn="bl" rotWithShape="0" blurRad="101600" dist="38100" dir="8100000">
+            <a:outerShdw blurRad="101600" dist="38100" dir="8100000" algn="bl" rotWithShape="0">
               <a:srgbClr val="000000">
                 <a:alpha val="12000"/>
               </a:srgbClr>
             </a:outerShdw>
           </a:effectLst>
         </p:spPr>
+        <p:txBody>
+          <a:bodyPr/>
+          <a:lstStyle/>
+          <a:p>
+            <a:endParaRPr lang="es-ES"/>
+          </a:p>
+        </p:txBody>
       </p:sp>
       <p:sp>
         <p:nvSpPr>
@@ -7050,7 +7222,7 @@
           <a:bodyPr wrap="square" rtlCol="0" anchor="ctr"/>
           <a:lstStyle/>
           <a:p>
-            <a:pPr algn="ctr" indent="0" marL="0">
+            <a:pPr marL="0" indent="0" algn="ctr">
               <a:buNone/>
             </a:pPr>
             <a:r>
@@ -7084,6 +7256,7 @@
         <a:solidFill>
           <a:srgbClr val="FDF6EC"/>
         </a:solidFill>
+        <a:effectLst/>
       </p:bgPr>
     </p:bg>
     <p:spTree>
@@ -7124,6 +7297,13 @@
             <a:prstDash val="solid"/>
           </a:ln>
         </p:spPr>
+        <p:txBody>
+          <a:bodyPr/>
+          <a:lstStyle/>
+          <a:p>
+            <a:endParaRPr lang="es-ES"/>
+          </a:p>
+        </p:txBody>
       </p:sp>
       <p:sp>
         <p:nvSpPr>
@@ -7149,6 +7329,13 @@
             <a:prstDash val="solid"/>
           </a:ln>
         </p:spPr>
+        <p:txBody>
+          <a:bodyPr/>
+          <a:lstStyle/>
+          <a:p>
+            <a:endParaRPr lang="es-ES"/>
+          </a:p>
+        </p:txBody>
       </p:sp>
       <p:sp>
         <p:nvSpPr>
@@ -7171,7 +7358,7 @@
           <a:bodyPr wrap="square" lIns="0" tIns="0" rIns="0" bIns="0" rtlCol="0" anchor="ctr"/>
           <a:lstStyle/>
           <a:p>
-            <a:pPr algn="l" indent="0" marL="0">
+            <a:pPr marL="0" indent="0" algn="l">
               <a:buNone/>
             </a:pPr>
             <a:r>
@@ -7213,6 +7400,13 @@
             <a:prstDash val="solid"/>
           </a:ln>
         </p:spPr>
+        <p:txBody>
+          <a:bodyPr/>
+          <a:lstStyle/>
+          <a:p>
+            <a:endParaRPr lang="es-ES"/>
+          </a:p>
+        </p:txBody>
       </p:sp>
       <p:sp>
         <p:nvSpPr>
@@ -7235,7 +7429,7 @@
           <a:bodyPr wrap="square" rtlCol="0" anchor="ctr"/>
           <a:lstStyle/>
           <a:p>
-            <a:pPr algn="ctr" indent="0" marL="0">
+            <a:pPr marL="0" indent="0" algn="ctr">
               <a:buNone/>
             </a:pPr>
             <a:r>
@@ -7252,7 +7446,7 @@
             <a:endParaRPr lang="en-US" sz="1200" dirty="0"/>
           </a:p>
           <a:p>
-            <a:pPr algn="ctr" indent="0" marL="0">
+            <a:pPr marL="0" indent="0" algn="ctr">
               <a:buNone/>
             </a:pPr>
             <a:r>
@@ -7269,7 +7463,7 @@
             <a:endParaRPr lang="en-US" sz="1200" dirty="0"/>
           </a:p>
           <a:p>
-            <a:pPr algn="ctr" indent="0" marL="0">
+            <a:pPr marL="0" indent="0" algn="ctr">
               <a:buNone/>
             </a:pPr>
             <a:r>
@@ -7286,7 +7480,7 @@
             <a:endParaRPr lang="en-US" sz="1200" dirty="0"/>
           </a:p>
           <a:p>
-            <a:pPr algn="ctr" indent="0" marL="0">
+            <a:pPr marL="0" indent="0" algn="ctr">
               <a:buNone/>
             </a:pPr>
             <a:r>
@@ -7328,6 +7522,13 @@
             <a:prstDash val="solid"/>
           </a:ln>
         </p:spPr>
+        <p:txBody>
+          <a:bodyPr/>
+          <a:lstStyle/>
+          <a:p>
+            <a:endParaRPr lang="es-ES"/>
+          </a:p>
+        </p:txBody>
       </p:sp>
       <p:sp>
         <p:nvSpPr>
@@ -7350,7 +7551,7 @@
           <a:bodyPr wrap="square" rtlCol="0" anchor="ctr"/>
           <a:lstStyle/>
           <a:p>
-            <a:pPr algn="ctr" indent="0" marL="0">
+            <a:pPr marL="0" indent="0" algn="ctr">
               <a:buNone/>
             </a:pPr>
             <a:r>
@@ -7384,6 +7585,7 @@
         <a:solidFill>
           <a:srgbClr val="FDF6EC"/>
         </a:solidFill>
+        <a:effectLst/>
       </p:bgPr>
     </p:bg>
     <p:spTree>
@@ -7424,6 +7626,13 @@
             <a:prstDash val="solid"/>
           </a:ln>
         </p:spPr>
+        <p:txBody>
+          <a:bodyPr/>
+          <a:lstStyle/>
+          <a:p>
+            <a:endParaRPr lang="es-ES"/>
+          </a:p>
+        </p:txBody>
       </p:sp>
       <p:sp>
         <p:nvSpPr>
@@ -7449,6 +7658,13 @@
             <a:prstDash val="solid"/>
           </a:ln>
         </p:spPr>
+        <p:txBody>
+          <a:bodyPr/>
+          <a:lstStyle/>
+          <a:p>
+            <a:endParaRPr lang="es-ES"/>
+          </a:p>
+        </p:txBody>
       </p:sp>
       <p:sp>
         <p:nvSpPr>
@@ -7471,7 +7687,7 @@
           <a:bodyPr wrap="square" lIns="0" tIns="0" rIns="0" bIns="0" rtlCol="0" anchor="ctr"/>
           <a:lstStyle/>
           <a:p>
-            <a:pPr algn="l" indent="0" marL="0">
+            <a:pPr marL="0" indent="0" algn="l">
               <a:buNone/>
             </a:pPr>
             <a:r>
@@ -7513,6 +7729,13 @@
             <a:prstDash val="solid"/>
           </a:ln>
         </p:spPr>
+        <p:txBody>
+          <a:bodyPr/>
+          <a:lstStyle/>
+          <a:p>
+            <a:endParaRPr lang="es-ES"/>
+          </a:p>
+        </p:txBody>
       </p:sp>
       <p:sp>
         <p:nvSpPr>
@@ -7535,7 +7758,7 @@
           <a:bodyPr wrap="square" rtlCol="0" anchor="ctr"/>
           <a:lstStyle/>
           <a:p>
-            <a:pPr algn="ctr" indent="0" marL="0">
+            <a:pPr marL="0" indent="0" algn="ctr">
               <a:buNone/>
             </a:pPr>
             <a:r>
@@ -7552,7 +7775,7 @@
             <a:endParaRPr lang="en-US" sz="1200" dirty="0"/>
           </a:p>
           <a:p>
-            <a:pPr algn="ctr" indent="0" marL="0">
+            <a:pPr marL="0" indent="0" algn="ctr">
               <a:buNone/>
             </a:pPr>
             <a:r>
@@ -7569,7 +7792,7 @@
             <a:endParaRPr lang="en-US" sz="1200" dirty="0"/>
           </a:p>
           <a:p>
-            <a:pPr algn="ctr" indent="0" marL="0">
+            <a:pPr marL="0" indent="0" algn="ctr">
               <a:buNone/>
             </a:pPr>
             <a:r>
@@ -7586,7 +7809,7 @@
             <a:endParaRPr lang="en-US" sz="1200" dirty="0"/>
           </a:p>
           <a:p>
-            <a:pPr algn="ctr" indent="0" marL="0">
+            <a:pPr marL="0" indent="0" algn="ctr">
               <a:buNone/>
             </a:pPr>
             <a:r>
@@ -7603,7 +7826,7 @@
             <a:endParaRPr lang="en-US" sz="1200" dirty="0"/>
           </a:p>
           <a:p>
-            <a:pPr algn="ctr" indent="0" marL="0">
+            <a:pPr marL="0" indent="0" algn="ctr">
               <a:buNone/>
             </a:pPr>
             <a:r>
@@ -7645,6 +7868,13 @@
             <a:prstDash val="solid"/>
           </a:ln>
         </p:spPr>
+        <p:txBody>
+          <a:bodyPr/>
+          <a:lstStyle/>
+          <a:p>
+            <a:endParaRPr lang="es-ES"/>
+          </a:p>
+        </p:txBody>
       </p:sp>
       <p:sp>
         <p:nvSpPr>
@@ -7667,7 +7897,7 @@
           <a:bodyPr wrap="square" rtlCol="0" anchor="ctr"/>
           <a:lstStyle/>
           <a:p>
-            <a:pPr algn="ctr" indent="0" marL="0">
+            <a:pPr marL="0" indent="0" algn="ctr">
               <a:buNone/>
             </a:pPr>
             <a:r>
@@ -7701,6 +7931,7 @@
         <a:solidFill>
           <a:srgbClr val="FDF6EC"/>
         </a:solidFill>
+        <a:effectLst/>
       </p:bgPr>
     </p:bg>
     <p:spTree>
@@ -7741,6 +7972,13 @@
             <a:prstDash val="solid"/>
           </a:ln>
         </p:spPr>
+        <p:txBody>
+          <a:bodyPr/>
+          <a:lstStyle/>
+          <a:p>
+            <a:endParaRPr lang="es-ES"/>
+          </a:p>
+        </p:txBody>
       </p:sp>
       <p:sp>
         <p:nvSpPr>
@@ -7766,6 +8004,13 @@
             <a:prstDash val="solid"/>
           </a:ln>
         </p:spPr>
+        <p:txBody>
+          <a:bodyPr/>
+          <a:lstStyle/>
+          <a:p>
+            <a:endParaRPr lang="es-ES"/>
+          </a:p>
+        </p:txBody>
       </p:sp>
       <p:sp>
         <p:nvSpPr>
@@ -7788,7 +8033,7 @@
           <a:bodyPr wrap="square" lIns="0" tIns="0" rIns="0" bIns="0" rtlCol="0" anchor="ctr"/>
           <a:lstStyle/>
           <a:p>
-            <a:pPr algn="l" indent="0" marL="0">
+            <a:pPr marL="0" indent="0" algn="l">
               <a:buNone/>
             </a:pPr>
             <a:r>
@@ -7830,6 +8075,13 @@
             <a:prstDash val="solid"/>
           </a:ln>
         </p:spPr>
+        <p:txBody>
+          <a:bodyPr/>
+          <a:lstStyle/>
+          <a:p>
+            <a:endParaRPr lang="es-ES"/>
+          </a:p>
+        </p:txBody>
       </p:sp>
       <p:sp>
         <p:nvSpPr>
@@ -7852,7 +8104,7 @@
           <a:bodyPr wrap="square" rtlCol="0" anchor="ctr"/>
           <a:lstStyle/>
           <a:p>
-            <a:pPr algn="ctr" indent="0" marL="0">
+            <a:pPr marL="0" indent="0" algn="ctr">
               <a:buNone/>
             </a:pPr>
             <a:r>
@@ -7869,7 +8121,7 @@
             <a:endParaRPr lang="en-US" sz="1200" dirty="0"/>
           </a:p>
           <a:p>
-            <a:pPr algn="ctr" indent="0" marL="0">
+            <a:pPr marL="0" indent="0" algn="ctr">
               <a:buNone/>
             </a:pPr>
             <a:r>
@@ -7886,7 +8138,7 @@
             <a:endParaRPr lang="en-US" sz="1200" dirty="0"/>
           </a:p>
           <a:p>
-            <a:pPr algn="ctr" indent="0" marL="0">
+            <a:pPr marL="0" indent="0" algn="ctr">
               <a:buNone/>
             </a:pPr>
             <a:r>
@@ -7903,7 +8155,7 @@
             <a:endParaRPr lang="en-US" sz="1200" dirty="0"/>
           </a:p>
           <a:p>
-            <a:pPr algn="ctr" indent="0" marL="0">
+            <a:pPr marL="0" indent="0" algn="ctr">
               <a:buNone/>
             </a:pPr>
             <a:r>
@@ -7920,7 +8172,7 @@
             <a:endParaRPr lang="en-US" sz="1200" dirty="0"/>
           </a:p>
           <a:p>
-            <a:pPr algn="ctr" indent="0" marL="0">
+            <a:pPr marL="0" indent="0" algn="ctr">
               <a:buNone/>
             </a:pPr>
             <a:r>
@@ -7962,6 +8214,13 @@
             <a:prstDash val="solid"/>
           </a:ln>
         </p:spPr>
+        <p:txBody>
+          <a:bodyPr/>
+          <a:lstStyle/>
+          <a:p>
+            <a:endParaRPr lang="es-ES"/>
+          </a:p>
+        </p:txBody>
       </p:sp>
       <p:sp>
         <p:nvSpPr>
@@ -7984,7 +8243,7 @@
           <a:bodyPr wrap="square" rtlCol="0" anchor="ctr"/>
           <a:lstStyle/>
           <a:p>
-            <a:pPr algn="ctr" indent="0" marL="0">
+            <a:pPr marL="0" indent="0" algn="ctr">
               <a:buNone/>
             </a:pPr>
             <a:r>
@@ -8001,7 +8260,7 @@
             <a:endParaRPr lang="en-US" sz="1200" dirty="0"/>
           </a:p>
           <a:p>
-            <a:pPr algn="ctr" indent="0" marL="0">
+            <a:pPr marL="0" indent="0" algn="ctr">
               <a:buNone/>
             </a:pPr>
             <a:r>
@@ -8018,7 +8277,7 @@
             <a:endParaRPr lang="en-US" sz="1200" dirty="0"/>
           </a:p>
           <a:p>
-            <a:pPr algn="ctr" indent="0" marL="0">
+            <a:pPr marL="0" indent="0" algn="ctr">
               <a:buNone/>
             </a:pPr>
             <a:r>
@@ -8035,7 +8294,7 @@
             <a:endParaRPr lang="en-US" sz="1200" dirty="0"/>
           </a:p>
           <a:p>
-            <a:pPr algn="ctr" indent="0" marL="0">
+            <a:pPr marL="0" indent="0" algn="ctr">
               <a:buNone/>
             </a:pPr>
             <a:r>
@@ -8052,7 +8311,7 @@
             <a:endParaRPr lang="en-US" sz="1200" dirty="0"/>
           </a:p>
           <a:p>
-            <a:pPr algn="ctr" indent="0" marL="0">
+            <a:pPr marL="0" indent="0" algn="ctr">
               <a:buNone/>
             </a:pPr>
             <a:r>
@@ -8094,6 +8353,13 @@
             <a:prstDash val="solid"/>
           </a:ln>
         </p:spPr>
+        <p:txBody>
+          <a:bodyPr/>
+          <a:lstStyle/>
+          <a:p>
+            <a:endParaRPr lang="es-ES"/>
+          </a:p>
+        </p:txBody>
       </p:sp>
       <p:sp>
         <p:nvSpPr>
@@ -8116,7 +8382,7 @@
           <a:bodyPr wrap="square" rtlCol="0" anchor="ctr"/>
           <a:lstStyle/>
           <a:p>
-            <a:pPr algn="ctr" indent="0" marL="0">
+            <a:pPr marL="0" indent="0" algn="ctr">
               <a:buNone/>
             </a:pPr>
             <a:r>
@@ -8150,6 +8416,7 @@
         <a:solidFill>
           <a:srgbClr val="FDF6EC"/>
         </a:solidFill>
+        <a:effectLst/>
       </p:bgPr>
     </p:bg>
     <p:spTree>
@@ -8190,6 +8457,13 @@
             <a:prstDash val="solid"/>
           </a:ln>
         </p:spPr>
+        <p:txBody>
+          <a:bodyPr/>
+          <a:lstStyle/>
+          <a:p>
+            <a:endParaRPr lang="es-ES"/>
+          </a:p>
+        </p:txBody>
       </p:sp>
       <p:sp>
         <p:nvSpPr>
@@ -8215,6 +8489,13 @@
             <a:prstDash val="solid"/>
           </a:ln>
         </p:spPr>
+        <p:txBody>
+          <a:bodyPr/>
+          <a:lstStyle/>
+          <a:p>
+            <a:endParaRPr lang="es-ES"/>
+          </a:p>
+        </p:txBody>
       </p:sp>
       <p:sp>
         <p:nvSpPr>
@@ -8237,7 +8518,7 @@
           <a:bodyPr wrap="square" lIns="0" tIns="0" rIns="0" bIns="0" rtlCol="0" anchor="ctr"/>
           <a:lstStyle/>
           <a:p>
-            <a:pPr algn="l" indent="0" marL="0">
+            <a:pPr marL="0" indent="0" algn="l">
               <a:buNone/>
             </a:pPr>
             <a:r>
@@ -8279,6 +8560,13 @@
             <a:prstDash val="solid"/>
           </a:ln>
         </p:spPr>
+        <p:txBody>
+          <a:bodyPr/>
+          <a:lstStyle/>
+          <a:p>
+            <a:endParaRPr lang="es-ES"/>
+          </a:p>
+        </p:txBody>
       </p:sp>
       <p:sp>
         <p:nvSpPr>
@@ -8301,7 +8589,7 @@
           <a:bodyPr wrap="square" rtlCol="0" anchor="ctr"/>
           <a:lstStyle/>
           <a:p>
-            <a:pPr algn="ctr" indent="0" marL="0">
+            <a:pPr marL="0" indent="0" algn="ctr">
               <a:buNone/>
             </a:pPr>
             <a:r>
@@ -8318,7 +8606,7 @@
             <a:endParaRPr lang="en-US" sz="1200" dirty="0"/>
           </a:p>
           <a:p>
-            <a:pPr algn="ctr" indent="0" marL="0">
+            <a:pPr marL="0" indent="0" algn="ctr">
               <a:buNone/>
             </a:pPr>
             <a:r>
@@ -8335,7 +8623,7 @@
             <a:endParaRPr lang="en-US" sz="1200" dirty="0"/>
           </a:p>
           <a:p>
-            <a:pPr algn="ctr" indent="0" marL="0">
+            <a:pPr marL="0" indent="0" algn="ctr">
               <a:buNone/>
             </a:pPr>
             <a:r>
@@ -8352,7 +8640,7 @@
             <a:endParaRPr lang="en-US" sz="1200" dirty="0"/>
           </a:p>
           <a:p>
-            <a:pPr algn="ctr" indent="0" marL="0">
+            <a:pPr marL="0" indent="0" algn="ctr">
               <a:buNone/>
             </a:pPr>
             <a:r>
@@ -8369,7 +8657,7 @@
             <a:endParaRPr lang="en-US" sz="1200" dirty="0"/>
           </a:p>
           <a:p>
-            <a:pPr algn="ctr" indent="0" marL="0">
+            <a:pPr marL="0" indent="0" algn="ctr">
               <a:buNone/>
             </a:pPr>
             <a:r>
@@ -8411,6 +8699,13 @@
             <a:prstDash val="solid"/>
           </a:ln>
         </p:spPr>
+        <p:txBody>
+          <a:bodyPr/>
+          <a:lstStyle/>
+          <a:p>
+            <a:endParaRPr lang="es-ES"/>
+          </a:p>
+        </p:txBody>
       </p:sp>
       <p:sp>
         <p:nvSpPr>
@@ -8433,7 +8728,7 @@
           <a:bodyPr wrap="square" rtlCol="0" anchor="ctr"/>
           <a:lstStyle/>
           <a:p>
-            <a:pPr algn="ctr" indent="0" marL="0">
+            <a:pPr marL="0" indent="0" algn="ctr">
               <a:buNone/>
             </a:pPr>
             <a:r>
@@ -8450,7 +8745,7 @@
             <a:endParaRPr lang="en-US" sz="1200" dirty="0"/>
           </a:p>
           <a:p>
-            <a:pPr algn="ctr" indent="0" marL="0">
+            <a:pPr marL="0" indent="0" algn="ctr">
               <a:buNone/>
             </a:pPr>
             <a:r>
@@ -8467,7 +8762,7 @@
             <a:endParaRPr lang="en-US" sz="1200" dirty="0"/>
           </a:p>
           <a:p>
-            <a:pPr algn="ctr" indent="0" marL="0">
+            <a:pPr marL="0" indent="0" algn="ctr">
               <a:buNone/>
             </a:pPr>
             <a:r>
@@ -8484,7 +8779,7 @@
             <a:endParaRPr lang="en-US" sz="1200" dirty="0"/>
           </a:p>
           <a:p>
-            <a:pPr algn="ctr" indent="0" marL="0">
+            <a:pPr marL="0" indent="0" algn="ctr">
               <a:buNone/>
             </a:pPr>
             <a:r>
@@ -8501,7 +8796,7 @@
             <a:endParaRPr lang="en-US" sz="1200" dirty="0"/>
           </a:p>
           <a:p>
-            <a:pPr algn="ctr" indent="0" marL="0">
+            <a:pPr marL="0" indent="0" algn="ctr">
               <a:buNone/>
             </a:pPr>
             <a:r>
@@ -8543,6 +8838,13 @@
             <a:prstDash val="solid"/>
           </a:ln>
         </p:spPr>
+        <p:txBody>
+          <a:bodyPr/>
+          <a:lstStyle/>
+          <a:p>
+            <a:endParaRPr lang="es-ES"/>
+          </a:p>
+        </p:txBody>
       </p:sp>
       <p:sp>
         <p:nvSpPr>
@@ -8565,7 +8867,7 @@
           <a:bodyPr wrap="square" rtlCol="0" anchor="ctr"/>
           <a:lstStyle/>
           <a:p>
-            <a:pPr algn="ctr" indent="0" marL="0">
+            <a:pPr marL="0" indent="0" algn="ctr">
               <a:buNone/>
             </a:pPr>
             <a:r>
@@ -8884,4 +9186,319 @@
     </a:ext>
   </a:extLst>
 </a:theme>
+</file>
+
+<file path=ppt/theme/theme2.xml><?xml version="1.0" encoding="utf-8"?>
+<a:theme xmlns:a="http://schemas.openxmlformats.org/drawingml/2006/main" name="Tema de Office">
+  <a:themeElements>
+    <a:clrScheme name="Office">
+      <a:dk1>
+        <a:sysClr val="windowText" lastClr="000000"/>
+      </a:dk1>
+      <a:lt1>
+        <a:sysClr val="window" lastClr="FFFFFF"/>
+      </a:lt1>
+      <a:dk2>
+        <a:srgbClr val="0E2841"/>
+      </a:dk2>
+      <a:lt2>
+        <a:srgbClr val="E8E8E8"/>
+      </a:lt2>
+      <a:accent1>
+        <a:srgbClr val="156082"/>
+      </a:accent1>
+      <a:accent2>
+        <a:srgbClr val="E97132"/>
+      </a:accent2>
+      <a:accent3>
+        <a:srgbClr val="196B24"/>
+      </a:accent3>
+      <a:accent4>
+        <a:srgbClr val="0F9ED5"/>
+      </a:accent4>
+      <a:accent5>
+        <a:srgbClr val="A02B93"/>
+      </a:accent5>
+      <a:accent6>
+        <a:srgbClr val="4EA72E"/>
+      </a:accent6>
+      <a:hlink>
+        <a:srgbClr val="467886"/>
+      </a:hlink>
+      <a:folHlink>
+        <a:srgbClr val="96607D"/>
+      </a:folHlink>
+    </a:clrScheme>
+    <a:fontScheme name="Office">
+      <a:majorFont>
+        <a:latin typeface="Aptos Display" panose="02110004020202020204"/>
+        <a:ea typeface=""/>
+        <a:cs typeface=""/>
+        <a:font script="Jpan" typeface="游ゴシック Light"/>
+        <a:font script="Hang" typeface="맑은 고딕"/>
+        <a:font script="Hans" typeface="等线 Light"/>
+        <a:font script="Hant" typeface="新細明體"/>
+        <a:font script="Arab" typeface="Times New Roman"/>
+        <a:font script="Hebr" typeface="Times New Roman"/>
+        <a:font script="Thai" typeface="Angsana New"/>
+        <a:font script="Ethi" typeface="Nyala"/>
+        <a:font script="Beng" typeface="Vrinda"/>
+        <a:font script="Gujr" typeface="Shruti"/>
+        <a:font script="Khmr" typeface="MoolBoran"/>
+        <a:font script="Knda" typeface="Tunga"/>
+        <a:font script="Guru" typeface="Raavi"/>
+        <a:font script="Cans" typeface="Euphemia"/>
+        <a:font script="Cher" typeface="Plantagenet Cherokee"/>
+        <a:font script="Yiii" typeface="Microsoft Yi Baiti"/>
+        <a:font script="Tibt" typeface="Microsoft Himalaya"/>
+        <a:font script="Thaa" typeface="MV Boli"/>
+        <a:font script="Deva" typeface="Mangal"/>
+        <a:font script="Telu" typeface="Gautami"/>
+        <a:font script="Taml" typeface="Latha"/>
+        <a:font script="Syrc" typeface="Estrangelo Edessa"/>
+        <a:font script="Orya" typeface="Kalinga"/>
+        <a:font script="Mlym" typeface="Kartika"/>
+        <a:font script="Laoo" typeface="DokChampa"/>
+        <a:font script="Sinh" typeface="Iskoola Pota"/>
+        <a:font script="Mong" typeface="Mongolian Baiti"/>
+        <a:font script="Viet" typeface="Times New Roman"/>
+        <a:font script="Uigh" typeface="Microsoft Uighur"/>
+        <a:font script="Geor" typeface="Sylfaen"/>
+        <a:font script="Armn" typeface="Arial"/>
+        <a:font script="Bugi" typeface="Leelawadee UI"/>
+        <a:font script="Bopo" typeface="Microsoft JhengHei"/>
+        <a:font script="Java" typeface="Javanese Text"/>
+        <a:font script="Lisu" typeface="Segoe UI"/>
+        <a:font script="Mymr" typeface="Myanmar Text"/>
+        <a:font script="Nkoo" typeface="Ebrima"/>
+        <a:font script="Olck" typeface="Nirmala UI"/>
+        <a:font script="Osma" typeface="Ebrima"/>
+        <a:font script="Phag" typeface="Phagspa"/>
+        <a:font script="Syrn" typeface="Estrangelo Edessa"/>
+        <a:font script="Syrj" typeface="Estrangelo Edessa"/>
+        <a:font script="Syre" typeface="Estrangelo Edessa"/>
+        <a:font script="Sora" typeface="Nirmala UI"/>
+        <a:font script="Tale" typeface="Microsoft Tai Le"/>
+        <a:font script="Talu" typeface="Microsoft New Tai Lue"/>
+        <a:font script="Tfng" typeface="Ebrima"/>
+      </a:majorFont>
+      <a:minorFont>
+        <a:latin typeface="Aptos" panose="02110004020202020204"/>
+        <a:ea typeface=""/>
+        <a:cs typeface=""/>
+        <a:font script="Jpan" typeface="游ゴシック"/>
+        <a:font script="Hang" typeface="맑은 고딕"/>
+        <a:font script="Hans" typeface="等线"/>
+        <a:font script="Hant" typeface="新細明體"/>
+        <a:font script="Arab" typeface="Arial"/>
+        <a:font script="Hebr" typeface="Arial"/>
+        <a:font script="Thai" typeface="Cordia New"/>
+        <a:font script="Ethi" typeface="Nyala"/>
+        <a:font script="Beng" typeface="Vrinda"/>
+        <a:font script="Gujr" typeface="Shruti"/>
+        <a:font script="Khmr" typeface="DaunPenh"/>
+        <a:font script="Knda" typeface="Tunga"/>
+        <a:font script="Guru" typeface="Raavi"/>
+        <a:font script="Cans" typeface="Euphemia"/>
+        <a:font script="Cher" typeface="Plantagenet Cherokee"/>
+        <a:font script="Yiii" typeface="Microsoft Yi Baiti"/>
+        <a:font script="Tibt" typeface="Microsoft Himalaya"/>
+        <a:font script="Thaa" typeface="MV Boli"/>
+        <a:font script="Deva" typeface="Mangal"/>
+        <a:font script="Telu" typeface="Gautami"/>
+        <a:font script="Taml" typeface="Latha"/>
+        <a:font script="Syrc" typeface="Estrangelo Edessa"/>
+        <a:font script="Orya" typeface="Kalinga"/>
+        <a:font script="Mlym" typeface="Kartika"/>
+        <a:font script="Laoo" typeface="DokChampa"/>
+        <a:font script="Sinh" typeface="Iskoola Pota"/>
+        <a:font script="Mong" typeface="Mongolian Baiti"/>
+        <a:font script="Viet" typeface="Arial"/>
+        <a:font script="Uigh" typeface="Microsoft Uighur"/>
+        <a:font script="Geor" typeface="Sylfaen"/>
+        <a:font script="Armn" typeface="Arial"/>
+        <a:font script="Bugi" typeface="Leelawadee UI"/>
+        <a:font script="Bopo" typeface="Microsoft JhengHei"/>
+        <a:font script="Java" typeface="Javanese Text"/>
+        <a:font script="Lisu" typeface="Segoe UI"/>
+        <a:font script="Mymr" typeface="Myanmar Text"/>
+        <a:font script="Nkoo" typeface="Ebrima"/>
+        <a:font script="Olck" typeface="Nirmala UI"/>
+        <a:font script="Osma" typeface="Ebrima"/>
+        <a:font script="Phag" typeface="Phagspa"/>
+        <a:font script="Syrn" typeface="Estrangelo Edessa"/>
+        <a:font script="Syrj" typeface="Estrangelo Edessa"/>
+        <a:font script="Syre" typeface="Estrangelo Edessa"/>
+        <a:font script="Sora" typeface="Nirmala UI"/>
+        <a:font script="Tale" typeface="Microsoft Tai Le"/>
+        <a:font script="Talu" typeface="Microsoft New Tai Lue"/>
+        <a:font script="Tfng" typeface="Ebrima"/>
+      </a:minorFont>
+    </a:fontScheme>
+    <a:fmtScheme name="Office">
+      <a:fillStyleLst>
+        <a:solidFill>
+          <a:schemeClr val="phClr"/>
+        </a:solidFill>
+        <a:gradFill rotWithShape="1">
+          <a:gsLst>
+            <a:gs pos="0">
+              <a:schemeClr val="phClr">
+                <a:lumMod val="110000"/>
+                <a:satMod val="105000"/>
+                <a:tint val="67000"/>
+              </a:schemeClr>
+            </a:gs>
+            <a:gs pos="50000">
+              <a:schemeClr val="phClr">
+                <a:lumMod val="105000"/>
+                <a:satMod val="103000"/>
+                <a:tint val="73000"/>
+              </a:schemeClr>
+            </a:gs>
+            <a:gs pos="100000">
+              <a:schemeClr val="phClr">
+                <a:lumMod val="105000"/>
+                <a:satMod val="109000"/>
+                <a:tint val="81000"/>
+              </a:schemeClr>
+            </a:gs>
+          </a:gsLst>
+          <a:lin ang="5400000" scaled="0"/>
+        </a:gradFill>
+        <a:gradFill rotWithShape="1">
+          <a:gsLst>
+            <a:gs pos="0">
+              <a:schemeClr val="phClr">
+                <a:satMod val="103000"/>
+                <a:lumMod val="102000"/>
+                <a:tint val="94000"/>
+              </a:schemeClr>
+            </a:gs>
+            <a:gs pos="50000">
+              <a:schemeClr val="phClr">
+                <a:satMod val="110000"/>
+                <a:lumMod val="100000"/>
+                <a:shade val="100000"/>
+              </a:schemeClr>
+            </a:gs>
+            <a:gs pos="100000">
+              <a:schemeClr val="phClr">
+                <a:lumMod val="99000"/>
+                <a:satMod val="120000"/>
+                <a:shade val="78000"/>
+              </a:schemeClr>
+            </a:gs>
+          </a:gsLst>
+          <a:lin ang="5400000" scaled="0"/>
+        </a:gradFill>
+      </a:fillStyleLst>
+      <a:lnStyleLst>
+        <a:ln w="12700" cap="flat" cmpd="sng" algn="ctr">
+          <a:solidFill>
+            <a:schemeClr val="phClr"/>
+          </a:solidFill>
+          <a:prstDash val="solid"/>
+          <a:miter lim="800000"/>
+        </a:ln>
+        <a:ln w="19050" cap="flat" cmpd="sng" algn="ctr">
+          <a:solidFill>
+            <a:schemeClr val="phClr"/>
+          </a:solidFill>
+          <a:prstDash val="solid"/>
+          <a:miter lim="800000"/>
+        </a:ln>
+        <a:ln w="25400" cap="flat" cmpd="sng" algn="ctr">
+          <a:solidFill>
+            <a:schemeClr val="phClr"/>
+          </a:solidFill>
+          <a:prstDash val="solid"/>
+          <a:miter lim="800000"/>
+        </a:ln>
+      </a:lnStyleLst>
+      <a:effectStyleLst>
+        <a:effectStyle>
+          <a:effectLst/>
+        </a:effectStyle>
+        <a:effectStyle>
+          <a:effectLst/>
+        </a:effectStyle>
+        <a:effectStyle>
+          <a:effectLst>
+            <a:outerShdw blurRad="57150" dist="19050" dir="5400000" algn="ctr" rotWithShape="0">
+              <a:srgbClr val="000000">
+                <a:alpha val="63000"/>
+              </a:srgbClr>
+            </a:outerShdw>
+          </a:effectLst>
+        </a:effectStyle>
+      </a:effectStyleLst>
+      <a:bgFillStyleLst>
+        <a:solidFill>
+          <a:schemeClr val="phClr"/>
+        </a:solidFill>
+        <a:solidFill>
+          <a:schemeClr val="phClr">
+            <a:tint val="95000"/>
+            <a:satMod val="170000"/>
+          </a:schemeClr>
+        </a:solidFill>
+        <a:gradFill rotWithShape="1">
+          <a:gsLst>
+            <a:gs pos="0">
+              <a:schemeClr val="phClr">
+                <a:tint val="93000"/>
+                <a:satMod val="150000"/>
+                <a:shade val="98000"/>
+                <a:lumMod val="102000"/>
+              </a:schemeClr>
+            </a:gs>
+            <a:gs pos="50000">
+              <a:schemeClr val="phClr">
+                <a:tint val="98000"/>
+                <a:satMod val="130000"/>
+                <a:shade val="90000"/>
+                <a:lumMod val="103000"/>
+              </a:schemeClr>
+            </a:gs>
+            <a:gs pos="100000">
+              <a:schemeClr val="phClr">
+                <a:shade val="63000"/>
+                <a:satMod val="120000"/>
+              </a:schemeClr>
+            </a:gs>
+          </a:gsLst>
+          <a:lin ang="5400000" scaled="0"/>
+        </a:gradFill>
+      </a:bgFillStyleLst>
+    </a:fmtScheme>
+  </a:themeElements>
+  <a:objectDefaults>
+    <a:lnDef>
+      <a:spPr/>
+      <a:bodyPr/>
+      <a:lstStyle/>
+      <a:style>
+        <a:lnRef idx="2">
+          <a:schemeClr val="accent1"/>
+        </a:lnRef>
+        <a:fillRef idx="0">
+          <a:schemeClr val="accent1"/>
+        </a:fillRef>
+        <a:effectRef idx="1">
+          <a:schemeClr val="accent1"/>
+        </a:effectRef>
+        <a:fontRef idx="minor">
+          <a:schemeClr val="tx1"/>
+        </a:fontRef>
+      </a:style>
+    </a:lnDef>
+  </a:objectDefaults>
+  <a:extraClrSchemeLst/>
+  <a:extLst>
+    <a:ext uri="{05A4C25C-085E-4340-85A3-A5531E510DB2}">
+      <thm15:themeFamily xmlns:thm15="http://schemas.microsoft.com/office/thememl/2012/main" name="Office Theme" id="{2E142A2C-CD16-42D6-873A-C26D2A0506FA}" vid="{1BDDFF52-6CD6-40A5-AB3C-68EB2F1E4D0A}"/>
+    </a:ext>
+  </a:extLst>
+</a:theme>
 </file>
--- a/Presentacion/EDA_Goodreads.pptx
+++ b/Presentacion/EDA_Goodreads.pptx
@@ -5,7 +5,7 @@
     <p:sldMasterId id="2147483648" r:id="rId1"/>
   </p:sldMasterIdLst>
   <p:notesMasterIdLst>
-    <p:notesMasterId r:id="rId14"/>
+    <p:notesMasterId r:id="rId13"/>
   </p:notesMasterIdLst>
   <p:sldIdLst>
     <p:sldId id="256" r:id="rId2"/>
@@ -17,9 +17,8 @@
     <p:sldId id="262" r:id="rId8"/>
     <p:sldId id="263" r:id="rId9"/>
     <p:sldId id="264" r:id="rId10"/>
-    <p:sldId id="265" r:id="rId11"/>
-    <p:sldId id="266" r:id="rId12"/>
-    <p:sldId id="267" r:id="rId13"/>
+    <p:sldId id="266" r:id="rId11"/>
+    <p:sldId id="267" r:id="rId12"/>
   </p:sldIdLst>
   <p:sldSz cx="9144000" cy="5143500" type="screen16x9"/>
   <p:notesSz cx="5143500" cy="9144000"/>
@@ -500,90 +499,6 @@
 </p:notes>
 </file>
 
-<file path=ppt/notesSlides/notesSlide12.xml><?xml version="1.0" encoding="utf-8"?>
-<p:notes xmlns:a="http://schemas.openxmlformats.org/drawingml/2006/main" xmlns:r="http://schemas.openxmlformats.org/officeDocument/2006/relationships" xmlns:p="http://schemas.openxmlformats.org/presentationml/2006/main">
-  <p:cSld>
-    <p:spTree>
-      <p:nvGrpSpPr>
-        <p:cNvPr id="1" name=""/>
-        <p:cNvGrpSpPr/>
-        <p:nvPr/>
-      </p:nvGrpSpPr>
-      <p:grpSpPr>
-        <a:xfrm>
-          <a:off x="0" y="0"/>
-          <a:ext cx="0" cy="0"/>
-          <a:chOff x="0" y="0"/>
-          <a:chExt cx="0" cy="0"/>
-        </a:xfrm>
-      </p:grpSpPr>
-      <p:sp>
-        <p:nvSpPr>
-          <p:cNvPr id="2" name="Slide Image Placeholder 1"/>
-          <p:cNvSpPr>
-            <a:spLocks noGrp="1" noRot="1" noChangeAspect="1"/>
-          </p:cNvSpPr>
-          <p:nvPr>
-            <p:ph type="sldImg"/>
-          </p:nvPr>
-        </p:nvSpPr>
-        <p:spPr/>
-      </p:sp>
-      <p:sp>
-        <p:nvSpPr>
-          <p:cNvPr id="3" name="Notes Placeholder 2"/>
-          <p:cNvSpPr>
-            <a:spLocks noGrp="1"/>
-          </p:cNvSpPr>
-          <p:nvPr>
-            <p:ph type="body" idx="1"/>
-          </p:nvPr>
-        </p:nvSpPr>
-        <p:spPr/>
-        <p:txBody>
-          <a:bodyPr/>
-          <a:lstStyle/>
-          <a:p>
-            <a:endParaRPr lang="en-US" dirty="0"/>
-          </a:p>
-        </p:txBody>
-      </p:sp>
-      <p:sp>
-        <p:nvSpPr>
-          <p:cNvPr id="4" name="Slide Number Placeholder 3"/>
-          <p:cNvSpPr>
-            <a:spLocks noGrp="1"/>
-          </p:cNvSpPr>
-          <p:nvPr>
-            <p:ph type="sldNum" sz="quarter" idx="10"/>
-          </p:nvPr>
-        </p:nvSpPr>
-        <p:spPr/>
-        <p:txBody>
-          <a:bodyPr/>
-          <a:lstStyle/>
-          <a:p>
-            <a:fld id="{F7021451-1387-4CA6-816F-3879F97B5CBC}" type="slidenum">
-              <a:rPr lang="en-US"/>
-              <a:t>12</a:t>
-            </a:fld>
-            <a:endParaRPr lang="en-US"/>
-          </a:p>
-        </p:txBody>
-      </p:sp>
-    </p:spTree>
-    <p:extLst>
-      <p:ext uri="{BB962C8B-B14F-4D97-AF65-F5344CB8AC3E}">
-        <p14:creationId xmlns:p14="http://schemas.microsoft.com/office/powerpoint/2010/main" val="1024086991"/>
-      </p:ext>
-    </p:extLst>
-  </p:cSld>
-  <p:clrMapOvr>
-    <a:masterClrMapping/>
-  </p:clrMapOvr>
-</p:notes>
-</file>
-
 <file path=ppt/notesSlides/notesSlide2.xml><?xml version="1.0" encoding="utf-8"?>
 <p:notes xmlns:a="http://schemas.openxmlformats.org/drawingml/2006/main" xmlns:r="http://schemas.openxmlformats.org/officeDocument/2006/relationships" xmlns:p="http://schemas.openxmlformats.org/presentationml/2006/main">
   <p:cSld>
@@ -1621,7 +1536,7 @@
           <a:bodyPr/>
           <a:lstStyle/>
           <a:p>
-            <a:endParaRPr lang="es-ES"/>
+            <a:endParaRPr lang="es-ES_tradnl" noProof="1"/>
           </a:p>
         </p:txBody>
       </p:sp>
@@ -1650,7 +1565,7 @@
               <a:buNone/>
             </a:pPr>
             <a:r>
-              <a:rPr lang="en-US" sz="4400" b="1" dirty="0">
+              <a:rPr lang="es-ES_tradnl" sz="4400" b="1" noProof="1">
                 <a:solidFill>
                   <a:srgbClr val="FDF6EC"/>
                 </a:solidFill>
@@ -1660,14 +1575,14 @@
               </a:rPr>
               <a:t>Análisis Exploratorio</a:t>
             </a:r>
-            <a:endParaRPr lang="en-US" sz="4400" dirty="0"/>
+            <a:endParaRPr lang="es-ES_tradnl" sz="4400" noProof="1"/>
           </a:p>
           <a:p>
             <a:pPr marL="0" indent="0" algn="l">
               <a:buNone/>
             </a:pPr>
             <a:r>
-              <a:rPr lang="en-US" sz="4400" b="1" dirty="0">
+              <a:rPr lang="es-ES_tradnl" sz="4400" b="1" noProof="1">
                 <a:solidFill>
                   <a:srgbClr val="FDF6EC"/>
                 </a:solidFill>
@@ -1677,7 +1592,7 @@
               </a:rPr>
               <a:t>de Datos</a:t>
             </a:r>
-            <a:endParaRPr lang="en-US" sz="4400" dirty="0"/>
+            <a:endParaRPr lang="es-ES_tradnl" sz="4400" noProof="1"/>
           </a:p>
         </p:txBody>
       </p:sp>
@@ -1706,7 +1621,7 @@
               <a:buNone/>
             </a:pPr>
             <a:r>
-              <a:rPr lang="en-US" sz="1800" dirty="0">
+              <a:rPr lang="es-ES_tradnl" sz="1800" noProof="1">
                 <a:solidFill>
                   <a:srgbClr val="C8860A"/>
                 </a:solidFill>
@@ -1714,9 +1629,31 @@
                 <a:ea typeface="Calibri" pitchFamily="34" charset="-122"/>
                 <a:cs typeface="Calibri" pitchFamily="34" charset="-120"/>
               </a:rPr>
-              <a:t>📚 Dataset: Goodreads Best Books (52k libros)</a:t>
-            </a:r>
-            <a:endParaRPr lang="en-US" sz="1800" dirty="0"/>
+              <a:t>📚 Dataset: Goodreads </a:t>
+            </a:r>
+            <a:r>
+              <a:rPr lang="es-ES_tradnl" sz="1800" noProof="1">
+                <a:solidFill>
+                  <a:srgbClr val="C88708"/>
+                </a:solidFill>
+                <a:latin typeface="Calibri" pitchFamily="34" charset="0"/>
+                <a:ea typeface="Calibri" pitchFamily="34" charset="-122"/>
+                <a:cs typeface="Calibri" pitchFamily="34" charset="-120"/>
+              </a:rPr>
+              <a:t>Best</a:t>
+            </a:r>
+            <a:r>
+              <a:rPr lang="es-ES_tradnl" sz="1800" noProof="1">
+                <a:solidFill>
+                  <a:srgbClr val="C8860A"/>
+                </a:solidFill>
+                <a:latin typeface="Calibri" pitchFamily="34" charset="0"/>
+                <a:ea typeface="Calibri" pitchFamily="34" charset="-122"/>
+                <a:cs typeface="Calibri" pitchFamily="34" charset="-120"/>
+              </a:rPr>
+              <a:t> Books (52k libros)</a:t>
+            </a:r>
+            <a:endParaRPr lang="es-ES_tradnl" sz="1800" noProof="1"/>
           </a:p>
         </p:txBody>
       </p:sp>
@@ -1748,7 +1685,7 @@
           <a:bodyPr/>
           <a:lstStyle/>
           <a:p>
-            <a:endParaRPr lang="es-ES"/>
+            <a:endParaRPr lang="es-ES_tradnl" noProof="1"/>
           </a:p>
         </p:txBody>
       </p:sp>
@@ -1773,19 +1710,16 @@
           <a:bodyPr wrap="square" rtlCol="0" anchor="ctr"/>
           <a:lstStyle/>
           <a:p>
-            <a:pPr marL="0" indent="0" algn="l">
-              <a:buNone/>
-            </a:pPr>
-            <a:r>
-              <a:rPr lang="en-US" sz="1200" dirty="0">
-                <a:solidFill>
-                  <a:srgbClr val="7A5C3A"/>
+            <a:r>
+              <a:rPr lang="es-ES_tradnl" sz="1200" noProof="1">
+                <a:solidFill>
+                  <a:srgbClr val="C88708"/>
                 </a:solidFill>
                 <a:latin typeface="Calibri" pitchFamily="34" charset="0"/>
                 <a:ea typeface="Calibri" pitchFamily="34" charset="-122"/>
                 <a:cs typeface="Calibri" pitchFamily="34" charset="-120"/>
               </a:rPr>
-              <a:t>EDA | Bootcamp Data Science  •  2026</a:t>
+              <a:t>EDA | Bootcamp Data Science • Fátima Goiri •  2026</a:t>
             </a:r>
           </a:p>
         </p:txBody>
@@ -1799,508 +1733,6 @@
 </file>
 
 <file path=ppt/slides/slide10.xml><?xml version="1.0" encoding="utf-8"?>
-<p:sld xmlns:a="http://schemas.openxmlformats.org/drawingml/2006/main" xmlns:r="http://schemas.openxmlformats.org/officeDocument/2006/relationships" xmlns:p="http://schemas.openxmlformats.org/presentationml/2006/main">
-  <p:cSld name="Slide 10">
-    <p:bg>
-      <p:bgPr>
-        <a:solidFill>
-          <a:srgbClr val="FDF6EC"/>
-        </a:solidFill>
-        <a:effectLst/>
-      </p:bgPr>
-    </p:bg>
-    <p:spTree>
-      <p:nvGrpSpPr>
-        <p:cNvPr id="1" name=""/>
-        <p:cNvGrpSpPr/>
-        <p:nvPr/>
-      </p:nvGrpSpPr>
-      <p:grpSpPr>
-        <a:xfrm>
-          <a:off x="0" y="0"/>
-          <a:ext cx="0" cy="0"/>
-          <a:chOff x="0" y="0"/>
-          <a:chExt cx="0" cy="0"/>
-        </a:xfrm>
-      </p:grpSpPr>
-      <p:sp>
-        <p:nvSpPr>
-          <p:cNvPr id="2" name="Shape 0"/>
-          <p:cNvSpPr/>
-          <p:nvPr/>
-        </p:nvSpPr>
-        <p:spPr>
-          <a:xfrm>
-            <a:off x="0" y="0"/>
-            <a:ext cx="9144000" cy="914400"/>
-          </a:xfrm>
-          <a:prstGeom prst="rect">
-            <a:avLst/>
-          </a:prstGeom>
-          <a:solidFill>
-            <a:srgbClr val="2C1A0E"/>
-          </a:solidFill>
-          <a:ln w="12700">
-            <a:solidFill>
-              <a:srgbClr val="2C1A0E"/>
-            </a:solidFill>
-            <a:prstDash val="solid"/>
-          </a:ln>
-        </p:spPr>
-        <p:txBody>
-          <a:bodyPr/>
-          <a:lstStyle/>
-          <a:p>
-            <a:endParaRPr lang="es-ES"/>
-          </a:p>
-        </p:txBody>
-      </p:sp>
-      <p:sp>
-        <p:nvSpPr>
-          <p:cNvPr id="3" name="Shape 1"/>
-          <p:cNvSpPr/>
-          <p:nvPr/>
-        </p:nvSpPr>
-        <p:spPr>
-          <a:xfrm>
-            <a:off x="0" y="0"/>
-            <a:ext cx="320040" cy="5143500"/>
-          </a:xfrm>
-          <a:prstGeom prst="rect">
-            <a:avLst/>
-          </a:prstGeom>
-          <a:solidFill>
-            <a:srgbClr val="C8860A"/>
-          </a:solidFill>
-          <a:ln w="12700">
-            <a:solidFill>
-              <a:srgbClr val="C8860A"/>
-            </a:solidFill>
-            <a:prstDash val="solid"/>
-          </a:ln>
-        </p:spPr>
-        <p:txBody>
-          <a:bodyPr/>
-          <a:lstStyle/>
-          <a:p>
-            <a:endParaRPr lang="es-ES"/>
-          </a:p>
-        </p:txBody>
-      </p:sp>
-      <p:sp>
-        <p:nvSpPr>
-          <p:cNvPr id="4" name="Text 2"/>
-          <p:cNvSpPr/>
-          <p:nvPr/>
-        </p:nvSpPr>
-        <p:spPr>
-          <a:xfrm>
-            <a:off x="502920" y="137160"/>
-            <a:ext cx="8412480" cy="640080"/>
-          </a:xfrm>
-          <a:prstGeom prst="rect">
-            <a:avLst/>
-          </a:prstGeom>
-          <a:noFill/>
-          <a:ln/>
-        </p:spPr>
-        <p:txBody>
-          <a:bodyPr wrap="square" lIns="0" tIns="0" rIns="0" bIns="0" rtlCol="0" anchor="ctr"/>
-          <a:lstStyle/>
-          <a:p>
-            <a:pPr marL="0" indent="0" algn="l">
-              <a:buNone/>
-            </a:pPr>
-            <a:r>
-              <a:rPr lang="en-US" sz="2200" b="1" dirty="0">
-                <a:solidFill>
-                  <a:srgbClr val="FDF6EC"/>
-                </a:solidFill>
-                <a:latin typeface="Georgia" pitchFamily="34" charset="0"/>
-                <a:ea typeface="Georgia" pitchFamily="34" charset="-122"/>
-                <a:cs typeface="Georgia" pitchFamily="34" charset="-120"/>
-              </a:rPr>
-              <a:t>H1 — ¿Los libros con más páginas tienen mejor rating?</a:t>
-            </a:r>
-            <a:endParaRPr lang="en-US" sz="2200" dirty="0"/>
-          </a:p>
-        </p:txBody>
-      </p:sp>
-      <p:sp>
-        <p:nvSpPr>
-          <p:cNvPr id="5" name="Shape 3"/>
-          <p:cNvSpPr/>
-          <p:nvPr/>
-        </p:nvSpPr>
-        <p:spPr>
-          <a:xfrm>
-            <a:off x="502920" y="1051560"/>
-            <a:ext cx="5943600" cy="3108960"/>
-          </a:xfrm>
-          <a:prstGeom prst="rect">
-            <a:avLst/>
-          </a:prstGeom>
-          <a:solidFill>
-            <a:srgbClr val="F5E6CC"/>
-          </a:solidFill>
-          <a:ln w="12700">
-            <a:solidFill>
-              <a:srgbClr val="D4A853"/>
-            </a:solidFill>
-            <a:prstDash val="solid"/>
-          </a:ln>
-        </p:spPr>
-        <p:txBody>
-          <a:bodyPr/>
-          <a:lstStyle/>
-          <a:p>
-            <a:endParaRPr lang="es-ES"/>
-          </a:p>
-        </p:txBody>
-      </p:sp>
-      <p:sp>
-        <p:nvSpPr>
-          <p:cNvPr id="6" name="Text 4"/>
-          <p:cNvSpPr/>
-          <p:nvPr/>
-        </p:nvSpPr>
-        <p:spPr>
-          <a:xfrm>
-            <a:off x="502920" y="1051560"/>
-            <a:ext cx="5943600" cy="3108960"/>
-          </a:xfrm>
-          <a:prstGeom prst="rect">
-            <a:avLst/>
-          </a:prstGeom>
-          <a:noFill/>
-          <a:ln/>
-        </p:spPr>
-        <p:txBody>
-          <a:bodyPr wrap="square" rtlCol="0" anchor="ctr"/>
-          <a:lstStyle/>
-          <a:p>
-            <a:pPr marL="0" indent="0" algn="ctr">
-              <a:buNone/>
-            </a:pPr>
-            <a:r>
-              <a:rPr lang="en-US" sz="1200" i="1" dirty="0">
-                <a:solidFill>
-                  <a:srgbClr val="7A5C3A"/>
-                </a:solidFill>
-                <a:latin typeface="Calibri" pitchFamily="34" charset="0"/>
-                <a:ea typeface="Calibri" pitchFamily="34" charset="-122"/>
-                <a:cs typeface="Calibri" pitchFamily="34" charset="-120"/>
-              </a:rPr>
-              <a:t>📊  INSERTAR AQUÍ:</a:t>
-            </a:r>
-            <a:endParaRPr lang="en-US" sz="1200" dirty="0"/>
-          </a:p>
-          <a:p>
-            <a:pPr marL="0" indent="0" algn="ctr">
-              <a:buNone/>
-            </a:pPr>
-            <a:r>
-              <a:rPr lang="en-US" sz="1200" i="1" dirty="0">
-                <a:solidFill>
-                  <a:srgbClr val="7A5C3A"/>
-                </a:solidFill>
-                <a:latin typeface="Calibri" pitchFamily="34" charset="0"/>
-                <a:ea typeface="Calibri" pitchFamily="34" charset="-122"/>
-                <a:cs typeface="Calibri" pitchFamily="34" charset="-120"/>
-              </a:rPr>
-              <a:t>Gráfico de barras: rating medio por tramo de páginas</a:t>
-            </a:r>
-            <a:endParaRPr lang="en-US" sz="1200" dirty="0"/>
-          </a:p>
-          <a:p>
-            <a:pPr marL="0" indent="0" algn="ctr">
-              <a:buNone/>
-            </a:pPr>
-            <a:r>
-              <a:rPr lang="en-US" sz="1200" i="1" dirty="0">
-                <a:solidFill>
-                  <a:srgbClr val="7A5C3A"/>
-                </a:solidFill>
-                <a:latin typeface="Calibri" pitchFamily="34" charset="0"/>
-                <a:ea typeface="Calibri" pitchFamily="34" charset="-122"/>
-                <a:cs typeface="Calibri" pitchFamily="34" charset="-120"/>
-              </a:rPr>
-              <a:t>(ver diapositiva H1 para gráfico completo)</a:t>
-            </a:r>
-            <a:endParaRPr lang="en-US" sz="1200" dirty="0"/>
-          </a:p>
-          <a:p>
-            <a:pPr marL="0" indent="0" algn="ctr">
-              <a:buNone/>
-            </a:pPr>
-            <a:r>
-              <a:rPr lang="en-US" sz="1200" i="1" dirty="0">
-                <a:solidFill>
-                  <a:srgbClr val="7A5C3A"/>
-                </a:solidFill>
-                <a:latin typeface="Calibri" pitchFamily="34" charset="0"/>
-                <a:ea typeface="Calibri" pitchFamily="34" charset="-122"/>
-                <a:cs typeface="Calibri" pitchFamily="34" charset="-120"/>
-              </a:rPr>
-              <a:t>Rangos: &lt;100 | 100-200 | ... | &gt;1000</a:t>
-            </a:r>
-            <a:endParaRPr lang="en-US" sz="1200" dirty="0"/>
-          </a:p>
-        </p:txBody>
-      </p:sp>
-      <p:sp>
-        <p:nvSpPr>
-          <p:cNvPr id="7" name="Shape 5"/>
-          <p:cNvSpPr/>
-          <p:nvPr/>
-        </p:nvSpPr>
-        <p:spPr>
-          <a:xfrm>
-            <a:off x="6675120" y="1051560"/>
-            <a:ext cx="2194560" cy="914400"/>
-          </a:xfrm>
-          <a:prstGeom prst="rect">
-            <a:avLst/>
-          </a:prstGeom>
-          <a:solidFill>
-            <a:srgbClr val="FFFFFF"/>
-          </a:solidFill>
-          <a:ln w="12700">
-            <a:solidFill>
-              <a:srgbClr val="4A7C59"/>
-            </a:solidFill>
-            <a:prstDash val="solid"/>
-          </a:ln>
-          <a:effectLst>
-            <a:outerShdw blurRad="101600" dist="38100" dir="8100000" algn="bl" rotWithShape="0">
-              <a:srgbClr val="000000">
-                <a:alpha val="12000"/>
-              </a:srgbClr>
-            </a:outerShdw>
-          </a:effectLst>
-        </p:spPr>
-        <p:txBody>
-          <a:bodyPr/>
-          <a:lstStyle/>
-          <a:p>
-            <a:endParaRPr lang="es-ES"/>
-          </a:p>
-        </p:txBody>
-      </p:sp>
-      <p:sp>
-        <p:nvSpPr>
-          <p:cNvPr id="8" name="Text 6"/>
-          <p:cNvSpPr/>
-          <p:nvPr/>
-        </p:nvSpPr>
-        <p:spPr>
-          <a:xfrm>
-            <a:off x="6675120" y="1051560"/>
-            <a:ext cx="2194560" cy="411480"/>
-          </a:xfrm>
-          <a:prstGeom prst="rect">
-            <a:avLst/>
-          </a:prstGeom>
-          <a:noFill/>
-          <a:ln/>
-        </p:spPr>
-        <p:txBody>
-          <a:bodyPr wrap="square" rtlCol="0" anchor="ctr"/>
-          <a:lstStyle/>
-          <a:p>
-            <a:pPr marL="0" indent="0" algn="ctr">
-              <a:buNone/>
-            </a:pPr>
-            <a:r>
-              <a:rPr lang="en-US" sz="1000" dirty="0">
-                <a:solidFill>
-                  <a:srgbClr val="7A5C3A"/>
-                </a:solidFill>
-                <a:latin typeface="Calibri" pitchFamily="34" charset="0"/>
-                <a:ea typeface="Calibri" pitchFamily="34" charset="-122"/>
-                <a:cs typeface="Calibri" pitchFamily="34" charset="-120"/>
-              </a:rPr>
-              <a:t>Tendencia</a:t>
-            </a:r>
-            <a:endParaRPr lang="en-US" sz="1000" dirty="0"/>
-          </a:p>
-          <a:p>
-            <a:pPr marL="0" indent="0" algn="ctr">
-              <a:buNone/>
-            </a:pPr>
-            <a:r>
-              <a:rPr lang="en-US" sz="1000" dirty="0">
-                <a:solidFill>
-                  <a:srgbClr val="7A5C3A"/>
-                </a:solidFill>
-                <a:latin typeface="Calibri" pitchFamily="34" charset="0"/>
-                <a:ea typeface="Calibri" pitchFamily="34" charset="-122"/>
-                <a:cs typeface="Calibri" pitchFamily="34" charset="-120"/>
-              </a:rPr>
-              <a:t>Páginas ↔ rating</a:t>
-            </a:r>
-            <a:endParaRPr lang="en-US" sz="1000" dirty="0"/>
-          </a:p>
-        </p:txBody>
-      </p:sp>
-      <p:sp>
-        <p:nvSpPr>
-          <p:cNvPr id="9" name="Text 7"/>
-          <p:cNvSpPr/>
-          <p:nvPr/>
-        </p:nvSpPr>
-        <p:spPr>
-          <a:xfrm>
-            <a:off x="6675120" y="1463040"/>
-            <a:ext cx="2194560" cy="502920"/>
-          </a:xfrm>
-          <a:prstGeom prst="rect">
-            <a:avLst/>
-          </a:prstGeom>
-          <a:noFill/>
-          <a:ln/>
-        </p:spPr>
-        <p:txBody>
-          <a:bodyPr wrap="square" rtlCol="0" anchor="ctr"/>
-          <a:lstStyle/>
-          <a:p>
-            <a:pPr marL="0" indent="0" algn="ctr">
-              <a:buNone/>
-            </a:pPr>
-            <a:r>
-              <a:rPr lang="en-US" sz="2800" b="1" dirty="0">
-                <a:solidFill>
-                  <a:srgbClr val="8B4513"/>
-                </a:solidFill>
-                <a:latin typeface="Georgia" pitchFamily="34" charset="0"/>
-                <a:ea typeface="Georgia" pitchFamily="34" charset="-122"/>
-                <a:cs typeface="Georgia" pitchFamily="34" charset="-120"/>
-              </a:rPr>
-              <a:t>↑ leve</a:t>
-            </a:r>
-            <a:endParaRPr lang="en-US" sz="2800" dirty="0"/>
-          </a:p>
-        </p:txBody>
-      </p:sp>
-      <p:sp>
-        <p:nvSpPr>
-          <p:cNvPr id="10" name="Text 8"/>
-          <p:cNvSpPr/>
-          <p:nvPr/>
-        </p:nvSpPr>
-        <p:spPr>
-          <a:xfrm>
-            <a:off x="6675120" y="2057400"/>
-            <a:ext cx="2194560" cy="365760"/>
-          </a:xfrm>
-          <a:prstGeom prst="rect">
-            <a:avLst/>
-          </a:prstGeom>
-          <a:noFill/>
-          <a:ln/>
-        </p:spPr>
-        <p:txBody>
-          <a:bodyPr wrap="square" rtlCol="0" anchor="ctr"/>
-          <a:lstStyle/>
-          <a:p>
-            <a:pPr marL="0" indent="0" algn="ctr">
-              <a:buNone/>
-            </a:pPr>
-            <a:r>
-              <a:rPr lang="en-US" sz="1000" i="1" dirty="0">
-                <a:solidFill>
-                  <a:srgbClr val="7A5C3A"/>
-                </a:solidFill>
-                <a:latin typeface="Calibri" pitchFamily="34" charset="0"/>
-                <a:ea typeface="Calibri" pitchFamily="34" charset="-122"/>
-                <a:cs typeface="Calibri" pitchFamily="34" charset="-120"/>
-              </a:rPr>
-              <a:t>Tendencia débil positiva</a:t>
-            </a:r>
-            <a:endParaRPr lang="en-US" sz="1000" dirty="0"/>
-          </a:p>
-        </p:txBody>
-      </p:sp>
-      <p:sp>
-        <p:nvSpPr>
-          <p:cNvPr id="11" name="Shape 9"/>
-          <p:cNvSpPr/>
-          <p:nvPr/>
-        </p:nvSpPr>
-        <p:spPr>
-          <a:xfrm>
-            <a:off x="502920" y="4343400"/>
-            <a:ext cx="8321040" cy="502920"/>
-          </a:xfrm>
-          <a:prstGeom prst="rect">
-            <a:avLst/>
-          </a:prstGeom>
-          <a:solidFill>
-            <a:srgbClr val="F5E6CC"/>
-          </a:solidFill>
-          <a:ln w="12700">
-            <a:solidFill>
-              <a:srgbClr val="C8860A"/>
-            </a:solidFill>
-            <a:prstDash val="solid"/>
-          </a:ln>
-        </p:spPr>
-        <p:txBody>
-          <a:bodyPr/>
-          <a:lstStyle/>
-          <a:p>
-            <a:endParaRPr lang="es-ES"/>
-          </a:p>
-        </p:txBody>
-      </p:sp>
-      <p:sp>
-        <p:nvSpPr>
-          <p:cNvPr id="12" name="Text 10"/>
-          <p:cNvSpPr/>
-          <p:nvPr/>
-        </p:nvSpPr>
-        <p:spPr>
-          <a:xfrm>
-            <a:off x="502920" y="4343400"/>
-            <a:ext cx="8321040" cy="502920"/>
-          </a:xfrm>
-          <a:prstGeom prst="rect">
-            <a:avLst/>
-          </a:prstGeom>
-          <a:noFill/>
-          <a:ln/>
-        </p:spPr>
-        <p:txBody>
-          <a:bodyPr wrap="square" rtlCol="0" anchor="ctr"/>
-          <a:lstStyle/>
-          <a:p>
-            <a:pPr marL="0" indent="0" algn="ctr">
-              <a:buNone/>
-            </a:pPr>
-            <a:r>
-              <a:rPr lang="en-US" sz="1200" i="1" dirty="0">
-                <a:solidFill>
-                  <a:srgbClr val="8B4513"/>
-                </a:solidFill>
-                <a:latin typeface="Calibri" pitchFamily="34" charset="0"/>
-                <a:ea typeface="Calibri" pitchFamily="34" charset="-122"/>
-                <a:cs typeface="Calibri" pitchFamily="34" charset="-120"/>
-              </a:rPr>
-              <a:t>H1 — PARCIALMENTE CONFIRMADA: Tendencia leve al alza (3,97 → 4,26). La diferencia es mínima pero los libros más largos acumulan muchas más valoraciones.</a:t>
-            </a:r>
-            <a:endParaRPr lang="en-US" sz="1200" dirty="0"/>
-          </a:p>
-        </p:txBody>
-      </p:sp>
-    </p:spTree>
-  </p:cSld>
-  <p:clrMapOvr>
-    <a:masterClrMapping/>
-  </p:clrMapOvr>
-</p:sld>
-</file>
-
-<file path=ppt/slides/slide11.xml><?xml version="1.0" encoding="utf-8"?>
 <p:sld xmlns:a="http://schemas.openxmlformats.org/drawingml/2006/main" xmlns:r="http://schemas.openxmlformats.org/officeDocument/2006/relationships" xmlns:p="http://schemas.openxmlformats.org/presentationml/2006/main">
   <p:cSld name="Slide 11">
     <p:bg>
@@ -2353,7 +1785,7 @@
           <a:bodyPr/>
           <a:lstStyle/>
           <a:p>
-            <a:endParaRPr lang="es-ES"/>
+            <a:endParaRPr lang="es-ES_tradnl" noProof="1"/>
           </a:p>
         </p:txBody>
       </p:sp>
@@ -2382,7 +1814,7 @@
               <a:buNone/>
             </a:pPr>
             <a:r>
-              <a:rPr lang="en-US" sz="3600" b="1" dirty="0">
+              <a:rPr lang="es-ES_tradnl" sz="3600" b="1" noProof="1">
                 <a:solidFill>
                   <a:srgbClr val="C8860A"/>
                 </a:solidFill>
@@ -2392,7 +1824,7 @@
               </a:rPr>
               <a:t>Conclusiones</a:t>
             </a:r>
-            <a:endParaRPr lang="en-US" sz="3600" dirty="0"/>
+            <a:endParaRPr lang="es-ES_tradnl" sz="3600" noProof="1"/>
           </a:p>
         </p:txBody>
       </p:sp>
@@ -2424,7 +1856,7 @@
           <a:bodyPr/>
           <a:lstStyle/>
           <a:p>
-            <a:endParaRPr lang="es-ES"/>
+            <a:endParaRPr lang="es-ES_tradnl" noProof="1"/>
           </a:p>
         </p:txBody>
       </p:sp>
@@ -2456,7 +1888,7 @@
           <a:bodyPr/>
           <a:lstStyle/>
           <a:p>
-            <a:endParaRPr lang="es-ES"/>
+            <a:endParaRPr lang="es-ES_tradnl" noProof="1"/>
           </a:p>
         </p:txBody>
       </p:sp>
@@ -2485,7 +1917,7 @@
               <a:buNone/>
             </a:pPr>
             <a:r>
-              <a:rPr lang="en-US" sz="1400" b="1" dirty="0">
+              <a:rPr lang="es-ES_tradnl" sz="1400" b="1" noProof="1">
                 <a:solidFill>
                   <a:srgbClr val="2C1A0E"/>
                 </a:solidFill>
@@ -2495,7 +1927,7 @@
               </a:rPr>
               <a:t>H1</a:t>
             </a:r>
-            <a:endParaRPr lang="en-US" sz="1400" dirty="0"/>
+            <a:endParaRPr lang="es-ES_tradnl" sz="1400" noProof="1"/>
           </a:p>
         </p:txBody>
       </p:sp>
@@ -2524,7 +1956,7 @@
               <a:buNone/>
             </a:pPr>
             <a:r>
-              <a:rPr lang="en-US" sz="1000" dirty="0">
+              <a:rPr lang="es-ES_tradnl" sz="1000" noProof="1">
                 <a:solidFill>
                   <a:srgbClr val="FDF6EC"/>
                 </a:solidFill>
@@ -2534,14 +1966,14 @@
               </a:rPr>
               <a:t>Páginas</a:t>
             </a:r>
-            <a:endParaRPr lang="en-US" sz="1000" dirty="0"/>
+            <a:endParaRPr lang="es-ES_tradnl" sz="1000" noProof="1"/>
           </a:p>
           <a:p>
             <a:pPr marL="0" indent="0" algn="ctr">
               <a:buNone/>
             </a:pPr>
             <a:r>
-              <a:rPr lang="en-US" sz="1000" dirty="0">
+              <a:rPr lang="es-ES_tradnl" sz="1000" noProof="1">
                 <a:solidFill>
                   <a:srgbClr val="FDF6EC"/>
                 </a:solidFill>
@@ -2551,7 +1983,7 @@
               </a:rPr>
               <a:t>vs Rating</a:t>
             </a:r>
-            <a:endParaRPr lang="en-US" sz="1000" dirty="0"/>
+            <a:endParaRPr lang="es-ES_tradnl" sz="1000" noProof="1"/>
           </a:p>
         </p:txBody>
       </p:sp>
@@ -2583,7 +2015,7 @@
           <a:bodyPr/>
           <a:lstStyle/>
           <a:p>
-            <a:endParaRPr lang="es-ES"/>
+            <a:endParaRPr lang="es-ES_tradnl" noProof="1"/>
           </a:p>
         </p:txBody>
       </p:sp>
@@ -2612,7 +2044,7 @@
               <a:buNone/>
             </a:pPr>
             <a:r>
-              <a:rPr lang="en-US" sz="1000" i="1" dirty="0">
+              <a:rPr lang="es-ES_tradnl" sz="1000" i="1" noProof="1">
                 <a:solidFill>
                   <a:srgbClr val="2C1A0E"/>
                 </a:solidFill>
@@ -2622,14 +2054,14 @@
               </a:rPr>
               <a:t>~</a:t>
             </a:r>
-            <a:endParaRPr lang="en-US" sz="1000" dirty="0"/>
+            <a:endParaRPr lang="es-ES_tradnl" sz="1000" noProof="1"/>
           </a:p>
           <a:p>
             <a:pPr marL="0" indent="0" algn="ctr">
               <a:buNone/>
             </a:pPr>
             <a:r>
-              <a:rPr lang="en-US" sz="1000" i="1" dirty="0">
+              <a:rPr lang="es-ES_tradnl" sz="1000" i="1" noProof="1">
                 <a:solidFill>
                   <a:srgbClr val="2C1A0E"/>
                 </a:solidFill>
@@ -2639,7 +2071,7 @@
               </a:rPr>
               <a:t>Tendencia leve, sin diferencia clara</a:t>
             </a:r>
-            <a:endParaRPr lang="en-US" sz="1000" dirty="0"/>
+            <a:endParaRPr lang="es-ES_tradnl" sz="1000" noProof="1"/>
           </a:p>
         </p:txBody>
       </p:sp>
@@ -2671,7 +2103,7 @@
           <a:bodyPr/>
           <a:lstStyle/>
           <a:p>
-            <a:endParaRPr lang="es-ES"/>
+            <a:endParaRPr lang="es-ES_tradnl" noProof="1"/>
           </a:p>
         </p:txBody>
       </p:sp>
@@ -2703,7 +2135,7 @@
           <a:bodyPr/>
           <a:lstStyle/>
           <a:p>
-            <a:endParaRPr lang="es-ES"/>
+            <a:endParaRPr lang="es-ES_tradnl" noProof="1"/>
           </a:p>
         </p:txBody>
       </p:sp>
@@ -2732,7 +2164,7 @@
               <a:buNone/>
             </a:pPr>
             <a:r>
-              <a:rPr lang="en-US" sz="1400" b="1" dirty="0">
+              <a:rPr lang="es-ES_tradnl" sz="1400" b="1" noProof="1">
                 <a:solidFill>
                   <a:srgbClr val="2C1A0E"/>
                 </a:solidFill>
@@ -2742,7 +2174,7 @@
               </a:rPr>
               <a:t>H2</a:t>
             </a:r>
-            <a:endParaRPr lang="en-US" sz="1400" dirty="0"/>
+            <a:endParaRPr lang="es-ES_tradnl" sz="1400" noProof="1"/>
           </a:p>
         </p:txBody>
       </p:sp>
@@ -2771,7 +2203,7 @@
               <a:buNone/>
             </a:pPr>
             <a:r>
-              <a:rPr lang="en-US" sz="1000" dirty="0">
+              <a:rPr lang="es-ES_tradnl" sz="1000" noProof="1">
                 <a:solidFill>
                   <a:srgbClr val="FDF6EC"/>
                 </a:solidFill>
@@ -2781,14 +2213,14 @@
               </a:rPr>
               <a:t>Hardcover</a:t>
             </a:r>
-            <a:endParaRPr lang="en-US" sz="1000" dirty="0"/>
+            <a:endParaRPr lang="es-ES_tradnl" sz="1000" noProof="1"/>
           </a:p>
           <a:p>
             <a:pPr marL="0" indent="0" algn="ctr">
               <a:buNone/>
             </a:pPr>
             <a:r>
-              <a:rPr lang="en-US" sz="1000" dirty="0">
+              <a:rPr lang="es-ES_tradnl" sz="1000" noProof="1">
                 <a:solidFill>
                   <a:srgbClr val="FDF6EC"/>
                 </a:solidFill>
@@ -2798,7 +2230,7 @@
               </a:rPr>
               <a:t>vs Rating</a:t>
             </a:r>
-            <a:endParaRPr lang="en-US" sz="1000" dirty="0"/>
+            <a:endParaRPr lang="es-ES_tradnl" sz="1000" noProof="1"/>
           </a:p>
         </p:txBody>
       </p:sp>
@@ -2830,7 +2262,7 @@
           <a:bodyPr/>
           <a:lstStyle/>
           <a:p>
-            <a:endParaRPr lang="es-ES"/>
+            <a:endParaRPr lang="es-ES_tradnl" noProof="1"/>
           </a:p>
         </p:txBody>
       </p:sp>
@@ -2859,7 +2291,7 @@
               <a:buNone/>
             </a:pPr>
             <a:r>
-              <a:rPr lang="en-US" sz="1000" i="1" dirty="0">
+              <a:rPr lang="es-ES_tradnl" sz="1000" i="1" noProof="1">
                 <a:solidFill>
                   <a:srgbClr val="2C1A0E"/>
                 </a:solidFill>
@@ -2869,14 +2301,14 @@
               </a:rPr>
               <a:t>✗</a:t>
             </a:r>
-            <a:endParaRPr lang="en-US" sz="1000" dirty="0"/>
+            <a:endParaRPr lang="es-ES_tradnl" sz="1000" noProof="1"/>
           </a:p>
           <a:p>
             <a:pPr marL="0" indent="0" algn="ctr">
               <a:buNone/>
             </a:pPr>
             <a:r>
-              <a:rPr lang="en-US" sz="1000" i="1" dirty="0">
+              <a:rPr lang="es-ES_tradnl" sz="1000" i="1" noProof="1">
                 <a:solidFill>
                   <a:srgbClr val="2C1A0E"/>
                 </a:solidFill>
@@ -2886,7 +2318,7 @@
               </a:rPr>
               <a:t>✗ Hardcover: rating más bajo (3,99)</a:t>
             </a:r>
-            <a:endParaRPr lang="en-US" sz="1000" dirty="0"/>
+            <a:endParaRPr lang="es-ES_tradnl" sz="1000" noProof="1"/>
           </a:p>
         </p:txBody>
       </p:sp>
@@ -2918,7 +2350,7 @@
           <a:bodyPr/>
           <a:lstStyle/>
           <a:p>
-            <a:endParaRPr lang="es-ES"/>
+            <a:endParaRPr lang="es-ES_tradnl" noProof="1"/>
           </a:p>
         </p:txBody>
       </p:sp>
@@ -2950,7 +2382,7 @@
           <a:bodyPr/>
           <a:lstStyle/>
           <a:p>
-            <a:endParaRPr lang="es-ES"/>
+            <a:endParaRPr lang="es-ES_tradnl" noProof="1"/>
           </a:p>
         </p:txBody>
       </p:sp>
@@ -2979,7 +2411,7 @@
               <a:buNone/>
             </a:pPr>
             <a:r>
-              <a:rPr lang="en-US" sz="1400" b="1" dirty="0">
+              <a:rPr lang="es-ES_tradnl" sz="1400" b="1" noProof="1">
                 <a:solidFill>
                   <a:srgbClr val="2C1A0E"/>
                 </a:solidFill>
@@ -2989,7 +2421,7 @@
               </a:rPr>
               <a:t>H3</a:t>
             </a:r>
-            <a:endParaRPr lang="en-US" sz="1400" dirty="0"/>
+            <a:endParaRPr lang="es-ES_tradnl" sz="1400" noProof="1"/>
           </a:p>
         </p:txBody>
       </p:sp>
@@ -3018,7 +2450,7 @@
               <a:buNone/>
             </a:pPr>
             <a:r>
-              <a:rPr lang="en-US" sz="1000" dirty="0">
+              <a:rPr lang="es-ES_tradnl" sz="1000" noProof="1">
                 <a:solidFill>
                   <a:srgbClr val="FDF6EC"/>
                 </a:solidFill>
@@ -3028,14 +2460,14 @@
               </a:rPr>
               <a:t>Series</a:t>
             </a:r>
-            <a:endParaRPr lang="en-US" sz="1000" dirty="0"/>
+            <a:endParaRPr lang="es-ES_tradnl" sz="1000" noProof="1"/>
           </a:p>
           <a:p>
             <a:pPr marL="0" indent="0" algn="ctr">
               <a:buNone/>
             </a:pPr>
             <a:r>
-              <a:rPr lang="en-US" sz="1000" dirty="0">
+              <a:rPr lang="es-ES_tradnl" sz="1000" noProof="1">
                 <a:solidFill>
                   <a:srgbClr val="FDF6EC"/>
                 </a:solidFill>
@@ -3045,7 +2477,7 @@
               </a:rPr>
               <a:t>vs Rating</a:t>
             </a:r>
-            <a:endParaRPr lang="en-US" sz="1000" dirty="0"/>
+            <a:endParaRPr lang="es-ES_tradnl" sz="1000" noProof="1"/>
           </a:p>
         </p:txBody>
       </p:sp>
@@ -3077,7 +2509,7 @@
           <a:bodyPr/>
           <a:lstStyle/>
           <a:p>
-            <a:endParaRPr lang="es-ES"/>
+            <a:endParaRPr lang="es-ES_tradnl" noProof="1"/>
           </a:p>
         </p:txBody>
       </p:sp>
@@ -3106,7 +2538,7 @@
               <a:buNone/>
             </a:pPr>
             <a:r>
-              <a:rPr lang="en-US" sz="1000" i="1" dirty="0">
+              <a:rPr lang="es-ES_tradnl" sz="1000" i="1" noProof="1">
                 <a:solidFill>
                   <a:srgbClr val="2C1A0E"/>
                 </a:solidFill>
@@ -3116,14 +2548,14 @@
               </a:rPr>
               <a:t>✓</a:t>
             </a:r>
-            <a:endParaRPr lang="en-US" sz="1000" dirty="0"/>
+            <a:endParaRPr lang="es-ES_tradnl" sz="1000" noProof="1"/>
           </a:p>
           <a:p>
             <a:pPr marL="0" indent="0" algn="ctr">
               <a:buNone/>
             </a:pPr>
             <a:r>
-              <a:rPr lang="en-US" sz="1000" i="1" dirty="0">
+              <a:rPr lang="es-ES_tradnl" sz="1000" i="1" noProof="1">
                 <a:solidFill>
                   <a:srgbClr val="2C1A0E"/>
                 </a:solidFill>
@@ -3133,7 +2565,7 @@
               </a:rPr>
               <a:t>Series: 4,03 vs 3,95 standalone</a:t>
             </a:r>
-            <a:endParaRPr lang="en-US" sz="1000" dirty="0"/>
+            <a:endParaRPr lang="es-ES_tradnl" sz="1000" noProof="1"/>
           </a:p>
         </p:txBody>
       </p:sp>
@@ -3165,7 +2597,7 @@
           <a:bodyPr/>
           <a:lstStyle/>
           <a:p>
-            <a:endParaRPr lang="es-ES"/>
+            <a:endParaRPr lang="es-ES_tradnl" noProof="1"/>
           </a:p>
         </p:txBody>
       </p:sp>
@@ -3197,7 +2629,7 @@
           <a:bodyPr/>
           <a:lstStyle/>
           <a:p>
-            <a:endParaRPr lang="es-ES"/>
+            <a:endParaRPr lang="es-ES_tradnl" noProof="1"/>
           </a:p>
         </p:txBody>
       </p:sp>
@@ -3226,7 +2658,7 @@
               <a:buNone/>
             </a:pPr>
             <a:r>
-              <a:rPr lang="en-US" sz="1400" b="1" dirty="0">
+              <a:rPr lang="es-ES_tradnl" sz="1400" b="1" noProof="1">
                 <a:solidFill>
                   <a:srgbClr val="2C1A0E"/>
                 </a:solidFill>
@@ -3236,7 +2668,7 @@
               </a:rPr>
               <a:t>H4</a:t>
             </a:r>
-            <a:endParaRPr lang="en-US" sz="1400" dirty="0"/>
+            <a:endParaRPr lang="es-ES_tradnl" sz="1400" noProof="1"/>
           </a:p>
         </p:txBody>
       </p:sp>
@@ -3265,7 +2697,7 @@
               <a:buNone/>
             </a:pPr>
             <a:r>
-              <a:rPr lang="en-US" sz="1000" dirty="0">
+              <a:rPr lang="es-ES_tradnl" sz="1000" noProof="1">
                 <a:solidFill>
                   <a:srgbClr val="FDF6EC"/>
                 </a:solidFill>
@@ -3275,14 +2707,14 @@
               </a:rPr>
               <a:t>Valoraciones</a:t>
             </a:r>
-            <a:endParaRPr lang="en-US" sz="1000" dirty="0"/>
+            <a:endParaRPr lang="es-ES_tradnl" sz="1000" noProof="1"/>
           </a:p>
           <a:p>
             <a:pPr marL="0" indent="0" algn="ctr">
               <a:buNone/>
             </a:pPr>
             <a:r>
-              <a:rPr lang="en-US" sz="1000" dirty="0">
+              <a:rPr lang="es-ES_tradnl" sz="1000" noProof="1">
                 <a:solidFill>
                   <a:srgbClr val="FDF6EC"/>
                 </a:solidFill>
@@ -3292,7 +2724,7 @@
               </a:rPr>
               <a:t>vs Rating</a:t>
             </a:r>
-            <a:endParaRPr lang="en-US" sz="1000" dirty="0"/>
+            <a:endParaRPr lang="es-ES_tradnl" sz="1000" noProof="1"/>
           </a:p>
         </p:txBody>
       </p:sp>
@@ -3324,7 +2756,7 @@
           <a:bodyPr/>
           <a:lstStyle/>
           <a:p>
-            <a:endParaRPr lang="es-ES"/>
+            <a:endParaRPr lang="es-ES_tradnl" noProof="1"/>
           </a:p>
         </p:txBody>
       </p:sp>
@@ -3353,7 +2785,7 @@
               <a:buNone/>
             </a:pPr>
             <a:r>
-              <a:rPr lang="en-US" sz="1000" i="1" dirty="0">
+              <a:rPr lang="es-ES_tradnl" sz="1000" i="1" noProof="1">
                 <a:solidFill>
                   <a:srgbClr val="2C1A0E"/>
                 </a:solidFill>
@@ -3363,14 +2795,14 @@
               </a:rPr>
               <a:t>✓</a:t>
             </a:r>
-            <a:endParaRPr lang="en-US" sz="1000" dirty="0"/>
+            <a:endParaRPr lang="es-ES_tradnl" sz="1000" noProof="1"/>
           </a:p>
           <a:p>
             <a:pPr marL="0" indent="0" algn="ctr">
               <a:buNone/>
             </a:pPr>
             <a:r>
-              <a:rPr lang="en-US" sz="1000" i="1" dirty="0">
+              <a:rPr lang="es-ES_tradnl" sz="1000" i="1" noProof="1">
                 <a:solidFill>
                   <a:srgbClr val="2C1A0E"/>
                 </a:solidFill>
@@ -3380,7 +2812,7 @@
               </a:rPr>
               <a:t>J.K. Rowling lidera con 24M+ valoraciones</a:t>
             </a:r>
-            <a:endParaRPr lang="en-US" sz="1000" dirty="0"/>
+            <a:endParaRPr lang="es-ES_tradnl" sz="1000" noProof="1"/>
           </a:p>
         </p:txBody>
       </p:sp>
@@ -3412,7 +2844,7 @@
           <a:bodyPr/>
           <a:lstStyle/>
           <a:p>
-            <a:endParaRPr lang="es-ES"/>
+            <a:endParaRPr lang="es-ES_tradnl" noProof="1"/>
           </a:p>
         </p:txBody>
       </p:sp>
@@ -3444,7 +2876,7 @@
           <a:bodyPr/>
           <a:lstStyle/>
           <a:p>
-            <a:endParaRPr lang="es-ES"/>
+            <a:endParaRPr lang="es-ES_tradnl" noProof="1"/>
           </a:p>
         </p:txBody>
       </p:sp>
@@ -3473,7 +2905,7 @@
               <a:buNone/>
             </a:pPr>
             <a:r>
-              <a:rPr lang="en-US" sz="1400" b="1" dirty="0">
+              <a:rPr lang="es-ES_tradnl" sz="1400" b="1" noProof="1">
                 <a:solidFill>
                   <a:srgbClr val="2C1A0E"/>
                 </a:solidFill>
@@ -3483,7 +2915,7 @@
               </a:rPr>
               <a:t>H5</a:t>
             </a:r>
-            <a:endParaRPr lang="en-US" sz="1400" dirty="0"/>
+            <a:endParaRPr lang="es-ES_tradnl" sz="1400" noProof="1"/>
           </a:p>
         </p:txBody>
       </p:sp>
@@ -3512,7 +2944,7 @@
               <a:buNone/>
             </a:pPr>
             <a:r>
-              <a:rPr lang="en-US" sz="1000" dirty="0">
+              <a:rPr lang="es-ES_tradnl" sz="1000" noProof="1">
                 <a:solidFill>
                   <a:srgbClr val="FDF6EC"/>
                 </a:solidFill>
@@ -3522,14 +2954,14 @@
               </a:rPr>
               <a:t>Autores</a:t>
             </a:r>
-            <a:endParaRPr lang="en-US" sz="1000" dirty="0"/>
+            <a:endParaRPr lang="es-ES_tradnl" sz="1000" noProof="1"/>
           </a:p>
           <a:p>
             <a:pPr marL="0" indent="0" algn="ctr">
               <a:buNone/>
             </a:pPr>
             <a:r>
-              <a:rPr lang="en-US" sz="1000" dirty="0">
+              <a:rPr lang="es-ES_tradnl" sz="1000" noProof="1">
                 <a:solidFill>
                   <a:srgbClr val="FDF6EC"/>
                 </a:solidFill>
@@ -3539,7 +2971,7 @@
               </a:rPr>
               <a:t>y premios</a:t>
             </a:r>
-            <a:endParaRPr lang="en-US" sz="1000" dirty="0"/>
+            <a:endParaRPr lang="es-ES_tradnl" sz="1000" noProof="1"/>
           </a:p>
         </p:txBody>
       </p:sp>
@@ -3571,7 +3003,7 @@
           <a:bodyPr/>
           <a:lstStyle/>
           <a:p>
-            <a:endParaRPr lang="es-ES"/>
+            <a:endParaRPr lang="es-ES_tradnl" noProof="1"/>
           </a:p>
         </p:txBody>
       </p:sp>
@@ -3600,7 +3032,7 @@
               <a:buNone/>
             </a:pPr>
             <a:r>
-              <a:rPr lang="en-US" sz="1000" i="1" dirty="0">
+              <a:rPr lang="es-ES_tradnl" sz="1000" i="1" noProof="1">
                 <a:solidFill>
                   <a:srgbClr val="2C1A0E"/>
                 </a:solidFill>
@@ -3610,14 +3042,14 @@
               </a:rPr>
               <a:t>✓</a:t>
             </a:r>
-            <a:endParaRPr lang="en-US" sz="1000" dirty="0"/>
+            <a:endParaRPr lang="es-ES_tradnl" sz="1000" noProof="1"/>
           </a:p>
           <a:p>
             <a:pPr marL="0" indent="0" algn="ctr">
               <a:buNone/>
             </a:pPr>
             <a:r>
-              <a:rPr lang="en-US" sz="1000" i="1" dirty="0">
+              <a:rPr lang="es-ES_tradnl" sz="1000" i="1" noProof="1">
                 <a:solidFill>
                   <a:srgbClr val="2C1A0E"/>
                 </a:solidFill>
@@ -3627,7 +3059,7 @@
               </a:rPr>
               <a:t>Pop.: 2,44 premios vs 0,47</a:t>
             </a:r>
-            <a:endParaRPr lang="en-US" sz="1000" dirty="0"/>
+            <a:endParaRPr lang="es-ES_tradnl" sz="1000" noProof="1"/>
           </a:p>
         </p:txBody>
       </p:sp>
@@ -3656,17 +3088,21 @@
               <a:buNone/>
             </a:pPr>
             <a:r>
-              <a:rPr lang="en-US" sz="1200" i="1" dirty="0">
-                <a:solidFill>
-                  <a:srgbClr val="7A5C3A"/>
+              <a:rPr lang="es-ES_tradnl" sz="1200" i="1" noProof="1">
+                <a:solidFill>
+                  <a:schemeClr val="accent2"/>
                 </a:solidFill>
                 <a:latin typeface="Calibri" pitchFamily="34" charset="0"/>
                 <a:ea typeface="Calibri" pitchFamily="34" charset="-122"/>
                 <a:cs typeface="Calibri" pitchFamily="34" charset="-120"/>
               </a:rPr>
-              <a:t>Próximos pasos: análisis de géneros · correlación bbeScore · modelo predictivo de rating</a:t>
-            </a:r>
-            <a:endParaRPr lang="en-US" sz="1200" dirty="0"/>
+              <a:t>Próximos pasos: Análisis de géneros · Correlación bbeScore · Modelo predictivo de rating</a:t>
+            </a:r>
+            <a:endParaRPr lang="es-ES_tradnl" sz="1200" noProof="1">
+              <a:solidFill>
+                <a:schemeClr val="accent2"/>
+              </a:solidFill>
+            </a:endParaRPr>
           </a:p>
         </p:txBody>
       </p:sp>
@@ -3678,7 +3114,7 @@
 </p:sld>
 </file>
 
-<file path=ppt/slides/slide12.xml><?xml version="1.0" encoding="utf-8"?>
+<file path=ppt/slides/slide11.xml><?xml version="1.0" encoding="utf-8"?>
 <p:sld xmlns:a="http://schemas.openxmlformats.org/drawingml/2006/main" xmlns:r="http://schemas.openxmlformats.org/officeDocument/2006/relationships" xmlns:p="http://schemas.openxmlformats.org/presentationml/2006/main">
   <p:cSld name="Slide 12">
     <p:bg>
@@ -3731,7 +3167,7 @@
           <a:bodyPr/>
           <a:lstStyle/>
           <a:p>
-            <a:endParaRPr lang="es-ES"/>
+            <a:endParaRPr lang="es-ES_tradnl" noProof="1"/>
           </a:p>
         </p:txBody>
       </p:sp>
@@ -3760,7 +3196,7 @@
               <a:buNone/>
             </a:pPr>
             <a:r>
-              <a:rPr lang="en-US" sz="6400" b="1" dirty="0">
+              <a:rPr lang="es-ES_tradnl" sz="6400" b="1" noProof="1">
                 <a:solidFill>
                   <a:srgbClr val="FDF6EC"/>
                 </a:solidFill>
@@ -3770,7 +3206,7 @@
               </a:rPr>
               <a:t>Gracias</a:t>
             </a:r>
-            <a:endParaRPr lang="en-US" sz="6400" dirty="0"/>
+            <a:endParaRPr lang="es-ES_tradnl" sz="6400" noProof="1"/>
           </a:p>
         </p:txBody>
       </p:sp>
@@ -3802,7 +3238,7 @@
           <a:bodyPr/>
           <a:lstStyle/>
           <a:p>
-            <a:endParaRPr lang="es-ES"/>
+            <a:endParaRPr lang="es-ES_tradnl" noProof="1"/>
           </a:p>
         </p:txBody>
       </p:sp>
@@ -3831,7 +3267,7 @@
               <a:buNone/>
             </a:pPr>
             <a:r>
-              <a:rPr lang="en-US" sz="1300" dirty="0">
+              <a:rPr lang="es-ES_tradnl" sz="1300" noProof="1">
                 <a:solidFill>
                   <a:srgbClr val="7A5C3A"/>
                 </a:solidFill>
@@ -3841,14 +3277,14 @@
               </a:rPr>
               <a:t>Dataset: Goodreads Best Books Ever  ·  Kaggle</a:t>
             </a:r>
-            <a:endParaRPr lang="en-US" sz="1300" dirty="0"/>
+            <a:endParaRPr lang="es-ES_tradnl" sz="1300" noProof="1"/>
           </a:p>
           <a:p>
             <a:pPr marL="0" indent="0" algn="l">
               <a:buNone/>
             </a:pPr>
             <a:r>
-              <a:rPr lang="en-US" sz="1300" dirty="0">
+              <a:rPr lang="es-ES_tradnl" sz="1300" noProof="1">
                 <a:solidFill>
                   <a:srgbClr val="7A5C3A"/>
                 </a:solidFill>
@@ -3858,7 +3294,7 @@
               </a:rPr>
               <a:t>Herramientas: Python · pandas · matplotlib · seaborn</a:t>
             </a:r>
-            <a:endParaRPr lang="en-US" sz="1300" dirty="0"/>
+            <a:endParaRPr lang="es-ES_tradnl" sz="1300" noProof="1"/>
           </a:p>
         </p:txBody>
       </p:sp>
@@ -3887,7 +3323,7 @@
               <a:buNone/>
             </a:pPr>
             <a:r>
-              <a:rPr lang="en-US" sz="2400" i="1" dirty="0">
+              <a:rPr lang="es-ES_tradnl" sz="2400" i="1" noProof="1">
                 <a:solidFill>
                   <a:srgbClr val="C8860A"/>
                 </a:solidFill>
@@ -3897,7 +3333,7 @@
               </a:rPr>
               <a:t>¿Preguntas?</a:t>
             </a:r>
-            <a:endParaRPr lang="en-US" sz="2400" dirty="0"/>
+            <a:endParaRPr lang="es-ES_tradnl" sz="2400" noProof="1"/>
           </a:p>
         </p:txBody>
       </p:sp>
@@ -3915,7 +3351,7 @@
     <p:bg>
       <p:bgPr>
         <a:solidFill>
-          <a:srgbClr val="FDF6EC"/>
+          <a:srgbClr val="FDF7EC"/>
         </a:solidFill>
         <a:effectLst/>
       </p:bgPr>
@@ -3962,7 +3398,7 @@
           <a:bodyPr/>
           <a:lstStyle/>
           <a:p>
-            <a:endParaRPr lang="es-ES"/>
+            <a:endParaRPr lang="es-ES_tradnl" noProof="1"/>
           </a:p>
         </p:txBody>
       </p:sp>
@@ -3994,7 +3430,7 @@
           <a:bodyPr/>
           <a:lstStyle/>
           <a:p>
-            <a:endParaRPr lang="es-ES"/>
+            <a:endParaRPr lang="es-ES_tradnl" noProof="1"/>
           </a:p>
         </p:txBody>
       </p:sp>
@@ -4023,7 +3459,7 @@
               <a:buNone/>
             </a:pPr>
             <a:r>
-              <a:rPr lang="en-US" sz="2200" b="1" dirty="0">
+              <a:rPr lang="es-ES_tradnl" sz="2200" b="1" noProof="1">
                 <a:solidFill>
                   <a:srgbClr val="FDF6EC"/>
                 </a:solidFill>
@@ -4033,7 +3469,7 @@
               </a:rPr>
               <a:t>¿Qué es Goodreads y por qué este dataset?</a:t>
             </a:r>
-            <a:endParaRPr lang="en-US" sz="2200" dirty="0"/>
+            <a:endParaRPr lang="es-ES_tradnl" sz="2200" noProof="1"/>
           </a:p>
         </p:txBody>
       </p:sp>
@@ -4045,7 +3481,7 @@
         </p:nvSpPr>
         <p:spPr>
           <a:xfrm>
-            <a:off x="502920" y="1097280"/>
+            <a:off x="502920" y="1634490"/>
             <a:ext cx="8412480" cy="1005840"/>
           </a:xfrm>
           <a:prstGeom prst="rect">
@@ -4062,7 +3498,7 @@
               <a:buNone/>
             </a:pPr>
             <a:r>
-              <a:rPr lang="en-US" sz="1400" dirty="0">
+              <a:rPr lang="es-ES_tradnl" sz="1400" noProof="1">
                 <a:solidFill>
                   <a:srgbClr val="1A0F00"/>
                 </a:solidFill>
@@ -4072,14 +3508,14 @@
               </a:rPr>
               <a:t>Goodreads es la mayor red social de lectores del mundo, con más de 150 millones de usuarios.</a:t>
             </a:r>
-            <a:endParaRPr lang="en-US" sz="1400" dirty="0"/>
+            <a:endParaRPr lang="es-ES_tradnl" sz="1400" noProof="1"/>
           </a:p>
           <a:p>
             <a:pPr marL="0" indent="0" algn="l">
               <a:buNone/>
             </a:pPr>
             <a:r>
-              <a:rPr lang="en-US" sz="1400" dirty="0">
+              <a:rPr lang="es-ES_tradnl" sz="1400" noProof="1">
                 <a:solidFill>
                   <a:srgbClr val="1A0F00"/>
                 </a:solidFill>
@@ -4087,9 +3523,9 @@
                 <a:ea typeface="Calibri" pitchFamily="34" charset="-122"/>
                 <a:cs typeface="Calibri" pitchFamily="34" charset="-120"/>
               </a:rPr>
-              <a:t>El dataset recoge los 52.478 mejores libros según sus listas, con información sobre ratings, géneros, premios y más.</a:t>
-            </a:r>
-            <a:endParaRPr lang="en-US" sz="1400" dirty="0"/>
+              <a:t>El dataset descargado de Kaggle, recoge 52.478 de sus mejores libros según sus listas, con información sobre ratings, géneros, premios y más.</a:t>
+            </a:r>
+            <a:endParaRPr lang="es-ES_tradnl" sz="1400" noProof="1"/>
           </a:p>
         </p:txBody>
       </p:sp>
@@ -4101,7 +3537,7 @@
         </p:nvSpPr>
         <p:spPr>
           <a:xfrm>
-            <a:off x="502920" y="2286000"/>
+            <a:off x="502920" y="2720340"/>
             <a:ext cx="1920240" cy="1371600"/>
           </a:xfrm>
           <a:prstGeom prst="rect">
@@ -4128,7 +3564,7 @@
           <a:bodyPr/>
           <a:lstStyle/>
           <a:p>
-            <a:endParaRPr lang="es-ES"/>
+            <a:endParaRPr lang="es-ES_tradnl" noProof="1"/>
           </a:p>
         </p:txBody>
       </p:sp>
@@ -4140,7 +3576,7 @@
         </p:nvSpPr>
         <p:spPr>
           <a:xfrm>
-            <a:off x="502920" y="2377440"/>
+            <a:off x="502920" y="2811780"/>
             <a:ext cx="1920240" cy="640080"/>
           </a:xfrm>
           <a:prstGeom prst="rect">
@@ -4157,7 +3593,7 @@
               <a:buNone/>
             </a:pPr>
             <a:r>
-              <a:rPr lang="en-US" sz="2600" b="1" dirty="0">
+              <a:rPr lang="es-ES_tradnl" sz="2600" b="1" noProof="1">
                 <a:solidFill>
                   <a:srgbClr val="8B4513"/>
                 </a:solidFill>
@@ -4167,7 +3603,7 @@
               </a:rPr>
               <a:t>52.478</a:t>
             </a:r>
-            <a:endParaRPr lang="en-US" sz="2600" dirty="0"/>
+            <a:endParaRPr lang="es-ES_tradnl" sz="2600" noProof="1"/>
           </a:p>
         </p:txBody>
       </p:sp>
@@ -4179,7 +3615,7 @@
         </p:nvSpPr>
         <p:spPr>
           <a:xfrm>
-            <a:off x="502920" y="3017520"/>
+            <a:off x="502920" y="3451860"/>
             <a:ext cx="1920240" cy="457200"/>
           </a:xfrm>
           <a:prstGeom prst="rect">
@@ -4196,7 +3632,7 @@
               <a:buNone/>
             </a:pPr>
             <a:r>
-              <a:rPr lang="en-US" sz="1100" dirty="0">
+              <a:rPr lang="es-ES_tradnl" sz="1100" noProof="1">
                 <a:solidFill>
                   <a:srgbClr val="7A5C3A"/>
                 </a:solidFill>
@@ -4206,7 +3642,7 @@
               </a:rPr>
               <a:t>Libros originales</a:t>
             </a:r>
-            <a:endParaRPr lang="en-US" sz="1100" dirty="0"/>
+            <a:endParaRPr lang="es-ES_tradnl" sz="1100" noProof="1"/>
           </a:p>
         </p:txBody>
       </p:sp>
@@ -4218,7 +3654,7 @@
         </p:nvSpPr>
         <p:spPr>
           <a:xfrm>
-            <a:off x="2651760" y="2286000"/>
+            <a:off x="2651760" y="2720340"/>
             <a:ext cx="1920240" cy="1371600"/>
           </a:xfrm>
           <a:prstGeom prst="rect">
@@ -4245,7 +3681,7 @@
           <a:bodyPr/>
           <a:lstStyle/>
           <a:p>
-            <a:endParaRPr lang="es-ES"/>
+            <a:endParaRPr lang="es-ES_tradnl" noProof="1"/>
           </a:p>
         </p:txBody>
       </p:sp>
@@ -4257,7 +3693,7 @@
         </p:nvSpPr>
         <p:spPr>
           <a:xfrm>
-            <a:off x="2651760" y="2377440"/>
+            <a:off x="2651760" y="2811780"/>
             <a:ext cx="1920240" cy="640080"/>
           </a:xfrm>
           <a:prstGeom prst="rect">
@@ -4274,7 +3710,7 @@
               <a:buNone/>
             </a:pPr>
             <a:r>
-              <a:rPr lang="en-US" sz="2600" b="1" dirty="0">
+              <a:rPr lang="es-ES_tradnl" sz="2600" b="1" noProof="1">
                 <a:solidFill>
                   <a:srgbClr val="8B4513"/>
                 </a:solidFill>
@@ -4284,7 +3720,7 @@
               </a:rPr>
               <a:t>~49.000</a:t>
             </a:r>
-            <a:endParaRPr lang="en-US" sz="2600" dirty="0"/>
+            <a:endParaRPr lang="es-ES_tradnl" sz="2600" noProof="1"/>
           </a:p>
         </p:txBody>
       </p:sp>
@@ -4296,7 +3732,7 @@
         </p:nvSpPr>
         <p:spPr>
           <a:xfrm>
-            <a:off x="2651760" y="3017520"/>
+            <a:off x="2651760" y="3451860"/>
             <a:ext cx="1920240" cy="457200"/>
           </a:xfrm>
           <a:prstGeom prst="rect">
@@ -4313,7 +3749,7 @@
               <a:buNone/>
             </a:pPr>
             <a:r>
-              <a:rPr lang="en-US" sz="1100" dirty="0">
+              <a:rPr lang="es-ES_tradnl" sz="1100" noProof="1">
                 <a:solidFill>
                   <a:srgbClr val="7A5C3A"/>
                 </a:solidFill>
@@ -4323,7 +3759,7 @@
               </a:rPr>
               <a:t>Tras limpieza</a:t>
             </a:r>
-            <a:endParaRPr lang="en-US" sz="1100" dirty="0"/>
+            <a:endParaRPr lang="es-ES_tradnl" sz="1100" noProof="1"/>
           </a:p>
         </p:txBody>
       </p:sp>
@@ -4335,7 +3771,7 @@
         </p:nvSpPr>
         <p:spPr>
           <a:xfrm>
-            <a:off x="4800600" y="2286000"/>
+            <a:off x="4800600" y="2720340"/>
             <a:ext cx="1920240" cy="1371600"/>
           </a:xfrm>
           <a:prstGeom prst="rect">
@@ -4362,7 +3798,7 @@
           <a:bodyPr/>
           <a:lstStyle/>
           <a:p>
-            <a:endParaRPr lang="es-ES"/>
+            <a:endParaRPr lang="es-ES_tradnl" noProof="1"/>
           </a:p>
         </p:txBody>
       </p:sp>
@@ -4374,7 +3810,7 @@
         </p:nvSpPr>
         <p:spPr>
           <a:xfrm>
-            <a:off x="4800600" y="2377440"/>
+            <a:off x="4800600" y="2811780"/>
             <a:ext cx="1920240" cy="640080"/>
           </a:xfrm>
           <a:prstGeom prst="rect">
@@ -4391,7 +3827,7 @@
               <a:buNone/>
             </a:pPr>
             <a:r>
-              <a:rPr lang="en-US" sz="2600" b="1" dirty="0">
+              <a:rPr lang="es-ES_tradnl" sz="2600" b="1" noProof="1">
                 <a:solidFill>
                   <a:srgbClr val="8B4513"/>
                 </a:solidFill>
@@ -4401,7 +3837,7 @@
               </a:rPr>
               <a:t>15</a:t>
             </a:r>
-            <a:endParaRPr lang="en-US" sz="2600" dirty="0"/>
+            <a:endParaRPr lang="es-ES_tradnl" sz="2600" noProof="1"/>
           </a:p>
         </p:txBody>
       </p:sp>
@@ -4413,7 +3849,7 @@
         </p:nvSpPr>
         <p:spPr>
           <a:xfrm>
-            <a:off x="4800600" y="3017520"/>
+            <a:off x="4800600" y="3451860"/>
             <a:ext cx="1920240" cy="457200"/>
           </a:xfrm>
           <a:prstGeom prst="rect">
@@ -4430,7 +3866,7 @@
               <a:buNone/>
             </a:pPr>
             <a:r>
-              <a:rPr lang="en-US" sz="1100" dirty="0">
+              <a:rPr lang="es-ES_tradnl" sz="1100" noProof="1">
                 <a:solidFill>
                   <a:srgbClr val="7A5C3A"/>
                 </a:solidFill>
@@ -4440,7 +3876,7 @@
               </a:rPr>
               <a:t>Variables clave</a:t>
             </a:r>
-            <a:endParaRPr lang="en-US" sz="1100" dirty="0"/>
+            <a:endParaRPr lang="es-ES_tradnl" sz="1100" noProof="1"/>
           </a:p>
         </p:txBody>
       </p:sp>
@@ -4452,7 +3888,7 @@
         </p:nvSpPr>
         <p:spPr>
           <a:xfrm>
-            <a:off x="6949440" y="2286000"/>
+            <a:off x="6949440" y="2720340"/>
             <a:ext cx="1920240" cy="1371600"/>
           </a:xfrm>
           <a:prstGeom prst="rect">
@@ -4479,7 +3915,7 @@
           <a:bodyPr/>
           <a:lstStyle/>
           <a:p>
-            <a:endParaRPr lang="es-ES"/>
+            <a:endParaRPr lang="es-ES_tradnl" noProof="1"/>
           </a:p>
         </p:txBody>
       </p:sp>
@@ -4491,7 +3927,7 @@
         </p:nvSpPr>
         <p:spPr>
           <a:xfrm>
-            <a:off x="6949440" y="2377440"/>
+            <a:off x="6949440" y="2811780"/>
             <a:ext cx="1920240" cy="640080"/>
           </a:xfrm>
           <a:prstGeom prst="rect">
@@ -4508,7 +3944,7 @@
               <a:buNone/>
             </a:pPr>
             <a:r>
-              <a:rPr lang="en-US" sz="2600" b="1" dirty="0">
+              <a:rPr lang="es-ES_tradnl" sz="2600" b="1" noProof="1">
                 <a:solidFill>
                   <a:srgbClr val="8B4513"/>
                 </a:solidFill>
@@ -4518,7 +3954,7 @@
               </a:rPr>
               <a:t>5</a:t>
             </a:r>
-            <a:endParaRPr lang="en-US" sz="2600" dirty="0"/>
+            <a:endParaRPr lang="es-ES_tradnl" sz="2600" noProof="1"/>
           </a:p>
         </p:txBody>
       </p:sp>
@@ -4530,7 +3966,7 @@
         </p:nvSpPr>
         <p:spPr>
           <a:xfrm>
-            <a:off x="6949440" y="3017520"/>
+            <a:off x="6949440" y="3451860"/>
             <a:ext cx="1920240" cy="457200"/>
           </a:xfrm>
           <a:prstGeom prst="rect">
@@ -4547,7 +3983,7 @@
               <a:buNone/>
             </a:pPr>
             <a:r>
-              <a:rPr lang="en-US" sz="1100" dirty="0">
+              <a:rPr lang="es-ES_tradnl" sz="1100" noProof="1">
                 <a:solidFill>
                   <a:srgbClr val="7A5C3A"/>
                 </a:solidFill>
@@ -4557,7 +3993,7 @@
               </a:rPr>
               <a:t>Hipótesis planteadas</a:t>
             </a:r>
-            <a:endParaRPr lang="en-US" sz="1100" dirty="0"/>
+            <a:endParaRPr lang="es-ES_tradnl" sz="1100" noProof="1"/>
           </a:p>
         </p:txBody>
       </p:sp>
@@ -4569,7 +4005,7 @@
         </p:nvSpPr>
         <p:spPr>
           <a:xfrm>
-            <a:off x="502920" y="3931920"/>
+            <a:off x="502920" y="4366260"/>
             <a:ext cx="8412480" cy="640080"/>
           </a:xfrm>
           <a:prstGeom prst="rect">
@@ -4586,7 +4022,7 @@
               <a:buNone/>
             </a:pPr>
             <a:r>
-              <a:rPr lang="en-US" sz="1100" i="1" dirty="0">
+              <a:rPr lang="es-ES_tradnl" sz="1100" i="1" noProof="1">
                 <a:solidFill>
                   <a:srgbClr val="7A5C3A"/>
                 </a:solidFill>
@@ -4596,10 +4032,72 @@
               </a:rPr>
               <a:t>Variables principales: title · author · rating · numRatings · genres · pages · bookFormat · awards · language · likedPercent · bbeScore</a:t>
             </a:r>
-            <a:endParaRPr lang="en-US" sz="1100" dirty="0"/>
-          </a:p>
-        </p:txBody>
-      </p:sp>
+            <a:endParaRPr lang="es-ES_tradnl" sz="1100" noProof="1"/>
+          </a:p>
+        </p:txBody>
+      </p:sp>
+      <p:pic>
+        <p:nvPicPr>
+          <p:cNvPr id="20" name="Imagen 19">
+            <a:extLst>
+              <a:ext uri="{FF2B5EF4-FFF2-40B4-BE49-F238E27FC236}">
+                <a16:creationId xmlns:a16="http://schemas.microsoft.com/office/drawing/2014/main" id="{05352762-32D7-2476-999E-219F579C4235}"/>
+              </a:ext>
+            </a:extLst>
+          </p:cNvPr>
+          <p:cNvPicPr>
+            <a:picLocks noChangeAspect="1"/>
+          </p:cNvPicPr>
+          <p:nvPr/>
+        </p:nvPicPr>
+        <p:blipFill>
+          <a:blip r:embed="rId3">
+            <a:alphaModFix/>
+          </a:blip>
+          <a:srcRect/>
+          <a:stretch/>
+        </p:blipFill>
+        <p:spPr>
+          <a:xfrm>
+            <a:off x="586322" y="1039003"/>
+            <a:ext cx="2415539" cy="601201"/>
+          </a:xfrm>
+          <a:prstGeom prst="rect">
+            <a:avLst/>
+          </a:prstGeom>
+          <a:noFill/>
+          <a:effectLst/>
+        </p:spPr>
+      </p:pic>
+      <p:pic>
+        <p:nvPicPr>
+          <p:cNvPr id="22" name="Imagen 21">
+            <a:extLst>
+              <a:ext uri="{FF2B5EF4-FFF2-40B4-BE49-F238E27FC236}">
+                <a16:creationId xmlns:a16="http://schemas.microsoft.com/office/drawing/2014/main" id="{7BCE76F0-21FF-264F-2088-21C2D259BF0A}"/>
+              </a:ext>
+            </a:extLst>
+          </p:cNvPr>
+          <p:cNvPicPr>
+            <a:picLocks noChangeAspect="1"/>
+          </p:cNvPicPr>
+          <p:nvPr/>
+        </p:nvPicPr>
+        <p:blipFill>
+          <a:blip r:embed="rId4"/>
+          <a:srcRect t="17705" b="17705"/>
+          <a:stretch/>
+        </p:blipFill>
+        <p:spPr>
+          <a:xfrm>
+            <a:off x="7094220" y="1003266"/>
+            <a:ext cx="1821180" cy="782776"/>
+          </a:xfrm>
+          <a:prstGeom prst="rect">
+            <a:avLst/>
+          </a:prstGeom>
+        </p:spPr>
+      </p:pic>
     </p:spTree>
   </p:cSld>
   <p:clrMapOvr>
@@ -4661,7 +4159,7 @@
           <a:bodyPr/>
           <a:lstStyle/>
           <a:p>
-            <a:endParaRPr lang="es-ES"/>
+            <a:endParaRPr lang="es-ES_tradnl" noProof="1"/>
           </a:p>
         </p:txBody>
       </p:sp>
@@ -4693,7 +4191,7 @@
           <a:bodyPr/>
           <a:lstStyle/>
           <a:p>
-            <a:endParaRPr lang="es-ES"/>
+            <a:endParaRPr lang="es-ES_tradnl" noProof="1"/>
           </a:p>
         </p:txBody>
       </p:sp>
@@ -4722,7 +4220,7 @@
               <a:buNone/>
             </a:pPr>
             <a:r>
-              <a:rPr lang="en-US" sz="2200" b="1" dirty="0">
+              <a:rPr lang="es-ES_tradnl" sz="2200" b="1" noProof="1">
                 <a:solidFill>
                   <a:srgbClr val="FDF6EC"/>
                 </a:solidFill>
@@ -4732,7 +4230,7 @@
               </a:rPr>
               <a:t>Hipótesis planteadas</a:t>
             </a:r>
-            <a:endParaRPr lang="en-US" sz="2200" dirty="0"/>
+            <a:endParaRPr lang="es-ES_tradnl" sz="2200" noProof="1"/>
           </a:p>
         </p:txBody>
       </p:sp>
@@ -4771,7 +4269,7 @@
           <a:bodyPr/>
           <a:lstStyle/>
           <a:p>
-            <a:endParaRPr lang="es-ES"/>
+            <a:endParaRPr lang="es-ES_tradnl" noProof="1"/>
           </a:p>
         </p:txBody>
       </p:sp>
@@ -4803,7 +4301,7 @@
           <a:bodyPr/>
           <a:lstStyle/>
           <a:p>
-            <a:endParaRPr lang="es-ES"/>
+            <a:endParaRPr lang="es-ES_tradnl" noProof="1"/>
           </a:p>
         </p:txBody>
       </p:sp>
@@ -4832,7 +4330,7 @@
               <a:buNone/>
             </a:pPr>
             <a:r>
-              <a:rPr lang="en-US" sz="1400" b="1" dirty="0">
+              <a:rPr lang="es-ES_tradnl" sz="1400" b="1" noProof="1">
                 <a:solidFill>
                   <a:srgbClr val="FDF6EC"/>
                 </a:solidFill>
@@ -4842,7 +4340,7 @@
               </a:rPr>
               <a:t>H1</a:t>
             </a:r>
-            <a:endParaRPr lang="en-US" sz="1400" dirty="0"/>
+            <a:endParaRPr lang="es-ES_tradnl" sz="1400" noProof="1"/>
           </a:p>
         </p:txBody>
       </p:sp>
@@ -4871,7 +4369,7 @@
               <a:buNone/>
             </a:pPr>
             <a:r>
-              <a:rPr lang="en-US" sz="1100" dirty="0">
+              <a:rPr lang="es-ES_tradnl" sz="1100" noProof="1">
                 <a:solidFill>
                   <a:srgbClr val="1A0F00"/>
                 </a:solidFill>
@@ -4881,7 +4379,7 @@
               </a:rPr>
               <a:t>Los libros con más páginas tienen mejor rating</a:t>
             </a:r>
-            <a:endParaRPr lang="en-US" sz="1100" dirty="0"/>
+            <a:endParaRPr lang="es-ES_tradnl" sz="1100" noProof="1"/>
           </a:p>
         </p:txBody>
       </p:sp>
@@ -4920,7 +4418,7 @@
           <a:bodyPr/>
           <a:lstStyle/>
           <a:p>
-            <a:endParaRPr lang="es-ES"/>
+            <a:endParaRPr lang="es-ES_tradnl" noProof="1"/>
           </a:p>
         </p:txBody>
       </p:sp>
@@ -4952,7 +4450,7 @@
           <a:bodyPr/>
           <a:lstStyle/>
           <a:p>
-            <a:endParaRPr lang="es-ES"/>
+            <a:endParaRPr lang="es-ES_tradnl" noProof="1"/>
           </a:p>
         </p:txBody>
       </p:sp>
@@ -4981,7 +4479,7 @@
               <a:buNone/>
             </a:pPr>
             <a:r>
-              <a:rPr lang="en-US" sz="1400" b="1" dirty="0">
+              <a:rPr lang="es-ES_tradnl" sz="1400" b="1" noProof="1">
                 <a:solidFill>
                   <a:srgbClr val="FDF6EC"/>
                 </a:solidFill>
@@ -4991,7 +4489,7 @@
               </a:rPr>
               <a:t>H2</a:t>
             </a:r>
-            <a:endParaRPr lang="en-US" sz="1400" dirty="0"/>
+            <a:endParaRPr lang="es-ES_tradnl" sz="1400" noProof="1"/>
           </a:p>
         </p:txBody>
       </p:sp>
@@ -5020,7 +4518,7 @@
               <a:buNone/>
             </a:pPr>
             <a:r>
-              <a:rPr lang="en-US" sz="1100" dirty="0">
+              <a:rPr lang="es-ES_tradnl" sz="1100" noProof="1">
                 <a:solidFill>
                   <a:srgbClr val="1A0F00"/>
                 </a:solidFill>
@@ -5030,7 +4528,7 @@
               </a:rPr>
               <a:t>Los libros en formato Hardcover tienen mejor rating</a:t>
             </a:r>
-            <a:endParaRPr lang="en-US" sz="1100" dirty="0"/>
+            <a:endParaRPr lang="es-ES_tradnl" sz="1100" noProof="1"/>
           </a:p>
         </p:txBody>
       </p:sp>
@@ -5069,7 +4567,7 @@
           <a:bodyPr/>
           <a:lstStyle/>
           <a:p>
-            <a:endParaRPr lang="es-ES"/>
+            <a:endParaRPr lang="es-ES_tradnl" noProof="1"/>
           </a:p>
         </p:txBody>
       </p:sp>
@@ -5101,7 +4599,7 @@
           <a:bodyPr/>
           <a:lstStyle/>
           <a:p>
-            <a:endParaRPr lang="es-ES"/>
+            <a:endParaRPr lang="es-ES_tradnl" noProof="1"/>
           </a:p>
         </p:txBody>
       </p:sp>
@@ -5130,7 +4628,7 @@
               <a:buNone/>
             </a:pPr>
             <a:r>
-              <a:rPr lang="en-US" sz="1400" b="1" dirty="0">
+              <a:rPr lang="es-ES_tradnl" sz="1400" b="1" noProof="1">
                 <a:solidFill>
                   <a:srgbClr val="FDF6EC"/>
                 </a:solidFill>
@@ -5140,7 +4638,7 @@
               </a:rPr>
               <a:t>H3</a:t>
             </a:r>
-            <a:endParaRPr lang="en-US" sz="1400" dirty="0"/>
+            <a:endParaRPr lang="es-ES_tradnl" sz="1400" noProof="1"/>
           </a:p>
         </p:txBody>
       </p:sp>
@@ -5169,7 +4667,7 @@
               <a:buNone/>
             </a:pPr>
             <a:r>
-              <a:rPr lang="en-US" sz="1100" dirty="0">
+              <a:rPr lang="es-ES_tradnl" sz="1100" noProof="1">
                 <a:solidFill>
                   <a:srgbClr val="1A0F00"/>
                 </a:solidFill>
@@ -5179,7 +4677,7 @@
               </a:rPr>
               <a:t>Las series tienen mejores ratings que los libros individuales</a:t>
             </a:r>
-            <a:endParaRPr lang="en-US" sz="1100" dirty="0"/>
+            <a:endParaRPr lang="es-ES_tradnl" sz="1100" noProof="1"/>
           </a:p>
         </p:txBody>
       </p:sp>
@@ -5218,7 +4716,7 @@
           <a:bodyPr/>
           <a:lstStyle/>
           <a:p>
-            <a:endParaRPr lang="es-ES"/>
+            <a:endParaRPr lang="es-ES_tradnl" noProof="1"/>
           </a:p>
         </p:txBody>
       </p:sp>
@@ -5250,7 +4748,7 @@
           <a:bodyPr/>
           <a:lstStyle/>
           <a:p>
-            <a:endParaRPr lang="es-ES"/>
+            <a:endParaRPr lang="es-ES_tradnl" noProof="1"/>
           </a:p>
         </p:txBody>
       </p:sp>
@@ -5279,7 +4777,7 @@
               <a:buNone/>
             </a:pPr>
             <a:r>
-              <a:rPr lang="en-US" sz="1400" b="1" dirty="0">
+              <a:rPr lang="es-ES_tradnl" sz="1400" b="1" noProof="1">
                 <a:solidFill>
                   <a:srgbClr val="FDF6EC"/>
                 </a:solidFill>
@@ -5289,7 +4787,7 @@
               </a:rPr>
               <a:t>H4</a:t>
             </a:r>
-            <a:endParaRPr lang="en-US" sz="1400" dirty="0"/>
+            <a:endParaRPr lang="es-ES_tradnl" sz="1400" noProof="1"/>
           </a:p>
         </p:txBody>
       </p:sp>
@@ -5318,7 +4816,7 @@
               <a:buNone/>
             </a:pPr>
             <a:r>
-              <a:rPr lang="en-US" sz="1100" dirty="0">
+              <a:rPr lang="es-ES_tradnl" sz="1100" noProof="1">
                 <a:solidFill>
                   <a:srgbClr val="1A0F00"/>
                 </a:solidFill>
@@ -5328,7 +4826,7 @@
               </a:rPr>
               <a:t>Los autores populares concentran la mayoría de las valoraciones</a:t>
             </a:r>
-            <a:endParaRPr lang="en-US" sz="1100" dirty="0"/>
+            <a:endParaRPr lang="es-ES_tradnl" sz="1100" noProof="1"/>
           </a:p>
         </p:txBody>
       </p:sp>
@@ -5367,7 +4865,7 @@
           <a:bodyPr/>
           <a:lstStyle/>
           <a:p>
-            <a:endParaRPr lang="es-ES"/>
+            <a:endParaRPr lang="es-ES_tradnl" noProof="1"/>
           </a:p>
         </p:txBody>
       </p:sp>
@@ -5399,7 +4897,7 @@
           <a:bodyPr/>
           <a:lstStyle/>
           <a:p>
-            <a:endParaRPr lang="es-ES"/>
+            <a:endParaRPr lang="es-ES_tradnl" noProof="1"/>
           </a:p>
         </p:txBody>
       </p:sp>
@@ -5428,7 +4926,7 @@
               <a:buNone/>
             </a:pPr>
             <a:r>
-              <a:rPr lang="en-US" sz="1400" b="1" dirty="0">
+              <a:rPr lang="es-ES_tradnl" sz="1400" b="1" noProof="1">
                 <a:solidFill>
                   <a:srgbClr val="FDF6EC"/>
                 </a:solidFill>
@@ -5438,7 +4936,7 @@
               </a:rPr>
               <a:t>H5</a:t>
             </a:r>
-            <a:endParaRPr lang="en-US" sz="1400" dirty="0"/>
+            <a:endParaRPr lang="es-ES_tradnl" sz="1400" noProof="1"/>
           </a:p>
         </p:txBody>
       </p:sp>
@@ -5467,7 +4965,7 @@
               <a:buNone/>
             </a:pPr>
             <a:r>
-              <a:rPr lang="en-US" sz="1100" dirty="0">
+              <a:rPr lang="es-ES_tradnl" sz="1100" noProof="1">
                 <a:solidFill>
                   <a:srgbClr val="1A0F00"/>
                 </a:solidFill>
@@ -5477,7 +4975,7 @@
               </a:rPr>
               <a:t>Los autores populares tienen más premios</a:t>
             </a:r>
-            <a:endParaRPr lang="en-US" sz="1100" dirty="0"/>
+            <a:endParaRPr lang="es-ES_tradnl" sz="1100" noProof="1"/>
           </a:p>
         </p:txBody>
       </p:sp>
@@ -5542,7 +5040,7 @@
           <a:bodyPr/>
           <a:lstStyle/>
           <a:p>
-            <a:endParaRPr lang="es-ES"/>
+            <a:endParaRPr lang="es-ES_tradnl" noProof="1"/>
           </a:p>
         </p:txBody>
       </p:sp>
@@ -5574,7 +5072,7 @@
           <a:bodyPr/>
           <a:lstStyle/>
           <a:p>
-            <a:endParaRPr lang="es-ES"/>
+            <a:endParaRPr lang="es-ES_tradnl" noProof="1"/>
           </a:p>
         </p:txBody>
       </p:sp>
@@ -5603,7 +5101,7 @@
               <a:buNone/>
             </a:pPr>
             <a:r>
-              <a:rPr lang="en-US" sz="2200" b="1" dirty="0">
+              <a:rPr lang="es-ES_tradnl" sz="2200" b="1" noProof="1">
                 <a:solidFill>
                   <a:srgbClr val="FDF6EC"/>
                 </a:solidFill>
@@ -5613,7 +5111,7 @@
               </a:rPr>
               <a:t>Proceso de limpieza de datos</a:t>
             </a:r>
-            <a:endParaRPr lang="en-US" sz="2200" dirty="0"/>
+            <a:endParaRPr lang="es-ES_tradnl" sz="2200" noProof="1"/>
           </a:p>
         </p:txBody>
       </p:sp>
@@ -5645,7 +5143,7 @@
           <a:bodyPr/>
           <a:lstStyle/>
           <a:p>
-            <a:endParaRPr lang="es-ES"/>
+            <a:endParaRPr lang="es-ES_tradnl" noProof="1"/>
           </a:p>
         </p:txBody>
       </p:sp>
@@ -5674,7 +5172,7 @@
               <a:buNone/>
             </a:pPr>
             <a:r>
-              <a:rPr lang="en-US" sz="1300" b="1" dirty="0">
+              <a:rPr lang="es-ES_tradnl" sz="1300" b="1" noProof="1">
                 <a:solidFill>
                   <a:srgbClr val="FDF6EC"/>
                 </a:solidFill>
@@ -5682,9 +5180,9 @@
                 <a:ea typeface="Georgia" pitchFamily="34" charset="-122"/>
                 <a:cs typeface="Georgia" pitchFamily="34" charset="-120"/>
               </a:rPr>
-              <a:t>❌  Columnas eliminadas</a:t>
-            </a:r>
-            <a:endParaRPr lang="en-US" sz="1300" dirty="0"/>
+              <a:t>Columnas eliminadas</a:t>
+            </a:r>
+            <a:endParaRPr lang="es-ES_tradnl" sz="1300" noProof="1"/>
           </a:p>
         </p:txBody>
       </p:sp>
@@ -5713,7 +5211,7 @@
               <a:buNone/>
             </a:pPr>
             <a:r>
-              <a:rPr lang="en-US" sz="1200" dirty="0">
+              <a:rPr lang="es-ES_tradnl" sz="1200" noProof="1">
                 <a:solidFill>
                   <a:srgbClr val="1A0F00"/>
                 </a:solidFill>
@@ -5723,7 +5221,7 @@
               </a:rPr>
               <a:t>•  isbn, bookId, coverImg</a:t>
             </a:r>
-            <a:endParaRPr lang="en-US" sz="1200" dirty="0"/>
+            <a:endParaRPr lang="es-ES_tradnl" sz="1200" noProof="1"/>
           </a:p>
         </p:txBody>
       </p:sp>
@@ -5752,7 +5250,7 @@
               <a:buNone/>
             </a:pPr>
             <a:r>
-              <a:rPr lang="en-US" sz="1200" dirty="0">
+              <a:rPr lang="es-ES_tradnl" sz="1200" noProof="1">
                 <a:solidFill>
                   <a:srgbClr val="1A0F00"/>
                 </a:solidFill>
@@ -5762,7 +5260,7 @@
               </a:rPr>
               <a:t>•  series (reemplazada por is_series)</a:t>
             </a:r>
-            <a:endParaRPr lang="en-US" sz="1200" dirty="0"/>
+            <a:endParaRPr lang="es-ES_tradnl" sz="1200" noProof="1"/>
           </a:p>
         </p:txBody>
       </p:sp>
@@ -5791,7 +5289,7 @@
               <a:buNone/>
             </a:pPr>
             <a:r>
-              <a:rPr lang="en-US" sz="1200" dirty="0">
+              <a:rPr lang="es-ES_tradnl" sz="1200" noProof="1">
                 <a:solidFill>
                   <a:srgbClr val="1A0F00"/>
                 </a:solidFill>
@@ -5801,7 +5299,7 @@
               </a:rPr>
               <a:t>•  description, characters</a:t>
             </a:r>
-            <a:endParaRPr lang="en-US" sz="1200" dirty="0"/>
+            <a:endParaRPr lang="es-ES_tradnl" sz="1200" noProof="1"/>
           </a:p>
         </p:txBody>
       </p:sp>
@@ -5830,7 +5328,7 @@
               <a:buNone/>
             </a:pPr>
             <a:r>
-              <a:rPr lang="en-US" sz="1200" dirty="0">
+              <a:rPr lang="es-ES_tradnl" sz="1200" noProof="1">
                 <a:solidFill>
                   <a:srgbClr val="1A0F00"/>
                 </a:solidFill>
@@ -5840,7 +5338,7 @@
               </a:rPr>
               <a:t>•  edition, firstPublishDate, price</a:t>
             </a:r>
-            <a:endParaRPr lang="en-US" sz="1200" dirty="0"/>
+            <a:endParaRPr lang="es-ES_tradnl" sz="1200" noProof="1"/>
           </a:p>
         </p:txBody>
       </p:sp>
@@ -5869,7 +5367,7 @@
               <a:buNone/>
             </a:pPr>
             <a:r>
-              <a:rPr lang="en-US" sz="1200" dirty="0">
+              <a:rPr lang="es-ES_tradnl" sz="1200" noProof="1">
                 <a:solidFill>
                   <a:srgbClr val="1A0F00"/>
                 </a:solidFill>
@@ -5879,7 +5377,7 @@
               </a:rPr>
               <a:t>•  Filas con rating = 0 o nulos en géneros</a:t>
             </a:r>
-            <a:endParaRPr lang="en-US" sz="1200" dirty="0"/>
+            <a:endParaRPr lang="es-ES_tradnl" sz="1200" noProof="1"/>
           </a:p>
         </p:txBody>
       </p:sp>
@@ -5911,7 +5409,7 @@
           <a:bodyPr/>
           <a:lstStyle/>
           <a:p>
-            <a:endParaRPr lang="es-ES"/>
+            <a:endParaRPr lang="es-ES_tradnl" noProof="1"/>
           </a:p>
         </p:txBody>
       </p:sp>
@@ -5940,7 +5438,7 @@
               <a:buNone/>
             </a:pPr>
             <a:r>
-              <a:rPr lang="en-US" sz="1300" b="1" dirty="0">
+              <a:rPr lang="es-ES_tradnl" sz="1300" b="1" noProof="1">
                 <a:solidFill>
                   <a:srgbClr val="FDF6EC"/>
                 </a:solidFill>
@@ -5948,9 +5446,9 @@
                 <a:ea typeface="Georgia" pitchFamily="34" charset="-122"/>
                 <a:cs typeface="Georgia" pitchFamily="34" charset="-120"/>
               </a:rPr>
-              <a:t>✅  Transformaciones aplicadas</a:t>
-            </a:r>
-            <a:endParaRPr lang="en-US" sz="1300" dirty="0"/>
+              <a:t>Transformaciones aplicadas</a:t>
+            </a:r>
+            <a:endParaRPr lang="es-ES_tradnl" sz="1300" noProof="1"/>
           </a:p>
         </p:txBody>
       </p:sp>
@@ -5979,7 +5477,7 @@
               <a:buNone/>
             </a:pPr>
             <a:r>
-              <a:rPr lang="en-US" sz="1200" dirty="0">
+              <a:rPr lang="es-ES_tradnl" sz="1200" noProof="1">
                 <a:solidFill>
                   <a:srgbClr val="1A0F00"/>
                 </a:solidFill>
@@ -5989,7 +5487,7 @@
               </a:rPr>
               <a:t>•  Filtrado por bookFormat (5 formatos válidos)</a:t>
             </a:r>
-            <a:endParaRPr lang="en-US" sz="1200" dirty="0"/>
+            <a:endParaRPr lang="es-ES_tradnl" sz="1200" noProof="1"/>
           </a:p>
         </p:txBody>
       </p:sp>
@@ -6018,7 +5516,7 @@
               <a:buNone/>
             </a:pPr>
             <a:r>
-              <a:rPr lang="en-US" sz="1200" dirty="0">
+              <a:rPr lang="es-ES_tradnl" sz="1200" noProof="1">
                 <a:solidFill>
                   <a:srgbClr val="1A0F00"/>
                 </a:solidFill>
@@ -6028,7 +5526,7 @@
               </a:rPr>
               <a:t>•  Eliminación de box sets (#X-Y en series)</a:t>
             </a:r>
-            <a:endParaRPr lang="en-US" sz="1200" dirty="0"/>
+            <a:endParaRPr lang="es-ES_tradnl" sz="1200" noProof="1"/>
           </a:p>
         </p:txBody>
       </p:sp>
@@ -6057,7 +5555,7 @@
               <a:buNone/>
             </a:pPr>
             <a:r>
-              <a:rPr lang="en-US" sz="1200" dirty="0">
+              <a:rPr lang="es-ES_tradnl" sz="1200" noProof="1">
                 <a:solidFill>
                   <a:srgbClr val="1A0F00"/>
                 </a:solidFill>
@@ -6067,7 +5565,7 @@
               </a:rPr>
               <a:t>•  Nueva variable is_series (True/False)</a:t>
             </a:r>
-            <a:endParaRPr lang="en-US" sz="1200" dirty="0"/>
+            <a:endParaRPr lang="es-ES_tradnl" sz="1200" noProof="1"/>
           </a:p>
         </p:txBody>
       </p:sp>
@@ -6096,7 +5594,7 @@
               <a:buNone/>
             </a:pPr>
             <a:r>
-              <a:rPr lang="en-US" sz="1200" dirty="0">
+              <a:rPr lang="es-ES_tradnl" sz="1200" noProof="1">
                 <a:solidFill>
                   <a:srgbClr val="1A0F00"/>
                 </a:solidFill>
@@ -6106,7 +5604,7 @@
               </a:rPr>
               <a:t>•  Limpieza de columna author → main_author</a:t>
             </a:r>
-            <a:endParaRPr lang="en-US" sz="1200" dirty="0"/>
+            <a:endParaRPr lang="es-ES_tradnl" sz="1200" noProof="1"/>
           </a:p>
         </p:txBody>
       </p:sp>
@@ -6118,7 +5616,7 @@
         </p:nvSpPr>
         <p:spPr>
           <a:xfrm>
-            <a:off x="4800600" y="3044952"/>
+            <a:off x="4800600" y="3127549"/>
             <a:ext cx="3749040" cy="347472"/>
           </a:xfrm>
           <a:prstGeom prst="rect">
@@ -6135,7 +5633,7 @@
               <a:buNone/>
             </a:pPr>
             <a:r>
-              <a:rPr lang="en-US" sz="1200" dirty="0">
+              <a:rPr lang="es-ES_tradnl" sz="1200" noProof="1">
                 <a:solidFill>
                   <a:srgbClr val="1A0F00"/>
                 </a:solidFill>
@@ -6150,7 +5648,7 @@
             <a:pPr marL="342900" indent="-342900" algn="l">
               <a:buNone/>
             </a:pPr>
-            <a:endParaRPr lang="en-US" sz="1200" dirty="0"/>
+            <a:endParaRPr lang="es-ES_tradnl" sz="1200" noProof="1"/>
           </a:p>
         </p:txBody>
       </p:sp>
@@ -6182,7 +5680,7 @@
           <a:bodyPr/>
           <a:lstStyle/>
           <a:p>
-            <a:endParaRPr lang="es-ES"/>
+            <a:endParaRPr lang="es-ES_tradnl" noProof="1"/>
           </a:p>
         </p:txBody>
       </p:sp>
@@ -6211,7 +5709,7 @@
               <a:buNone/>
             </a:pPr>
             <a:r>
-              <a:rPr lang="en-US" sz="1400" b="1" dirty="0">
+              <a:rPr lang="es-ES_tradnl" sz="1400" b="1" noProof="1">
                 <a:solidFill>
                   <a:srgbClr val="8B4513"/>
                 </a:solidFill>
@@ -6219,9 +5717,9 @@
                 <a:ea typeface="Georgia" pitchFamily="34" charset="-122"/>
                 <a:cs typeface="Georgia" pitchFamily="34" charset="-120"/>
               </a:rPr>
-              <a:t>Dataset final: ~49.000 libros  ·  15 variables  ·  6.8 MB</a:t>
-            </a:r>
-            <a:endParaRPr lang="en-US" sz="1400" dirty="0"/>
+              <a:t>Dataset final: ~49.000 libros  ·  15 variables</a:t>
+            </a:r>
+            <a:endParaRPr lang="es-ES_tradnl" sz="1400" noProof="1"/>
           </a:p>
         </p:txBody>
       </p:sp>
@@ -6286,7 +5784,7 @@
           <a:bodyPr/>
           <a:lstStyle/>
           <a:p>
-            <a:endParaRPr lang="es-ES"/>
+            <a:endParaRPr lang="es-ES_tradnl" noProof="1"/>
           </a:p>
         </p:txBody>
       </p:sp>
@@ -6318,7 +5816,7 @@
           <a:bodyPr/>
           <a:lstStyle/>
           <a:p>
-            <a:endParaRPr lang="es-ES"/>
+            <a:endParaRPr lang="es-ES_tradnl" noProof="1"/>
           </a:p>
         </p:txBody>
       </p:sp>
@@ -6347,7 +5845,7 @@
               <a:buNone/>
             </a:pPr>
             <a:r>
-              <a:rPr lang="en-US" sz="2200" b="1" dirty="0">
+              <a:rPr lang="es-ES_tradnl" sz="2200" b="1" noProof="1">
                 <a:solidFill>
                   <a:srgbClr val="FDF6EC"/>
                 </a:solidFill>
@@ -6357,7 +5855,7 @@
               </a:rPr>
               <a:t>Distribución de ratings</a:t>
             </a:r>
-            <a:endParaRPr lang="en-US" sz="2200" dirty="0"/>
+            <a:endParaRPr lang="es-ES_tradnl" sz="2200" noProof="1"/>
           </a:p>
         </p:txBody>
       </p:sp>
@@ -6389,7 +5887,7 @@
           <a:bodyPr/>
           <a:lstStyle/>
           <a:p>
-            <a:endParaRPr lang="es-ES"/>
+            <a:endParaRPr lang="es-ES_tradnl" noProof="1"/>
           </a:p>
         </p:txBody>
       </p:sp>
@@ -6445,7 +5943,7 @@
           <a:bodyPr/>
           <a:lstStyle/>
           <a:p>
-            <a:endParaRPr lang="es-ES"/>
+            <a:endParaRPr lang="es-ES_tradnl" noProof="1"/>
           </a:p>
         </p:txBody>
       </p:sp>
@@ -6474,7 +5972,7 @@
               <a:buNone/>
             </a:pPr>
             <a:r>
-              <a:rPr lang="en-US" sz="1300" b="1" dirty="0">
+              <a:rPr lang="es-ES_tradnl" sz="1300" b="1" noProof="1">
                 <a:solidFill>
                   <a:srgbClr val="FDF6EC"/>
                 </a:solidFill>
@@ -6484,7 +5982,7 @@
               </a:rPr>
               <a:t>Hallazgos clave</a:t>
             </a:r>
-            <a:endParaRPr lang="en-US" sz="1300" dirty="0"/>
+            <a:endParaRPr lang="es-ES_tradnl" sz="1300" noProof="1"/>
           </a:p>
         </p:txBody>
       </p:sp>
@@ -6523,7 +6021,7 @@
           <a:bodyPr/>
           <a:lstStyle/>
           <a:p>
-            <a:endParaRPr lang="es-ES"/>
+            <a:endParaRPr lang="es-ES_tradnl" noProof="1"/>
           </a:p>
         </p:txBody>
       </p:sp>
@@ -6552,7 +6050,7 @@
               <a:buNone/>
             </a:pPr>
             <a:r>
-              <a:rPr lang="en-US" sz="1200" dirty="0">
+              <a:rPr lang="es-ES_tradnl" sz="1200" noProof="1">
                 <a:solidFill>
                   <a:srgbClr val="1A0F00"/>
                 </a:solidFill>
@@ -6562,7 +6060,7 @@
               </a:rPr>
               <a:t>Media: ~4.02 ⭐</a:t>
             </a:r>
-            <a:endParaRPr lang="en-US" sz="1200" dirty="0"/>
+            <a:endParaRPr lang="es-ES_tradnl" sz="1200" noProof="1"/>
           </a:p>
         </p:txBody>
       </p:sp>
@@ -6601,7 +6099,7 @@
           <a:bodyPr/>
           <a:lstStyle/>
           <a:p>
-            <a:endParaRPr lang="es-ES"/>
+            <a:endParaRPr lang="es-ES_tradnl" noProof="1"/>
           </a:p>
         </p:txBody>
       </p:sp>
@@ -6630,7 +6128,7 @@
               <a:buNone/>
             </a:pPr>
             <a:r>
-              <a:rPr lang="en-US" sz="1200" dirty="0">
+              <a:rPr lang="es-ES_tradnl" sz="1200" noProof="1">
                 <a:solidFill>
                   <a:srgbClr val="1A0F00"/>
                 </a:solidFill>
@@ -6640,7 +6138,7 @@
               </a:rPr>
               <a:t>La mayoría entre 3.5 - 4.5</a:t>
             </a:r>
-            <a:endParaRPr lang="en-US" sz="1200" dirty="0"/>
+            <a:endParaRPr lang="es-ES_tradnl" sz="1200" noProof="1"/>
           </a:p>
         </p:txBody>
       </p:sp>
@@ -6679,7 +6177,7 @@
           <a:bodyPr/>
           <a:lstStyle/>
           <a:p>
-            <a:endParaRPr lang="es-ES"/>
+            <a:endParaRPr lang="es-ES_tradnl" noProof="1"/>
           </a:p>
         </p:txBody>
       </p:sp>
@@ -6708,7 +6206,7 @@
               <a:buNone/>
             </a:pPr>
             <a:r>
-              <a:rPr lang="en-US" sz="1200" dirty="0">
+              <a:rPr lang="es-ES_tradnl" sz="1200" noProof="1">
                 <a:solidFill>
                   <a:srgbClr val="1A0F00"/>
                 </a:solidFill>
@@ -6718,7 +6216,7 @@
               </a:rPr>
               <a:t>Muy pocos &lt; 3.0</a:t>
             </a:r>
-            <a:endParaRPr lang="en-US" sz="1200" dirty="0"/>
+            <a:endParaRPr lang="es-ES_tradnl" sz="1200" noProof="1"/>
           </a:p>
         </p:txBody>
       </p:sp>
@@ -6757,7 +6255,7 @@
           <a:bodyPr/>
           <a:lstStyle/>
           <a:p>
-            <a:endParaRPr lang="es-ES"/>
+            <a:endParaRPr lang="es-ES_tradnl" noProof="1"/>
           </a:p>
         </p:txBody>
       </p:sp>
@@ -6786,7 +6284,7 @@
               <a:buNone/>
             </a:pPr>
             <a:r>
-              <a:rPr lang="en-US" sz="1200" dirty="0">
+              <a:rPr lang="es-ES_tradnl" sz="1200" noProof="1">
                 <a:solidFill>
                   <a:srgbClr val="1A0F00"/>
                 </a:solidFill>
@@ -6796,7 +6294,7 @@
               </a:rPr>
               <a:t>Distribución sesgada a la derecha</a:t>
             </a:r>
-            <a:endParaRPr lang="en-US" sz="1200" dirty="0"/>
+            <a:endParaRPr lang="es-ES_tradnl" sz="1200" noProof="1"/>
           </a:p>
         </p:txBody>
       </p:sp>
@@ -6861,7 +6359,7 @@
           <a:bodyPr/>
           <a:lstStyle/>
           <a:p>
-            <a:endParaRPr lang="es-ES"/>
+            <a:endParaRPr lang="es-ES_tradnl" noProof="1"/>
           </a:p>
         </p:txBody>
       </p:sp>
@@ -6893,7 +6391,7 @@
           <a:bodyPr/>
           <a:lstStyle/>
           <a:p>
-            <a:endParaRPr lang="es-ES"/>
+            <a:endParaRPr lang="es-ES_tradnl" noProof="1"/>
           </a:p>
         </p:txBody>
       </p:sp>
@@ -6922,7 +6420,7 @@
               <a:buNone/>
             </a:pPr>
             <a:r>
-              <a:rPr lang="en-US" sz="2000" b="1" dirty="0">
+              <a:rPr lang="es-ES_tradnl" sz="2000" b="1" noProof="1">
                 <a:solidFill>
                   <a:srgbClr val="FDF6EC"/>
                 </a:solidFill>
@@ -6932,7 +6430,7 @@
               </a:rPr>
               <a:t>H1 — ¿Los libros con más páginas tienen mejor rating?</a:t>
             </a:r>
-            <a:endParaRPr lang="en-US" sz="2000" dirty="0"/>
+            <a:endParaRPr lang="es-ES_tradnl" sz="2000" noProof="1"/>
           </a:p>
         </p:txBody>
       </p:sp>
@@ -6988,7 +6486,7 @@
           <a:bodyPr/>
           <a:lstStyle/>
           <a:p>
-            <a:endParaRPr lang="es-ES"/>
+            <a:endParaRPr lang="es-ES_tradnl" noProof="1"/>
           </a:p>
         </p:txBody>
       </p:sp>
@@ -7017,7 +6515,7 @@
               <a:buNone/>
             </a:pPr>
             <a:r>
-              <a:rPr lang="en-US" sz="1200" i="1" dirty="0">
+              <a:rPr lang="es-ES_tradnl" sz="1200" i="1" noProof="1">
                 <a:solidFill>
                   <a:srgbClr val="8B4513"/>
                 </a:solidFill>
@@ -7027,7 +6525,7 @@
               </a:rPr>
               <a:t>H1 — PARCIALMENTE CONFIRMADA: Los libros más largos obtienen ligeramente mejor rating (3,97→4,26), aunque la diferencia es mínima. Sí se confirma que acumulan muchas más valoraciones.</a:t>
             </a:r>
-            <a:endParaRPr lang="en-US" sz="1200" dirty="0"/>
+            <a:endParaRPr lang="es-ES_tradnl" sz="1200" noProof="1"/>
           </a:p>
         </p:txBody>
       </p:sp>
@@ -7092,7 +6590,7 @@
           <a:bodyPr/>
           <a:lstStyle/>
           <a:p>
-            <a:endParaRPr lang="es-ES"/>
+            <a:endParaRPr lang="es-ES_tradnl" noProof="1"/>
           </a:p>
         </p:txBody>
       </p:sp>
@@ -7124,7 +6622,7 @@
           <a:bodyPr/>
           <a:lstStyle/>
           <a:p>
-            <a:endParaRPr lang="es-ES"/>
+            <a:endParaRPr lang="es-ES_tradnl" noProof="1"/>
           </a:p>
         </p:txBody>
       </p:sp>
@@ -7153,7 +6651,7 @@
               <a:buNone/>
             </a:pPr>
             <a:r>
-              <a:rPr lang="en-US" sz="2000" b="1" dirty="0">
+              <a:rPr lang="es-ES_tradnl" sz="2000" b="1" noProof="1">
                 <a:solidFill>
                   <a:srgbClr val="FDF6EC"/>
                 </a:solidFill>
@@ -7163,7 +6661,7 @@
               </a:rPr>
               <a:t>H2 — ¿Los libros en formato Hardcover tienen mejor rating?</a:t>
             </a:r>
-            <a:endParaRPr lang="en-US" sz="2000" dirty="0"/>
+            <a:endParaRPr lang="es-ES_tradnl" sz="2000" noProof="1"/>
           </a:p>
         </p:txBody>
       </p:sp>
@@ -7219,7 +6717,7 @@
           <a:bodyPr/>
           <a:lstStyle/>
           <a:p>
-            <a:endParaRPr lang="es-ES"/>
+            <a:endParaRPr lang="es-ES_tradnl" noProof="1"/>
           </a:p>
         </p:txBody>
       </p:sp>
@@ -7248,7 +6746,7 @@
               <a:buNone/>
             </a:pPr>
             <a:r>
-              <a:rPr lang="en-US" sz="1200" i="1" dirty="0">
+              <a:rPr lang="es-ES_tradnl" sz="1200" i="1" noProof="1">
                 <a:solidFill>
                   <a:srgbClr val="8B4513"/>
                 </a:solidFill>
@@ -7258,7 +6756,7 @@
               </a:rPr>
               <a:t>H2 — RECHAZADA: El Hardcover obtiene el rating más bajo (3,99). Los formatos digitales (Kindle 4,12 / ebook 4,07) lideran. El Mass Market Paperback es el más valorado por número de reseñas.</a:t>
             </a:r>
-            <a:endParaRPr lang="en-US" sz="1200" dirty="0"/>
+            <a:endParaRPr lang="es-ES_tradnl" sz="1200" noProof="1"/>
           </a:p>
         </p:txBody>
       </p:sp>
@@ -7323,7 +6821,7 @@
           <a:bodyPr/>
           <a:lstStyle/>
           <a:p>
-            <a:endParaRPr lang="es-ES"/>
+            <a:endParaRPr lang="es-ES_tradnl" noProof="1"/>
           </a:p>
         </p:txBody>
       </p:sp>
@@ -7355,7 +6853,7 @@
           <a:bodyPr/>
           <a:lstStyle/>
           <a:p>
-            <a:endParaRPr lang="es-ES"/>
+            <a:endParaRPr lang="es-ES_tradnl" noProof="1"/>
           </a:p>
         </p:txBody>
       </p:sp>
@@ -7384,7 +6882,7 @@
               <a:buNone/>
             </a:pPr>
             <a:r>
-              <a:rPr lang="en-US" sz="2000" b="1" dirty="0">
+              <a:rPr lang="es-ES_tradnl" sz="2000" b="1" noProof="1">
                 <a:solidFill>
                   <a:srgbClr val="FDF6EC"/>
                 </a:solidFill>
@@ -7394,7 +6892,7 @@
               </a:rPr>
               <a:t>H3 — ¿Las series tienen mejores ratings que los libros individuales?</a:t>
             </a:r>
-            <a:endParaRPr lang="en-US" sz="2000" dirty="0"/>
+            <a:endParaRPr lang="es-ES_tradnl" sz="2000" noProof="1"/>
           </a:p>
         </p:txBody>
       </p:sp>
@@ -7424,7 +6922,7 @@
       </p:pic>
       <p:sp>
         <p:nvSpPr>
-          <p:cNvPr id="7" name="Shape 5"/>
+          <p:cNvPr id="8" name="Text 6"/>
           <p:cNvSpPr/>
           <p:nvPr/>
         </p:nvSpPr>
@@ -7436,38 +6934,6 @@
           <a:prstGeom prst="rect">
             <a:avLst/>
           </a:prstGeom>
-          <a:solidFill>
-            <a:srgbClr val="F5E6CC"/>
-          </a:solidFill>
-          <a:ln w="12700">
-            <a:solidFill>
-              <a:srgbClr val="D4A853"/>
-            </a:solidFill>
-            <a:prstDash val="solid"/>
-          </a:ln>
-        </p:spPr>
-        <p:txBody>
-          <a:bodyPr/>
-          <a:lstStyle/>
-          <a:p>
-            <a:endParaRPr lang="es-ES"/>
-          </a:p>
-        </p:txBody>
-      </p:sp>
-      <p:sp>
-        <p:nvSpPr>
-          <p:cNvPr id="8" name="Text 6"/>
-          <p:cNvSpPr/>
-          <p:nvPr/>
-        </p:nvSpPr>
-        <p:spPr>
-          <a:xfrm>
-            <a:off x="4800600" y="1051560"/>
-            <a:ext cx="3931920" cy="3108960"/>
-          </a:xfrm>
-          <a:prstGeom prst="rect">
-            <a:avLst/>
-          </a:prstGeom>
           <a:noFill/>
           <a:ln/>
         </p:spPr>
@@ -7478,75 +6944,7 @@
             <a:pPr marL="0" indent="0" algn="ctr">
               <a:buNone/>
             </a:pPr>
-            <a:r>
-              <a:rPr lang="en-US" sz="1200" i="1" dirty="0">
-                <a:solidFill>
-                  <a:srgbClr val="7A5C3A"/>
-                </a:solidFill>
-                <a:latin typeface="Calibri" pitchFamily="34" charset="0"/>
-                <a:ea typeface="Calibri" pitchFamily="34" charset="-122"/>
-                <a:cs typeface="Calibri" pitchFamily="34" charset="-120"/>
-              </a:rPr>
-              <a:t>📊  Media de valoraciones por libro</a:t>
-            </a:r>
-            <a:endParaRPr lang="en-US" sz="1200" dirty="0"/>
-          </a:p>
-          <a:p>
-            <a:pPr marL="0" indent="0" algn="ctr">
-              <a:buNone/>
-            </a:pPr>
-            <a:endParaRPr lang="en-US" sz="1200" dirty="0"/>
-          </a:p>
-          <a:p>
-            <a:pPr marL="0" indent="0" algn="ctr">
-              <a:buNone/>
-            </a:pPr>
-            <a:r>
-              <a:rPr lang="en-US" sz="1200" i="1" dirty="0">
-                <a:solidFill>
-                  <a:srgbClr val="7A5C3A"/>
-                </a:solidFill>
-                <a:latin typeface="Calibri" pitchFamily="34" charset="0"/>
-                <a:ea typeface="Calibri" pitchFamily="34" charset="-122"/>
-                <a:cs typeface="Calibri" pitchFamily="34" charset="-120"/>
-              </a:rPr>
-              <a:t>Series:  ~23.500</a:t>
-            </a:r>
-            <a:endParaRPr lang="en-US" sz="1200" dirty="0"/>
-          </a:p>
-          <a:p>
-            <a:pPr marL="0" indent="0" algn="ctr">
-              <a:buNone/>
-            </a:pPr>
-            <a:r>
-              <a:rPr lang="en-US" sz="1200" i="1" dirty="0">
-                <a:solidFill>
-                  <a:srgbClr val="7A5C3A"/>
-                </a:solidFill>
-                <a:latin typeface="Calibri" pitchFamily="34" charset="0"/>
-                <a:ea typeface="Calibri" pitchFamily="34" charset="-122"/>
-                <a:cs typeface="Calibri" pitchFamily="34" charset="-120"/>
-              </a:rPr>
-              <a:t>Standalone:  ~19.500</a:t>
-            </a:r>
-            <a:endParaRPr lang="en-US" sz="1200" dirty="0"/>
-          </a:p>
-          <a:p>
-            <a:pPr marL="0" indent="0" algn="ctr">
-              <a:buNone/>
-            </a:pPr>
-            <a:r>
-              <a:rPr lang="en-US" sz="1200" i="1" dirty="0">
-                <a:solidFill>
-                  <a:srgbClr val="7A5C3A"/>
-                </a:solidFill>
-                <a:latin typeface="Calibri" pitchFamily="34" charset="0"/>
-                <a:ea typeface="Calibri" pitchFamily="34" charset="-122"/>
-                <a:cs typeface="Calibri" pitchFamily="34" charset="-120"/>
-              </a:rPr>
-              <a:t>+20% más en sagas ✓</a:t>
-            </a:r>
-            <a:endParaRPr lang="en-US" sz="1200" dirty="0"/>
+            <a:endParaRPr lang="es-ES_tradnl" sz="1200" noProof="1"/>
           </a:p>
         </p:txBody>
       </p:sp>
@@ -7558,7 +6956,7 @@
         </p:nvSpPr>
         <p:spPr>
           <a:xfrm>
-            <a:off x="502920" y="4343400"/>
+            <a:off x="594360" y="4297680"/>
             <a:ext cx="8321040" cy="502920"/>
           </a:xfrm>
           <a:prstGeom prst="rect">
@@ -7578,7 +6976,7 @@
           <a:bodyPr/>
           <a:lstStyle/>
           <a:p>
-            <a:endParaRPr lang="es-ES"/>
+            <a:endParaRPr lang="es-ES_tradnl" noProof="1"/>
           </a:p>
         </p:txBody>
       </p:sp>
@@ -7590,7 +6988,7 @@
         </p:nvSpPr>
         <p:spPr>
           <a:xfrm>
-            <a:off x="502920" y="4343400"/>
+            <a:off x="594360" y="4297680"/>
             <a:ext cx="8321040" cy="502920"/>
           </a:xfrm>
           <a:prstGeom prst="rect">
@@ -7607,7 +7005,7 @@
               <a:buNone/>
             </a:pPr>
             <a:r>
-              <a:rPr lang="en-US" sz="1200" i="1" dirty="0">
+              <a:rPr lang="es-ES_tradnl" sz="1200" i="1" noProof="1">
                 <a:solidFill>
                   <a:srgbClr val="8B4513"/>
                 </a:solidFill>
@@ -7615,12 +7013,42 @@
                 <a:ea typeface="Calibri" pitchFamily="34" charset="-122"/>
                 <a:cs typeface="Calibri" pitchFamily="34" charset="-120"/>
               </a:rPr>
-              <a:t>H3 — CONFIRMADA: Las series tienen rating medio 4,03 vs 3,95 de los standalone. Además acumulan más valoraciones (~23.500 vs ~19.500), lo que sugiere fidelización del lector.</a:t>
-            </a:r>
-            <a:endParaRPr lang="en-US" sz="1200" dirty="0"/>
-          </a:p>
-        </p:txBody>
-      </p:sp>
+              <a:t>H3 — CONFIRMADA: Las series tienen rating medio 4,03 vs 3,95 de los standalone. Además, acumulan más valoraciones (~23.500 vs ~19.500), lo que sugiere fidelización del lector.</a:t>
+            </a:r>
+            <a:endParaRPr lang="es-ES_tradnl" sz="1200" noProof="1"/>
+          </a:p>
+        </p:txBody>
+      </p:sp>
+      <p:pic>
+        <p:nvPicPr>
+          <p:cNvPr id="5" name="Imagen 4">
+            <a:extLst>
+              <a:ext uri="{FF2B5EF4-FFF2-40B4-BE49-F238E27FC236}">
+                <a16:creationId xmlns:a16="http://schemas.microsoft.com/office/drawing/2014/main" id="{41157A3F-A59F-92E2-405D-68FDB93D6F93}"/>
+              </a:ext>
+            </a:extLst>
+          </p:cNvPr>
+          <p:cNvPicPr>
+            <a:picLocks noChangeAspect="1"/>
+          </p:cNvPicPr>
+          <p:nvPr/>
+        </p:nvPicPr>
+        <p:blipFill>
+          <a:blip r:embed="rId4"/>
+          <a:stretch>
+            <a:fillRect/>
+          </a:stretch>
+        </p:blipFill>
+        <p:spPr>
+          <a:xfrm>
+            <a:off x="4617720" y="1051560"/>
+            <a:ext cx="4377923" cy="3108960"/>
+          </a:xfrm>
+          <a:prstGeom prst="rect">
+            <a:avLst/>
+          </a:prstGeom>
+        </p:spPr>
+      </p:pic>
     </p:spTree>
   </p:cSld>
   <p:clrMapOvr>
@@ -7682,7 +7110,7 @@
           <a:bodyPr/>
           <a:lstStyle/>
           <a:p>
-            <a:endParaRPr lang="es-ES"/>
+            <a:endParaRPr lang="es-ES_tradnl" noProof="1"/>
           </a:p>
         </p:txBody>
       </p:sp>
@@ -7714,7 +7142,7 @@
           <a:bodyPr/>
           <a:lstStyle/>
           <a:p>
-            <a:endParaRPr lang="es-ES"/>
+            <a:endParaRPr lang="es-ES_tradnl" noProof="1"/>
           </a:p>
         </p:txBody>
       </p:sp>
@@ -7743,7 +7171,7 @@
               <a:buNone/>
             </a:pPr>
             <a:r>
-              <a:rPr lang="en-US" sz="2000" b="1" dirty="0">
+              <a:rPr lang="es-ES_tradnl" sz="2000" b="1" noProof="1">
                 <a:solidFill>
                   <a:srgbClr val="FDF6EC"/>
                 </a:solidFill>
@@ -7753,7 +7181,7 @@
               </a:rPr>
               <a:t>H4 &amp; H5 — Autores populares: valoraciones y premios</a:t>
             </a:r>
-            <a:endParaRPr lang="en-US" sz="2000" dirty="0"/>
+            <a:endParaRPr lang="es-ES_tradnl" sz="2000" noProof="1"/>
           </a:p>
         </p:txBody>
       </p:sp>
@@ -7833,7 +7261,7 @@
           <a:bodyPr/>
           <a:lstStyle/>
           <a:p>
-            <a:endParaRPr lang="es-ES"/>
+            <a:endParaRPr lang="es-ES_tradnl" noProof="1"/>
           </a:p>
         </p:txBody>
       </p:sp>
@@ -7862,7 +7290,7 @@
               <a:buNone/>
             </a:pPr>
             <a:r>
-              <a:rPr lang="en-US" sz="1200" i="1" dirty="0">
+              <a:rPr lang="es-ES_tradnl" sz="1200" i="1" noProof="1">
                 <a:solidFill>
                   <a:srgbClr val="8B4513"/>
                 </a:solidFill>
@@ -7872,7 +7300,7 @@
               </a:rPr>
               <a:t>H4 CONFIRMADA: J.K. Rowling acumula +24M valoraciones, muy por encima del resto. H5 CONFIRMADA: autores populares tienen 2,44 premios de media vs 0,47 de los no populares.</a:t>
             </a:r>
-            <a:endParaRPr lang="en-US" sz="1200" dirty="0"/>
+            <a:endParaRPr lang="es-ES_tradnl" sz="1200" noProof="1"/>
           </a:p>
         </p:txBody>
       </p:sp>

--- a/Presentacion/EDA_Goodreads.pptx
+++ b/Presentacion/EDA_Goodreads.pptx
@@ -5,20 +5,21 @@
     <p:sldMasterId id="2147483648" r:id="rId1"/>
   </p:sldMasterIdLst>
   <p:notesMasterIdLst>
-    <p:notesMasterId r:id="rId13"/>
+    <p:notesMasterId r:id="rId14"/>
   </p:notesMasterIdLst>
   <p:sldIdLst>
     <p:sldId id="256" r:id="rId2"/>
-    <p:sldId id="257" r:id="rId3"/>
-    <p:sldId id="258" r:id="rId4"/>
-    <p:sldId id="259" r:id="rId5"/>
-    <p:sldId id="260" r:id="rId6"/>
-    <p:sldId id="261" r:id="rId7"/>
-    <p:sldId id="262" r:id="rId8"/>
-    <p:sldId id="263" r:id="rId9"/>
-    <p:sldId id="264" r:id="rId10"/>
-    <p:sldId id="266" r:id="rId11"/>
-    <p:sldId id="267" r:id="rId12"/>
+    <p:sldId id="268" r:id="rId3"/>
+    <p:sldId id="269" r:id="rId4"/>
+    <p:sldId id="258" r:id="rId5"/>
+    <p:sldId id="259" r:id="rId6"/>
+    <p:sldId id="260" r:id="rId7"/>
+    <p:sldId id="261" r:id="rId8"/>
+    <p:sldId id="262" r:id="rId9"/>
+    <p:sldId id="263" r:id="rId10"/>
+    <p:sldId id="264" r:id="rId11"/>
+    <p:sldId id="266" r:id="rId12"/>
+    <p:sldId id="267" r:id="rId13"/>
   </p:sldIdLst>
   <p:sldSz cx="9144000" cy="5143500" type="screen16x9"/>
   <p:notesSz cx="5143500" cy="9144000"/>
@@ -396,91 +397,7 @@
           <a:p>
             <a:fld id="{F7021451-1387-4CA6-816F-3879F97B5CBC}" type="slidenum">
               <a:rPr lang="en-US"/>
-              <a:t>10</a:t>
-            </a:fld>
-            <a:endParaRPr lang="en-US"/>
-          </a:p>
-        </p:txBody>
-      </p:sp>
-    </p:spTree>
-    <p:extLst>
-      <p:ext uri="{BB962C8B-B14F-4D97-AF65-F5344CB8AC3E}">
-        <p14:creationId xmlns:p14="http://schemas.microsoft.com/office/powerpoint/2010/main" val="1024086991"/>
-      </p:ext>
-    </p:extLst>
-  </p:cSld>
-  <p:clrMapOvr>
-    <a:masterClrMapping/>
-  </p:clrMapOvr>
-</p:notes>
-</file>
-
-<file path=ppt/notesSlides/notesSlide11.xml><?xml version="1.0" encoding="utf-8"?>
-<p:notes xmlns:a="http://schemas.openxmlformats.org/drawingml/2006/main" xmlns:r="http://schemas.openxmlformats.org/officeDocument/2006/relationships" xmlns:p="http://schemas.openxmlformats.org/presentationml/2006/main">
-  <p:cSld>
-    <p:spTree>
-      <p:nvGrpSpPr>
-        <p:cNvPr id="1" name=""/>
-        <p:cNvGrpSpPr/>
-        <p:nvPr/>
-      </p:nvGrpSpPr>
-      <p:grpSpPr>
-        <a:xfrm>
-          <a:off x="0" y="0"/>
-          <a:ext cx="0" cy="0"/>
-          <a:chOff x="0" y="0"/>
-          <a:chExt cx="0" cy="0"/>
-        </a:xfrm>
-      </p:grpSpPr>
-      <p:sp>
-        <p:nvSpPr>
-          <p:cNvPr id="2" name="Slide Image Placeholder 1"/>
-          <p:cNvSpPr>
-            <a:spLocks noGrp="1" noRot="1" noChangeAspect="1"/>
-          </p:cNvSpPr>
-          <p:nvPr>
-            <p:ph type="sldImg"/>
-          </p:nvPr>
-        </p:nvSpPr>
-        <p:spPr/>
-      </p:sp>
-      <p:sp>
-        <p:nvSpPr>
-          <p:cNvPr id="3" name="Notes Placeholder 2"/>
-          <p:cNvSpPr>
-            <a:spLocks noGrp="1"/>
-          </p:cNvSpPr>
-          <p:nvPr>
-            <p:ph type="body" idx="1"/>
-          </p:nvPr>
-        </p:nvSpPr>
-        <p:spPr/>
-        <p:txBody>
-          <a:bodyPr/>
-          <a:lstStyle/>
-          <a:p>
-            <a:endParaRPr lang="en-US" dirty="0"/>
-          </a:p>
-        </p:txBody>
-      </p:sp>
-      <p:sp>
-        <p:nvSpPr>
-          <p:cNvPr id="4" name="Slide Number Placeholder 3"/>
-          <p:cNvSpPr>
-            <a:spLocks noGrp="1"/>
-          </p:cNvSpPr>
-          <p:nvPr>
-            <p:ph type="sldNum" sz="quarter" idx="10"/>
-          </p:nvPr>
-        </p:nvSpPr>
-        <p:spPr/>
-        <p:txBody>
-          <a:bodyPr/>
-          <a:lstStyle/>
-          <a:p>
-            <a:fld id="{F7021451-1387-4CA6-816F-3879F97B5CBC}" type="slidenum">
-              <a:rPr lang="en-US"/>
-              <a:t>11</a:t>
+              <a:t>12</a:t>
             </a:fld>
             <a:endParaRPr lang="en-US"/>
           </a:p>
@@ -564,7 +481,7 @@
           <a:p>
             <a:fld id="{F7021451-1387-4CA6-816F-3879F97B5CBC}" type="slidenum">
               <a:rPr lang="en-US"/>
-              <a:t>2</a:t>
+              <a:t>4</a:t>
             </a:fld>
             <a:endParaRPr lang="en-US"/>
           </a:p>
@@ -648,7 +565,7 @@
           <a:p>
             <a:fld id="{F7021451-1387-4CA6-816F-3879F97B5CBC}" type="slidenum">
               <a:rPr lang="en-US"/>
-              <a:t>3</a:t>
+              <a:t>5</a:t>
             </a:fld>
             <a:endParaRPr lang="en-US"/>
           </a:p>
@@ -732,7 +649,7 @@
           <a:p>
             <a:fld id="{F7021451-1387-4CA6-816F-3879F97B5CBC}" type="slidenum">
               <a:rPr lang="en-US"/>
-              <a:t>4</a:t>
+              <a:t>6</a:t>
             </a:fld>
             <a:endParaRPr lang="en-US"/>
           </a:p>
@@ -816,7 +733,7 @@
           <a:p>
             <a:fld id="{F7021451-1387-4CA6-816F-3879F97B5CBC}" type="slidenum">
               <a:rPr lang="en-US"/>
-              <a:t>5</a:t>
+              <a:t>7</a:t>
             </a:fld>
             <a:endParaRPr lang="en-US"/>
           </a:p>
@@ -900,7 +817,7 @@
           <a:p>
             <a:fld id="{F7021451-1387-4CA6-816F-3879F97B5CBC}" type="slidenum">
               <a:rPr lang="en-US"/>
-              <a:t>6</a:t>
+              <a:t>8</a:t>
             </a:fld>
             <a:endParaRPr lang="en-US"/>
           </a:p>
@@ -984,7 +901,7 @@
           <a:p>
             <a:fld id="{F7021451-1387-4CA6-816F-3879F97B5CBC}" type="slidenum">
               <a:rPr lang="en-US"/>
-              <a:t>7</a:t>
+              <a:t>9</a:t>
             </a:fld>
             <a:endParaRPr lang="en-US"/>
           </a:p>
@@ -1068,7 +985,7 @@
           <a:p>
             <a:fld id="{F7021451-1387-4CA6-816F-3879F97B5CBC}" type="slidenum">
               <a:rPr lang="en-US"/>
-              <a:t>8</a:t>
+              <a:t>10</a:t>
             </a:fld>
             <a:endParaRPr lang="en-US"/>
           </a:p>
@@ -1152,7 +1069,7 @@
           <a:p>
             <a:fld id="{F7021451-1387-4CA6-816F-3879F97B5CBC}" type="slidenum">
               <a:rPr lang="en-US"/>
-              <a:t>9</a:t>
+              <a:t>11</a:t>
             </a:fld>
             <a:endParaRPr lang="en-US"/>
           </a:p>
@@ -1734,6 +1651,261 @@
 
 <file path=ppt/slides/slide10.xml><?xml version="1.0" encoding="utf-8"?>
 <p:sld xmlns:a="http://schemas.openxmlformats.org/drawingml/2006/main" xmlns:r="http://schemas.openxmlformats.org/officeDocument/2006/relationships" xmlns:p="http://schemas.openxmlformats.org/presentationml/2006/main">
+  <p:cSld name="Slide 9">
+    <p:bg>
+      <p:bgPr>
+        <a:solidFill>
+          <a:srgbClr val="FDF6EC"/>
+        </a:solidFill>
+        <a:effectLst/>
+      </p:bgPr>
+    </p:bg>
+    <p:spTree>
+      <p:nvGrpSpPr>
+        <p:cNvPr id="1" name=""/>
+        <p:cNvGrpSpPr/>
+        <p:nvPr/>
+      </p:nvGrpSpPr>
+      <p:grpSpPr>
+        <a:xfrm>
+          <a:off x="0" y="0"/>
+          <a:ext cx="0" cy="0"/>
+          <a:chOff x="0" y="0"/>
+          <a:chExt cx="0" cy="0"/>
+        </a:xfrm>
+      </p:grpSpPr>
+      <p:sp>
+        <p:nvSpPr>
+          <p:cNvPr id="2" name="Shape 0"/>
+          <p:cNvSpPr/>
+          <p:nvPr/>
+        </p:nvSpPr>
+        <p:spPr>
+          <a:xfrm>
+            <a:off x="0" y="0"/>
+            <a:ext cx="9144000" cy="914400"/>
+          </a:xfrm>
+          <a:prstGeom prst="rect">
+            <a:avLst/>
+          </a:prstGeom>
+          <a:solidFill>
+            <a:srgbClr val="2C1A0E"/>
+          </a:solidFill>
+          <a:ln w="12700">
+            <a:solidFill>
+              <a:srgbClr val="2C1A0E"/>
+            </a:solidFill>
+            <a:prstDash val="solid"/>
+          </a:ln>
+        </p:spPr>
+        <p:txBody>
+          <a:bodyPr/>
+          <a:lstStyle/>
+          <a:p>
+            <a:endParaRPr lang="es-ES_tradnl" noProof="1"/>
+          </a:p>
+        </p:txBody>
+      </p:sp>
+      <p:sp>
+        <p:nvSpPr>
+          <p:cNvPr id="3" name="Shape 1"/>
+          <p:cNvSpPr/>
+          <p:nvPr/>
+        </p:nvSpPr>
+        <p:spPr>
+          <a:xfrm>
+            <a:off x="0" y="0"/>
+            <a:ext cx="320040" cy="5143500"/>
+          </a:xfrm>
+          <a:prstGeom prst="rect">
+            <a:avLst/>
+          </a:prstGeom>
+          <a:solidFill>
+            <a:srgbClr val="C8860A"/>
+          </a:solidFill>
+          <a:ln w="12700">
+            <a:solidFill>
+              <a:srgbClr val="C8860A"/>
+            </a:solidFill>
+            <a:prstDash val="solid"/>
+          </a:ln>
+        </p:spPr>
+        <p:txBody>
+          <a:bodyPr/>
+          <a:lstStyle/>
+          <a:p>
+            <a:endParaRPr lang="es-ES_tradnl" noProof="1"/>
+          </a:p>
+        </p:txBody>
+      </p:sp>
+      <p:sp>
+        <p:nvSpPr>
+          <p:cNvPr id="4" name="Text 2"/>
+          <p:cNvSpPr/>
+          <p:nvPr/>
+        </p:nvSpPr>
+        <p:spPr>
+          <a:xfrm>
+            <a:off x="502920" y="137160"/>
+            <a:ext cx="8412480" cy="640080"/>
+          </a:xfrm>
+          <a:prstGeom prst="rect">
+            <a:avLst/>
+          </a:prstGeom>
+          <a:noFill/>
+          <a:ln/>
+        </p:spPr>
+        <p:txBody>
+          <a:bodyPr wrap="square" lIns="0" tIns="0" rIns="0" bIns="0" rtlCol="0" anchor="ctr"/>
+          <a:lstStyle/>
+          <a:p>
+            <a:pPr marL="0" indent="0" algn="l">
+              <a:buNone/>
+            </a:pPr>
+            <a:r>
+              <a:rPr lang="es-ES_tradnl" sz="2000" b="1" noProof="1">
+                <a:solidFill>
+                  <a:srgbClr val="FDF6EC"/>
+                </a:solidFill>
+                <a:latin typeface="Georgia" pitchFamily="34" charset="0"/>
+                <a:ea typeface="Georgia" pitchFamily="34" charset="-122"/>
+                <a:cs typeface="Georgia" pitchFamily="34" charset="-120"/>
+              </a:rPr>
+              <a:t>H4 &amp; H5 — Autores populares: valoraciones y premios</a:t>
+            </a:r>
+            <a:endParaRPr lang="es-ES_tradnl" sz="2000" noProof="1"/>
+          </a:p>
+        </p:txBody>
+      </p:sp>
+      <p:pic>
+        <p:nvPicPr>
+          <p:cNvPr id="500" name="h4_autores"/>
+          <p:cNvPicPr>
+            <a:picLocks noChangeAspect="1"/>
+          </p:cNvPicPr>
+          <p:nvPr/>
+        </p:nvPicPr>
+        <p:blipFill>
+          <a:blip r:embed="rId3"/>
+          <a:stretch>
+            <a:fillRect/>
+          </a:stretch>
+        </p:blipFill>
+        <p:spPr>
+          <a:xfrm>
+            <a:off x="502920" y="1051560"/>
+            <a:ext cx="3931920" cy="3108960"/>
+          </a:xfrm>
+          <a:prstGeom prst="rect">
+            <a:avLst/>
+          </a:prstGeom>
+        </p:spPr>
+      </p:pic>
+      <p:pic>
+        <p:nvPicPr>
+          <p:cNvPr id="501" name="h5_premios"/>
+          <p:cNvPicPr>
+            <a:picLocks noChangeAspect="1"/>
+          </p:cNvPicPr>
+          <p:nvPr/>
+        </p:nvPicPr>
+        <p:blipFill>
+          <a:blip r:embed="rId4"/>
+          <a:stretch>
+            <a:fillRect/>
+          </a:stretch>
+        </p:blipFill>
+        <p:spPr>
+          <a:xfrm>
+            <a:off x="4800600" y="1051560"/>
+            <a:ext cx="3931920" cy="3108960"/>
+          </a:xfrm>
+          <a:prstGeom prst="rect">
+            <a:avLst/>
+          </a:prstGeom>
+        </p:spPr>
+      </p:pic>
+      <p:sp>
+        <p:nvSpPr>
+          <p:cNvPr id="9" name="Shape 7"/>
+          <p:cNvSpPr/>
+          <p:nvPr/>
+        </p:nvSpPr>
+        <p:spPr>
+          <a:xfrm>
+            <a:off x="502920" y="4343400"/>
+            <a:ext cx="8321040" cy="502920"/>
+          </a:xfrm>
+          <a:prstGeom prst="rect">
+            <a:avLst/>
+          </a:prstGeom>
+          <a:solidFill>
+            <a:srgbClr val="F5E6CC"/>
+          </a:solidFill>
+          <a:ln w="12700">
+            <a:solidFill>
+              <a:srgbClr val="C8860A"/>
+            </a:solidFill>
+            <a:prstDash val="solid"/>
+          </a:ln>
+        </p:spPr>
+        <p:txBody>
+          <a:bodyPr/>
+          <a:lstStyle/>
+          <a:p>
+            <a:endParaRPr lang="es-ES_tradnl" noProof="1"/>
+          </a:p>
+        </p:txBody>
+      </p:sp>
+      <p:sp>
+        <p:nvSpPr>
+          <p:cNvPr id="10" name="Text 8"/>
+          <p:cNvSpPr/>
+          <p:nvPr/>
+        </p:nvSpPr>
+        <p:spPr>
+          <a:xfrm>
+            <a:off x="502920" y="4343400"/>
+            <a:ext cx="8321040" cy="502920"/>
+          </a:xfrm>
+          <a:prstGeom prst="rect">
+            <a:avLst/>
+          </a:prstGeom>
+          <a:noFill/>
+          <a:ln/>
+        </p:spPr>
+        <p:txBody>
+          <a:bodyPr wrap="square" rtlCol="0" anchor="ctr"/>
+          <a:lstStyle/>
+          <a:p>
+            <a:pPr marL="0" indent="0" algn="ctr">
+              <a:buNone/>
+            </a:pPr>
+            <a:r>
+              <a:rPr lang="es-ES_tradnl" sz="1200" i="1" noProof="1">
+                <a:solidFill>
+                  <a:srgbClr val="8B4513"/>
+                </a:solidFill>
+                <a:latin typeface="Calibri" pitchFamily="34" charset="0"/>
+                <a:ea typeface="Calibri" pitchFamily="34" charset="-122"/>
+                <a:cs typeface="Calibri" pitchFamily="34" charset="-120"/>
+              </a:rPr>
+              <a:t>H4 CONFIRMADA: J.K. Rowling acumula +24M valoraciones, muy por encima del resto. H5 CONFIRMADA: autores populares tienen 2,44 premios de media vs 0,47 de los no populares.</a:t>
+            </a:r>
+            <a:endParaRPr lang="es-ES_tradnl" sz="1200" noProof="1"/>
+          </a:p>
+        </p:txBody>
+      </p:sp>
+    </p:spTree>
+  </p:cSld>
+  <p:clrMapOvr>
+    <a:masterClrMapping/>
+  </p:clrMapOvr>
+</p:sld>
+</file>
+
+<file path=ppt/slides/slide11.xml><?xml version="1.0" encoding="utf-8"?>
+<p:sld xmlns:a="http://schemas.openxmlformats.org/drawingml/2006/main" xmlns:r="http://schemas.openxmlformats.org/officeDocument/2006/relationships" xmlns:p="http://schemas.openxmlformats.org/presentationml/2006/main">
   <p:cSld name="Slide 11">
     <p:bg>
       <p:bgPr>
@@ -3114,7 +3286,7 @@
 </p:sld>
 </file>
 
-<file path=ppt/slides/slide11.xml><?xml version="1.0" encoding="utf-8"?>
+<file path=ppt/slides/slide12.xml><?xml version="1.0" encoding="utf-8"?>
 <p:sld xmlns:a="http://schemas.openxmlformats.org/drawingml/2006/main" xmlns:r="http://schemas.openxmlformats.org/officeDocument/2006/relationships" xmlns:p="http://schemas.openxmlformats.org/presentationml/2006/main">
   <p:cSld name="Slide 12">
     <p:bg>
@@ -3347,7 +3519,7 @@
 
 <file path=ppt/slides/slide2.xml><?xml version="1.0" encoding="utf-8"?>
 <p:sld xmlns:a="http://schemas.openxmlformats.org/drawingml/2006/main" xmlns:r="http://schemas.openxmlformats.org/officeDocument/2006/relationships" xmlns:p="http://schemas.openxmlformats.org/presentationml/2006/main">
-  <p:cSld name="Slide 2">
+  <p:cSld>
     <p:bg>
       <p:bgPr>
         <a:solidFill>
@@ -3398,7 +3570,7 @@
           <a:bodyPr/>
           <a:lstStyle/>
           <a:p>
-            <a:endParaRPr lang="es-ES_tradnl" noProof="1"/>
+            <a:endParaRPr lang="es-ES"/>
           </a:p>
         </p:txBody>
       </p:sp>
@@ -3430,7 +3602,7 @@
           <a:bodyPr/>
           <a:lstStyle/>
           <a:p>
-            <a:endParaRPr lang="es-ES_tradnl" noProof="1"/>
+            <a:endParaRPr lang="es-ES"/>
           </a:p>
         </p:txBody>
       </p:sp>
@@ -3459,7 +3631,7 @@
               <a:buNone/>
             </a:pPr>
             <a:r>
-              <a:rPr lang="es-ES_tradnl" sz="2200" b="1" noProof="1">
+              <a:rPr lang="en-US" sz="2200" b="1" dirty="0">
                 <a:solidFill>
                   <a:srgbClr val="FDF6EC"/>
                 </a:solidFill>
@@ -3467,9 +3639,9 @@
                 <a:ea typeface="Georgia" pitchFamily="34" charset="-122"/>
                 <a:cs typeface="Georgia" pitchFamily="34" charset="-120"/>
               </a:rPr>
-              <a:t>¿Qué es Goodreads y por qué este dataset?</a:t>
-            </a:r>
-            <a:endParaRPr lang="es-ES_tradnl" sz="2200" noProof="1"/>
+              <a:t>¿Qué es Goodreads?</a:t>
+            </a:r>
+            <a:endParaRPr lang="en-US" sz="2200" dirty="0"/>
           </a:p>
         </p:txBody>
       </p:sp>
@@ -3481,7 +3653,7 @@
         </p:nvSpPr>
         <p:spPr>
           <a:xfrm>
-            <a:off x="502920" y="1634490"/>
+            <a:off x="502920" y="1628588"/>
             <a:ext cx="8412480" cy="1005840"/>
           </a:xfrm>
           <a:prstGeom prst="rect">
@@ -3498,7 +3670,7 @@
               <a:buNone/>
             </a:pPr>
             <a:r>
-              <a:rPr lang="es-ES_tradnl" sz="1400" noProof="1">
+              <a:rPr lang="en-US" sz="1400" dirty="0">
                 <a:solidFill>
                   <a:srgbClr val="1A0F00"/>
                 </a:solidFill>
@@ -3506,16 +3678,16 @@
                 <a:ea typeface="Calibri" pitchFamily="34" charset="-122"/>
                 <a:cs typeface="Calibri" pitchFamily="34" charset="-120"/>
               </a:rPr>
-              <a:t>Goodreads es la mayor red social de lectores del mundo, con más de 150 millones de usuarios.</a:t>
-            </a:r>
-            <a:endParaRPr lang="es-ES_tradnl" sz="1400" noProof="1"/>
+              <a:t>Goodreads es una red social orientada a la lectura fundada en 2007 y adquirida por Amazon en 2013. Con más de 150 millones de usuarios, es la mayor plataforma de referencia para lectores y escritores del mundo.</a:t>
+            </a:r>
+            <a:endParaRPr lang="en-US" sz="1400" dirty="0"/>
           </a:p>
           <a:p>
             <a:pPr marL="0" indent="0" algn="l">
               <a:buNone/>
             </a:pPr>
             <a:r>
-              <a:rPr lang="es-ES_tradnl" sz="1400" noProof="1">
+              <a:rPr lang="en-US" sz="1400" dirty="0">
                 <a:solidFill>
                   <a:srgbClr val="1A0F00"/>
                 </a:solidFill>
@@ -3523,9 +3695,53 @@
                 <a:ea typeface="Calibri" pitchFamily="34" charset="-122"/>
                 <a:cs typeface="Calibri" pitchFamily="34" charset="-120"/>
               </a:rPr>
-              <a:t>El dataset descargado de Kaggle, recoge 52.478 de sus mejores libros según sus listas, con información sobre ratings, géneros, premios y más.</a:t>
-            </a:r>
-            <a:endParaRPr lang="es-ES_tradnl" sz="1400" noProof="1"/>
+              <a:t>Permite descubrir libros, valorarlos, escribir reseñas y organizar listas personales. Sus rankings y </a:t>
+            </a:r>
+            <a:r>
+              <a:rPr lang="en-US" sz="1400" dirty="0" err="1">
+                <a:solidFill>
+                  <a:srgbClr val="1A0F00"/>
+                </a:solidFill>
+                <a:latin typeface="Calibri" pitchFamily="34" charset="0"/>
+                <a:ea typeface="Calibri" pitchFamily="34" charset="-122"/>
+                <a:cs typeface="Calibri" pitchFamily="34" charset="-120"/>
+              </a:rPr>
+              <a:t>listas</a:t>
+            </a:r>
+            <a:r>
+              <a:rPr lang="en-US" sz="1400" dirty="0">
+                <a:solidFill>
+                  <a:srgbClr val="1A0F00"/>
+                </a:solidFill>
+                <a:latin typeface="Calibri" pitchFamily="34" charset="0"/>
+                <a:ea typeface="Calibri" pitchFamily="34" charset="-122"/>
+                <a:cs typeface="Calibri" pitchFamily="34" charset="-120"/>
+              </a:rPr>
+              <a:t> </a:t>
+            </a:r>
+            <a:r>
+              <a:rPr lang="en-US" sz="1400" dirty="0" err="1">
+                <a:solidFill>
+                  <a:srgbClr val="1A0F00"/>
+                </a:solidFill>
+                <a:latin typeface="Calibri" pitchFamily="34" charset="0"/>
+                <a:ea typeface="Calibri" pitchFamily="34" charset="-122"/>
+                <a:cs typeface="Calibri" pitchFamily="34" charset="-120"/>
+              </a:rPr>
+              <a:t>recogen</a:t>
+            </a:r>
+            <a:r>
+              <a:rPr lang="en-US" sz="1400" dirty="0">
+                <a:solidFill>
+                  <a:srgbClr val="1A0F00"/>
+                </a:solidFill>
+                <a:latin typeface="Calibri" pitchFamily="34" charset="0"/>
+                <a:ea typeface="Calibri" pitchFamily="34" charset="-122"/>
+                <a:cs typeface="Calibri" pitchFamily="34" charset="-120"/>
+              </a:rPr>
+              <a:t> los libros mejor valorados por la comunidad.</a:t>
+            </a:r>
+            <a:endParaRPr lang="en-US" sz="1400" dirty="0"/>
           </a:p>
         </p:txBody>
       </p:sp>
@@ -3537,7 +3753,7 @@
         </p:nvSpPr>
         <p:spPr>
           <a:xfrm>
-            <a:off x="502920" y="2720340"/>
+            <a:off x="502920" y="2817308"/>
             <a:ext cx="1920240" cy="1371600"/>
           </a:xfrm>
           <a:prstGeom prst="rect">
@@ -3564,7 +3780,7 @@
           <a:bodyPr/>
           <a:lstStyle/>
           <a:p>
-            <a:endParaRPr lang="es-ES_tradnl" noProof="1"/>
+            <a:endParaRPr lang="es-ES"/>
           </a:p>
         </p:txBody>
       </p:sp>
@@ -3576,7 +3792,7 @@
         </p:nvSpPr>
         <p:spPr>
           <a:xfrm>
-            <a:off x="502920" y="2811780"/>
+            <a:off x="502920" y="2908748"/>
             <a:ext cx="1920240" cy="640080"/>
           </a:xfrm>
           <a:prstGeom prst="rect">
@@ -3593,7 +3809,7 @@
               <a:buNone/>
             </a:pPr>
             <a:r>
-              <a:rPr lang="es-ES_tradnl" sz="2600" b="1" noProof="1">
+              <a:rPr lang="en-US" sz="2600" b="1" dirty="0">
                 <a:solidFill>
                   <a:srgbClr val="8B4513"/>
                 </a:solidFill>
@@ -3601,9 +3817,9 @@
                 <a:ea typeface="Georgia" pitchFamily="34" charset="-122"/>
                 <a:cs typeface="Georgia" pitchFamily="34" charset="-120"/>
               </a:rPr>
-              <a:t>52.478</a:t>
-            </a:r>
-            <a:endParaRPr lang="es-ES_tradnl" sz="2600" noProof="1"/>
+              <a:t>150M+</a:t>
+            </a:r>
+            <a:endParaRPr lang="en-US" sz="2600" dirty="0"/>
           </a:p>
         </p:txBody>
       </p:sp>
@@ -3615,7 +3831,7 @@
         </p:nvSpPr>
         <p:spPr>
           <a:xfrm>
-            <a:off x="502920" y="3451860"/>
+            <a:off x="502920" y="3548828"/>
             <a:ext cx="1920240" cy="457200"/>
           </a:xfrm>
           <a:prstGeom prst="rect">
@@ -3632,7 +3848,7 @@
               <a:buNone/>
             </a:pPr>
             <a:r>
-              <a:rPr lang="es-ES_tradnl" sz="1100" noProof="1">
+              <a:rPr lang="en-US" sz="1100" dirty="0">
                 <a:solidFill>
                   <a:srgbClr val="7A5C3A"/>
                 </a:solidFill>
@@ -3640,9 +3856,9 @@
                 <a:ea typeface="Calibri" pitchFamily="34" charset="-122"/>
                 <a:cs typeface="Calibri" pitchFamily="34" charset="-120"/>
               </a:rPr>
-              <a:t>Libros originales</a:t>
-            </a:r>
-            <a:endParaRPr lang="es-ES_tradnl" sz="1100" noProof="1"/>
+              <a:t>Usuarios registrados</a:t>
+            </a:r>
+            <a:endParaRPr lang="en-US" sz="1100" dirty="0"/>
           </a:p>
         </p:txBody>
       </p:sp>
@@ -3654,7 +3870,7 @@
         </p:nvSpPr>
         <p:spPr>
           <a:xfrm>
-            <a:off x="2651760" y="2720340"/>
+            <a:off x="2651760" y="2817308"/>
             <a:ext cx="1920240" cy="1371600"/>
           </a:xfrm>
           <a:prstGeom prst="rect">
@@ -3681,7 +3897,7 @@
           <a:bodyPr/>
           <a:lstStyle/>
           <a:p>
-            <a:endParaRPr lang="es-ES_tradnl" noProof="1"/>
+            <a:endParaRPr lang="es-ES"/>
           </a:p>
         </p:txBody>
       </p:sp>
@@ -3693,7 +3909,7 @@
         </p:nvSpPr>
         <p:spPr>
           <a:xfrm>
-            <a:off x="2651760" y="2811780"/>
+            <a:off x="2651760" y="2908748"/>
             <a:ext cx="1920240" cy="640080"/>
           </a:xfrm>
           <a:prstGeom prst="rect">
@@ -3710,7 +3926,7 @@
               <a:buNone/>
             </a:pPr>
             <a:r>
-              <a:rPr lang="es-ES_tradnl" sz="2600" b="1" noProof="1">
+              <a:rPr lang="en-US" sz="2600" b="1" dirty="0">
                 <a:solidFill>
                   <a:srgbClr val="8B4513"/>
                 </a:solidFill>
@@ -3718,9 +3934,9 @@
                 <a:ea typeface="Georgia" pitchFamily="34" charset="-122"/>
                 <a:cs typeface="Georgia" pitchFamily="34" charset="-120"/>
               </a:rPr>
-              <a:t>~49.000</a:t>
-            </a:r>
-            <a:endParaRPr lang="es-ES_tradnl" sz="2600" noProof="1"/>
+              <a:t>3.000M+</a:t>
+            </a:r>
+            <a:endParaRPr lang="en-US" sz="2600" dirty="0"/>
           </a:p>
         </p:txBody>
       </p:sp>
@@ -3732,7 +3948,7 @@
         </p:nvSpPr>
         <p:spPr>
           <a:xfrm>
-            <a:off x="2651760" y="3451860"/>
+            <a:off x="2651760" y="3548828"/>
             <a:ext cx="1920240" cy="457200"/>
           </a:xfrm>
           <a:prstGeom prst="rect">
@@ -3749,7 +3965,7 @@
               <a:buNone/>
             </a:pPr>
             <a:r>
-              <a:rPr lang="es-ES_tradnl" sz="1100" noProof="1">
+              <a:rPr lang="en-US" sz="1100" dirty="0">
                 <a:solidFill>
                   <a:srgbClr val="7A5C3A"/>
                 </a:solidFill>
@@ -3757,9 +3973,9 @@
                 <a:ea typeface="Calibri" pitchFamily="34" charset="-122"/>
                 <a:cs typeface="Calibri" pitchFamily="34" charset="-120"/>
               </a:rPr>
-              <a:t>Tras limpieza</a:t>
-            </a:r>
-            <a:endParaRPr lang="es-ES_tradnl" sz="1100" noProof="1"/>
+              <a:t>Valoraciones totales</a:t>
+            </a:r>
+            <a:endParaRPr lang="en-US" sz="1100" dirty="0"/>
           </a:p>
         </p:txBody>
       </p:sp>
@@ -3771,7 +3987,7 @@
         </p:nvSpPr>
         <p:spPr>
           <a:xfrm>
-            <a:off x="4800600" y="2720340"/>
+            <a:off x="4800600" y="2817308"/>
             <a:ext cx="1920240" cy="1371600"/>
           </a:xfrm>
           <a:prstGeom prst="rect">
@@ -3798,7 +4014,7 @@
           <a:bodyPr/>
           <a:lstStyle/>
           <a:p>
-            <a:endParaRPr lang="es-ES_tradnl" noProof="1"/>
+            <a:endParaRPr lang="es-ES"/>
           </a:p>
         </p:txBody>
       </p:sp>
@@ -3810,7 +4026,7 @@
         </p:nvSpPr>
         <p:spPr>
           <a:xfrm>
-            <a:off x="4800600" y="2811780"/>
+            <a:off x="4800600" y="2908748"/>
             <a:ext cx="1920240" cy="640080"/>
           </a:xfrm>
           <a:prstGeom prst="rect">
@@ -3827,7 +4043,7 @@
               <a:buNone/>
             </a:pPr>
             <a:r>
-              <a:rPr lang="es-ES_tradnl" sz="2600" b="1" noProof="1">
+              <a:rPr lang="en-US" sz="2600" b="1" dirty="0">
                 <a:solidFill>
                   <a:srgbClr val="8B4513"/>
                 </a:solidFill>
@@ -3835,9 +4051,9 @@
                 <a:ea typeface="Georgia" pitchFamily="34" charset="-122"/>
                 <a:cs typeface="Georgia" pitchFamily="34" charset="-120"/>
               </a:rPr>
-              <a:t>15</a:t>
-            </a:r>
-            <a:endParaRPr lang="es-ES_tradnl" sz="2600" noProof="1"/>
+              <a:t>52.478</a:t>
+            </a:r>
+            <a:endParaRPr lang="en-US" sz="2600" dirty="0"/>
           </a:p>
         </p:txBody>
       </p:sp>
@@ -3849,7 +4065,7 @@
         </p:nvSpPr>
         <p:spPr>
           <a:xfrm>
-            <a:off x="4800600" y="3451860"/>
+            <a:off x="4800600" y="3548828"/>
             <a:ext cx="1920240" cy="457200"/>
           </a:xfrm>
           <a:prstGeom prst="rect">
@@ -3866,7 +4082,7 @@
               <a:buNone/>
             </a:pPr>
             <a:r>
-              <a:rPr lang="es-ES_tradnl" sz="1100" noProof="1">
+              <a:rPr lang="en-US" sz="1100" dirty="0">
                 <a:solidFill>
                   <a:srgbClr val="7A5C3A"/>
                 </a:solidFill>
@@ -3874,9 +4090,9 @@
                 <a:ea typeface="Calibri" pitchFamily="34" charset="-122"/>
                 <a:cs typeface="Calibri" pitchFamily="34" charset="-120"/>
               </a:rPr>
-              <a:t>Variables clave</a:t>
-            </a:r>
-            <a:endParaRPr lang="es-ES_tradnl" sz="1100" noProof="1"/>
+              <a:t>Libros en Best Books</a:t>
+            </a:r>
+            <a:endParaRPr lang="en-US" sz="1100" dirty="0"/>
           </a:p>
         </p:txBody>
       </p:sp>
@@ -3888,7 +4104,7 @@
         </p:nvSpPr>
         <p:spPr>
           <a:xfrm>
-            <a:off x="6949440" y="2720340"/>
+            <a:off x="6949440" y="2817308"/>
             <a:ext cx="1920240" cy="1371600"/>
           </a:xfrm>
           <a:prstGeom prst="rect">
@@ -3915,7 +4131,7 @@
           <a:bodyPr/>
           <a:lstStyle/>
           <a:p>
-            <a:endParaRPr lang="es-ES_tradnl" noProof="1"/>
+            <a:endParaRPr lang="es-ES"/>
           </a:p>
         </p:txBody>
       </p:sp>
@@ -3927,7 +4143,7 @@
         </p:nvSpPr>
         <p:spPr>
           <a:xfrm>
-            <a:off x="6949440" y="2811780"/>
+            <a:off x="6949440" y="2908748"/>
             <a:ext cx="1920240" cy="640080"/>
           </a:xfrm>
           <a:prstGeom prst="rect">
@@ -3944,7 +4160,7 @@
               <a:buNone/>
             </a:pPr>
             <a:r>
-              <a:rPr lang="es-ES_tradnl" sz="2600" b="1" noProof="1">
+              <a:rPr lang="en-US" sz="2600" b="1" dirty="0">
                 <a:solidFill>
                   <a:srgbClr val="8B4513"/>
                 </a:solidFill>
@@ -3952,9 +4168,9 @@
                 <a:ea typeface="Georgia" pitchFamily="34" charset="-122"/>
                 <a:cs typeface="Georgia" pitchFamily="34" charset="-120"/>
               </a:rPr>
-              <a:t>5</a:t>
-            </a:r>
-            <a:endParaRPr lang="es-ES_tradnl" sz="2600" noProof="1"/>
+              <a:t>2007</a:t>
+            </a:r>
+            <a:endParaRPr lang="en-US" sz="2600" dirty="0"/>
           </a:p>
         </p:txBody>
       </p:sp>
@@ -3966,7 +4182,7 @@
         </p:nvSpPr>
         <p:spPr>
           <a:xfrm>
-            <a:off x="6949440" y="3451860"/>
+            <a:off x="6949440" y="3548828"/>
             <a:ext cx="1920240" cy="457200"/>
           </a:xfrm>
           <a:prstGeom prst="rect">
@@ -3983,7 +4199,7 @@
               <a:buNone/>
             </a:pPr>
             <a:r>
-              <a:rPr lang="es-ES_tradnl" sz="1100" noProof="1">
+              <a:rPr lang="en-US" sz="1100" dirty="0">
                 <a:solidFill>
                   <a:srgbClr val="7A5C3A"/>
                 </a:solidFill>
@@ -3991,9 +4207,9 @@
                 <a:ea typeface="Calibri" pitchFamily="34" charset="-122"/>
                 <a:cs typeface="Calibri" pitchFamily="34" charset="-120"/>
               </a:rPr>
-              <a:t>Hipótesis planteadas</a:t>
-            </a:r>
-            <a:endParaRPr lang="es-ES_tradnl" sz="1100" noProof="1"/>
+              <a:t>Año de fundación</a:t>
+            </a:r>
+            <a:endParaRPr lang="en-US" sz="1100" dirty="0"/>
           </a:p>
         </p:txBody>
       </p:sp>
@@ -4005,7 +4221,7 @@
         </p:nvSpPr>
         <p:spPr>
           <a:xfrm>
-            <a:off x="502920" y="4366260"/>
+            <a:off x="525780" y="4326068"/>
             <a:ext cx="8412480" cy="640080"/>
           </a:xfrm>
           <a:prstGeom prst="rect">
@@ -4022,7 +4238,7 @@
               <a:buNone/>
             </a:pPr>
             <a:r>
-              <a:rPr lang="es-ES_tradnl" sz="1100" i="1" noProof="1">
+              <a:rPr lang="en-US" sz="1100" i="1" dirty="0">
                 <a:solidFill>
                   <a:srgbClr val="7A5C3A"/>
                 </a:solidFill>
@@ -4030,18 +4246,18 @@
                 <a:ea typeface="Calibri" pitchFamily="34" charset="-122"/>
                 <a:cs typeface="Calibri" pitchFamily="34" charset="-120"/>
               </a:rPr>
-              <a:t>Variables principales: title · author · rating · numRatings · genres · pages · bookFormat · awards · language · likedPercent · bbeScore</a:t>
-            </a:r>
-            <a:endParaRPr lang="es-ES_tradnl" sz="1100" noProof="1"/>
+              <a:t>Funcionalidades: catálogo de libros · valoraciones y reseñas · listas personales · rankings · comunidad social · seguimiento de lectura</a:t>
+            </a:r>
+            <a:endParaRPr lang="en-US" sz="1100" dirty="0"/>
           </a:p>
         </p:txBody>
       </p:sp>
       <p:pic>
         <p:nvPicPr>
-          <p:cNvPr id="20" name="Imagen 19">
+          <p:cNvPr id="19" name="Imagen 18">
             <a:extLst>
               <a:ext uri="{FF2B5EF4-FFF2-40B4-BE49-F238E27FC236}">
-                <a16:creationId xmlns:a16="http://schemas.microsoft.com/office/drawing/2014/main" id="{05352762-32D7-2476-999E-219F579C4235}"/>
+                <a16:creationId xmlns:a16="http://schemas.microsoft.com/office/drawing/2014/main" id="{AF0C3784-8EAD-FD36-EC38-B033E6C5D6C8}"/>
               </a:ext>
             </a:extLst>
           </p:cNvPr>
@@ -4051,7 +4267,7 @@
           <p:nvPr/>
         </p:nvPicPr>
         <p:blipFill>
-          <a:blip r:embed="rId3">
+          <a:blip r:embed="rId2">
             <a:alphaModFix/>
           </a:blip>
           <a:srcRect/>
@@ -4059,7 +4275,7 @@
         </p:blipFill>
         <p:spPr>
           <a:xfrm>
-            <a:off x="586322" y="1039003"/>
+            <a:off x="3501390" y="981667"/>
             <a:ext cx="2415539" cy="601201"/>
           </a:xfrm>
           <a:prstGeom prst="rect">
@@ -4067,35 +4283,6 @@
           </a:prstGeom>
           <a:noFill/>
           <a:effectLst/>
-        </p:spPr>
-      </p:pic>
-      <p:pic>
-        <p:nvPicPr>
-          <p:cNvPr id="22" name="Imagen 21">
-            <a:extLst>
-              <a:ext uri="{FF2B5EF4-FFF2-40B4-BE49-F238E27FC236}">
-                <a16:creationId xmlns:a16="http://schemas.microsoft.com/office/drawing/2014/main" id="{7BCE76F0-21FF-264F-2088-21C2D259BF0A}"/>
-              </a:ext>
-            </a:extLst>
-          </p:cNvPr>
-          <p:cNvPicPr>
-            <a:picLocks noChangeAspect="1"/>
-          </p:cNvPicPr>
-          <p:nvPr/>
-        </p:nvPicPr>
-        <p:blipFill>
-          <a:blip r:embed="rId4"/>
-          <a:srcRect t="17705" b="17705"/>
-          <a:stretch/>
-        </p:blipFill>
-        <p:spPr>
-          <a:xfrm>
-            <a:off x="7094220" y="1003266"/>
-            <a:ext cx="1821180" cy="782776"/>
-          </a:xfrm>
-          <a:prstGeom prst="rect">
-            <a:avLst/>
-          </a:prstGeom>
         </p:spPr>
       </p:pic>
     </p:spTree>
@@ -4107,6 +4294,734 @@
 </file>
 
 <file path=ppt/slides/slide3.xml><?xml version="1.0" encoding="utf-8"?>
+<p:sld xmlns:a="http://schemas.openxmlformats.org/drawingml/2006/main" xmlns:r="http://schemas.openxmlformats.org/officeDocument/2006/relationships" xmlns:p="http://schemas.openxmlformats.org/presentationml/2006/main">
+  <p:cSld>
+    <p:bg>
+      <p:bgPr>
+        <a:solidFill>
+          <a:srgbClr val="FDF7EC"/>
+        </a:solidFill>
+        <a:effectLst/>
+      </p:bgPr>
+    </p:bg>
+    <p:spTree>
+      <p:nvGrpSpPr>
+        <p:cNvPr id="1" name=""/>
+        <p:cNvGrpSpPr/>
+        <p:nvPr/>
+      </p:nvGrpSpPr>
+      <p:grpSpPr>
+        <a:xfrm>
+          <a:off x="0" y="0"/>
+          <a:ext cx="0" cy="0"/>
+          <a:chOff x="0" y="0"/>
+          <a:chExt cx="0" cy="0"/>
+        </a:xfrm>
+      </p:grpSpPr>
+      <p:sp>
+        <p:nvSpPr>
+          <p:cNvPr id="2" name="Shape 0"/>
+          <p:cNvSpPr/>
+          <p:nvPr/>
+        </p:nvSpPr>
+        <p:spPr>
+          <a:xfrm>
+            <a:off x="0" y="0"/>
+            <a:ext cx="9144000" cy="914400"/>
+          </a:xfrm>
+          <a:prstGeom prst="rect">
+            <a:avLst/>
+          </a:prstGeom>
+          <a:solidFill>
+            <a:srgbClr val="2C1A0E"/>
+          </a:solidFill>
+          <a:ln w="12700">
+            <a:solidFill>
+              <a:srgbClr val="2C1A0E"/>
+            </a:solidFill>
+            <a:prstDash val="solid"/>
+          </a:ln>
+        </p:spPr>
+        <p:txBody>
+          <a:bodyPr/>
+          <a:lstStyle/>
+          <a:p>
+            <a:endParaRPr lang="es-ES"/>
+          </a:p>
+        </p:txBody>
+      </p:sp>
+      <p:sp>
+        <p:nvSpPr>
+          <p:cNvPr id="3" name="Shape 1"/>
+          <p:cNvSpPr/>
+          <p:nvPr/>
+        </p:nvSpPr>
+        <p:spPr>
+          <a:xfrm>
+            <a:off x="0" y="0"/>
+            <a:ext cx="320040" cy="5143500"/>
+          </a:xfrm>
+          <a:prstGeom prst="rect">
+            <a:avLst/>
+          </a:prstGeom>
+          <a:solidFill>
+            <a:srgbClr val="C8860A"/>
+          </a:solidFill>
+          <a:ln w="12700">
+            <a:solidFill>
+              <a:srgbClr val="C8860A"/>
+            </a:solidFill>
+            <a:prstDash val="solid"/>
+          </a:ln>
+        </p:spPr>
+        <p:txBody>
+          <a:bodyPr/>
+          <a:lstStyle/>
+          <a:p>
+            <a:endParaRPr lang="es-ES"/>
+          </a:p>
+        </p:txBody>
+      </p:sp>
+      <p:sp>
+        <p:nvSpPr>
+          <p:cNvPr id="4" name="Text 2"/>
+          <p:cNvSpPr/>
+          <p:nvPr/>
+        </p:nvSpPr>
+        <p:spPr>
+          <a:xfrm>
+            <a:off x="502920" y="137160"/>
+            <a:ext cx="8412480" cy="640080"/>
+          </a:xfrm>
+          <a:prstGeom prst="rect">
+            <a:avLst/>
+          </a:prstGeom>
+          <a:noFill/>
+          <a:ln/>
+        </p:spPr>
+        <p:txBody>
+          <a:bodyPr wrap="square" lIns="0" tIns="0" rIns="0" bIns="0" rtlCol="0" anchor="ctr"/>
+          <a:lstStyle/>
+          <a:p>
+            <a:pPr marL="0" indent="0" algn="l">
+              <a:buNone/>
+            </a:pPr>
+            <a:r>
+              <a:rPr lang="en-US" sz="2200" b="1" dirty="0">
+                <a:solidFill>
+                  <a:srgbClr val="FDF6EC"/>
+                </a:solidFill>
+                <a:latin typeface="Georgia" pitchFamily="34" charset="0"/>
+                <a:ea typeface="Georgia" pitchFamily="34" charset="-122"/>
+                <a:cs typeface="Georgia" pitchFamily="34" charset="-120"/>
+              </a:rPr>
+              <a:t>¿Qué es Kaggle? El dataset</a:t>
+            </a:r>
+            <a:endParaRPr lang="en-US" sz="2200" dirty="0"/>
+          </a:p>
+        </p:txBody>
+      </p:sp>
+      <p:sp>
+        <p:nvSpPr>
+          <p:cNvPr id="5" name="Text 3"/>
+          <p:cNvSpPr/>
+          <p:nvPr/>
+        </p:nvSpPr>
+        <p:spPr>
+          <a:xfrm>
+            <a:off x="502919" y="1805940"/>
+            <a:ext cx="8412480" cy="1005840"/>
+          </a:xfrm>
+          <a:prstGeom prst="rect">
+            <a:avLst/>
+          </a:prstGeom>
+          <a:noFill/>
+          <a:ln/>
+        </p:spPr>
+        <p:txBody>
+          <a:bodyPr wrap="square" rtlCol="0" anchor="ctr"/>
+          <a:lstStyle/>
+          <a:p>
+            <a:pPr marL="0" indent="0" algn="l">
+              <a:buNone/>
+            </a:pPr>
+            <a:r>
+              <a:rPr lang="en-US" sz="1400" dirty="0">
+                <a:solidFill>
+                  <a:srgbClr val="1A0F00"/>
+                </a:solidFill>
+                <a:latin typeface="Calibri" pitchFamily="34" charset="0"/>
+                <a:ea typeface="Calibri" pitchFamily="34" charset="-122"/>
+                <a:cs typeface="Calibri" pitchFamily="34" charset="-120"/>
+              </a:rPr>
+              <a:t>Kaggle es la plataforma de ciencia de datos de Google. Ofrece datasets públicos, notebooks en la nube, competiciones con premios y una gran comunidad de científicos de datos.</a:t>
+            </a:r>
+            <a:endParaRPr lang="en-US" sz="1400" dirty="0"/>
+          </a:p>
+          <a:p>
+            <a:pPr marL="0" indent="0" algn="l">
+              <a:buNone/>
+            </a:pPr>
+            <a:r>
+              <a:rPr lang="en-US" sz="1400" dirty="0">
+                <a:solidFill>
+                  <a:srgbClr val="1A0F00"/>
+                </a:solidFill>
+                <a:latin typeface="Calibri" pitchFamily="34" charset="0"/>
+                <a:ea typeface="Calibri" pitchFamily="34" charset="-122"/>
+                <a:cs typeface="Calibri" pitchFamily="34" charset="-120"/>
+              </a:rPr>
+              <a:t>El dataset utilizado es "Comprehensive Overview of 52.478 GoodReads Best Books" publicado por The Devastator. Recoge los mejores libros de Goodreads con ratings, géneros, premios, páginas y más.</a:t>
+            </a:r>
+            <a:endParaRPr lang="en-US" sz="1400" dirty="0"/>
+          </a:p>
+        </p:txBody>
+      </p:sp>
+      <p:sp>
+        <p:nvSpPr>
+          <p:cNvPr id="6" name="Shape 4"/>
+          <p:cNvSpPr/>
+          <p:nvPr/>
+        </p:nvSpPr>
+        <p:spPr>
+          <a:xfrm>
+            <a:off x="502919" y="2994660"/>
+            <a:ext cx="1920240" cy="1371600"/>
+          </a:xfrm>
+          <a:prstGeom prst="rect">
+            <a:avLst/>
+          </a:prstGeom>
+          <a:solidFill>
+            <a:srgbClr val="FFFFFF"/>
+          </a:solidFill>
+          <a:ln w="12700">
+            <a:solidFill>
+              <a:srgbClr val="C8860A"/>
+            </a:solidFill>
+            <a:prstDash val="solid"/>
+          </a:ln>
+          <a:effectLst>
+            <a:outerShdw blurRad="101600" dist="38100" dir="8100000" algn="bl" rotWithShape="0">
+              <a:srgbClr val="000000">
+                <a:alpha val="12000"/>
+              </a:srgbClr>
+            </a:outerShdw>
+          </a:effectLst>
+        </p:spPr>
+        <p:txBody>
+          <a:bodyPr/>
+          <a:lstStyle/>
+          <a:p>
+            <a:endParaRPr lang="es-ES"/>
+          </a:p>
+        </p:txBody>
+      </p:sp>
+      <p:sp>
+        <p:nvSpPr>
+          <p:cNvPr id="7" name="Text 5"/>
+          <p:cNvSpPr/>
+          <p:nvPr/>
+        </p:nvSpPr>
+        <p:spPr>
+          <a:xfrm>
+            <a:off x="502919" y="3086100"/>
+            <a:ext cx="1920240" cy="640080"/>
+          </a:xfrm>
+          <a:prstGeom prst="rect">
+            <a:avLst/>
+          </a:prstGeom>
+          <a:noFill/>
+          <a:ln/>
+        </p:spPr>
+        <p:txBody>
+          <a:bodyPr wrap="square" rtlCol="0" anchor="ctr"/>
+          <a:lstStyle/>
+          <a:p>
+            <a:pPr marL="0" indent="0" algn="ctr">
+              <a:buNone/>
+            </a:pPr>
+            <a:r>
+              <a:rPr lang="en-US" sz="2600" b="1" dirty="0">
+                <a:solidFill>
+                  <a:srgbClr val="8B4513"/>
+                </a:solidFill>
+                <a:latin typeface="Georgia" pitchFamily="34" charset="0"/>
+                <a:ea typeface="Georgia" pitchFamily="34" charset="-122"/>
+                <a:cs typeface="Georgia" pitchFamily="34" charset="-120"/>
+              </a:rPr>
+              <a:t>52.478</a:t>
+            </a:r>
+            <a:endParaRPr lang="en-US" sz="2600" dirty="0"/>
+          </a:p>
+        </p:txBody>
+      </p:sp>
+      <p:sp>
+        <p:nvSpPr>
+          <p:cNvPr id="8" name="Text 6"/>
+          <p:cNvSpPr/>
+          <p:nvPr/>
+        </p:nvSpPr>
+        <p:spPr>
+          <a:xfrm>
+            <a:off x="502919" y="3726180"/>
+            <a:ext cx="1920240" cy="457200"/>
+          </a:xfrm>
+          <a:prstGeom prst="rect">
+            <a:avLst/>
+          </a:prstGeom>
+          <a:noFill/>
+          <a:ln/>
+        </p:spPr>
+        <p:txBody>
+          <a:bodyPr wrap="square" rtlCol="0" anchor="ctr"/>
+          <a:lstStyle/>
+          <a:p>
+            <a:pPr marL="0" indent="0" algn="ctr">
+              <a:buNone/>
+            </a:pPr>
+            <a:r>
+              <a:rPr lang="en-US" sz="1100" dirty="0">
+                <a:solidFill>
+                  <a:srgbClr val="7A5C3A"/>
+                </a:solidFill>
+                <a:latin typeface="Calibri" pitchFamily="34" charset="0"/>
+                <a:ea typeface="Calibri" pitchFamily="34" charset="-122"/>
+                <a:cs typeface="Calibri" pitchFamily="34" charset="-120"/>
+              </a:rPr>
+              <a:t>Libros originales</a:t>
+            </a:r>
+            <a:endParaRPr lang="en-US" sz="1100" dirty="0"/>
+          </a:p>
+        </p:txBody>
+      </p:sp>
+      <p:sp>
+        <p:nvSpPr>
+          <p:cNvPr id="9" name="Shape 7"/>
+          <p:cNvSpPr/>
+          <p:nvPr/>
+        </p:nvSpPr>
+        <p:spPr>
+          <a:xfrm>
+            <a:off x="2651759" y="2994660"/>
+            <a:ext cx="1920240" cy="1371600"/>
+          </a:xfrm>
+          <a:prstGeom prst="rect">
+            <a:avLst/>
+          </a:prstGeom>
+          <a:solidFill>
+            <a:srgbClr val="FFFFFF"/>
+          </a:solidFill>
+          <a:ln w="12700">
+            <a:solidFill>
+              <a:srgbClr val="C8860A"/>
+            </a:solidFill>
+            <a:prstDash val="solid"/>
+          </a:ln>
+          <a:effectLst>
+            <a:outerShdw blurRad="101600" dist="38100" dir="8100000" algn="bl" rotWithShape="0">
+              <a:srgbClr val="000000">
+                <a:alpha val="12000"/>
+              </a:srgbClr>
+            </a:outerShdw>
+          </a:effectLst>
+        </p:spPr>
+        <p:txBody>
+          <a:bodyPr/>
+          <a:lstStyle/>
+          <a:p>
+            <a:endParaRPr lang="es-ES"/>
+          </a:p>
+        </p:txBody>
+      </p:sp>
+      <p:sp>
+        <p:nvSpPr>
+          <p:cNvPr id="10" name="Text 8"/>
+          <p:cNvSpPr/>
+          <p:nvPr/>
+        </p:nvSpPr>
+        <p:spPr>
+          <a:xfrm>
+            <a:off x="2651759" y="3086100"/>
+            <a:ext cx="1920240" cy="640080"/>
+          </a:xfrm>
+          <a:prstGeom prst="rect">
+            <a:avLst/>
+          </a:prstGeom>
+          <a:noFill/>
+          <a:ln/>
+        </p:spPr>
+        <p:txBody>
+          <a:bodyPr wrap="square" rtlCol="0" anchor="ctr"/>
+          <a:lstStyle/>
+          <a:p>
+            <a:pPr marL="0" indent="0" algn="ctr">
+              <a:buNone/>
+            </a:pPr>
+            <a:r>
+              <a:rPr lang="en-US" sz="2600" b="1" dirty="0">
+                <a:solidFill>
+                  <a:srgbClr val="8B4513"/>
+                </a:solidFill>
+                <a:latin typeface="Georgia" pitchFamily="34" charset="0"/>
+                <a:ea typeface="Georgia" pitchFamily="34" charset="-122"/>
+                <a:cs typeface="Georgia" pitchFamily="34" charset="-120"/>
+              </a:rPr>
+              <a:t>~49.000</a:t>
+            </a:r>
+            <a:endParaRPr lang="en-US" sz="2600" dirty="0"/>
+          </a:p>
+        </p:txBody>
+      </p:sp>
+      <p:sp>
+        <p:nvSpPr>
+          <p:cNvPr id="11" name="Text 9"/>
+          <p:cNvSpPr/>
+          <p:nvPr/>
+        </p:nvSpPr>
+        <p:spPr>
+          <a:xfrm>
+            <a:off x="2651759" y="3726180"/>
+            <a:ext cx="1920240" cy="457200"/>
+          </a:xfrm>
+          <a:prstGeom prst="rect">
+            <a:avLst/>
+          </a:prstGeom>
+          <a:noFill/>
+          <a:ln/>
+        </p:spPr>
+        <p:txBody>
+          <a:bodyPr wrap="square" rtlCol="0" anchor="ctr"/>
+          <a:lstStyle/>
+          <a:p>
+            <a:pPr marL="0" indent="0" algn="ctr">
+              <a:buNone/>
+            </a:pPr>
+            <a:r>
+              <a:rPr lang="en-US" sz="1100" dirty="0">
+                <a:solidFill>
+                  <a:srgbClr val="7A5C3A"/>
+                </a:solidFill>
+                <a:latin typeface="Calibri" pitchFamily="34" charset="0"/>
+                <a:ea typeface="Calibri" pitchFamily="34" charset="-122"/>
+                <a:cs typeface="Calibri" pitchFamily="34" charset="-120"/>
+              </a:rPr>
+              <a:t>Tras limpieza</a:t>
+            </a:r>
+            <a:endParaRPr lang="en-US" sz="1100" dirty="0"/>
+          </a:p>
+        </p:txBody>
+      </p:sp>
+      <p:sp>
+        <p:nvSpPr>
+          <p:cNvPr id="12" name="Shape 10"/>
+          <p:cNvSpPr/>
+          <p:nvPr/>
+        </p:nvSpPr>
+        <p:spPr>
+          <a:xfrm>
+            <a:off x="4800599" y="2994660"/>
+            <a:ext cx="1920240" cy="1371600"/>
+          </a:xfrm>
+          <a:prstGeom prst="rect">
+            <a:avLst/>
+          </a:prstGeom>
+          <a:solidFill>
+            <a:srgbClr val="FFFFFF"/>
+          </a:solidFill>
+          <a:ln w="12700">
+            <a:solidFill>
+              <a:srgbClr val="C8860A"/>
+            </a:solidFill>
+            <a:prstDash val="solid"/>
+          </a:ln>
+          <a:effectLst>
+            <a:outerShdw blurRad="101600" dist="38100" dir="8100000" algn="bl" rotWithShape="0">
+              <a:srgbClr val="000000">
+                <a:alpha val="12000"/>
+              </a:srgbClr>
+            </a:outerShdw>
+          </a:effectLst>
+        </p:spPr>
+        <p:txBody>
+          <a:bodyPr/>
+          <a:lstStyle/>
+          <a:p>
+            <a:endParaRPr lang="es-ES"/>
+          </a:p>
+        </p:txBody>
+      </p:sp>
+      <p:sp>
+        <p:nvSpPr>
+          <p:cNvPr id="13" name="Text 11"/>
+          <p:cNvSpPr/>
+          <p:nvPr/>
+        </p:nvSpPr>
+        <p:spPr>
+          <a:xfrm>
+            <a:off x="4800599" y="3086100"/>
+            <a:ext cx="1920240" cy="640080"/>
+          </a:xfrm>
+          <a:prstGeom prst="rect">
+            <a:avLst/>
+          </a:prstGeom>
+          <a:noFill/>
+          <a:ln/>
+        </p:spPr>
+        <p:txBody>
+          <a:bodyPr wrap="square" rtlCol="0" anchor="ctr"/>
+          <a:lstStyle/>
+          <a:p>
+            <a:pPr marL="0" indent="0" algn="ctr">
+              <a:buNone/>
+            </a:pPr>
+            <a:r>
+              <a:rPr lang="en-US" sz="2600" b="1" dirty="0">
+                <a:solidFill>
+                  <a:srgbClr val="8B4513"/>
+                </a:solidFill>
+                <a:latin typeface="Georgia" pitchFamily="34" charset="0"/>
+                <a:ea typeface="Georgia" pitchFamily="34" charset="-122"/>
+                <a:cs typeface="Georgia" pitchFamily="34" charset="-120"/>
+              </a:rPr>
+              <a:t>25</a:t>
+            </a:r>
+            <a:endParaRPr lang="en-US" sz="2600" dirty="0"/>
+          </a:p>
+        </p:txBody>
+      </p:sp>
+      <p:sp>
+        <p:nvSpPr>
+          <p:cNvPr id="14" name="Text 12"/>
+          <p:cNvSpPr/>
+          <p:nvPr/>
+        </p:nvSpPr>
+        <p:spPr>
+          <a:xfrm>
+            <a:off x="4800599" y="3726180"/>
+            <a:ext cx="1920240" cy="457200"/>
+          </a:xfrm>
+          <a:prstGeom prst="rect">
+            <a:avLst/>
+          </a:prstGeom>
+          <a:noFill/>
+          <a:ln/>
+        </p:spPr>
+        <p:txBody>
+          <a:bodyPr wrap="square" rtlCol="0" anchor="ctr"/>
+          <a:lstStyle/>
+          <a:p>
+            <a:pPr marL="0" indent="0" algn="ctr">
+              <a:buNone/>
+            </a:pPr>
+            <a:r>
+              <a:rPr lang="en-US" sz="1100" dirty="0">
+                <a:solidFill>
+                  <a:srgbClr val="7A5C3A"/>
+                </a:solidFill>
+                <a:latin typeface="Calibri" pitchFamily="34" charset="0"/>
+                <a:ea typeface="Calibri" pitchFamily="34" charset="-122"/>
+                <a:cs typeface="Calibri" pitchFamily="34" charset="-120"/>
+              </a:rPr>
+              <a:t>Columnas originales</a:t>
+            </a:r>
+            <a:endParaRPr lang="en-US" sz="1100" dirty="0"/>
+          </a:p>
+        </p:txBody>
+      </p:sp>
+      <p:sp>
+        <p:nvSpPr>
+          <p:cNvPr id="15" name="Shape 13"/>
+          <p:cNvSpPr/>
+          <p:nvPr/>
+        </p:nvSpPr>
+        <p:spPr>
+          <a:xfrm>
+            <a:off x="6949439" y="2994660"/>
+            <a:ext cx="1920240" cy="1371600"/>
+          </a:xfrm>
+          <a:prstGeom prst="rect">
+            <a:avLst/>
+          </a:prstGeom>
+          <a:solidFill>
+            <a:srgbClr val="FFFFFF"/>
+          </a:solidFill>
+          <a:ln w="12700">
+            <a:solidFill>
+              <a:srgbClr val="C8860A"/>
+            </a:solidFill>
+            <a:prstDash val="solid"/>
+          </a:ln>
+          <a:effectLst>
+            <a:outerShdw blurRad="101600" dist="38100" dir="8100000" algn="bl" rotWithShape="0">
+              <a:srgbClr val="000000">
+                <a:alpha val="12000"/>
+              </a:srgbClr>
+            </a:outerShdw>
+          </a:effectLst>
+        </p:spPr>
+        <p:txBody>
+          <a:bodyPr/>
+          <a:lstStyle/>
+          <a:p>
+            <a:endParaRPr lang="es-ES"/>
+          </a:p>
+        </p:txBody>
+      </p:sp>
+      <p:sp>
+        <p:nvSpPr>
+          <p:cNvPr id="16" name="Text 14"/>
+          <p:cNvSpPr/>
+          <p:nvPr/>
+        </p:nvSpPr>
+        <p:spPr>
+          <a:xfrm>
+            <a:off x="6949439" y="3086100"/>
+            <a:ext cx="1920240" cy="640080"/>
+          </a:xfrm>
+          <a:prstGeom prst="rect">
+            <a:avLst/>
+          </a:prstGeom>
+          <a:noFill/>
+          <a:ln/>
+        </p:spPr>
+        <p:txBody>
+          <a:bodyPr wrap="square" rtlCol="0" anchor="ctr"/>
+          <a:lstStyle/>
+          <a:p>
+            <a:pPr marL="0" indent="0" algn="ctr">
+              <a:buNone/>
+            </a:pPr>
+            <a:r>
+              <a:rPr lang="en-US" sz="2600" b="1" dirty="0">
+                <a:solidFill>
+                  <a:srgbClr val="8B4513"/>
+                </a:solidFill>
+                <a:latin typeface="Georgia" pitchFamily="34" charset="0"/>
+                <a:ea typeface="Georgia" pitchFamily="34" charset="-122"/>
+                <a:cs typeface="Georgia" pitchFamily="34" charset="-120"/>
+              </a:rPr>
+              <a:t>10/10</a:t>
+            </a:r>
+            <a:endParaRPr lang="en-US" sz="2600" dirty="0"/>
+          </a:p>
+        </p:txBody>
+      </p:sp>
+      <p:sp>
+        <p:nvSpPr>
+          <p:cNvPr id="17" name="Text 15"/>
+          <p:cNvSpPr/>
+          <p:nvPr/>
+        </p:nvSpPr>
+        <p:spPr>
+          <a:xfrm>
+            <a:off x="6949439" y="3726180"/>
+            <a:ext cx="1920240" cy="457200"/>
+          </a:xfrm>
+          <a:prstGeom prst="rect">
+            <a:avLst/>
+          </a:prstGeom>
+          <a:noFill/>
+          <a:ln/>
+        </p:spPr>
+        <p:txBody>
+          <a:bodyPr wrap="square" rtlCol="0" anchor="ctr"/>
+          <a:lstStyle/>
+          <a:p>
+            <a:pPr marL="0" indent="0" algn="ctr">
+              <a:buNone/>
+            </a:pPr>
+            <a:r>
+              <a:rPr lang="en-US" sz="1100" dirty="0">
+                <a:solidFill>
+                  <a:srgbClr val="7A5C3A"/>
+                </a:solidFill>
+                <a:latin typeface="Calibri" pitchFamily="34" charset="0"/>
+                <a:ea typeface="Calibri" pitchFamily="34" charset="-122"/>
+                <a:cs typeface="Calibri" pitchFamily="34" charset="-120"/>
+              </a:rPr>
+              <a:t>Usabilidad Kaggle</a:t>
+            </a:r>
+            <a:endParaRPr lang="en-US" sz="1100" dirty="0"/>
+          </a:p>
+        </p:txBody>
+      </p:sp>
+      <p:sp>
+        <p:nvSpPr>
+          <p:cNvPr id="18" name="Text 16"/>
+          <p:cNvSpPr/>
+          <p:nvPr/>
+        </p:nvSpPr>
+        <p:spPr>
+          <a:xfrm>
+            <a:off x="502920" y="4366260"/>
+            <a:ext cx="8412480" cy="640080"/>
+          </a:xfrm>
+          <a:prstGeom prst="rect">
+            <a:avLst/>
+          </a:prstGeom>
+          <a:noFill/>
+          <a:ln/>
+        </p:spPr>
+        <p:txBody>
+          <a:bodyPr wrap="square" rtlCol="0" anchor="ctr"/>
+          <a:lstStyle/>
+          <a:p>
+            <a:pPr marL="0" indent="0" algn="l">
+              <a:buNone/>
+            </a:pPr>
+            <a:r>
+              <a:rPr lang="en-US" sz="1100" i="1" dirty="0">
+                <a:solidFill>
+                  <a:srgbClr val="7A5C3A"/>
+                </a:solidFill>
+                <a:latin typeface="Calibri" pitchFamily="34" charset="0"/>
+                <a:ea typeface="Calibri" pitchFamily="34" charset="-122"/>
+                <a:cs typeface="Calibri" pitchFamily="34" charset="-120"/>
+              </a:rPr>
+              <a:t>Variables principales: title · author · rating · numRatings · genres · pages · bookFormat · awards · language · likedPercent · bbeScore</a:t>
+            </a:r>
+            <a:endParaRPr lang="en-US" sz="1100" dirty="0"/>
+          </a:p>
+        </p:txBody>
+      </p:sp>
+      <p:pic>
+        <p:nvPicPr>
+          <p:cNvPr id="20" name="Imagen 19">
+            <a:extLst>
+              <a:ext uri="{FF2B5EF4-FFF2-40B4-BE49-F238E27FC236}">
+                <a16:creationId xmlns:a16="http://schemas.microsoft.com/office/drawing/2014/main" id="{B1EBA698-67FE-D8F6-C9AA-FEFE0343A78D}"/>
+              </a:ext>
+            </a:extLst>
+          </p:cNvPr>
+          <p:cNvPicPr>
+            <a:picLocks noChangeAspect="1"/>
+          </p:cNvPicPr>
+          <p:nvPr/>
+        </p:nvPicPr>
+        <p:blipFill>
+          <a:blip r:embed="rId2"/>
+          <a:srcRect t="19016" b="19016"/>
+          <a:stretch/>
+        </p:blipFill>
+        <p:spPr>
+          <a:xfrm>
+            <a:off x="3507288" y="973890"/>
+            <a:ext cx="2129421" cy="878095"/>
+          </a:xfrm>
+          <a:prstGeom prst="rect">
+            <a:avLst/>
+          </a:prstGeom>
+        </p:spPr>
+      </p:pic>
+    </p:spTree>
+  </p:cSld>
+  <p:clrMapOvr>
+    <a:masterClrMapping/>
+  </p:clrMapOvr>
+</p:sld>
+</file>
+
+<file path=ppt/slides/slide4.xml><?xml version="1.0" encoding="utf-8"?>
 <p:sld xmlns:a="http://schemas.openxmlformats.org/drawingml/2006/main" xmlns:r="http://schemas.openxmlformats.org/officeDocument/2006/relationships" xmlns:p="http://schemas.openxmlformats.org/presentationml/2006/main">
   <p:cSld name="Slide 3">
     <p:bg>
@@ -4987,7 +5902,7 @@
 </p:sld>
 </file>
 
-<file path=ppt/slides/slide4.xml><?xml version="1.0" encoding="utf-8"?>
+<file path=ppt/slides/slide5.xml><?xml version="1.0" encoding="utf-8"?>
 <p:sld xmlns:a="http://schemas.openxmlformats.org/drawingml/2006/main" xmlns:r="http://schemas.openxmlformats.org/officeDocument/2006/relationships" xmlns:p="http://schemas.openxmlformats.org/presentationml/2006/main">
   <p:cSld name="Slide 4">
     <p:bg>
@@ -5731,7 +6646,7 @@
 </p:sld>
 </file>
 
-<file path=ppt/slides/slide5.xml><?xml version="1.0" encoding="utf-8"?>
+<file path=ppt/slides/slide6.xml><?xml version="1.0" encoding="utf-8"?>
 <p:sld xmlns:a="http://schemas.openxmlformats.org/drawingml/2006/main" xmlns:r="http://schemas.openxmlformats.org/officeDocument/2006/relationships" xmlns:p="http://schemas.openxmlformats.org/presentationml/2006/main">
   <p:cSld name="Slide 5">
     <p:bg>
@@ -6306,7 +7221,7 @@
 </p:sld>
 </file>
 
-<file path=ppt/slides/slide6.xml><?xml version="1.0" encoding="utf-8"?>
+<file path=ppt/slides/slide7.xml><?xml version="1.0" encoding="utf-8"?>
 <p:sld xmlns:a="http://schemas.openxmlformats.org/drawingml/2006/main" xmlns:r="http://schemas.openxmlformats.org/officeDocument/2006/relationships" xmlns:p="http://schemas.openxmlformats.org/presentationml/2006/main">
   <p:cSld name="Slide 6">
     <p:bg>
@@ -6537,7 +7452,7 @@
 </p:sld>
 </file>
 
-<file path=ppt/slides/slide7.xml><?xml version="1.0" encoding="utf-8"?>
+<file path=ppt/slides/slide8.xml><?xml version="1.0" encoding="utf-8"?>
 <p:sld xmlns:a="http://schemas.openxmlformats.org/drawingml/2006/main" xmlns:r="http://schemas.openxmlformats.org/officeDocument/2006/relationships" xmlns:p="http://schemas.openxmlformats.org/presentationml/2006/main">
   <p:cSld name="Slide 7">
     <p:bg>
@@ -6697,8 +7612,8 @@
         </p:nvSpPr>
         <p:spPr>
           <a:xfrm>
-            <a:off x="502920" y="4343400"/>
-            <a:ext cx="8321040" cy="502920"/>
+            <a:off x="502920" y="4297680"/>
+            <a:ext cx="8321040" cy="708660"/>
           </a:xfrm>
           <a:prstGeom prst="rect">
             <a:avLst/>
@@ -6729,8 +7644,8 @@
         </p:nvSpPr>
         <p:spPr>
           <a:xfrm>
-            <a:off x="502920" y="4343400"/>
-            <a:ext cx="8321040" cy="502920"/>
+            <a:off x="502920" y="4297680"/>
+            <a:ext cx="8321040" cy="708660"/>
           </a:xfrm>
           <a:prstGeom prst="rect">
             <a:avLst/>
@@ -6754,7 +7669,7 @@
                 <a:ea typeface="Calibri" pitchFamily="34" charset="-122"/>
                 <a:cs typeface="Calibri" pitchFamily="34" charset="-120"/>
               </a:rPr>
-              <a:t>H2 — RECHAZADA: El Hardcover obtiene el rating más bajo (3,99). Los formatos digitales (Kindle 4,12 / ebook 4,07) lideran. El Mass Market Paperback es el más valorado por número de reseñas.</a:t>
+              <a:t>H2 — RECHAZADA: Hardcover tiene el rating más bajo (3,99) pese a ser el 2º formato más valorado (26.502 valoraciones/libro). Los formatos digitales lideran en rating: Kindle 4,12 · ebook 4,07. Posible sesgo de selección: solo los títulos más populares se publican en digital.</a:t>
             </a:r>
             <a:endParaRPr lang="es-ES_tradnl" sz="1200" noProof="1"/>
           </a:p>
@@ -6768,7 +7683,7 @@
 </p:sld>
 </file>
 
-<file path=ppt/slides/slide8.xml><?xml version="1.0" encoding="utf-8"?>
+<file path=ppt/slides/slide9.xml><?xml version="1.0" encoding="utf-8"?>
 <p:sld xmlns:a="http://schemas.openxmlformats.org/drawingml/2006/main" xmlns:r="http://schemas.openxmlformats.org/officeDocument/2006/relationships" xmlns:p="http://schemas.openxmlformats.org/presentationml/2006/main">
   <p:cSld name="Slide 8">
     <p:bg>
@@ -7049,261 +7964,6 @@
           </a:prstGeom>
         </p:spPr>
       </p:pic>
-    </p:spTree>
-  </p:cSld>
-  <p:clrMapOvr>
-    <a:masterClrMapping/>
-  </p:clrMapOvr>
-</p:sld>
-</file>
-
-<file path=ppt/slides/slide9.xml><?xml version="1.0" encoding="utf-8"?>
-<p:sld xmlns:a="http://schemas.openxmlformats.org/drawingml/2006/main" xmlns:r="http://schemas.openxmlformats.org/officeDocument/2006/relationships" xmlns:p="http://schemas.openxmlformats.org/presentationml/2006/main">
-  <p:cSld name="Slide 9">
-    <p:bg>
-      <p:bgPr>
-        <a:solidFill>
-          <a:srgbClr val="FDF6EC"/>
-        </a:solidFill>
-        <a:effectLst/>
-      </p:bgPr>
-    </p:bg>
-    <p:spTree>
-      <p:nvGrpSpPr>
-        <p:cNvPr id="1" name=""/>
-        <p:cNvGrpSpPr/>
-        <p:nvPr/>
-      </p:nvGrpSpPr>
-      <p:grpSpPr>
-        <a:xfrm>
-          <a:off x="0" y="0"/>
-          <a:ext cx="0" cy="0"/>
-          <a:chOff x="0" y="0"/>
-          <a:chExt cx="0" cy="0"/>
-        </a:xfrm>
-      </p:grpSpPr>
-      <p:sp>
-        <p:nvSpPr>
-          <p:cNvPr id="2" name="Shape 0"/>
-          <p:cNvSpPr/>
-          <p:nvPr/>
-        </p:nvSpPr>
-        <p:spPr>
-          <a:xfrm>
-            <a:off x="0" y="0"/>
-            <a:ext cx="9144000" cy="914400"/>
-          </a:xfrm>
-          <a:prstGeom prst="rect">
-            <a:avLst/>
-          </a:prstGeom>
-          <a:solidFill>
-            <a:srgbClr val="2C1A0E"/>
-          </a:solidFill>
-          <a:ln w="12700">
-            <a:solidFill>
-              <a:srgbClr val="2C1A0E"/>
-            </a:solidFill>
-            <a:prstDash val="solid"/>
-          </a:ln>
-        </p:spPr>
-        <p:txBody>
-          <a:bodyPr/>
-          <a:lstStyle/>
-          <a:p>
-            <a:endParaRPr lang="es-ES_tradnl" noProof="1"/>
-          </a:p>
-        </p:txBody>
-      </p:sp>
-      <p:sp>
-        <p:nvSpPr>
-          <p:cNvPr id="3" name="Shape 1"/>
-          <p:cNvSpPr/>
-          <p:nvPr/>
-        </p:nvSpPr>
-        <p:spPr>
-          <a:xfrm>
-            <a:off x="0" y="0"/>
-            <a:ext cx="320040" cy="5143500"/>
-          </a:xfrm>
-          <a:prstGeom prst="rect">
-            <a:avLst/>
-          </a:prstGeom>
-          <a:solidFill>
-            <a:srgbClr val="C8860A"/>
-          </a:solidFill>
-          <a:ln w="12700">
-            <a:solidFill>
-              <a:srgbClr val="C8860A"/>
-            </a:solidFill>
-            <a:prstDash val="solid"/>
-          </a:ln>
-        </p:spPr>
-        <p:txBody>
-          <a:bodyPr/>
-          <a:lstStyle/>
-          <a:p>
-            <a:endParaRPr lang="es-ES_tradnl" noProof="1"/>
-          </a:p>
-        </p:txBody>
-      </p:sp>
-      <p:sp>
-        <p:nvSpPr>
-          <p:cNvPr id="4" name="Text 2"/>
-          <p:cNvSpPr/>
-          <p:nvPr/>
-        </p:nvSpPr>
-        <p:spPr>
-          <a:xfrm>
-            <a:off x="502920" y="137160"/>
-            <a:ext cx="8412480" cy="640080"/>
-          </a:xfrm>
-          <a:prstGeom prst="rect">
-            <a:avLst/>
-          </a:prstGeom>
-          <a:noFill/>
-          <a:ln/>
-        </p:spPr>
-        <p:txBody>
-          <a:bodyPr wrap="square" lIns="0" tIns="0" rIns="0" bIns="0" rtlCol="0" anchor="ctr"/>
-          <a:lstStyle/>
-          <a:p>
-            <a:pPr marL="0" indent="0" algn="l">
-              <a:buNone/>
-            </a:pPr>
-            <a:r>
-              <a:rPr lang="es-ES_tradnl" sz="2000" b="1" noProof="1">
-                <a:solidFill>
-                  <a:srgbClr val="FDF6EC"/>
-                </a:solidFill>
-                <a:latin typeface="Georgia" pitchFamily="34" charset="0"/>
-                <a:ea typeface="Georgia" pitchFamily="34" charset="-122"/>
-                <a:cs typeface="Georgia" pitchFamily="34" charset="-120"/>
-              </a:rPr>
-              <a:t>H4 &amp; H5 — Autores populares: valoraciones y premios</a:t>
-            </a:r>
-            <a:endParaRPr lang="es-ES_tradnl" sz="2000" noProof="1"/>
-          </a:p>
-        </p:txBody>
-      </p:sp>
-      <p:pic>
-        <p:nvPicPr>
-          <p:cNvPr id="500" name="h4_autores"/>
-          <p:cNvPicPr>
-            <a:picLocks noChangeAspect="1"/>
-          </p:cNvPicPr>
-          <p:nvPr/>
-        </p:nvPicPr>
-        <p:blipFill>
-          <a:blip r:embed="rId3"/>
-          <a:stretch>
-            <a:fillRect/>
-          </a:stretch>
-        </p:blipFill>
-        <p:spPr>
-          <a:xfrm>
-            <a:off x="502920" y="1051560"/>
-            <a:ext cx="3931920" cy="3108960"/>
-          </a:xfrm>
-          <a:prstGeom prst="rect">
-            <a:avLst/>
-          </a:prstGeom>
-        </p:spPr>
-      </p:pic>
-      <p:pic>
-        <p:nvPicPr>
-          <p:cNvPr id="501" name="h5_premios"/>
-          <p:cNvPicPr>
-            <a:picLocks noChangeAspect="1"/>
-          </p:cNvPicPr>
-          <p:nvPr/>
-        </p:nvPicPr>
-        <p:blipFill>
-          <a:blip r:embed="rId4"/>
-          <a:stretch>
-            <a:fillRect/>
-          </a:stretch>
-        </p:blipFill>
-        <p:spPr>
-          <a:xfrm>
-            <a:off x="4800600" y="1051560"/>
-            <a:ext cx="3931920" cy="3108960"/>
-          </a:xfrm>
-          <a:prstGeom prst="rect">
-            <a:avLst/>
-          </a:prstGeom>
-        </p:spPr>
-      </p:pic>
-      <p:sp>
-        <p:nvSpPr>
-          <p:cNvPr id="9" name="Shape 7"/>
-          <p:cNvSpPr/>
-          <p:nvPr/>
-        </p:nvSpPr>
-        <p:spPr>
-          <a:xfrm>
-            <a:off x="502920" y="4343400"/>
-            <a:ext cx="8321040" cy="502920"/>
-          </a:xfrm>
-          <a:prstGeom prst="rect">
-            <a:avLst/>
-          </a:prstGeom>
-          <a:solidFill>
-            <a:srgbClr val="F5E6CC"/>
-          </a:solidFill>
-          <a:ln w="12700">
-            <a:solidFill>
-              <a:srgbClr val="C8860A"/>
-            </a:solidFill>
-            <a:prstDash val="solid"/>
-          </a:ln>
-        </p:spPr>
-        <p:txBody>
-          <a:bodyPr/>
-          <a:lstStyle/>
-          <a:p>
-            <a:endParaRPr lang="es-ES_tradnl" noProof="1"/>
-          </a:p>
-        </p:txBody>
-      </p:sp>
-      <p:sp>
-        <p:nvSpPr>
-          <p:cNvPr id="10" name="Text 8"/>
-          <p:cNvSpPr/>
-          <p:nvPr/>
-        </p:nvSpPr>
-        <p:spPr>
-          <a:xfrm>
-            <a:off x="502920" y="4343400"/>
-            <a:ext cx="8321040" cy="502920"/>
-          </a:xfrm>
-          <a:prstGeom prst="rect">
-            <a:avLst/>
-          </a:prstGeom>
-          <a:noFill/>
-          <a:ln/>
-        </p:spPr>
-        <p:txBody>
-          <a:bodyPr wrap="square" rtlCol="0" anchor="ctr"/>
-          <a:lstStyle/>
-          <a:p>
-            <a:pPr marL="0" indent="0" algn="ctr">
-              <a:buNone/>
-            </a:pPr>
-            <a:r>
-              <a:rPr lang="es-ES_tradnl" sz="1200" i="1" noProof="1">
-                <a:solidFill>
-                  <a:srgbClr val="8B4513"/>
-                </a:solidFill>
-                <a:latin typeface="Calibri" pitchFamily="34" charset="0"/>
-                <a:ea typeface="Calibri" pitchFamily="34" charset="-122"/>
-                <a:cs typeface="Calibri" pitchFamily="34" charset="-120"/>
-              </a:rPr>
-              <a:t>H4 CONFIRMADA: J.K. Rowling acumula +24M valoraciones, muy por encima del resto. H5 CONFIRMADA: autores populares tienen 2,44 premios de media vs 0,47 de los no populares.</a:t>
-            </a:r>
-            <a:endParaRPr lang="es-ES_tradnl" sz="1200" noProof="1"/>
-          </a:p>
-        </p:txBody>
-      </p:sp>
     </p:spTree>
   </p:cSld>
   <p:clrMapOvr>

--- a/Presentacion/EDA_Goodreads.pptx
+++ b/Presentacion/EDA_Goodreads.pptx
@@ -1882,7 +1882,7 @@
               <a:buNone/>
             </a:pPr>
             <a:r>
-              <a:rPr lang="es-ES_tradnl" sz="1200" i="1" noProof="1">
+              <a:rPr lang="es-ES_tradnl" sz="1300" i="1" noProof="1">
                 <a:solidFill>
                   <a:srgbClr val="8B4513"/>
                 </a:solidFill>
@@ -1892,7 +1892,7 @@
               </a:rPr>
               <a:t>H4 CONFIRMADA: J.K. Rowling acumula +24M valoraciones, muy por encima del resto. H5 CONFIRMADA: autores populares tienen 2,44 premios de media vs 0,47 de los no populares.</a:t>
             </a:r>
-            <a:endParaRPr lang="es-ES_tradnl" sz="1200" noProof="1"/>
+            <a:endParaRPr lang="es-ES_tradnl" sz="1300" noProof="1"/>
           </a:p>
         </p:txBody>
       </p:sp>
@@ -2008,7 +2008,7 @@
         </p:nvSpPr>
         <p:spPr>
           <a:xfrm>
-            <a:off x="1280160" y="1143000"/>
+            <a:off x="1193896" y="1371600"/>
             <a:ext cx="1234440" cy="2560320"/>
           </a:xfrm>
           <a:prstGeom prst="rect">
@@ -2040,7 +2040,7 @@
         </p:nvSpPr>
         <p:spPr>
           <a:xfrm>
-            <a:off x="1280160" y="1143000"/>
+            <a:off x="1193896" y="1371600"/>
             <a:ext cx="1234440" cy="457200"/>
           </a:xfrm>
           <a:prstGeom prst="rect">
@@ -2072,7 +2072,7 @@
         </p:nvSpPr>
         <p:spPr>
           <a:xfrm>
-            <a:off x="1280160" y="1143000"/>
+            <a:off x="1193896" y="1371600"/>
             <a:ext cx="1234440" cy="457200"/>
           </a:xfrm>
           <a:prstGeom prst="rect">
@@ -2111,7 +2111,7 @@
         </p:nvSpPr>
         <p:spPr>
           <a:xfrm>
-            <a:off x="1280160" y="1645920"/>
+            <a:off x="1193896" y="1874520"/>
             <a:ext cx="1234440" cy="731520"/>
           </a:xfrm>
           <a:prstGeom prst="rect">
@@ -2128,7 +2128,7 @@
               <a:buNone/>
             </a:pPr>
             <a:r>
-              <a:rPr lang="es-ES_tradnl" sz="1000" noProof="1">
+              <a:rPr lang="es-ES_tradnl" sz="1200" noProof="1">
                 <a:solidFill>
                   <a:srgbClr val="FDF6EC"/>
                 </a:solidFill>
@@ -2138,14 +2138,14 @@
               </a:rPr>
               <a:t>Páginas</a:t>
             </a:r>
-            <a:endParaRPr lang="es-ES_tradnl" sz="1000" noProof="1"/>
+            <a:endParaRPr lang="es-ES_tradnl" sz="1200" noProof="1"/>
           </a:p>
           <a:p>
             <a:pPr marL="0" indent="0" algn="ctr">
               <a:buNone/>
             </a:pPr>
             <a:r>
-              <a:rPr lang="es-ES_tradnl" sz="1000" noProof="1">
+              <a:rPr lang="es-ES_tradnl" sz="1200" noProof="1">
                 <a:solidFill>
                   <a:srgbClr val="FDF6EC"/>
                 </a:solidFill>
@@ -2155,7 +2155,7 @@
               </a:rPr>
               <a:t>vs Rating</a:t>
             </a:r>
-            <a:endParaRPr lang="es-ES_tradnl" sz="1000" noProof="1"/>
+            <a:endParaRPr lang="es-ES_tradnl" sz="1200" noProof="1"/>
           </a:p>
         </p:txBody>
       </p:sp>
@@ -2167,7 +2167,7 @@
         </p:nvSpPr>
         <p:spPr>
           <a:xfrm>
-            <a:off x="1371600" y="2514600"/>
+            <a:off x="1285336" y="2743200"/>
             <a:ext cx="1051560" cy="640080"/>
           </a:xfrm>
           <a:prstGeom prst="rect">
@@ -2199,7 +2199,7 @@
         </p:nvSpPr>
         <p:spPr>
           <a:xfrm>
-            <a:off x="1371600" y="2514600"/>
+            <a:off x="1285336" y="2743200"/>
             <a:ext cx="1051560" cy="640080"/>
           </a:xfrm>
           <a:prstGeom prst="rect">
@@ -2255,7 +2255,7 @@
         </p:nvSpPr>
         <p:spPr>
           <a:xfrm>
-            <a:off x="2697480" y="1143000"/>
+            <a:off x="2611216" y="1371600"/>
             <a:ext cx="1234440" cy="2560320"/>
           </a:xfrm>
           <a:prstGeom prst="rect">
@@ -2287,7 +2287,7 @@
         </p:nvSpPr>
         <p:spPr>
           <a:xfrm>
-            <a:off x="2697480" y="1143000"/>
+            <a:off x="2611216" y="1371600"/>
             <a:ext cx="1234440" cy="457200"/>
           </a:xfrm>
           <a:prstGeom prst="rect">
@@ -2319,7 +2319,7 @@
         </p:nvSpPr>
         <p:spPr>
           <a:xfrm>
-            <a:off x="2697480" y="1143000"/>
+            <a:off x="2611216" y="1371600"/>
             <a:ext cx="1234440" cy="457200"/>
           </a:xfrm>
           <a:prstGeom prst="rect">
@@ -2358,7 +2358,7 @@
         </p:nvSpPr>
         <p:spPr>
           <a:xfrm>
-            <a:off x="2697480" y="1645920"/>
+            <a:off x="2611216" y="1874520"/>
             <a:ext cx="1234440" cy="731520"/>
           </a:xfrm>
           <a:prstGeom prst="rect">
@@ -2375,7 +2375,7 @@
               <a:buNone/>
             </a:pPr>
             <a:r>
-              <a:rPr lang="es-ES_tradnl" sz="1000" noProof="1">
+              <a:rPr lang="es-ES_tradnl" sz="1200" noProof="1">
                 <a:solidFill>
                   <a:srgbClr val="FDF6EC"/>
                 </a:solidFill>
@@ -2385,14 +2385,14 @@
               </a:rPr>
               <a:t>Hardcover</a:t>
             </a:r>
-            <a:endParaRPr lang="es-ES_tradnl" sz="1000" noProof="1"/>
+            <a:endParaRPr lang="es-ES_tradnl" sz="1200" noProof="1"/>
           </a:p>
           <a:p>
             <a:pPr marL="0" indent="0" algn="ctr">
               <a:buNone/>
             </a:pPr>
             <a:r>
-              <a:rPr lang="es-ES_tradnl" sz="1000" noProof="1">
+              <a:rPr lang="es-ES_tradnl" sz="1200" noProof="1">
                 <a:solidFill>
                   <a:srgbClr val="FDF6EC"/>
                 </a:solidFill>
@@ -2402,7 +2402,7 @@
               </a:rPr>
               <a:t>vs Rating</a:t>
             </a:r>
-            <a:endParaRPr lang="es-ES_tradnl" sz="1000" noProof="1"/>
+            <a:endParaRPr lang="es-ES_tradnl" sz="1200" noProof="1"/>
           </a:p>
         </p:txBody>
       </p:sp>
@@ -2414,7 +2414,7 @@
         </p:nvSpPr>
         <p:spPr>
           <a:xfrm>
-            <a:off x="2788920" y="2514600"/>
+            <a:off x="2702656" y="2743200"/>
             <a:ext cx="1051560" cy="640080"/>
           </a:xfrm>
           <a:prstGeom prst="rect">
@@ -2446,7 +2446,7 @@
         </p:nvSpPr>
         <p:spPr>
           <a:xfrm>
-            <a:off x="2788920" y="2514600"/>
+            <a:off x="2702656" y="2743200"/>
             <a:ext cx="1051560" cy="640080"/>
           </a:xfrm>
           <a:prstGeom prst="rect">
@@ -2502,7 +2502,7 @@
         </p:nvSpPr>
         <p:spPr>
           <a:xfrm>
-            <a:off x="4114800" y="1143000"/>
+            <a:off x="4028536" y="1371600"/>
             <a:ext cx="1234440" cy="2560320"/>
           </a:xfrm>
           <a:prstGeom prst="rect">
@@ -2534,7 +2534,7 @@
         </p:nvSpPr>
         <p:spPr>
           <a:xfrm>
-            <a:off x="4114800" y="1143000"/>
+            <a:off x="4028536" y="1371600"/>
             <a:ext cx="1234440" cy="457200"/>
           </a:xfrm>
           <a:prstGeom prst="rect">
@@ -2566,7 +2566,7 @@
         </p:nvSpPr>
         <p:spPr>
           <a:xfrm>
-            <a:off x="4114800" y="1143000"/>
+            <a:off x="4028536" y="1371600"/>
             <a:ext cx="1234440" cy="457200"/>
           </a:xfrm>
           <a:prstGeom prst="rect">
@@ -2605,7 +2605,7 @@
         </p:nvSpPr>
         <p:spPr>
           <a:xfrm>
-            <a:off x="4114800" y="1645920"/>
+            <a:off x="4028536" y="1874520"/>
             <a:ext cx="1234440" cy="731520"/>
           </a:xfrm>
           <a:prstGeom prst="rect">
@@ -2622,7 +2622,7 @@
               <a:buNone/>
             </a:pPr>
             <a:r>
-              <a:rPr lang="es-ES_tradnl" sz="1000" noProof="1">
+              <a:rPr lang="es-ES_tradnl" sz="1200" noProof="1">
                 <a:solidFill>
                   <a:srgbClr val="FDF6EC"/>
                 </a:solidFill>
@@ -2632,14 +2632,14 @@
               </a:rPr>
               <a:t>Series</a:t>
             </a:r>
-            <a:endParaRPr lang="es-ES_tradnl" sz="1000" noProof="1"/>
+            <a:endParaRPr lang="es-ES_tradnl" sz="1200" noProof="1"/>
           </a:p>
           <a:p>
             <a:pPr marL="0" indent="0" algn="ctr">
               <a:buNone/>
             </a:pPr>
             <a:r>
-              <a:rPr lang="es-ES_tradnl" sz="1000" noProof="1">
+              <a:rPr lang="es-ES_tradnl" sz="1200" noProof="1">
                 <a:solidFill>
                   <a:srgbClr val="FDF6EC"/>
                 </a:solidFill>
@@ -2649,7 +2649,7 @@
               </a:rPr>
               <a:t>vs Rating</a:t>
             </a:r>
-            <a:endParaRPr lang="es-ES_tradnl" sz="1000" noProof="1"/>
+            <a:endParaRPr lang="es-ES_tradnl" sz="1200" noProof="1"/>
           </a:p>
         </p:txBody>
       </p:sp>
@@ -2661,7 +2661,7 @@
         </p:nvSpPr>
         <p:spPr>
           <a:xfrm>
-            <a:off x="4206240" y="2514600"/>
+            <a:off x="4119976" y="2743200"/>
             <a:ext cx="1051560" cy="640080"/>
           </a:xfrm>
           <a:prstGeom prst="rect">
@@ -2693,7 +2693,7 @@
         </p:nvSpPr>
         <p:spPr>
           <a:xfrm>
-            <a:off x="4206240" y="2514600"/>
+            <a:off x="4119976" y="2743200"/>
             <a:ext cx="1051560" cy="640080"/>
           </a:xfrm>
           <a:prstGeom prst="rect">
@@ -2749,7 +2749,7 @@
         </p:nvSpPr>
         <p:spPr>
           <a:xfrm>
-            <a:off x="5532120" y="1143000"/>
+            <a:off x="5445856" y="1371600"/>
             <a:ext cx="1234440" cy="2560320"/>
           </a:xfrm>
           <a:prstGeom prst="rect">
@@ -2781,7 +2781,7 @@
         </p:nvSpPr>
         <p:spPr>
           <a:xfrm>
-            <a:off x="5532120" y="1143000"/>
+            <a:off x="5445856" y="1371600"/>
             <a:ext cx="1234440" cy="457200"/>
           </a:xfrm>
           <a:prstGeom prst="rect">
@@ -2813,7 +2813,7 @@
         </p:nvSpPr>
         <p:spPr>
           <a:xfrm>
-            <a:off x="5532120" y="1143000"/>
+            <a:off x="5445856" y="1371600"/>
             <a:ext cx="1234440" cy="457200"/>
           </a:xfrm>
           <a:prstGeom prst="rect">
@@ -2852,7 +2852,7 @@
         </p:nvSpPr>
         <p:spPr>
           <a:xfrm>
-            <a:off x="5532120" y="1645920"/>
+            <a:off x="5445856" y="1874520"/>
             <a:ext cx="1234440" cy="731520"/>
           </a:xfrm>
           <a:prstGeom prst="rect">
@@ -2869,7 +2869,7 @@
               <a:buNone/>
             </a:pPr>
             <a:r>
-              <a:rPr lang="es-ES_tradnl" sz="1000" noProof="1">
+              <a:rPr lang="es-ES_tradnl" sz="1200" noProof="1">
                 <a:solidFill>
                   <a:srgbClr val="FDF6EC"/>
                 </a:solidFill>
@@ -2879,14 +2879,14 @@
               </a:rPr>
               <a:t>Valoraciones</a:t>
             </a:r>
-            <a:endParaRPr lang="es-ES_tradnl" sz="1000" noProof="1"/>
+            <a:endParaRPr lang="es-ES_tradnl" sz="1200" noProof="1"/>
           </a:p>
           <a:p>
             <a:pPr marL="0" indent="0" algn="ctr">
               <a:buNone/>
             </a:pPr>
             <a:r>
-              <a:rPr lang="es-ES_tradnl" sz="1000" noProof="1">
+              <a:rPr lang="es-ES_tradnl" sz="1200" noProof="1">
                 <a:solidFill>
                   <a:srgbClr val="FDF6EC"/>
                 </a:solidFill>
@@ -2896,7 +2896,7 @@
               </a:rPr>
               <a:t>vs Rating</a:t>
             </a:r>
-            <a:endParaRPr lang="es-ES_tradnl" sz="1000" noProof="1"/>
+            <a:endParaRPr lang="es-ES_tradnl" sz="1200" noProof="1"/>
           </a:p>
         </p:txBody>
       </p:sp>
@@ -2908,7 +2908,7 @@
         </p:nvSpPr>
         <p:spPr>
           <a:xfrm>
-            <a:off x="5623560" y="2514600"/>
+            <a:off x="5537296" y="2743200"/>
             <a:ext cx="1051560" cy="640080"/>
           </a:xfrm>
           <a:prstGeom prst="rect">
@@ -2940,7 +2940,7 @@
         </p:nvSpPr>
         <p:spPr>
           <a:xfrm>
-            <a:off x="5623560" y="2514600"/>
+            <a:off x="5537296" y="2743200"/>
             <a:ext cx="1051560" cy="640080"/>
           </a:xfrm>
           <a:prstGeom prst="rect">
@@ -2996,7 +2996,7 @@
         </p:nvSpPr>
         <p:spPr>
           <a:xfrm>
-            <a:off x="6949440" y="1143000"/>
+            <a:off x="6863176" y="1371600"/>
             <a:ext cx="1234440" cy="2560320"/>
           </a:xfrm>
           <a:prstGeom prst="rect">
@@ -3028,7 +3028,7 @@
         </p:nvSpPr>
         <p:spPr>
           <a:xfrm>
-            <a:off x="6949440" y="1143000"/>
+            <a:off x="6863176" y="1371600"/>
             <a:ext cx="1234440" cy="457200"/>
           </a:xfrm>
           <a:prstGeom prst="rect">
@@ -3060,7 +3060,7 @@
         </p:nvSpPr>
         <p:spPr>
           <a:xfrm>
-            <a:off x="6949440" y="1143000"/>
+            <a:off x="6863176" y="1371600"/>
             <a:ext cx="1234440" cy="457200"/>
           </a:xfrm>
           <a:prstGeom prst="rect">
@@ -3099,7 +3099,7 @@
         </p:nvSpPr>
         <p:spPr>
           <a:xfrm>
-            <a:off x="6949440" y="1645920"/>
+            <a:off x="6863176" y="1874520"/>
             <a:ext cx="1234440" cy="731520"/>
           </a:xfrm>
           <a:prstGeom prst="rect">
@@ -3116,7 +3116,7 @@
               <a:buNone/>
             </a:pPr>
             <a:r>
-              <a:rPr lang="es-ES_tradnl" sz="1000" noProof="1">
+              <a:rPr lang="es-ES_tradnl" sz="1200" noProof="1">
                 <a:solidFill>
                   <a:srgbClr val="FDF6EC"/>
                 </a:solidFill>
@@ -3126,14 +3126,14 @@
               </a:rPr>
               <a:t>Autores</a:t>
             </a:r>
-            <a:endParaRPr lang="es-ES_tradnl" sz="1000" noProof="1"/>
+            <a:endParaRPr lang="es-ES_tradnl" sz="1200" noProof="1"/>
           </a:p>
           <a:p>
             <a:pPr marL="0" indent="0" algn="ctr">
               <a:buNone/>
             </a:pPr>
             <a:r>
-              <a:rPr lang="es-ES_tradnl" sz="1000" noProof="1">
+              <a:rPr lang="es-ES_tradnl" sz="1200" noProof="1">
                 <a:solidFill>
                   <a:srgbClr val="FDF6EC"/>
                 </a:solidFill>
@@ -3143,7 +3143,7 @@
               </a:rPr>
               <a:t>y premios</a:t>
             </a:r>
-            <a:endParaRPr lang="es-ES_tradnl" sz="1000" noProof="1"/>
+            <a:endParaRPr lang="es-ES_tradnl" sz="1200" noProof="1"/>
           </a:p>
         </p:txBody>
       </p:sp>
@@ -3155,7 +3155,7 @@
         </p:nvSpPr>
         <p:spPr>
           <a:xfrm>
-            <a:off x="7040880" y="2514600"/>
+            <a:off x="6954616" y="2743200"/>
             <a:ext cx="1051560" cy="640080"/>
           </a:xfrm>
           <a:prstGeom prst="rect">
@@ -3187,7 +3187,7 @@
         </p:nvSpPr>
         <p:spPr>
           <a:xfrm>
-            <a:off x="7040880" y="2514600"/>
+            <a:off x="6954616" y="2743200"/>
             <a:ext cx="1051560" cy="640080"/>
           </a:xfrm>
           <a:prstGeom prst="rect">
@@ -3256,13 +3256,13 @@
           <a:bodyPr wrap="square" rtlCol="0" anchor="ctr"/>
           <a:lstStyle/>
           <a:p>
-            <a:pPr marL="0" indent="0" algn="l">
+            <a:pPr marL="0" indent="0" algn="ctr">
               <a:buNone/>
             </a:pPr>
             <a:r>
               <a:rPr lang="es-ES_tradnl" sz="1200" i="1" noProof="1">
                 <a:solidFill>
-                  <a:schemeClr val="accent2"/>
+                  <a:schemeClr val="accent4"/>
                 </a:solidFill>
                 <a:latin typeface="Calibri" pitchFamily="34" charset="0"/>
                 <a:ea typeface="Calibri" pitchFamily="34" charset="-122"/>
@@ -3272,7 +3272,7 @@
             </a:r>
             <a:endParaRPr lang="es-ES_tradnl" sz="1200" noProof="1">
               <a:solidFill>
-                <a:schemeClr val="accent2"/>
+                <a:schemeClr val="accent4"/>
               </a:solidFill>
             </a:endParaRPr>
           </a:p>
@@ -4429,7 +4429,7 @@
         </p:nvSpPr>
         <p:spPr>
           <a:xfrm>
-            <a:off x="502919" y="1805940"/>
+            <a:off x="502920" y="1188720"/>
             <a:ext cx="8412480" cy="1005840"/>
           </a:xfrm>
           <a:prstGeom prst="rect">
@@ -4442,11 +4442,11 @@
           <a:bodyPr wrap="square" rtlCol="0" anchor="ctr"/>
           <a:lstStyle/>
           <a:p>
-            <a:pPr marL="0" indent="0" algn="l">
-              <a:buNone/>
-            </a:pPr>
-            <a:r>
-              <a:rPr lang="en-US" sz="1400" dirty="0">
+            <a:pPr marL="0" indent="0" algn="ctr">
+              <a:buNone/>
+            </a:pPr>
+            <a:r>
+              <a:rPr lang="en-US" dirty="0">
                 <a:solidFill>
                   <a:srgbClr val="1A0F00"/>
                 </a:solidFill>
@@ -4454,26 +4454,9 @@
                 <a:ea typeface="Calibri" pitchFamily="34" charset="-122"/>
                 <a:cs typeface="Calibri" pitchFamily="34" charset="-120"/>
               </a:rPr>
-              <a:t>Kaggle es la plataforma de ciencia de datos de Google. Ofrece datasets públicos, notebooks en la nube, competiciones con premios y una gran comunidad de científicos de datos.</a:t>
-            </a:r>
-            <a:endParaRPr lang="en-US" sz="1400" dirty="0"/>
-          </a:p>
-          <a:p>
-            <a:pPr marL="0" indent="0" algn="l">
-              <a:buNone/>
-            </a:pPr>
-            <a:r>
-              <a:rPr lang="en-US" sz="1400" dirty="0">
-                <a:solidFill>
-                  <a:srgbClr val="1A0F00"/>
-                </a:solidFill>
-                <a:latin typeface="Calibri" pitchFamily="34" charset="0"/>
-                <a:ea typeface="Calibri" pitchFamily="34" charset="-122"/>
-                <a:cs typeface="Calibri" pitchFamily="34" charset="-120"/>
-              </a:rPr>
-              <a:t>El dataset utilizado es "Comprehensive Overview of 52.478 GoodReads Best Books" publicado por The Devastator. Recoge los mejores libros de Goodreads con ratings, géneros, premios, páginas y más.</a:t>
-            </a:r>
-            <a:endParaRPr lang="en-US" sz="1400" dirty="0"/>
+              <a:t>El dataset utilizado es "Comprehensive Overview of 52.478 GoodReads Best Books". Recoge los mejores libros de Goodreads con ratings, géneros, premios, páginas y más.</a:t>
+            </a:r>
+            <a:endParaRPr lang="en-US" dirty="0"/>
           </a:p>
         </p:txBody>
       </p:sp>
@@ -4485,7 +4468,7 @@
         </p:nvSpPr>
         <p:spPr>
           <a:xfrm>
-            <a:off x="502919" y="2994660"/>
+            <a:off x="548640" y="2400300"/>
             <a:ext cx="1920240" cy="1371600"/>
           </a:xfrm>
           <a:prstGeom prst="rect">
@@ -4524,7 +4507,7 @@
         </p:nvSpPr>
         <p:spPr>
           <a:xfrm>
-            <a:off x="502919" y="3086100"/>
+            <a:off x="548640" y="2491740"/>
             <a:ext cx="1920240" cy="640080"/>
           </a:xfrm>
           <a:prstGeom prst="rect">
@@ -4563,7 +4546,7 @@
         </p:nvSpPr>
         <p:spPr>
           <a:xfrm>
-            <a:off x="502919" y="3726180"/>
+            <a:off x="548640" y="3131820"/>
             <a:ext cx="1920240" cy="457200"/>
           </a:xfrm>
           <a:prstGeom prst="rect">
@@ -4602,7 +4585,7 @@
         </p:nvSpPr>
         <p:spPr>
           <a:xfrm>
-            <a:off x="2651759" y="2994660"/>
+            <a:off x="2697480" y="2400300"/>
             <a:ext cx="1920240" cy="1371600"/>
           </a:xfrm>
           <a:prstGeom prst="rect">
@@ -4641,7 +4624,7 @@
         </p:nvSpPr>
         <p:spPr>
           <a:xfrm>
-            <a:off x="2651759" y="3086100"/>
+            <a:off x="2697480" y="2491740"/>
             <a:ext cx="1920240" cy="640080"/>
           </a:xfrm>
           <a:prstGeom prst="rect">
@@ -4680,7 +4663,7 @@
         </p:nvSpPr>
         <p:spPr>
           <a:xfrm>
-            <a:off x="2651759" y="3726180"/>
+            <a:off x="2697480" y="3131820"/>
             <a:ext cx="1920240" cy="457200"/>
           </a:xfrm>
           <a:prstGeom prst="rect">
@@ -4719,7 +4702,7 @@
         </p:nvSpPr>
         <p:spPr>
           <a:xfrm>
-            <a:off x="4800599" y="2994660"/>
+            <a:off x="4846320" y="2400300"/>
             <a:ext cx="1920240" cy="1371600"/>
           </a:xfrm>
           <a:prstGeom prst="rect">
@@ -4758,7 +4741,7 @@
         </p:nvSpPr>
         <p:spPr>
           <a:xfrm>
-            <a:off x="4800599" y="3086100"/>
+            <a:off x="4846320" y="2491740"/>
             <a:ext cx="1920240" cy="640080"/>
           </a:xfrm>
           <a:prstGeom prst="rect">
@@ -4797,7 +4780,7 @@
         </p:nvSpPr>
         <p:spPr>
           <a:xfrm>
-            <a:off x="4800599" y="3726180"/>
+            <a:off x="4846320" y="3131820"/>
             <a:ext cx="1920240" cy="457200"/>
           </a:xfrm>
           <a:prstGeom prst="rect">
@@ -4836,7 +4819,7 @@
         </p:nvSpPr>
         <p:spPr>
           <a:xfrm>
-            <a:off x="6949439" y="2994660"/>
+            <a:off x="6995160" y="2400300"/>
             <a:ext cx="1920240" cy="1371600"/>
           </a:xfrm>
           <a:prstGeom prst="rect">
@@ -4875,7 +4858,7 @@
         </p:nvSpPr>
         <p:spPr>
           <a:xfrm>
-            <a:off x="6949439" y="3086100"/>
+            <a:off x="6995160" y="2491740"/>
             <a:ext cx="1920240" cy="640080"/>
           </a:xfrm>
           <a:prstGeom prst="rect">
@@ -4914,7 +4897,7 @@
         </p:nvSpPr>
         <p:spPr>
           <a:xfrm>
-            <a:off x="6949439" y="3726180"/>
+            <a:off x="6995160" y="3131820"/>
             <a:ext cx="1920240" cy="457200"/>
           </a:xfrm>
           <a:prstGeom prst="rect">
@@ -4953,7 +4936,7 @@
         </p:nvSpPr>
         <p:spPr>
           <a:xfrm>
-            <a:off x="502920" y="4366260"/>
+            <a:off x="548640" y="3977640"/>
             <a:ext cx="8412480" cy="640080"/>
           </a:xfrm>
           <a:prstGeom prst="rect">
@@ -4966,7 +4949,7 @@
           <a:bodyPr wrap="square" rtlCol="0" anchor="ctr"/>
           <a:lstStyle/>
           <a:p>
-            <a:pPr marL="0" indent="0" algn="l">
+            <a:pPr marL="0" indent="0" algn="ctr">
               <a:buNone/>
             </a:pPr>
             <a:r>
@@ -4984,35 +4967,6 @@
           </a:p>
         </p:txBody>
       </p:sp>
-      <p:pic>
-        <p:nvPicPr>
-          <p:cNvPr id="20" name="Imagen 19">
-            <a:extLst>
-              <a:ext uri="{FF2B5EF4-FFF2-40B4-BE49-F238E27FC236}">
-                <a16:creationId xmlns:a16="http://schemas.microsoft.com/office/drawing/2014/main" id="{B1EBA698-67FE-D8F6-C9AA-FEFE0343A78D}"/>
-              </a:ext>
-            </a:extLst>
-          </p:cNvPr>
-          <p:cNvPicPr>
-            <a:picLocks noChangeAspect="1"/>
-          </p:cNvPicPr>
-          <p:nvPr/>
-        </p:nvPicPr>
-        <p:blipFill>
-          <a:blip r:embed="rId2"/>
-          <a:srcRect t="19016" b="19016"/>
-          <a:stretch/>
-        </p:blipFill>
-        <p:spPr>
-          <a:xfrm>
-            <a:off x="3507288" y="973890"/>
-            <a:ext cx="2129421" cy="878095"/>
-          </a:xfrm>
-          <a:prstGeom prst="rect">
-            <a:avLst/>
-          </a:prstGeom>
-        </p:spPr>
-      </p:pic>
     </p:spTree>
   </p:cSld>
   <p:clrMapOvr>
@@ -5280,11 +5234,11 @@
           <a:bodyPr wrap="square" rtlCol="0" anchor="ctr"/>
           <a:lstStyle/>
           <a:p>
-            <a:pPr marL="0" indent="0">
-              <a:buNone/>
-            </a:pPr>
-            <a:r>
-              <a:rPr lang="es-ES_tradnl" sz="1100" noProof="1">
+            <a:pPr marL="0" indent="0" algn="ctr">
+              <a:buNone/>
+            </a:pPr>
+            <a:r>
+              <a:rPr lang="es-ES_tradnl" sz="1400" noProof="1">
                 <a:solidFill>
                   <a:srgbClr val="1A0F00"/>
                 </a:solidFill>
@@ -5294,7 +5248,7 @@
               </a:rPr>
               <a:t>Los libros con más páginas tienen mejor rating</a:t>
             </a:r>
-            <a:endParaRPr lang="es-ES_tradnl" sz="1100" noProof="1"/>
+            <a:endParaRPr lang="es-ES_tradnl" sz="1400" noProof="1"/>
           </a:p>
         </p:txBody>
       </p:sp>
@@ -5429,11 +5383,11 @@
           <a:bodyPr wrap="square" rtlCol="0" anchor="ctr"/>
           <a:lstStyle/>
           <a:p>
-            <a:pPr marL="0" indent="0">
-              <a:buNone/>
-            </a:pPr>
-            <a:r>
-              <a:rPr lang="es-ES_tradnl" sz="1100" noProof="1">
+            <a:pPr marL="0" indent="0" algn="ctr">
+              <a:buNone/>
+            </a:pPr>
+            <a:r>
+              <a:rPr lang="es-ES_tradnl" sz="1400" noProof="1">
                 <a:solidFill>
                   <a:srgbClr val="1A0F00"/>
                 </a:solidFill>
@@ -5443,7 +5397,7 @@
               </a:rPr>
               <a:t>Los libros en formato Hardcover tienen mejor rating</a:t>
             </a:r>
-            <a:endParaRPr lang="es-ES_tradnl" sz="1100" noProof="1"/>
+            <a:endParaRPr lang="es-ES_tradnl" sz="1400" noProof="1"/>
           </a:p>
         </p:txBody>
       </p:sp>
@@ -5578,11 +5532,11 @@
           <a:bodyPr wrap="square" rtlCol="0" anchor="ctr"/>
           <a:lstStyle/>
           <a:p>
-            <a:pPr marL="0" indent="0">
-              <a:buNone/>
-            </a:pPr>
-            <a:r>
-              <a:rPr lang="es-ES_tradnl" sz="1100" noProof="1">
+            <a:pPr marL="0" indent="0" algn="ctr">
+              <a:buNone/>
+            </a:pPr>
+            <a:r>
+              <a:rPr lang="es-ES_tradnl" sz="1400" noProof="1">
                 <a:solidFill>
                   <a:srgbClr val="1A0F00"/>
                 </a:solidFill>
@@ -5592,7 +5546,7 @@
               </a:rPr>
               <a:t>Las series tienen mejores ratings que los libros individuales</a:t>
             </a:r>
-            <a:endParaRPr lang="es-ES_tradnl" sz="1100" noProof="1"/>
+            <a:endParaRPr lang="es-ES_tradnl" sz="1400" noProof="1"/>
           </a:p>
         </p:txBody>
       </p:sp>
@@ -5727,11 +5681,11 @@
           <a:bodyPr wrap="square" rtlCol="0" anchor="ctr"/>
           <a:lstStyle/>
           <a:p>
-            <a:pPr marL="0" indent="0">
-              <a:buNone/>
-            </a:pPr>
-            <a:r>
-              <a:rPr lang="es-ES_tradnl" sz="1100" noProof="1">
+            <a:pPr marL="0" indent="0" algn="ctr">
+              <a:buNone/>
+            </a:pPr>
+            <a:r>
+              <a:rPr lang="es-ES_tradnl" sz="1400" noProof="1">
                 <a:solidFill>
                   <a:srgbClr val="1A0F00"/>
                 </a:solidFill>
@@ -5741,7 +5695,7 @@
               </a:rPr>
               <a:t>Los autores populares concentran la mayoría de las valoraciones</a:t>
             </a:r>
-            <a:endParaRPr lang="es-ES_tradnl" sz="1100" noProof="1"/>
+            <a:endParaRPr lang="es-ES_tradnl" sz="1400" noProof="1"/>
           </a:p>
         </p:txBody>
       </p:sp>
@@ -5876,11 +5830,11 @@
           <a:bodyPr wrap="square" rtlCol="0" anchor="ctr"/>
           <a:lstStyle/>
           <a:p>
-            <a:pPr marL="0" indent="0">
-              <a:buNone/>
-            </a:pPr>
-            <a:r>
-              <a:rPr lang="es-ES_tradnl" sz="1100" noProof="1">
+            <a:pPr marL="0" indent="0" algn="ctr">
+              <a:buNone/>
+            </a:pPr>
+            <a:r>
+              <a:rPr lang="es-ES_tradnl" sz="1400" noProof="1">
                 <a:solidFill>
                   <a:srgbClr val="1A0F00"/>
                 </a:solidFill>
@@ -5890,7 +5844,7 @@
               </a:rPr>
               <a:t>Los autores populares tienen más premios</a:t>
             </a:r>
-            <a:endParaRPr lang="es-ES_tradnl" sz="1100" noProof="1"/>
+            <a:endParaRPr lang="es-ES_tradnl" sz="1400" noProof="1"/>
           </a:p>
         </p:txBody>
       </p:sp>
@@ -6038,7 +5992,7 @@
         </p:nvSpPr>
         <p:spPr>
           <a:xfrm>
-            <a:off x="502920" y="1005840"/>
+            <a:off x="502920" y="1158729"/>
             <a:ext cx="3931920" cy="411480"/>
           </a:xfrm>
           <a:prstGeom prst="rect">
@@ -6070,7 +6024,7 @@
         </p:nvSpPr>
         <p:spPr>
           <a:xfrm>
-            <a:off x="502920" y="1005840"/>
+            <a:off x="502920" y="1158729"/>
             <a:ext cx="3931920" cy="411480"/>
           </a:xfrm>
           <a:prstGeom prst="rect">
@@ -6087,7 +6041,7 @@
               <a:buNone/>
             </a:pPr>
             <a:r>
-              <a:rPr lang="es-ES_tradnl" sz="1300" b="1" noProof="1">
+              <a:rPr lang="es-ES_tradnl" sz="1400" b="1" noProof="1">
                 <a:solidFill>
                   <a:srgbClr val="FDF6EC"/>
                 </a:solidFill>
@@ -6097,7 +6051,7 @@
               </a:rPr>
               <a:t>Columnas eliminadas</a:t>
             </a:r>
-            <a:endParaRPr lang="es-ES_tradnl" sz="1300" noProof="1"/>
+            <a:endParaRPr lang="es-ES_tradnl" sz="1400" noProof="1"/>
           </a:p>
         </p:txBody>
       </p:sp>
@@ -6109,7 +6063,7 @@
         </p:nvSpPr>
         <p:spPr>
           <a:xfrm>
-            <a:off x="594360" y="1508760"/>
+            <a:off x="594360" y="1776222"/>
             <a:ext cx="3749040" cy="347472"/>
           </a:xfrm>
           <a:prstGeom prst="rect">
@@ -6126,7 +6080,7 @@
               <a:buNone/>
             </a:pPr>
             <a:r>
-              <a:rPr lang="es-ES_tradnl" sz="1200" noProof="1">
+              <a:rPr lang="es-ES_tradnl" sz="1400" noProof="1">
                 <a:solidFill>
                   <a:srgbClr val="1A0F00"/>
                 </a:solidFill>
@@ -6136,7 +6090,7 @@
               </a:rPr>
               <a:t>•  isbn, bookId, coverImg</a:t>
             </a:r>
-            <a:endParaRPr lang="es-ES_tradnl" sz="1200" noProof="1"/>
+            <a:endParaRPr lang="es-ES_tradnl" sz="1400" noProof="1"/>
           </a:p>
         </p:txBody>
       </p:sp>
@@ -6148,7 +6102,7 @@
         </p:nvSpPr>
         <p:spPr>
           <a:xfrm>
-            <a:off x="594360" y="1892808"/>
+            <a:off x="594360" y="2248473"/>
             <a:ext cx="3749040" cy="347472"/>
           </a:xfrm>
           <a:prstGeom prst="rect">
@@ -6165,7 +6119,7 @@
               <a:buNone/>
             </a:pPr>
             <a:r>
-              <a:rPr lang="es-ES_tradnl" sz="1200" noProof="1">
+              <a:rPr lang="es-ES_tradnl" sz="1400" noProof="1">
                 <a:solidFill>
                   <a:srgbClr val="1A0F00"/>
                 </a:solidFill>
@@ -6175,7 +6129,7 @@
               </a:rPr>
               <a:t>•  series (reemplazada por is_series)</a:t>
             </a:r>
-            <a:endParaRPr lang="es-ES_tradnl" sz="1200" noProof="1"/>
+            <a:endParaRPr lang="es-ES_tradnl" sz="1400" noProof="1"/>
           </a:p>
         </p:txBody>
       </p:sp>
@@ -6187,7 +6141,7 @@
         </p:nvSpPr>
         <p:spPr>
           <a:xfrm>
-            <a:off x="594360" y="2276856"/>
+            <a:off x="594360" y="2725038"/>
             <a:ext cx="3749040" cy="347472"/>
           </a:xfrm>
           <a:prstGeom prst="rect">
@@ -6204,7 +6158,7 @@
               <a:buNone/>
             </a:pPr>
             <a:r>
-              <a:rPr lang="es-ES_tradnl" sz="1200" noProof="1">
+              <a:rPr lang="es-ES_tradnl" sz="1400" noProof="1">
                 <a:solidFill>
                   <a:srgbClr val="1A0F00"/>
                 </a:solidFill>
@@ -6214,7 +6168,7 @@
               </a:rPr>
               <a:t>•  description, characters</a:t>
             </a:r>
-            <a:endParaRPr lang="es-ES_tradnl" sz="1200" noProof="1"/>
+            <a:endParaRPr lang="es-ES_tradnl" sz="1400" noProof="1"/>
           </a:p>
         </p:txBody>
       </p:sp>
@@ -6226,7 +6180,7 @@
         </p:nvSpPr>
         <p:spPr>
           <a:xfrm>
-            <a:off x="594360" y="2660904"/>
+            <a:off x="594360" y="3201603"/>
             <a:ext cx="3749040" cy="347472"/>
           </a:xfrm>
           <a:prstGeom prst="rect">
@@ -6243,7 +6197,7 @@
               <a:buNone/>
             </a:pPr>
             <a:r>
-              <a:rPr lang="es-ES_tradnl" sz="1200" noProof="1">
+              <a:rPr lang="es-ES_tradnl" sz="1400" noProof="1">
                 <a:solidFill>
                   <a:srgbClr val="1A0F00"/>
                 </a:solidFill>
@@ -6253,7 +6207,7 @@
               </a:rPr>
               <a:t>•  edition, firstPublishDate, price</a:t>
             </a:r>
-            <a:endParaRPr lang="es-ES_tradnl" sz="1200" noProof="1"/>
+            <a:endParaRPr lang="es-ES_tradnl" sz="1400" noProof="1"/>
           </a:p>
         </p:txBody>
       </p:sp>
@@ -6265,7 +6219,7 @@
         </p:nvSpPr>
         <p:spPr>
           <a:xfrm>
-            <a:off x="594360" y="3044952"/>
+            <a:off x="594360" y="3678168"/>
             <a:ext cx="3749040" cy="347472"/>
           </a:xfrm>
           <a:prstGeom prst="rect">
@@ -6282,7 +6236,7 @@
               <a:buNone/>
             </a:pPr>
             <a:r>
-              <a:rPr lang="es-ES_tradnl" sz="1200" noProof="1">
+              <a:rPr lang="es-ES_tradnl" sz="1400" noProof="1">
                 <a:solidFill>
                   <a:srgbClr val="1A0F00"/>
                 </a:solidFill>
@@ -6292,7 +6246,7 @@
               </a:rPr>
               <a:t>•  Filas con rating = 0 o nulos en géneros</a:t>
             </a:r>
-            <a:endParaRPr lang="es-ES_tradnl" sz="1200" noProof="1"/>
+            <a:endParaRPr lang="es-ES_tradnl" sz="1400" noProof="1"/>
           </a:p>
         </p:txBody>
       </p:sp>
@@ -6304,7 +6258,7 @@
         </p:nvSpPr>
         <p:spPr>
           <a:xfrm>
-            <a:off x="4709160" y="1005840"/>
+            <a:off x="4709160" y="1158729"/>
             <a:ext cx="3931920" cy="411480"/>
           </a:xfrm>
           <a:prstGeom prst="rect">
@@ -6336,7 +6290,7 @@
         </p:nvSpPr>
         <p:spPr>
           <a:xfrm>
-            <a:off x="4709160" y="1005840"/>
+            <a:off x="4709160" y="1158729"/>
             <a:ext cx="3931920" cy="411480"/>
           </a:xfrm>
           <a:prstGeom prst="rect">
@@ -6353,7 +6307,7 @@
               <a:buNone/>
             </a:pPr>
             <a:r>
-              <a:rPr lang="es-ES_tradnl" sz="1300" b="1" noProof="1">
+              <a:rPr lang="es-ES_tradnl" sz="1400" b="1" noProof="1">
                 <a:solidFill>
                   <a:srgbClr val="FDF6EC"/>
                 </a:solidFill>
@@ -6363,7 +6317,7 @@
               </a:rPr>
               <a:t>Transformaciones aplicadas</a:t>
             </a:r>
-            <a:endParaRPr lang="es-ES_tradnl" sz="1300" noProof="1"/>
+            <a:endParaRPr lang="es-ES_tradnl" sz="1400" noProof="1"/>
           </a:p>
         </p:txBody>
       </p:sp>
@@ -6375,7 +6329,7 @@
         </p:nvSpPr>
         <p:spPr>
           <a:xfrm>
-            <a:off x="4800600" y="1508760"/>
+            <a:off x="4800600" y="1776222"/>
             <a:ext cx="3749040" cy="347472"/>
           </a:xfrm>
           <a:prstGeom prst="rect">
@@ -6392,7 +6346,7 @@
               <a:buNone/>
             </a:pPr>
             <a:r>
-              <a:rPr lang="es-ES_tradnl" sz="1200" noProof="1">
+              <a:rPr lang="es-ES_tradnl" sz="1400" noProof="1">
                 <a:solidFill>
                   <a:srgbClr val="1A0F00"/>
                 </a:solidFill>
@@ -6402,7 +6356,7 @@
               </a:rPr>
               <a:t>•  Filtrado por bookFormat (5 formatos válidos)</a:t>
             </a:r>
-            <a:endParaRPr lang="es-ES_tradnl" sz="1200" noProof="1"/>
+            <a:endParaRPr lang="es-ES_tradnl" sz="1400" noProof="1"/>
           </a:p>
         </p:txBody>
       </p:sp>
@@ -6414,7 +6368,7 @@
         </p:nvSpPr>
         <p:spPr>
           <a:xfrm>
-            <a:off x="4800600" y="1892808"/>
+            <a:off x="4800600" y="2248473"/>
             <a:ext cx="3749040" cy="347472"/>
           </a:xfrm>
           <a:prstGeom prst="rect">
@@ -6431,7 +6385,7 @@
               <a:buNone/>
             </a:pPr>
             <a:r>
-              <a:rPr lang="es-ES_tradnl" sz="1200" noProof="1">
+              <a:rPr lang="es-ES_tradnl" sz="1400" noProof="1">
                 <a:solidFill>
                   <a:srgbClr val="1A0F00"/>
                 </a:solidFill>
@@ -6441,7 +6395,7 @@
               </a:rPr>
               <a:t>•  Eliminación de box sets (#X-Y en series)</a:t>
             </a:r>
-            <a:endParaRPr lang="es-ES_tradnl" sz="1200" noProof="1"/>
+            <a:endParaRPr lang="es-ES_tradnl" sz="1400" noProof="1"/>
           </a:p>
         </p:txBody>
       </p:sp>
@@ -6453,7 +6407,7 @@
         </p:nvSpPr>
         <p:spPr>
           <a:xfrm>
-            <a:off x="4800600" y="2276856"/>
+            <a:off x="4800600" y="2725038"/>
             <a:ext cx="3749040" cy="347472"/>
           </a:xfrm>
           <a:prstGeom prst="rect">
@@ -6470,7 +6424,7 @@
               <a:buNone/>
             </a:pPr>
             <a:r>
-              <a:rPr lang="es-ES_tradnl" sz="1200" noProof="1">
+              <a:rPr lang="es-ES_tradnl" sz="1400" noProof="1">
                 <a:solidFill>
                   <a:srgbClr val="1A0F00"/>
                 </a:solidFill>
@@ -6480,7 +6434,7 @@
               </a:rPr>
               <a:t>•  Nueva variable is_series (True/False)</a:t>
             </a:r>
-            <a:endParaRPr lang="es-ES_tradnl" sz="1200" noProof="1"/>
+            <a:endParaRPr lang="es-ES_tradnl" sz="1400" noProof="1"/>
           </a:p>
         </p:txBody>
       </p:sp>
@@ -6492,7 +6446,7 @@
         </p:nvSpPr>
         <p:spPr>
           <a:xfrm>
-            <a:off x="4800600" y="2660904"/>
+            <a:off x="4800600" y="3201603"/>
             <a:ext cx="3749040" cy="347472"/>
           </a:xfrm>
           <a:prstGeom prst="rect">
@@ -6509,7 +6463,7 @@
               <a:buNone/>
             </a:pPr>
             <a:r>
-              <a:rPr lang="es-ES_tradnl" sz="1200" noProof="1">
+              <a:rPr lang="es-ES_tradnl" sz="1400" noProof="1">
                 <a:solidFill>
                   <a:srgbClr val="1A0F00"/>
                 </a:solidFill>
@@ -6519,7 +6473,7 @@
               </a:rPr>
               <a:t>•  Limpieza de columna author → main_author</a:t>
             </a:r>
-            <a:endParaRPr lang="es-ES_tradnl" sz="1200" noProof="1"/>
+            <a:endParaRPr lang="es-ES_tradnl" sz="1400" noProof="1"/>
           </a:p>
         </p:txBody>
       </p:sp>
@@ -6531,7 +6485,7 @@
         </p:nvSpPr>
         <p:spPr>
           <a:xfrm>
-            <a:off x="4800600" y="3127549"/>
+            <a:off x="4800600" y="3678168"/>
             <a:ext cx="3749040" cy="347472"/>
           </a:xfrm>
           <a:prstGeom prst="rect">
@@ -6548,7 +6502,7 @@
               <a:buNone/>
             </a:pPr>
             <a:r>
-              <a:rPr lang="es-ES_tradnl" sz="1200" noProof="1">
+              <a:rPr lang="es-ES_tradnl" sz="1400" noProof="1">
                 <a:solidFill>
                   <a:srgbClr val="1A0F00"/>
                 </a:solidFill>
@@ -6558,12 +6512,6 @@
               </a:rPr>
               <a:t>•  Conversión de pages a numérico</a:t>
             </a:r>
-          </a:p>
-          <a:p>
-            <a:pPr marL="342900" indent="-342900" algn="l">
-              <a:buNone/>
-            </a:pPr>
-            <a:endParaRPr lang="es-ES_tradnl" sz="1200" noProof="1"/>
           </a:p>
         </p:txBody>
       </p:sp>
@@ -6624,7 +6572,7 @@
               <a:buNone/>
             </a:pPr>
             <a:r>
-              <a:rPr lang="es-ES_tradnl" sz="1400" b="1" noProof="1">
+              <a:rPr lang="es-ES_tradnl" sz="1600" b="1" noProof="1">
                 <a:solidFill>
                   <a:srgbClr val="8B4513"/>
                 </a:solidFill>
@@ -6634,7 +6582,7 @@
               </a:rPr>
               <a:t>Dataset final: ~49.000 libros  ·  15 variables</a:t>
             </a:r>
-            <a:endParaRPr lang="es-ES_tradnl" sz="1400" noProof="1"/>
+            <a:endParaRPr lang="es-ES_tradnl" sz="1600" noProof="1"/>
           </a:p>
         </p:txBody>
       </p:sp>
@@ -6965,7 +6913,7 @@
               <a:buNone/>
             </a:pPr>
             <a:r>
-              <a:rPr lang="es-ES_tradnl" sz="1200" noProof="1">
+              <a:rPr lang="es-ES_tradnl" sz="1400" noProof="1">
                 <a:solidFill>
                   <a:srgbClr val="1A0F00"/>
                 </a:solidFill>
@@ -6975,7 +6923,7 @@
               </a:rPr>
               <a:t>Media: ~4.02 ⭐</a:t>
             </a:r>
-            <a:endParaRPr lang="es-ES_tradnl" sz="1200" noProof="1"/>
+            <a:endParaRPr lang="es-ES_tradnl" sz="1400" noProof="1"/>
           </a:p>
         </p:txBody>
       </p:sp>
@@ -7014,7 +6962,7 @@
           <a:bodyPr/>
           <a:lstStyle/>
           <a:p>
-            <a:endParaRPr lang="es-ES_tradnl" noProof="1"/>
+            <a:endParaRPr lang="es-ES_tradnl" sz="1600" noProof="1"/>
           </a:p>
         </p:txBody>
       </p:sp>
@@ -7043,7 +6991,7 @@
               <a:buNone/>
             </a:pPr>
             <a:r>
-              <a:rPr lang="es-ES_tradnl" sz="1200" noProof="1">
+              <a:rPr lang="es-ES_tradnl" sz="1400" noProof="1">
                 <a:solidFill>
                   <a:srgbClr val="1A0F00"/>
                 </a:solidFill>
@@ -7053,7 +7001,7 @@
               </a:rPr>
               <a:t>La mayoría entre 3.5 - 4.5</a:t>
             </a:r>
-            <a:endParaRPr lang="es-ES_tradnl" sz="1200" noProof="1"/>
+            <a:endParaRPr lang="es-ES_tradnl" sz="1400" noProof="1"/>
           </a:p>
         </p:txBody>
       </p:sp>
@@ -7121,7 +7069,7 @@
               <a:buNone/>
             </a:pPr>
             <a:r>
-              <a:rPr lang="es-ES_tradnl" sz="1200" noProof="1">
+              <a:rPr lang="es-ES_tradnl" sz="1400" noProof="1">
                 <a:solidFill>
                   <a:srgbClr val="1A0F00"/>
                 </a:solidFill>
@@ -7131,7 +7079,7 @@
               </a:rPr>
               <a:t>Muy pocos &lt; 3.0</a:t>
             </a:r>
-            <a:endParaRPr lang="es-ES_tradnl" sz="1200" noProof="1"/>
+            <a:endParaRPr lang="es-ES_tradnl" sz="1400" noProof="1"/>
           </a:p>
         </p:txBody>
       </p:sp>
@@ -7199,7 +7147,7 @@
               <a:buNone/>
             </a:pPr>
             <a:r>
-              <a:rPr lang="es-ES_tradnl" sz="1200" noProof="1">
+              <a:rPr lang="es-ES_tradnl" sz="1400" noProof="1">
                 <a:solidFill>
                   <a:srgbClr val="1A0F00"/>
                 </a:solidFill>
@@ -7209,7 +7157,7 @@
               </a:rPr>
               <a:t>Distribución sesgada a la derecha</a:t>
             </a:r>
-            <a:endParaRPr lang="es-ES_tradnl" sz="1200" noProof="1"/>
+            <a:endParaRPr lang="es-ES_tradnl" sz="1400" noProof="1"/>
           </a:p>
         </p:txBody>
       </p:sp>
@@ -7811,9 +7759,114 @@
           </a:p>
         </p:txBody>
       </p:sp>
+      <p:sp>
+        <p:nvSpPr>
+          <p:cNvPr id="8" name="Text 6"/>
+          <p:cNvSpPr/>
+          <p:nvPr/>
+        </p:nvSpPr>
+        <p:spPr>
+          <a:xfrm>
+            <a:off x="4800600" y="1051560"/>
+            <a:ext cx="3931920" cy="3108960"/>
+          </a:xfrm>
+          <a:prstGeom prst="rect">
+            <a:avLst/>
+          </a:prstGeom>
+          <a:noFill/>
+          <a:ln/>
+        </p:spPr>
+        <p:txBody>
+          <a:bodyPr wrap="square" rtlCol="0" anchor="ctr"/>
+          <a:lstStyle/>
+          <a:p>
+            <a:pPr marL="0" indent="0" algn="ctr">
+              <a:buNone/>
+            </a:pPr>
+            <a:endParaRPr lang="es-ES_tradnl" sz="1200" noProof="1"/>
+          </a:p>
+        </p:txBody>
+      </p:sp>
+      <p:sp>
+        <p:nvSpPr>
+          <p:cNvPr id="9" name="Shape 7"/>
+          <p:cNvSpPr/>
+          <p:nvPr/>
+        </p:nvSpPr>
+        <p:spPr>
+          <a:xfrm>
+            <a:off x="594360" y="4297680"/>
+            <a:ext cx="8321040" cy="502920"/>
+          </a:xfrm>
+          <a:prstGeom prst="rect">
+            <a:avLst/>
+          </a:prstGeom>
+          <a:solidFill>
+            <a:srgbClr val="F5E6CC"/>
+          </a:solidFill>
+          <a:ln w="12700">
+            <a:solidFill>
+              <a:srgbClr val="C8860A"/>
+            </a:solidFill>
+            <a:prstDash val="solid"/>
+          </a:ln>
+        </p:spPr>
+        <p:txBody>
+          <a:bodyPr/>
+          <a:lstStyle/>
+          <a:p>
+            <a:endParaRPr lang="es-ES_tradnl" noProof="1"/>
+          </a:p>
+        </p:txBody>
+      </p:sp>
+      <p:sp>
+        <p:nvSpPr>
+          <p:cNvPr id="10" name="Text 8"/>
+          <p:cNvSpPr/>
+          <p:nvPr/>
+        </p:nvSpPr>
+        <p:spPr>
+          <a:xfrm>
+            <a:off x="594360" y="4297680"/>
+            <a:ext cx="8321040" cy="502920"/>
+          </a:xfrm>
+          <a:prstGeom prst="rect">
+            <a:avLst/>
+          </a:prstGeom>
+          <a:noFill/>
+          <a:ln/>
+        </p:spPr>
+        <p:txBody>
+          <a:bodyPr wrap="square" rtlCol="0" anchor="ctr"/>
+          <a:lstStyle/>
+          <a:p>
+            <a:pPr marL="0" indent="0" algn="ctr">
+              <a:buNone/>
+            </a:pPr>
+            <a:r>
+              <a:rPr lang="es-ES_tradnl" sz="1300" i="1" noProof="1">
+                <a:solidFill>
+                  <a:srgbClr val="8B4513"/>
+                </a:solidFill>
+                <a:latin typeface="Calibri" pitchFamily="34" charset="0"/>
+                <a:ea typeface="Calibri" pitchFamily="34" charset="-122"/>
+                <a:cs typeface="Calibri" pitchFamily="34" charset="-120"/>
+              </a:rPr>
+              <a:t>H3 — CONFIRMADA: Las series tienen rating medio 4,03 vs 3,95 de los standalone. Además, acumulan más valoraciones (~23.500 vs ~19.500), lo que sugiere fidelización del lector.</a:t>
+            </a:r>
+            <a:endParaRPr lang="es-ES_tradnl" sz="1300" noProof="1"/>
+          </a:p>
+        </p:txBody>
+      </p:sp>
       <p:pic>
         <p:nvPicPr>
-          <p:cNvPr id="400" name="h3_series"/>
+          <p:cNvPr id="7" name="Imagen 6">
+            <a:extLst>
+              <a:ext uri="{FF2B5EF4-FFF2-40B4-BE49-F238E27FC236}">
+                <a16:creationId xmlns:a16="http://schemas.microsoft.com/office/drawing/2014/main" id="{0217015A-2B0E-51E2-7171-87DB59038A2B}"/>
+              </a:ext>
+            </a:extLst>
+          </p:cNvPr>
           <p:cNvPicPr>
             <a:picLocks noChangeAspect="1"/>
           </p:cNvPicPr>
@@ -7827,119 +7880,20 @@
         </p:blipFill>
         <p:spPr>
           <a:xfrm>
-            <a:off x="502920" y="1051560"/>
-            <a:ext cx="3931920" cy="3108960"/>
+            <a:off x="4701540" y="1173190"/>
+            <a:ext cx="4206647" cy="2987329"/>
           </a:xfrm>
           <a:prstGeom prst="rect">
             <a:avLst/>
           </a:prstGeom>
         </p:spPr>
       </p:pic>
-      <p:sp>
-        <p:nvSpPr>
-          <p:cNvPr id="8" name="Text 6"/>
-          <p:cNvSpPr/>
-          <p:nvPr/>
-        </p:nvSpPr>
-        <p:spPr>
-          <a:xfrm>
-            <a:off x="4800600" y="1051560"/>
-            <a:ext cx="3931920" cy="3108960"/>
-          </a:xfrm>
-          <a:prstGeom prst="rect">
-            <a:avLst/>
-          </a:prstGeom>
-          <a:noFill/>
-          <a:ln/>
-        </p:spPr>
-        <p:txBody>
-          <a:bodyPr wrap="square" rtlCol="0" anchor="ctr"/>
-          <a:lstStyle/>
-          <a:p>
-            <a:pPr marL="0" indent="0" algn="ctr">
-              <a:buNone/>
-            </a:pPr>
-            <a:endParaRPr lang="es-ES_tradnl" sz="1200" noProof="1"/>
-          </a:p>
-        </p:txBody>
-      </p:sp>
-      <p:sp>
-        <p:nvSpPr>
-          <p:cNvPr id="9" name="Shape 7"/>
-          <p:cNvSpPr/>
-          <p:nvPr/>
-        </p:nvSpPr>
-        <p:spPr>
-          <a:xfrm>
-            <a:off x="594360" y="4297680"/>
-            <a:ext cx="8321040" cy="502920"/>
-          </a:xfrm>
-          <a:prstGeom prst="rect">
-            <a:avLst/>
-          </a:prstGeom>
-          <a:solidFill>
-            <a:srgbClr val="F5E6CC"/>
-          </a:solidFill>
-          <a:ln w="12700">
-            <a:solidFill>
-              <a:srgbClr val="C8860A"/>
-            </a:solidFill>
-            <a:prstDash val="solid"/>
-          </a:ln>
-        </p:spPr>
-        <p:txBody>
-          <a:bodyPr/>
-          <a:lstStyle/>
-          <a:p>
-            <a:endParaRPr lang="es-ES_tradnl" noProof="1"/>
-          </a:p>
-        </p:txBody>
-      </p:sp>
-      <p:sp>
-        <p:nvSpPr>
-          <p:cNvPr id="10" name="Text 8"/>
-          <p:cNvSpPr/>
-          <p:nvPr/>
-        </p:nvSpPr>
-        <p:spPr>
-          <a:xfrm>
-            <a:off x="594360" y="4297680"/>
-            <a:ext cx="8321040" cy="502920"/>
-          </a:xfrm>
-          <a:prstGeom prst="rect">
-            <a:avLst/>
-          </a:prstGeom>
-          <a:noFill/>
-          <a:ln/>
-        </p:spPr>
-        <p:txBody>
-          <a:bodyPr wrap="square" rtlCol="0" anchor="ctr"/>
-          <a:lstStyle/>
-          <a:p>
-            <a:pPr marL="0" indent="0" algn="ctr">
-              <a:buNone/>
-            </a:pPr>
-            <a:r>
-              <a:rPr lang="es-ES_tradnl" sz="1200" i="1" noProof="1">
-                <a:solidFill>
-                  <a:srgbClr val="8B4513"/>
-                </a:solidFill>
-                <a:latin typeface="Calibri" pitchFamily="34" charset="0"/>
-                <a:ea typeface="Calibri" pitchFamily="34" charset="-122"/>
-                <a:cs typeface="Calibri" pitchFamily="34" charset="-120"/>
-              </a:rPr>
-              <a:t>H3 — CONFIRMADA: Las series tienen rating medio 4,03 vs 3,95 de los standalone. Además, acumulan más valoraciones (~23.500 vs ~19.500), lo que sugiere fidelización del lector.</a:t>
-            </a:r>
-            <a:endParaRPr lang="es-ES_tradnl" sz="1200" noProof="1"/>
-          </a:p>
-        </p:txBody>
-      </p:sp>
       <p:pic>
         <p:nvPicPr>
-          <p:cNvPr id="5" name="Imagen 4">
+          <p:cNvPr id="13" name="Imagen 12">
             <a:extLst>
               <a:ext uri="{FF2B5EF4-FFF2-40B4-BE49-F238E27FC236}">
-                <a16:creationId xmlns:a16="http://schemas.microsoft.com/office/drawing/2014/main" id="{41157A3F-A59F-92E2-405D-68FDB93D6F93}"/>
+                <a16:creationId xmlns:a16="http://schemas.microsoft.com/office/drawing/2014/main" id="{E7BECBEF-6FF9-74BE-74CA-18857A899D8E}"/>
               </a:ext>
             </a:extLst>
           </p:cNvPr>
@@ -7956,8 +7910,8 @@
         </p:blipFill>
         <p:spPr>
           <a:xfrm>
-            <a:off x="4617720" y="1051560"/>
-            <a:ext cx="4377923" cy="3108960"/>
+            <a:off x="419100" y="1173192"/>
+            <a:ext cx="4206646" cy="2987328"/>
           </a:xfrm>
           <a:prstGeom prst="rect">
             <a:avLst/>

--- a/Presentacion/EDA_Goodreads.pptx
+++ b/Presentacion/EDA_Goodreads.pptx
@@ -2002,14 +2002,53 @@
       </p:sp>
       <p:sp>
         <p:nvSpPr>
-          <p:cNvPr id="4" name="Shape 2"/>
-          <p:cNvSpPr/>
-          <p:nvPr/>
-        </p:nvSpPr>
-        <p:spPr>
-          <a:xfrm>
-            <a:off x="1193896" y="1371600"/>
-            <a:ext cx="1234440" cy="2560320"/>
+          <p:cNvPr id="18" name="Text 16"/>
+          <p:cNvSpPr/>
+          <p:nvPr/>
+        </p:nvSpPr>
+        <p:spPr>
+          <a:xfrm>
+            <a:off x="2980288" y="1940943"/>
+            <a:ext cx="1234440" cy="457200"/>
+          </a:xfrm>
+          <a:prstGeom prst="rect">
+            <a:avLst/>
+          </a:prstGeom>
+          <a:noFill/>
+          <a:ln/>
+        </p:spPr>
+        <p:txBody>
+          <a:bodyPr wrap="square" rtlCol="0" anchor="ctr"/>
+          <a:lstStyle/>
+          <a:p>
+            <a:pPr marL="0" indent="0" algn="ctr">
+              <a:buNone/>
+            </a:pPr>
+            <a:r>
+              <a:rPr lang="es-ES_tradnl" sz="1400" b="1" noProof="1">
+                <a:solidFill>
+                  <a:srgbClr val="2C1A0E"/>
+                </a:solidFill>
+                <a:latin typeface="Georgia" pitchFamily="34" charset="0"/>
+                <a:ea typeface="Georgia" pitchFamily="34" charset="-122"/>
+                <a:cs typeface="Georgia" pitchFamily="34" charset="-120"/>
+              </a:rPr>
+              <a:t>H3</a:t>
+            </a:r>
+            <a:endParaRPr lang="es-ES_tradnl" sz="1400" noProof="1"/>
+          </a:p>
+        </p:txBody>
+      </p:sp>
+      <p:sp>
+        <p:nvSpPr>
+          <p:cNvPr id="28" name="Shape 26"/>
+          <p:cNvSpPr/>
+          <p:nvPr/>
+        </p:nvSpPr>
+        <p:spPr>
+          <a:xfrm>
+            <a:off x="7136629" y="1371599"/>
+            <a:ext cx="1366425" cy="2846717"/>
           </a:xfrm>
           <a:prstGeom prst="rect">
             <a:avLst/>
@@ -2034,14 +2073,14 @@
       </p:sp>
       <p:sp>
         <p:nvSpPr>
-          <p:cNvPr id="5" name="Shape 3"/>
-          <p:cNvSpPr/>
-          <p:nvPr/>
-        </p:nvSpPr>
-        <p:spPr>
-          <a:xfrm>
-            <a:off x="1193896" y="1371600"/>
-            <a:ext cx="1234440" cy="457200"/>
+          <p:cNvPr id="29" name="Shape 27"/>
+          <p:cNvSpPr/>
+          <p:nvPr/>
+        </p:nvSpPr>
+        <p:spPr>
+          <a:xfrm>
+            <a:off x="7136629" y="1371600"/>
+            <a:ext cx="1366425" cy="508342"/>
           </a:xfrm>
           <a:prstGeom prst="rect">
             <a:avLst/>
@@ -2066,14 +2105,14 @@
       </p:sp>
       <p:sp>
         <p:nvSpPr>
-          <p:cNvPr id="6" name="Text 4"/>
-          <p:cNvSpPr/>
-          <p:nvPr/>
-        </p:nvSpPr>
-        <p:spPr>
-          <a:xfrm>
-            <a:off x="1193896" y="1371600"/>
-            <a:ext cx="1234440" cy="457200"/>
+          <p:cNvPr id="30" name="Text 28"/>
+          <p:cNvSpPr/>
+          <p:nvPr/>
+        </p:nvSpPr>
+        <p:spPr>
+          <a:xfrm>
+            <a:off x="7136629" y="1371600"/>
+            <a:ext cx="1366425" cy="508342"/>
           </a:xfrm>
           <a:prstGeom prst="rect">
             <a:avLst/>
@@ -2089,7 +2128,7 @@
               <a:buNone/>
             </a:pPr>
             <a:r>
-              <a:rPr lang="es-ES_tradnl" sz="1400" b="1" noProof="1">
+              <a:rPr lang="es-ES_tradnl" sz="1600" b="1" noProof="1">
                 <a:solidFill>
                   <a:srgbClr val="2C1A0E"/>
                 </a:solidFill>
@@ -2097,22 +2136,22 @@
                 <a:ea typeface="Georgia" pitchFamily="34" charset="-122"/>
                 <a:cs typeface="Georgia" pitchFamily="34" charset="-120"/>
               </a:rPr>
-              <a:t>H1</a:t>
-            </a:r>
-            <a:endParaRPr lang="es-ES_tradnl" sz="1400" noProof="1"/>
-          </a:p>
-        </p:txBody>
-      </p:sp>
-      <p:sp>
-        <p:nvSpPr>
-          <p:cNvPr id="7" name="Text 5"/>
-          <p:cNvSpPr/>
-          <p:nvPr/>
-        </p:nvSpPr>
-        <p:spPr>
-          <a:xfrm>
-            <a:off x="1193896" y="1874520"/>
-            <a:ext cx="1234440" cy="731520"/>
+              <a:t>H5</a:t>
+            </a:r>
+            <a:endParaRPr lang="es-ES_tradnl" sz="1600" noProof="1"/>
+          </a:p>
+        </p:txBody>
+      </p:sp>
+      <p:sp>
+        <p:nvSpPr>
+          <p:cNvPr id="31" name="Text 29"/>
+          <p:cNvSpPr/>
+          <p:nvPr/>
+        </p:nvSpPr>
+        <p:spPr>
+          <a:xfrm>
+            <a:off x="7136629" y="1874520"/>
+            <a:ext cx="1366425" cy="813348"/>
           </a:xfrm>
           <a:prstGeom prst="rect">
             <a:avLst/>
@@ -2136,7 +2175,7 @@
                 <a:ea typeface="Calibri" pitchFamily="34" charset="-122"/>
                 <a:cs typeface="Calibri" pitchFamily="34" charset="-120"/>
               </a:rPr>
-              <a:t>Páginas</a:t>
+              <a:t>Autores</a:t>
             </a:r>
             <a:endParaRPr lang="es-ES_tradnl" sz="1200" noProof="1"/>
           </a:p>
@@ -2153,7 +2192,7 @@
                 <a:ea typeface="Calibri" pitchFamily="34" charset="-122"/>
                 <a:cs typeface="Calibri" pitchFamily="34" charset="-120"/>
               </a:rPr>
-              <a:t>vs Rating</a:t>
+              <a:t>y premios</a:t>
             </a:r>
             <a:endParaRPr lang="es-ES_tradnl" sz="1200" noProof="1"/>
           </a:p>
@@ -2161,14 +2200,14 @@
       </p:sp>
       <p:sp>
         <p:nvSpPr>
-          <p:cNvPr id="8" name="Shape 6"/>
-          <p:cNvSpPr/>
-          <p:nvPr/>
-        </p:nvSpPr>
-        <p:spPr>
-          <a:xfrm>
-            <a:off x="1285336" y="2743200"/>
-            <a:ext cx="1051560" cy="640080"/>
+          <p:cNvPr id="32" name="Shape 30"/>
+          <p:cNvSpPr/>
+          <p:nvPr/>
+        </p:nvSpPr>
+        <p:spPr>
+          <a:xfrm>
+            <a:off x="7237845" y="2941607"/>
+            <a:ext cx="1163992" cy="711679"/>
           </a:xfrm>
           <a:prstGeom prst="rect">
             <a:avLst/>
@@ -2193,14 +2232,14 @@
       </p:sp>
       <p:sp>
         <p:nvSpPr>
-          <p:cNvPr id="9" name="Text 7"/>
-          <p:cNvSpPr/>
-          <p:nvPr/>
-        </p:nvSpPr>
-        <p:spPr>
-          <a:xfrm>
-            <a:off x="1285336" y="2743200"/>
-            <a:ext cx="1051560" cy="640080"/>
+          <p:cNvPr id="33" name="Text 31"/>
+          <p:cNvSpPr/>
+          <p:nvPr/>
+        </p:nvSpPr>
+        <p:spPr>
+          <a:xfrm>
+            <a:off x="7237845" y="2941607"/>
+            <a:ext cx="1163992" cy="711679"/>
           </a:xfrm>
           <a:prstGeom prst="rect">
             <a:avLst/>
@@ -2216,7 +2255,7 @@
               <a:buNone/>
             </a:pPr>
             <a:r>
-              <a:rPr lang="es-ES_tradnl" sz="1000" i="1" noProof="1">
+              <a:rPr lang="es-ES_tradnl" sz="1100" i="1" noProof="1">
                 <a:solidFill>
                   <a:srgbClr val="2C1A0E"/>
                 </a:solidFill>
@@ -2224,16 +2263,16 @@
                 <a:ea typeface="Calibri" pitchFamily="34" charset="-122"/>
                 <a:cs typeface="Calibri" pitchFamily="34" charset="-120"/>
               </a:rPr>
-              <a:t>~</a:t>
-            </a:r>
-            <a:endParaRPr lang="es-ES_tradnl" sz="1000" noProof="1"/>
+              <a:t>✓</a:t>
+            </a:r>
+            <a:endParaRPr lang="es-ES_tradnl" sz="1100" noProof="1"/>
           </a:p>
           <a:p>
             <a:pPr marL="0" indent="0" algn="ctr">
               <a:buNone/>
             </a:pPr>
             <a:r>
-              <a:rPr lang="es-ES_tradnl" sz="1000" i="1" noProof="1">
+              <a:rPr lang="es-ES_tradnl" sz="1100" i="1" noProof="1">
                 <a:solidFill>
                   <a:srgbClr val="2C1A0E"/>
                 </a:solidFill>
@@ -2241,22 +2280,71 @@
                 <a:ea typeface="Calibri" pitchFamily="34" charset="-122"/>
                 <a:cs typeface="Calibri" pitchFamily="34" charset="-120"/>
               </a:rPr>
-              <a:t>Tendencia leve, sin diferencia clara</a:t>
-            </a:r>
-            <a:endParaRPr lang="es-ES_tradnl" sz="1000" noProof="1"/>
-          </a:p>
-        </p:txBody>
-      </p:sp>
-      <p:sp>
-        <p:nvSpPr>
-          <p:cNvPr id="10" name="Shape 8"/>
-          <p:cNvSpPr/>
-          <p:nvPr/>
-        </p:nvSpPr>
-        <p:spPr>
-          <a:xfrm>
-            <a:off x="2611216" y="1371600"/>
-            <a:ext cx="1234440" cy="2560320"/>
+              <a:t>Pop.: 2,44 vs Premios 0,47</a:t>
+            </a:r>
+            <a:endParaRPr lang="es-ES_tradnl" sz="1100" noProof="1"/>
+          </a:p>
+        </p:txBody>
+      </p:sp>
+      <p:sp>
+        <p:nvSpPr>
+          <p:cNvPr id="40" name="Text 38"/>
+          <p:cNvSpPr/>
+          <p:nvPr/>
+        </p:nvSpPr>
+        <p:spPr>
+          <a:xfrm>
+            <a:off x="457200" y="4365253"/>
+            <a:ext cx="8229600" cy="548640"/>
+          </a:xfrm>
+          <a:prstGeom prst="rect">
+            <a:avLst/>
+          </a:prstGeom>
+          <a:noFill/>
+          <a:ln/>
+        </p:spPr>
+        <p:txBody>
+          <a:bodyPr wrap="square" rtlCol="0" anchor="ctr"/>
+          <a:lstStyle/>
+          <a:p>
+            <a:pPr marL="0" indent="0" algn="ctr">
+              <a:buNone/>
+            </a:pPr>
+            <a:r>
+              <a:rPr lang="es-ES_tradnl" sz="1300" i="1" noProof="1">
+                <a:solidFill>
+                  <a:schemeClr val="accent4"/>
+                </a:solidFill>
+                <a:latin typeface="Calibri" pitchFamily="34" charset="0"/>
+                <a:ea typeface="Calibri" pitchFamily="34" charset="-122"/>
+                <a:cs typeface="Calibri" pitchFamily="34" charset="-120"/>
+              </a:rPr>
+              <a:t>Próximos pasos: Análisis de géneros · Correlación bbeScore · Modelo predictivo de rating</a:t>
+            </a:r>
+            <a:endParaRPr lang="es-ES_tradnl" sz="1300" noProof="1">
+              <a:solidFill>
+                <a:schemeClr val="accent4"/>
+              </a:solidFill>
+            </a:endParaRPr>
+          </a:p>
+        </p:txBody>
+      </p:sp>
+      <p:sp>
+        <p:nvSpPr>
+          <p:cNvPr id="35" name="Shape 26">
+            <a:extLst>
+              <a:ext uri="{FF2B5EF4-FFF2-40B4-BE49-F238E27FC236}">
+                <a16:creationId xmlns:a16="http://schemas.microsoft.com/office/drawing/2014/main" id="{98DB840A-A14A-3E95-22AA-AD6C131CFEF9}"/>
+              </a:ext>
+            </a:extLst>
+          </p:cNvPr>
+          <p:cNvSpPr/>
+          <p:nvPr/>
+        </p:nvSpPr>
+        <p:spPr>
+          <a:xfrm>
+            <a:off x="5546493" y="1371599"/>
+            <a:ext cx="1366425" cy="2846717"/>
           </a:xfrm>
           <a:prstGeom prst="rect">
             <a:avLst/>
@@ -2281,14 +2369,20 @@
       </p:sp>
       <p:sp>
         <p:nvSpPr>
-          <p:cNvPr id="11" name="Shape 9"/>
-          <p:cNvSpPr/>
-          <p:nvPr/>
-        </p:nvSpPr>
-        <p:spPr>
-          <a:xfrm>
-            <a:off x="2611216" y="1371600"/>
-            <a:ext cx="1234440" cy="457200"/>
+          <p:cNvPr id="36" name="Shape 27">
+            <a:extLst>
+              <a:ext uri="{FF2B5EF4-FFF2-40B4-BE49-F238E27FC236}">
+                <a16:creationId xmlns:a16="http://schemas.microsoft.com/office/drawing/2014/main" id="{60958BB3-3E20-7D99-2248-FA098048D698}"/>
+              </a:ext>
+            </a:extLst>
+          </p:cNvPr>
+          <p:cNvSpPr/>
+          <p:nvPr/>
+        </p:nvSpPr>
+        <p:spPr>
+          <a:xfrm>
+            <a:off x="5546493" y="1371600"/>
+            <a:ext cx="1366425" cy="508342"/>
           </a:xfrm>
           <a:prstGeom prst="rect">
             <a:avLst/>
@@ -2313,14 +2407,20 @@
       </p:sp>
       <p:sp>
         <p:nvSpPr>
-          <p:cNvPr id="12" name="Text 10"/>
-          <p:cNvSpPr/>
-          <p:nvPr/>
-        </p:nvSpPr>
-        <p:spPr>
-          <a:xfrm>
-            <a:off x="2611216" y="1371600"/>
-            <a:ext cx="1234440" cy="457200"/>
+          <p:cNvPr id="37" name="Text 28">
+            <a:extLst>
+              <a:ext uri="{FF2B5EF4-FFF2-40B4-BE49-F238E27FC236}">
+                <a16:creationId xmlns:a16="http://schemas.microsoft.com/office/drawing/2014/main" id="{78D92796-2459-9210-CA95-6D8D5E5BB1FD}"/>
+              </a:ext>
+            </a:extLst>
+          </p:cNvPr>
+          <p:cNvSpPr/>
+          <p:nvPr/>
+        </p:nvSpPr>
+        <p:spPr>
+          <a:xfrm>
+            <a:off x="5546493" y="1371600"/>
+            <a:ext cx="1366425" cy="508342"/>
           </a:xfrm>
           <a:prstGeom prst="rect">
             <a:avLst/>
@@ -2336,7 +2436,7 @@
               <a:buNone/>
             </a:pPr>
             <a:r>
-              <a:rPr lang="es-ES_tradnl" sz="1400" b="1" noProof="1">
+              <a:rPr lang="es-ES_tradnl" sz="1600" b="1" noProof="1">
                 <a:solidFill>
                   <a:srgbClr val="2C1A0E"/>
                 </a:solidFill>
@@ -2344,78 +2444,28 @@
                 <a:ea typeface="Georgia" pitchFamily="34" charset="-122"/>
                 <a:cs typeface="Georgia" pitchFamily="34" charset="-120"/>
               </a:rPr>
-              <a:t>H2</a:t>
-            </a:r>
-            <a:endParaRPr lang="es-ES_tradnl" sz="1400" noProof="1"/>
-          </a:p>
-        </p:txBody>
-      </p:sp>
-      <p:sp>
-        <p:nvSpPr>
-          <p:cNvPr id="13" name="Text 11"/>
-          <p:cNvSpPr/>
-          <p:nvPr/>
-        </p:nvSpPr>
-        <p:spPr>
-          <a:xfrm>
-            <a:off x="2611216" y="1874520"/>
-            <a:ext cx="1234440" cy="731520"/>
-          </a:xfrm>
-          <a:prstGeom prst="rect">
-            <a:avLst/>
-          </a:prstGeom>
-          <a:noFill/>
-          <a:ln/>
-        </p:spPr>
-        <p:txBody>
-          <a:bodyPr wrap="square" rtlCol="0" anchor="ctr"/>
-          <a:lstStyle/>
-          <a:p>
-            <a:pPr marL="0" indent="0" algn="ctr">
-              <a:buNone/>
-            </a:pPr>
-            <a:r>
-              <a:rPr lang="es-ES_tradnl" sz="1200" noProof="1">
-                <a:solidFill>
-                  <a:srgbClr val="FDF6EC"/>
-                </a:solidFill>
-                <a:latin typeface="Calibri" pitchFamily="34" charset="0"/>
-                <a:ea typeface="Calibri" pitchFamily="34" charset="-122"/>
-                <a:cs typeface="Calibri" pitchFamily="34" charset="-120"/>
-              </a:rPr>
-              <a:t>Hardcover</a:t>
-            </a:r>
-            <a:endParaRPr lang="es-ES_tradnl" sz="1200" noProof="1"/>
-          </a:p>
-          <a:p>
-            <a:pPr marL="0" indent="0" algn="ctr">
-              <a:buNone/>
-            </a:pPr>
-            <a:r>
-              <a:rPr lang="es-ES_tradnl" sz="1200" noProof="1">
-                <a:solidFill>
-                  <a:srgbClr val="FDF6EC"/>
-                </a:solidFill>
-                <a:latin typeface="Calibri" pitchFamily="34" charset="0"/>
-                <a:ea typeface="Calibri" pitchFamily="34" charset="-122"/>
-                <a:cs typeface="Calibri" pitchFamily="34" charset="-120"/>
-              </a:rPr>
-              <a:t>vs Rating</a:t>
-            </a:r>
-            <a:endParaRPr lang="es-ES_tradnl" sz="1200" noProof="1"/>
-          </a:p>
-        </p:txBody>
-      </p:sp>
-      <p:sp>
-        <p:nvSpPr>
-          <p:cNvPr id="14" name="Shape 12"/>
-          <p:cNvSpPr/>
-          <p:nvPr/>
-        </p:nvSpPr>
-        <p:spPr>
-          <a:xfrm>
-            <a:off x="2702656" y="2743200"/>
-            <a:ext cx="1051560" cy="640080"/>
+              <a:t>H4</a:t>
+            </a:r>
+            <a:endParaRPr lang="es-ES_tradnl" sz="1600" noProof="1"/>
+          </a:p>
+        </p:txBody>
+      </p:sp>
+      <p:sp>
+        <p:nvSpPr>
+          <p:cNvPr id="39" name="Shape 30">
+            <a:extLst>
+              <a:ext uri="{FF2B5EF4-FFF2-40B4-BE49-F238E27FC236}">
+                <a16:creationId xmlns:a16="http://schemas.microsoft.com/office/drawing/2014/main" id="{927C00F6-0E9B-9DDB-EBFE-7396374CCD28}"/>
+              </a:ext>
+            </a:extLst>
+          </p:cNvPr>
+          <p:cNvSpPr/>
+          <p:nvPr/>
+        </p:nvSpPr>
+        <p:spPr>
+          <a:xfrm>
+            <a:off x="5647709" y="2928667"/>
+            <a:ext cx="1163992" cy="711679"/>
           </a:xfrm>
           <a:prstGeom prst="rect">
             <a:avLst/>
@@ -2440,14 +2490,20 @@
       </p:sp>
       <p:sp>
         <p:nvSpPr>
-          <p:cNvPr id="15" name="Text 13"/>
-          <p:cNvSpPr/>
-          <p:nvPr/>
-        </p:nvSpPr>
-        <p:spPr>
-          <a:xfrm>
-            <a:off x="2702656" y="2743200"/>
-            <a:ext cx="1051560" cy="640080"/>
+          <p:cNvPr id="41" name="Text 31">
+            <a:extLst>
+              <a:ext uri="{FF2B5EF4-FFF2-40B4-BE49-F238E27FC236}">
+                <a16:creationId xmlns:a16="http://schemas.microsoft.com/office/drawing/2014/main" id="{71FC4CBD-C76F-4E47-DE90-42D118E5E0DC}"/>
+              </a:ext>
+            </a:extLst>
+          </p:cNvPr>
+          <p:cNvSpPr/>
+          <p:nvPr/>
+        </p:nvSpPr>
+        <p:spPr>
+          <a:xfrm>
+            <a:off x="5647709" y="2941607"/>
+            <a:ext cx="1163992" cy="711679"/>
           </a:xfrm>
           <a:prstGeom prst="rect">
             <a:avLst/>
@@ -2459,11 +2515,9 @@
           <a:bodyPr wrap="square" rtlCol="0" anchor="ctr"/>
           <a:lstStyle/>
           <a:p>
-            <a:pPr marL="0" indent="0" algn="ctr">
-              <a:buNone/>
-            </a:pPr>
-            <a:r>
-              <a:rPr lang="es-ES_tradnl" sz="1000" i="1" noProof="1">
+            <a:pPr algn="ctr"/>
+            <a:r>
+              <a:rPr lang="es-ES_tradnl" sz="1100" i="1" noProof="1">
                 <a:solidFill>
                   <a:srgbClr val="2C1A0E"/>
                 </a:solidFill>
@@ -2471,16 +2525,14 @@
                 <a:ea typeface="Calibri" pitchFamily="34" charset="-122"/>
                 <a:cs typeface="Calibri" pitchFamily="34" charset="-120"/>
               </a:rPr>
-              <a:t>✗</a:t>
-            </a:r>
-            <a:endParaRPr lang="es-ES_tradnl" sz="1000" noProof="1"/>
-          </a:p>
-          <a:p>
-            <a:pPr marL="0" indent="0" algn="ctr">
-              <a:buNone/>
-            </a:pPr>
-            <a:r>
-              <a:rPr lang="es-ES_tradnl" sz="1000" i="1" noProof="1">
+              <a:t>✓</a:t>
+            </a:r>
+            <a:endParaRPr lang="es-ES_tradnl" sz="1100" noProof="1"/>
+          </a:p>
+          <a:p>
+            <a:pPr algn="ctr"/>
+            <a:r>
+              <a:rPr lang="es-ES_tradnl" sz="1100" i="1" noProof="1">
                 <a:solidFill>
                   <a:srgbClr val="2C1A0E"/>
                 </a:solidFill>
@@ -2488,22 +2540,90 @@
                 <a:ea typeface="Calibri" pitchFamily="34" charset="-122"/>
                 <a:cs typeface="Calibri" pitchFamily="34" charset="-120"/>
               </a:rPr>
-              <a:t>✗ Hardcover: rating más bajo (3,99)</a:t>
-            </a:r>
-            <a:endParaRPr lang="es-ES_tradnl" sz="1000" noProof="1"/>
-          </a:p>
-        </p:txBody>
-      </p:sp>
-      <p:sp>
-        <p:nvSpPr>
-          <p:cNvPr id="16" name="Shape 14"/>
-          <p:cNvSpPr/>
-          <p:nvPr/>
-        </p:nvSpPr>
-        <p:spPr>
-          <a:xfrm>
-            <a:off x="4028536" y="1371600"/>
-            <a:ext cx="1234440" cy="2560320"/>
+              <a:t>J.K. Rowling lidera con 24M+ valoraciones</a:t>
+            </a:r>
+            <a:endParaRPr lang="es-ES_tradnl" sz="1100" noProof="1"/>
+          </a:p>
+        </p:txBody>
+      </p:sp>
+      <p:sp>
+        <p:nvSpPr>
+          <p:cNvPr id="54" name="Text 23">
+            <a:extLst>
+              <a:ext uri="{FF2B5EF4-FFF2-40B4-BE49-F238E27FC236}">
+                <a16:creationId xmlns:a16="http://schemas.microsoft.com/office/drawing/2014/main" id="{5D933D5D-A316-F5F3-25BD-16089175A2EB}"/>
+              </a:ext>
+            </a:extLst>
+          </p:cNvPr>
+          <p:cNvSpPr/>
+          <p:nvPr/>
+        </p:nvSpPr>
+        <p:spPr>
+          <a:xfrm>
+            <a:off x="5612485" y="2087880"/>
+            <a:ext cx="1234440" cy="731520"/>
+          </a:xfrm>
+          <a:prstGeom prst="rect">
+            <a:avLst/>
+          </a:prstGeom>
+          <a:noFill/>
+          <a:ln/>
+        </p:spPr>
+        <p:txBody>
+          <a:bodyPr wrap="square" rtlCol="0" anchor="ctr"/>
+          <a:lstStyle/>
+          <a:p>
+            <a:pPr marL="0" indent="0" algn="ctr">
+              <a:buNone/>
+            </a:pPr>
+            <a:r>
+              <a:rPr lang="es-ES_tradnl" sz="1200" noProof="1">
+                <a:solidFill>
+                  <a:srgbClr val="FDF6EC"/>
+                </a:solidFill>
+                <a:latin typeface="Calibri" pitchFamily="34" charset="0"/>
+                <a:ea typeface="Calibri" pitchFamily="34" charset="-122"/>
+                <a:cs typeface="Calibri" pitchFamily="34" charset="-120"/>
+              </a:rPr>
+              <a:t>Valoraciones</a:t>
+            </a:r>
+            <a:endParaRPr lang="es-ES_tradnl" sz="1200" noProof="1"/>
+          </a:p>
+          <a:p>
+            <a:pPr marL="0" indent="0" algn="ctr">
+              <a:buNone/>
+            </a:pPr>
+            <a:r>
+              <a:rPr lang="es-ES_tradnl" sz="1200" noProof="1">
+                <a:solidFill>
+                  <a:srgbClr val="FDF6EC"/>
+                </a:solidFill>
+                <a:latin typeface="Calibri" pitchFamily="34" charset="0"/>
+                <a:ea typeface="Calibri" pitchFamily="34" charset="-122"/>
+                <a:cs typeface="Calibri" pitchFamily="34" charset="-120"/>
+              </a:rPr>
+              <a:t>vs Rating</a:t>
+            </a:r>
+            <a:endParaRPr lang="es-ES_tradnl" sz="1200" noProof="1"/>
+          </a:p>
+        </p:txBody>
+      </p:sp>
+      <p:sp>
+        <p:nvSpPr>
+          <p:cNvPr id="55" name="Shape 26">
+            <a:extLst>
+              <a:ext uri="{FF2B5EF4-FFF2-40B4-BE49-F238E27FC236}">
+                <a16:creationId xmlns:a16="http://schemas.microsoft.com/office/drawing/2014/main" id="{B4BE5447-B210-EACD-92CA-15D2BA4C46C5}"/>
+              </a:ext>
+            </a:extLst>
+          </p:cNvPr>
+          <p:cNvSpPr/>
+          <p:nvPr/>
+        </p:nvSpPr>
+        <p:spPr>
+          <a:xfrm>
+            <a:off x="3956357" y="1371599"/>
+            <a:ext cx="1366425" cy="2846717"/>
           </a:xfrm>
           <a:prstGeom prst="rect">
             <a:avLst/>
@@ -2528,14 +2648,20 @@
       </p:sp>
       <p:sp>
         <p:nvSpPr>
-          <p:cNvPr id="17" name="Shape 15"/>
-          <p:cNvSpPr/>
-          <p:nvPr/>
-        </p:nvSpPr>
-        <p:spPr>
-          <a:xfrm>
-            <a:off x="4028536" y="1371600"/>
-            <a:ext cx="1234440" cy="457200"/>
+          <p:cNvPr id="56" name="Shape 27">
+            <a:extLst>
+              <a:ext uri="{FF2B5EF4-FFF2-40B4-BE49-F238E27FC236}">
+                <a16:creationId xmlns:a16="http://schemas.microsoft.com/office/drawing/2014/main" id="{6EC4269B-10EE-B96F-3C65-9DB4F434BDCD}"/>
+              </a:ext>
+            </a:extLst>
+          </p:cNvPr>
+          <p:cNvSpPr/>
+          <p:nvPr/>
+        </p:nvSpPr>
+        <p:spPr>
+          <a:xfrm>
+            <a:off x="3956357" y="1371600"/>
+            <a:ext cx="1366425" cy="508342"/>
           </a:xfrm>
           <a:prstGeom prst="rect">
             <a:avLst/>
@@ -2560,14 +2686,20 @@
       </p:sp>
       <p:sp>
         <p:nvSpPr>
-          <p:cNvPr id="18" name="Text 16"/>
-          <p:cNvSpPr/>
-          <p:nvPr/>
-        </p:nvSpPr>
-        <p:spPr>
-          <a:xfrm>
-            <a:off x="4028536" y="1371600"/>
-            <a:ext cx="1234440" cy="457200"/>
+          <p:cNvPr id="57" name="Text 28">
+            <a:extLst>
+              <a:ext uri="{FF2B5EF4-FFF2-40B4-BE49-F238E27FC236}">
+                <a16:creationId xmlns:a16="http://schemas.microsoft.com/office/drawing/2014/main" id="{1EFCCFA8-8B47-FA38-423B-21C657A4F0CF}"/>
+              </a:ext>
+            </a:extLst>
+          </p:cNvPr>
+          <p:cNvSpPr/>
+          <p:nvPr/>
+        </p:nvSpPr>
+        <p:spPr>
+          <a:xfrm>
+            <a:off x="3956357" y="1371600"/>
+            <a:ext cx="1366425" cy="508342"/>
           </a:xfrm>
           <a:prstGeom prst="rect">
             <a:avLst/>
@@ -2583,7 +2715,7 @@
               <a:buNone/>
             </a:pPr>
             <a:r>
-              <a:rPr lang="es-ES_tradnl" sz="1400" b="1" noProof="1">
+              <a:rPr lang="es-ES_tradnl" sz="1600" b="1" noProof="1">
                 <a:solidFill>
                   <a:srgbClr val="2C1A0E"/>
                 </a:solidFill>
@@ -2593,76 +2725,26 @@
               </a:rPr>
               <a:t>H3</a:t>
             </a:r>
-            <a:endParaRPr lang="es-ES_tradnl" sz="1400" noProof="1"/>
-          </a:p>
-        </p:txBody>
-      </p:sp>
-      <p:sp>
-        <p:nvSpPr>
-          <p:cNvPr id="19" name="Text 17"/>
-          <p:cNvSpPr/>
-          <p:nvPr/>
-        </p:nvSpPr>
-        <p:spPr>
-          <a:xfrm>
-            <a:off x="4028536" y="1874520"/>
-            <a:ext cx="1234440" cy="731520"/>
-          </a:xfrm>
-          <a:prstGeom prst="rect">
-            <a:avLst/>
-          </a:prstGeom>
-          <a:noFill/>
-          <a:ln/>
-        </p:spPr>
-        <p:txBody>
-          <a:bodyPr wrap="square" rtlCol="0" anchor="ctr"/>
-          <a:lstStyle/>
-          <a:p>
-            <a:pPr marL="0" indent="0" algn="ctr">
-              <a:buNone/>
-            </a:pPr>
-            <a:r>
-              <a:rPr lang="es-ES_tradnl" sz="1200" noProof="1">
-                <a:solidFill>
-                  <a:srgbClr val="FDF6EC"/>
-                </a:solidFill>
-                <a:latin typeface="Calibri" pitchFamily="34" charset="0"/>
-                <a:ea typeface="Calibri" pitchFamily="34" charset="-122"/>
-                <a:cs typeface="Calibri" pitchFamily="34" charset="-120"/>
-              </a:rPr>
-              <a:t>Series</a:t>
-            </a:r>
-            <a:endParaRPr lang="es-ES_tradnl" sz="1200" noProof="1"/>
-          </a:p>
-          <a:p>
-            <a:pPr marL="0" indent="0" algn="ctr">
-              <a:buNone/>
-            </a:pPr>
-            <a:r>
-              <a:rPr lang="es-ES_tradnl" sz="1200" noProof="1">
-                <a:solidFill>
-                  <a:srgbClr val="FDF6EC"/>
-                </a:solidFill>
-                <a:latin typeface="Calibri" pitchFamily="34" charset="0"/>
-                <a:ea typeface="Calibri" pitchFamily="34" charset="-122"/>
-                <a:cs typeface="Calibri" pitchFamily="34" charset="-120"/>
-              </a:rPr>
-              <a:t>vs Rating</a:t>
-            </a:r>
-            <a:endParaRPr lang="es-ES_tradnl" sz="1200" noProof="1"/>
-          </a:p>
-        </p:txBody>
-      </p:sp>
-      <p:sp>
-        <p:nvSpPr>
-          <p:cNvPr id="20" name="Shape 18"/>
-          <p:cNvSpPr/>
-          <p:nvPr/>
-        </p:nvSpPr>
-        <p:spPr>
-          <a:xfrm>
-            <a:off x="4119976" y="2743200"/>
-            <a:ext cx="1051560" cy="640080"/>
+            <a:endParaRPr lang="es-ES_tradnl" sz="1600" noProof="1"/>
+          </a:p>
+        </p:txBody>
+      </p:sp>
+      <p:sp>
+        <p:nvSpPr>
+          <p:cNvPr id="58" name="Shape 30">
+            <a:extLst>
+              <a:ext uri="{FF2B5EF4-FFF2-40B4-BE49-F238E27FC236}">
+                <a16:creationId xmlns:a16="http://schemas.microsoft.com/office/drawing/2014/main" id="{5143E443-D2D2-3844-DF3D-BEE73F1E3756}"/>
+              </a:ext>
+            </a:extLst>
+          </p:cNvPr>
+          <p:cNvSpPr/>
+          <p:nvPr/>
+        </p:nvSpPr>
+        <p:spPr>
+          <a:xfrm>
+            <a:off x="4057573" y="2928667"/>
+            <a:ext cx="1163992" cy="711679"/>
           </a:xfrm>
           <a:prstGeom prst="rect">
             <a:avLst/>
@@ -2687,14 +2769,20 @@
       </p:sp>
       <p:sp>
         <p:nvSpPr>
-          <p:cNvPr id="21" name="Text 19"/>
-          <p:cNvSpPr/>
-          <p:nvPr/>
-        </p:nvSpPr>
-        <p:spPr>
-          <a:xfrm>
-            <a:off x="4119976" y="2743200"/>
-            <a:ext cx="1051560" cy="640080"/>
+          <p:cNvPr id="59" name="Text 31">
+            <a:extLst>
+              <a:ext uri="{FF2B5EF4-FFF2-40B4-BE49-F238E27FC236}">
+                <a16:creationId xmlns:a16="http://schemas.microsoft.com/office/drawing/2014/main" id="{4B54170B-FF76-71B4-2CDB-4AF95E4C4638}"/>
+              </a:ext>
+            </a:extLst>
+          </p:cNvPr>
+          <p:cNvSpPr/>
+          <p:nvPr/>
+        </p:nvSpPr>
+        <p:spPr>
+          <a:xfrm>
+            <a:off x="4057573" y="2941607"/>
+            <a:ext cx="1163992" cy="711679"/>
           </a:xfrm>
           <a:prstGeom prst="rect">
             <a:avLst/>
@@ -2706,11 +2794,9 @@
           <a:bodyPr wrap="square" rtlCol="0" anchor="ctr"/>
           <a:lstStyle/>
           <a:p>
-            <a:pPr marL="0" indent="0" algn="ctr">
-              <a:buNone/>
-            </a:pPr>
-            <a:r>
-              <a:rPr lang="es-ES_tradnl" sz="1000" i="1" noProof="1">
+            <a:pPr algn="ctr"/>
+            <a:r>
+              <a:rPr lang="es-ES_tradnl" sz="1100" i="1" noProof="1">
                 <a:solidFill>
                   <a:srgbClr val="2C1A0E"/>
                 </a:solidFill>
@@ -2720,14 +2806,12 @@
               </a:rPr>
               <a:t>✓</a:t>
             </a:r>
-            <a:endParaRPr lang="es-ES_tradnl" sz="1000" noProof="1"/>
-          </a:p>
-          <a:p>
-            <a:pPr marL="0" indent="0" algn="ctr">
-              <a:buNone/>
-            </a:pPr>
-            <a:r>
-              <a:rPr lang="es-ES_tradnl" sz="1000" i="1" noProof="1">
+            <a:endParaRPr lang="es-ES_tradnl" sz="1100" noProof="1"/>
+          </a:p>
+          <a:p>
+            <a:pPr algn="ctr"/>
+            <a:r>
+              <a:rPr lang="es-ES_tradnl" sz="1100" i="1" noProof="1">
                 <a:solidFill>
                   <a:srgbClr val="2C1A0E"/>
                 </a:solidFill>
@@ -2737,20 +2821,86 @@
               </a:rPr>
               <a:t>Series: 4,03 vs 3,95 standalone</a:t>
             </a:r>
-            <a:endParaRPr lang="es-ES_tradnl" sz="1000" noProof="1"/>
-          </a:p>
-        </p:txBody>
-      </p:sp>
-      <p:sp>
-        <p:nvSpPr>
-          <p:cNvPr id="22" name="Shape 20"/>
-          <p:cNvSpPr/>
-          <p:nvPr/>
-        </p:nvSpPr>
-        <p:spPr>
-          <a:xfrm>
-            <a:off x="5445856" y="1371600"/>
-            <a:ext cx="1234440" cy="2560320"/>
+            <a:endParaRPr lang="es-ES_tradnl" sz="1100" noProof="1"/>
+          </a:p>
+        </p:txBody>
+      </p:sp>
+      <p:sp>
+        <p:nvSpPr>
+          <p:cNvPr id="60" name="Text 23">
+            <a:extLst>
+              <a:ext uri="{FF2B5EF4-FFF2-40B4-BE49-F238E27FC236}">
+                <a16:creationId xmlns:a16="http://schemas.microsoft.com/office/drawing/2014/main" id="{DF9F0431-5E63-DEE8-3CDA-02EE4C9BCA4B}"/>
+              </a:ext>
+            </a:extLst>
+          </p:cNvPr>
+          <p:cNvSpPr/>
+          <p:nvPr/>
+        </p:nvSpPr>
+        <p:spPr>
+          <a:xfrm>
+            <a:off x="4022349" y="2087880"/>
+            <a:ext cx="1234440" cy="731520"/>
+          </a:xfrm>
+          <a:prstGeom prst="rect">
+            <a:avLst/>
+          </a:prstGeom>
+          <a:noFill/>
+          <a:ln/>
+        </p:spPr>
+        <p:txBody>
+          <a:bodyPr wrap="square" rtlCol="0" anchor="ctr"/>
+          <a:lstStyle/>
+          <a:p>
+            <a:pPr marL="0" indent="0" algn="ctr">
+              <a:buNone/>
+            </a:pPr>
+            <a:r>
+              <a:rPr lang="es-ES_tradnl" sz="1200" noProof="1">
+                <a:solidFill>
+                  <a:srgbClr val="FDF6EC"/>
+                </a:solidFill>
+                <a:latin typeface="Calibri" pitchFamily="34" charset="0"/>
+                <a:ea typeface="Calibri" pitchFamily="34" charset="-122"/>
+                <a:cs typeface="Calibri" pitchFamily="34" charset="-120"/>
+              </a:rPr>
+              <a:t>Series</a:t>
+            </a:r>
+          </a:p>
+          <a:p>
+            <a:pPr marL="0" indent="0" algn="ctr">
+              <a:buNone/>
+            </a:pPr>
+            <a:r>
+              <a:rPr lang="es-ES_tradnl" sz="1200" noProof="1">
+                <a:solidFill>
+                  <a:srgbClr val="FDF6EC"/>
+                </a:solidFill>
+                <a:latin typeface="Calibri" pitchFamily="34" charset="0"/>
+                <a:cs typeface="Calibri" pitchFamily="34" charset="-120"/>
+              </a:rPr>
+              <a:t>vs Rating</a:t>
+            </a:r>
+            <a:endParaRPr lang="es-ES_tradnl" sz="1200" noProof="1"/>
+          </a:p>
+        </p:txBody>
+      </p:sp>
+      <p:sp>
+        <p:nvSpPr>
+          <p:cNvPr id="61" name="Shape 26">
+            <a:extLst>
+              <a:ext uri="{FF2B5EF4-FFF2-40B4-BE49-F238E27FC236}">
+                <a16:creationId xmlns:a16="http://schemas.microsoft.com/office/drawing/2014/main" id="{7090FE61-4F9B-F7A1-DF7A-2CE70DFD1CBD}"/>
+              </a:ext>
+            </a:extLst>
+          </p:cNvPr>
+          <p:cNvSpPr/>
+          <p:nvPr/>
+        </p:nvSpPr>
+        <p:spPr>
+          <a:xfrm>
+            <a:off x="2342215" y="1371599"/>
+            <a:ext cx="1366425" cy="2846717"/>
           </a:xfrm>
           <a:prstGeom prst="rect">
             <a:avLst/>
@@ -2775,14 +2925,20 @@
       </p:sp>
       <p:sp>
         <p:nvSpPr>
-          <p:cNvPr id="23" name="Shape 21"/>
-          <p:cNvSpPr/>
-          <p:nvPr/>
-        </p:nvSpPr>
-        <p:spPr>
-          <a:xfrm>
-            <a:off x="5445856" y="1371600"/>
-            <a:ext cx="1234440" cy="457200"/>
+          <p:cNvPr id="62" name="Shape 27">
+            <a:extLst>
+              <a:ext uri="{FF2B5EF4-FFF2-40B4-BE49-F238E27FC236}">
+                <a16:creationId xmlns:a16="http://schemas.microsoft.com/office/drawing/2014/main" id="{8B946A44-1090-738D-BBFC-0D9D28C888C7}"/>
+              </a:ext>
+            </a:extLst>
+          </p:cNvPr>
+          <p:cNvSpPr/>
+          <p:nvPr/>
+        </p:nvSpPr>
+        <p:spPr>
+          <a:xfrm>
+            <a:off x="2342215" y="1371600"/>
+            <a:ext cx="1366425" cy="508342"/>
           </a:xfrm>
           <a:prstGeom prst="rect">
             <a:avLst/>
@@ -2807,14 +2963,20 @@
       </p:sp>
       <p:sp>
         <p:nvSpPr>
-          <p:cNvPr id="24" name="Text 22"/>
-          <p:cNvSpPr/>
-          <p:nvPr/>
-        </p:nvSpPr>
-        <p:spPr>
-          <a:xfrm>
-            <a:off x="5445856" y="1371600"/>
-            <a:ext cx="1234440" cy="457200"/>
+          <p:cNvPr id="63" name="Text 28">
+            <a:extLst>
+              <a:ext uri="{FF2B5EF4-FFF2-40B4-BE49-F238E27FC236}">
+                <a16:creationId xmlns:a16="http://schemas.microsoft.com/office/drawing/2014/main" id="{F4D65A32-0EFA-BB61-3B33-06663641D5DC}"/>
+              </a:ext>
+            </a:extLst>
+          </p:cNvPr>
+          <p:cNvSpPr/>
+          <p:nvPr/>
+        </p:nvSpPr>
+        <p:spPr>
+          <a:xfrm>
+            <a:off x="2342215" y="1371600"/>
+            <a:ext cx="1366425" cy="508342"/>
           </a:xfrm>
           <a:prstGeom prst="rect">
             <a:avLst/>
@@ -2830,7 +2992,7 @@
               <a:buNone/>
             </a:pPr>
             <a:r>
-              <a:rPr lang="es-ES_tradnl" sz="1400" b="1" noProof="1">
+              <a:rPr lang="es-ES_tradnl" sz="1600" b="1" noProof="1">
                 <a:solidFill>
                   <a:srgbClr val="2C1A0E"/>
                 </a:solidFill>
@@ -2838,78 +3000,28 @@
                 <a:ea typeface="Georgia" pitchFamily="34" charset="-122"/>
                 <a:cs typeface="Georgia" pitchFamily="34" charset="-120"/>
               </a:rPr>
-              <a:t>H4</a:t>
-            </a:r>
-            <a:endParaRPr lang="es-ES_tradnl" sz="1400" noProof="1"/>
-          </a:p>
-        </p:txBody>
-      </p:sp>
-      <p:sp>
-        <p:nvSpPr>
-          <p:cNvPr id="25" name="Text 23"/>
-          <p:cNvSpPr/>
-          <p:nvPr/>
-        </p:nvSpPr>
-        <p:spPr>
-          <a:xfrm>
-            <a:off x="5445856" y="1874520"/>
-            <a:ext cx="1234440" cy="731520"/>
-          </a:xfrm>
-          <a:prstGeom prst="rect">
-            <a:avLst/>
-          </a:prstGeom>
-          <a:noFill/>
-          <a:ln/>
-        </p:spPr>
-        <p:txBody>
-          <a:bodyPr wrap="square" rtlCol="0" anchor="ctr"/>
-          <a:lstStyle/>
-          <a:p>
-            <a:pPr marL="0" indent="0" algn="ctr">
-              <a:buNone/>
-            </a:pPr>
-            <a:r>
-              <a:rPr lang="es-ES_tradnl" sz="1200" noProof="1">
-                <a:solidFill>
-                  <a:srgbClr val="FDF6EC"/>
-                </a:solidFill>
-                <a:latin typeface="Calibri" pitchFamily="34" charset="0"/>
-                <a:ea typeface="Calibri" pitchFamily="34" charset="-122"/>
-                <a:cs typeface="Calibri" pitchFamily="34" charset="-120"/>
-              </a:rPr>
-              <a:t>Valoraciones</a:t>
-            </a:r>
-            <a:endParaRPr lang="es-ES_tradnl" sz="1200" noProof="1"/>
-          </a:p>
-          <a:p>
-            <a:pPr marL="0" indent="0" algn="ctr">
-              <a:buNone/>
-            </a:pPr>
-            <a:r>
-              <a:rPr lang="es-ES_tradnl" sz="1200" noProof="1">
-                <a:solidFill>
-                  <a:srgbClr val="FDF6EC"/>
-                </a:solidFill>
-                <a:latin typeface="Calibri" pitchFamily="34" charset="0"/>
-                <a:ea typeface="Calibri" pitchFamily="34" charset="-122"/>
-                <a:cs typeface="Calibri" pitchFamily="34" charset="-120"/>
-              </a:rPr>
-              <a:t>vs Rating</a:t>
-            </a:r>
-            <a:endParaRPr lang="es-ES_tradnl" sz="1200" noProof="1"/>
-          </a:p>
-        </p:txBody>
-      </p:sp>
-      <p:sp>
-        <p:nvSpPr>
-          <p:cNvPr id="26" name="Shape 24"/>
-          <p:cNvSpPr/>
-          <p:nvPr/>
-        </p:nvSpPr>
-        <p:spPr>
-          <a:xfrm>
-            <a:off x="5537296" y="2743200"/>
-            <a:ext cx="1051560" cy="640080"/>
+              <a:t>H2</a:t>
+            </a:r>
+            <a:endParaRPr lang="es-ES_tradnl" sz="1600" noProof="1"/>
+          </a:p>
+        </p:txBody>
+      </p:sp>
+      <p:sp>
+        <p:nvSpPr>
+          <p:cNvPr id="64" name="Shape 30">
+            <a:extLst>
+              <a:ext uri="{FF2B5EF4-FFF2-40B4-BE49-F238E27FC236}">
+                <a16:creationId xmlns:a16="http://schemas.microsoft.com/office/drawing/2014/main" id="{14D372EE-8D1B-A68B-5F0B-A772F708944B}"/>
+              </a:ext>
+            </a:extLst>
+          </p:cNvPr>
+          <p:cNvSpPr/>
+          <p:nvPr/>
+        </p:nvSpPr>
+        <p:spPr>
+          <a:xfrm>
+            <a:off x="2443431" y="2928667"/>
+            <a:ext cx="1163992" cy="711679"/>
           </a:xfrm>
           <a:prstGeom prst="rect">
             <a:avLst/>
@@ -2934,14 +3046,20 @@
       </p:sp>
       <p:sp>
         <p:nvSpPr>
-          <p:cNvPr id="27" name="Text 25"/>
-          <p:cNvSpPr/>
-          <p:nvPr/>
-        </p:nvSpPr>
-        <p:spPr>
-          <a:xfrm>
-            <a:off x="5537296" y="2743200"/>
-            <a:ext cx="1051560" cy="640080"/>
+          <p:cNvPr id="65" name="Text 31">
+            <a:extLst>
+              <a:ext uri="{FF2B5EF4-FFF2-40B4-BE49-F238E27FC236}">
+                <a16:creationId xmlns:a16="http://schemas.microsoft.com/office/drawing/2014/main" id="{7DC5D4E5-E7D0-664D-056D-8E7A88497B9E}"/>
+              </a:ext>
+            </a:extLst>
+          </p:cNvPr>
+          <p:cNvSpPr/>
+          <p:nvPr/>
+        </p:nvSpPr>
+        <p:spPr>
+          <a:xfrm>
+            <a:off x="2443431" y="2941607"/>
+            <a:ext cx="1163992" cy="711679"/>
           </a:xfrm>
           <a:prstGeom prst="rect">
             <a:avLst/>
@@ -2953,11 +3071,9 @@
           <a:bodyPr wrap="square" rtlCol="0" anchor="ctr"/>
           <a:lstStyle/>
           <a:p>
-            <a:pPr marL="0" indent="0" algn="ctr">
-              <a:buNone/>
-            </a:pPr>
-            <a:r>
-              <a:rPr lang="es-ES_tradnl" sz="1000" i="1" noProof="1">
+            <a:pPr algn="ctr"/>
+            <a:r>
+              <a:rPr lang="es-ES_tradnl" sz="1100" i="1" noProof="1">
                 <a:solidFill>
                   <a:srgbClr val="2C1A0E"/>
                 </a:solidFill>
@@ -2965,16 +3081,14 @@
                 <a:ea typeface="Calibri" pitchFamily="34" charset="-122"/>
                 <a:cs typeface="Calibri" pitchFamily="34" charset="-120"/>
               </a:rPr>
-              <a:t>✓</a:t>
-            </a:r>
-            <a:endParaRPr lang="es-ES_tradnl" sz="1000" noProof="1"/>
-          </a:p>
-          <a:p>
-            <a:pPr marL="0" indent="0" algn="ctr">
-              <a:buNone/>
-            </a:pPr>
-            <a:r>
-              <a:rPr lang="es-ES_tradnl" sz="1000" i="1" noProof="1">
+              <a:t>✗</a:t>
+            </a:r>
+            <a:endParaRPr lang="es-ES_tradnl" sz="1100" noProof="1"/>
+          </a:p>
+          <a:p>
+            <a:pPr algn="ctr"/>
+            <a:r>
+              <a:rPr lang="es-ES_tradnl" sz="1100" i="1" noProof="1">
                 <a:solidFill>
                   <a:srgbClr val="2C1A0E"/>
                 </a:solidFill>
@@ -2982,22 +3096,88 @@
                 <a:ea typeface="Calibri" pitchFamily="34" charset="-122"/>
                 <a:cs typeface="Calibri" pitchFamily="34" charset="-120"/>
               </a:rPr>
-              <a:t>J.K. Rowling lidera con 24M+ valoraciones</a:t>
-            </a:r>
-            <a:endParaRPr lang="es-ES_tradnl" sz="1000" noProof="1"/>
-          </a:p>
-        </p:txBody>
-      </p:sp>
-      <p:sp>
-        <p:nvSpPr>
-          <p:cNvPr id="28" name="Shape 26"/>
-          <p:cNvSpPr/>
-          <p:nvPr/>
-        </p:nvSpPr>
-        <p:spPr>
-          <a:xfrm>
-            <a:off x="6863176" y="1371600"/>
-            <a:ext cx="1234440" cy="2560320"/>
+              <a:t>✗ Hardcover: rating más bajo (3,99)</a:t>
+            </a:r>
+            <a:endParaRPr lang="es-ES_tradnl" sz="1100" noProof="1"/>
+          </a:p>
+        </p:txBody>
+      </p:sp>
+      <p:sp>
+        <p:nvSpPr>
+          <p:cNvPr id="66" name="Text 23">
+            <a:extLst>
+              <a:ext uri="{FF2B5EF4-FFF2-40B4-BE49-F238E27FC236}">
+                <a16:creationId xmlns:a16="http://schemas.microsoft.com/office/drawing/2014/main" id="{78CA5EEE-8C88-46AA-E64F-20A1EBE00CCC}"/>
+              </a:ext>
+            </a:extLst>
+          </p:cNvPr>
+          <p:cNvSpPr/>
+          <p:nvPr/>
+        </p:nvSpPr>
+        <p:spPr>
+          <a:xfrm>
+            <a:off x="2408207" y="2087880"/>
+            <a:ext cx="1234440" cy="731520"/>
+          </a:xfrm>
+          <a:prstGeom prst="rect">
+            <a:avLst/>
+          </a:prstGeom>
+          <a:noFill/>
+          <a:ln/>
+        </p:spPr>
+        <p:txBody>
+          <a:bodyPr wrap="square" rtlCol="0" anchor="ctr"/>
+          <a:lstStyle/>
+          <a:p>
+            <a:pPr marL="0" indent="0" algn="ctr">
+              <a:buNone/>
+            </a:pPr>
+            <a:r>
+              <a:rPr lang="es-ES_tradnl" sz="1200" noProof="1">
+                <a:solidFill>
+                  <a:srgbClr val="FDF6EC"/>
+                </a:solidFill>
+                <a:latin typeface="Calibri" pitchFamily="34" charset="0"/>
+                <a:ea typeface="Calibri" pitchFamily="34" charset="-122"/>
+                <a:cs typeface="Calibri" pitchFamily="34" charset="-120"/>
+              </a:rPr>
+              <a:t>Harcover</a:t>
+            </a:r>
+          </a:p>
+          <a:p>
+            <a:pPr marL="0" indent="0" algn="ctr">
+              <a:buNone/>
+            </a:pPr>
+            <a:r>
+              <a:rPr lang="es-ES_tradnl" sz="1200" noProof="1">
+                <a:solidFill>
+                  <a:srgbClr val="FDF6EC"/>
+                </a:solidFill>
+                <a:latin typeface="Calibri" pitchFamily="34" charset="0"/>
+                <a:cs typeface="Calibri" pitchFamily="34" charset="-120"/>
+              </a:rPr>
+              <a:t>vs Rating</a:t>
+            </a:r>
+            <a:endParaRPr lang="es-ES_tradnl" sz="1200" noProof="1"/>
+          </a:p>
+        </p:txBody>
+      </p:sp>
+      <p:sp>
+        <p:nvSpPr>
+          <p:cNvPr id="67" name="Shape 26">
+            <a:extLst>
+              <a:ext uri="{FF2B5EF4-FFF2-40B4-BE49-F238E27FC236}">
+                <a16:creationId xmlns:a16="http://schemas.microsoft.com/office/drawing/2014/main" id="{421099B6-4B37-2319-E9AF-3E389D5C1F7C}"/>
+              </a:ext>
+            </a:extLst>
+          </p:cNvPr>
+          <p:cNvSpPr/>
+          <p:nvPr/>
+        </p:nvSpPr>
+        <p:spPr>
+          <a:xfrm>
+            <a:off x="728074" y="1371599"/>
+            <a:ext cx="1366425" cy="2846717"/>
           </a:xfrm>
           <a:prstGeom prst="rect">
             <a:avLst/>
@@ -3022,14 +3202,20 @@
       </p:sp>
       <p:sp>
         <p:nvSpPr>
-          <p:cNvPr id="29" name="Shape 27"/>
-          <p:cNvSpPr/>
-          <p:nvPr/>
-        </p:nvSpPr>
-        <p:spPr>
-          <a:xfrm>
-            <a:off x="6863176" y="1371600"/>
-            <a:ext cx="1234440" cy="457200"/>
+          <p:cNvPr id="68" name="Shape 27">
+            <a:extLst>
+              <a:ext uri="{FF2B5EF4-FFF2-40B4-BE49-F238E27FC236}">
+                <a16:creationId xmlns:a16="http://schemas.microsoft.com/office/drawing/2014/main" id="{3C9A160E-A9B9-B7AF-A489-FB25F38AA80D}"/>
+              </a:ext>
+            </a:extLst>
+          </p:cNvPr>
+          <p:cNvSpPr/>
+          <p:nvPr/>
+        </p:nvSpPr>
+        <p:spPr>
+          <a:xfrm>
+            <a:off x="728074" y="1371600"/>
+            <a:ext cx="1366425" cy="508342"/>
           </a:xfrm>
           <a:prstGeom prst="rect">
             <a:avLst/>
@@ -3054,14 +3240,20 @@
       </p:sp>
       <p:sp>
         <p:nvSpPr>
-          <p:cNvPr id="30" name="Text 28"/>
-          <p:cNvSpPr/>
-          <p:nvPr/>
-        </p:nvSpPr>
-        <p:spPr>
-          <a:xfrm>
-            <a:off x="6863176" y="1371600"/>
-            <a:ext cx="1234440" cy="457200"/>
+          <p:cNvPr id="69" name="Text 28">
+            <a:extLst>
+              <a:ext uri="{FF2B5EF4-FFF2-40B4-BE49-F238E27FC236}">
+                <a16:creationId xmlns:a16="http://schemas.microsoft.com/office/drawing/2014/main" id="{ABD03977-F9A1-F9B8-028E-661D7C879806}"/>
+              </a:ext>
+            </a:extLst>
+          </p:cNvPr>
+          <p:cNvSpPr/>
+          <p:nvPr/>
+        </p:nvSpPr>
+        <p:spPr>
+          <a:xfrm>
+            <a:off x="728074" y="1371600"/>
+            <a:ext cx="1366425" cy="508342"/>
           </a:xfrm>
           <a:prstGeom prst="rect">
             <a:avLst/>
@@ -3077,7 +3269,7 @@
               <a:buNone/>
             </a:pPr>
             <a:r>
-              <a:rPr lang="es-ES_tradnl" sz="1400" b="1" noProof="1">
+              <a:rPr lang="es-ES_tradnl" sz="1600" b="1" noProof="1">
                 <a:solidFill>
                   <a:srgbClr val="2C1A0E"/>
                 </a:solidFill>
@@ -3085,78 +3277,28 @@
                 <a:ea typeface="Georgia" pitchFamily="34" charset="-122"/>
                 <a:cs typeface="Georgia" pitchFamily="34" charset="-120"/>
               </a:rPr>
-              <a:t>H5</a:t>
-            </a:r>
-            <a:endParaRPr lang="es-ES_tradnl" sz="1400" noProof="1"/>
-          </a:p>
-        </p:txBody>
-      </p:sp>
-      <p:sp>
-        <p:nvSpPr>
-          <p:cNvPr id="31" name="Text 29"/>
-          <p:cNvSpPr/>
-          <p:nvPr/>
-        </p:nvSpPr>
-        <p:spPr>
-          <a:xfrm>
-            <a:off x="6863176" y="1874520"/>
-            <a:ext cx="1234440" cy="731520"/>
-          </a:xfrm>
-          <a:prstGeom prst="rect">
-            <a:avLst/>
-          </a:prstGeom>
-          <a:noFill/>
-          <a:ln/>
-        </p:spPr>
-        <p:txBody>
-          <a:bodyPr wrap="square" rtlCol="0" anchor="ctr"/>
-          <a:lstStyle/>
-          <a:p>
-            <a:pPr marL="0" indent="0" algn="ctr">
-              <a:buNone/>
-            </a:pPr>
-            <a:r>
-              <a:rPr lang="es-ES_tradnl" sz="1200" noProof="1">
-                <a:solidFill>
-                  <a:srgbClr val="FDF6EC"/>
-                </a:solidFill>
-                <a:latin typeface="Calibri" pitchFamily="34" charset="0"/>
-                <a:ea typeface="Calibri" pitchFamily="34" charset="-122"/>
-                <a:cs typeface="Calibri" pitchFamily="34" charset="-120"/>
-              </a:rPr>
-              <a:t>Autores</a:t>
-            </a:r>
-            <a:endParaRPr lang="es-ES_tradnl" sz="1200" noProof="1"/>
-          </a:p>
-          <a:p>
-            <a:pPr marL="0" indent="0" algn="ctr">
-              <a:buNone/>
-            </a:pPr>
-            <a:r>
-              <a:rPr lang="es-ES_tradnl" sz="1200" noProof="1">
-                <a:solidFill>
-                  <a:srgbClr val="FDF6EC"/>
-                </a:solidFill>
-                <a:latin typeface="Calibri" pitchFamily="34" charset="0"/>
-                <a:ea typeface="Calibri" pitchFamily="34" charset="-122"/>
-                <a:cs typeface="Calibri" pitchFamily="34" charset="-120"/>
-              </a:rPr>
-              <a:t>y premios</a:t>
-            </a:r>
-            <a:endParaRPr lang="es-ES_tradnl" sz="1200" noProof="1"/>
-          </a:p>
-        </p:txBody>
-      </p:sp>
-      <p:sp>
-        <p:nvSpPr>
-          <p:cNvPr id="32" name="Shape 30"/>
-          <p:cNvSpPr/>
-          <p:nvPr/>
-        </p:nvSpPr>
-        <p:spPr>
-          <a:xfrm>
-            <a:off x="6954616" y="2743200"/>
-            <a:ext cx="1051560" cy="640080"/>
+              <a:t>H1</a:t>
+            </a:r>
+            <a:endParaRPr lang="es-ES_tradnl" sz="1600" noProof="1"/>
+          </a:p>
+        </p:txBody>
+      </p:sp>
+      <p:sp>
+        <p:nvSpPr>
+          <p:cNvPr id="70" name="Shape 30">
+            <a:extLst>
+              <a:ext uri="{FF2B5EF4-FFF2-40B4-BE49-F238E27FC236}">
+                <a16:creationId xmlns:a16="http://schemas.microsoft.com/office/drawing/2014/main" id="{2A6EACFB-5CBA-A677-84E3-424DED1F18A5}"/>
+              </a:ext>
+            </a:extLst>
+          </p:cNvPr>
+          <p:cNvSpPr/>
+          <p:nvPr/>
+        </p:nvSpPr>
+        <p:spPr>
+          <a:xfrm>
+            <a:off x="829290" y="2928667"/>
+            <a:ext cx="1163992" cy="711679"/>
           </a:xfrm>
           <a:prstGeom prst="rect">
             <a:avLst/>
@@ -3181,14 +3323,20 @@
       </p:sp>
       <p:sp>
         <p:nvSpPr>
-          <p:cNvPr id="33" name="Text 31"/>
-          <p:cNvSpPr/>
-          <p:nvPr/>
-        </p:nvSpPr>
-        <p:spPr>
-          <a:xfrm>
-            <a:off x="6954616" y="2743200"/>
-            <a:ext cx="1051560" cy="640080"/>
+          <p:cNvPr id="71" name="Text 31">
+            <a:extLst>
+              <a:ext uri="{FF2B5EF4-FFF2-40B4-BE49-F238E27FC236}">
+                <a16:creationId xmlns:a16="http://schemas.microsoft.com/office/drawing/2014/main" id="{E11A4441-3F35-E1CC-757B-3383575FCB05}"/>
+              </a:ext>
+            </a:extLst>
+          </p:cNvPr>
+          <p:cNvSpPr/>
+          <p:nvPr/>
+        </p:nvSpPr>
+        <p:spPr>
+          <a:xfrm>
+            <a:off x="829290" y="2941607"/>
+            <a:ext cx="1163992" cy="711679"/>
           </a:xfrm>
           <a:prstGeom prst="rect">
             <a:avLst/>
@@ -3200,11 +3348,9 @@
           <a:bodyPr wrap="square" rtlCol="0" anchor="ctr"/>
           <a:lstStyle/>
           <a:p>
-            <a:pPr marL="0" indent="0" algn="ctr">
-              <a:buNone/>
-            </a:pPr>
-            <a:r>
-              <a:rPr lang="es-ES_tradnl" sz="1000" i="1" noProof="1">
+            <a:pPr algn="ctr"/>
+            <a:r>
+              <a:rPr lang="es-ES_tradnl" sz="1100" i="1" noProof="1">
                 <a:solidFill>
                   <a:srgbClr val="2C1A0E"/>
                 </a:solidFill>
@@ -3212,16 +3358,14 @@
                 <a:ea typeface="Calibri" pitchFamily="34" charset="-122"/>
                 <a:cs typeface="Calibri" pitchFamily="34" charset="-120"/>
               </a:rPr>
-              <a:t>✓</a:t>
-            </a:r>
-            <a:endParaRPr lang="es-ES_tradnl" sz="1000" noProof="1"/>
-          </a:p>
-          <a:p>
-            <a:pPr marL="0" indent="0" algn="ctr">
-              <a:buNone/>
-            </a:pPr>
-            <a:r>
-              <a:rPr lang="es-ES_tradnl" sz="1000" i="1" noProof="1">
+              <a:t>~</a:t>
+            </a:r>
+            <a:endParaRPr lang="es-ES_tradnl" sz="1100" noProof="1"/>
+          </a:p>
+          <a:p>
+            <a:pPr algn="ctr"/>
+            <a:r>
+              <a:rPr lang="es-ES_tradnl" sz="1100" i="1" noProof="1">
                 <a:solidFill>
                   <a:srgbClr val="2C1A0E"/>
                 </a:solidFill>
@@ -3229,22 +3373,28 @@
                 <a:ea typeface="Calibri" pitchFamily="34" charset="-122"/>
                 <a:cs typeface="Calibri" pitchFamily="34" charset="-120"/>
               </a:rPr>
-              <a:t>Pop.: 2,44 premios vs 0,47</a:t>
-            </a:r>
-            <a:endParaRPr lang="es-ES_tradnl" sz="1000" noProof="1"/>
-          </a:p>
-        </p:txBody>
-      </p:sp>
-      <p:sp>
-        <p:nvSpPr>
-          <p:cNvPr id="40" name="Text 38"/>
-          <p:cNvSpPr/>
-          <p:nvPr/>
-        </p:nvSpPr>
-        <p:spPr>
-          <a:xfrm>
-            <a:off x="548640" y="4297680"/>
-            <a:ext cx="8229600" cy="548640"/>
+              <a:t>Tendencia leve, sin diferencia clara</a:t>
+            </a:r>
+            <a:endParaRPr lang="es-ES_tradnl" sz="1100" noProof="1"/>
+          </a:p>
+        </p:txBody>
+      </p:sp>
+      <p:sp>
+        <p:nvSpPr>
+          <p:cNvPr id="72" name="Text 23">
+            <a:extLst>
+              <a:ext uri="{FF2B5EF4-FFF2-40B4-BE49-F238E27FC236}">
+                <a16:creationId xmlns:a16="http://schemas.microsoft.com/office/drawing/2014/main" id="{DA3169DF-A825-E72C-02BF-B4BF89AA189E}"/>
+              </a:ext>
+            </a:extLst>
+          </p:cNvPr>
+          <p:cNvSpPr/>
+          <p:nvPr/>
+        </p:nvSpPr>
+        <p:spPr>
+          <a:xfrm>
+            <a:off x="794066" y="2087880"/>
+            <a:ext cx="1234440" cy="731520"/>
           </a:xfrm>
           <a:prstGeom prst="rect">
             <a:avLst/>
@@ -3260,21 +3410,32 @@
               <a:buNone/>
             </a:pPr>
             <a:r>
-              <a:rPr lang="es-ES_tradnl" sz="1200" i="1" noProof="1">
-                <a:solidFill>
-                  <a:schemeClr val="accent4"/>
+              <a:rPr lang="es-ES_tradnl" sz="1200" noProof="1">
+                <a:solidFill>
+                  <a:srgbClr val="FDF6EC"/>
                 </a:solidFill>
                 <a:latin typeface="Calibri" pitchFamily="34" charset="0"/>
                 <a:ea typeface="Calibri" pitchFamily="34" charset="-122"/>
                 <a:cs typeface="Calibri" pitchFamily="34" charset="-120"/>
               </a:rPr>
-              <a:t>Próximos pasos: Análisis de géneros · Correlación bbeScore · Modelo predictivo de rating</a:t>
-            </a:r>
-            <a:endParaRPr lang="es-ES_tradnl" sz="1200" noProof="1">
-              <a:solidFill>
-                <a:schemeClr val="accent4"/>
-              </a:solidFill>
-            </a:endParaRPr>
+              <a:t>Páginas</a:t>
+            </a:r>
+          </a:p>
+          <a:p>
+            <a:pPr marL="0" indent="0" algn="ctr">
+              <a:buNone/>
+            </a:pPr>
+            <a:r>
+              <a:rPr lang="es-ES_tradnl" sz="1200" noProof="1">
+                <a:solidFill>
+                  <a:srgbClr val="FDF6EC"/>
+                </a:solidFill>
+                <a:latin typeface="Calibri" pitchFamily="34" charset="0"/>
+                <a:cs typeface="Calibri" pitchFamily="34" charset="-120"/>
+              </a:rPr>
+              <a:t>vs Rating</a:t>
+            </a:r>
+            <a:endParaRPr lang="es-ES_tradnl" sz="1200" noProof="1"/>
           </a:p>
         </p:txBody>
       </p:sp>
@@ -3447,7 +3608,7 @@
                 <a:ea typeface="Calibri" pitchFamily="34" charset="-122"/>
                 <a:cs typeface="Calibri" pitchFamily="34" charset="-120"/>
               </a:rPr>
-              <a:t>Dataset: Goodreads Best Books Ever  ·  Kaggle</a:t>
+              <a:t>Dataset: Goodreads Best Books</a:t>
             </a:r>
             <a:endParaRPr lang="es-ES_tradnl" sz="1300" noProof="1"/>
           </a:p>
@@ -4415,7 +4576,7 @@
                 <a:ea typeface="Georgia" pitchFamily="34" charset="-122"/>
                 <a:cs typeface="Georgia" pitchFamily="34" charset="-120"/>
               </a:rPr>
-              <a:t>¿Qué es Kaggle? El dataset</a:t>
+              <a:t>El dataset</a:t>
             </a:r>
             <a:endParaRPr lang="en-US" sz="2200" dirty="0"/>
           </a:p>
@@ -4468,7 +4629,7 @@
         </p:nvSpPr>
         <p:spPr>
           <a:xfrm>
-            <a:off x="548640" y="2400300"/>
+            <a:off x="548640" y="2495186"/>
             <a:ext cx="1920240" cy="1371600"/>
           </a:xfrm>
           <a:prstGeom prst="rect">
@@ -4507,7 +4668,7 @@
         </p:nvSpPr>
         <p:spPr>
           <a:xfrm>
-            <a:off x="548640" y="2491740"/>
+            <a:off x="548640" y="2586626"/>
             <a:ext cx="1920240" cy="640080"/>
           </a:xfrm>
           <a:prstGeom prst="rect">
@@ -4546,7 +4707,7 @@
         </p:nvSpPr>
         <p:spPr>
           <a:xfrm>
-            <a:off x="548640" y="3131820"/>
+            <a:off x="548640" y="3226706"/>
             <a:ext cx="1920240" cy="457200"/>
           </a:xfrm>
           <a:prstGeom prst="rect">
@@ -4585,7 +4746,7 @@
         </p:nvSpPr>
         <p:spPr>
           <a:xfrm>
-            <a:off x="2697480" y="2400300"/>
+            <a:off x="2697480" y="2495186"/>
             <a:ext cx="1920240" cy="1371600"/>
           </a:xfrm>
           <a:prstGeom prst="rect">
@@ -4624,7 +4785,7 @@
         </p:nvSpPr>
         <p:spPr>
           <a:xfrm>
-            <a:off x="2697480" y="2491740"/>
+            <a:off x="2697480" y="2586626"/>
             <a:ext cx="1920240" cy="640080"/>
           </a:xfrm>
           <a:prstGeom prst="rect">
@@ -4663,7 +4824,7 @@
         </p:nvSpPr>
         <p:spPr>
           <a:xfrm>
-            <a:off x="2697480" y="3131820"/>
+            <a:off x="2697480" y="3226706"/>
             <a:ext cx="1920240" cy="457200"/>
           </a:xfrm>
           <a:prstGeom prst="rect">
@@ -4702,7 +4863,7 @@
         </p:nvSpPr>
         <p:spPr>
           <a:xfrm>
-            <a:off x="4846320" y="2400300"/>
+            <a:off x="4846320" y="2495186"/>
             <a:ext cx="1920240" cy="1371600"/>
           </a:xfrm>
           <a:prstGeom prst="rect">
@@ -4741,7 +4902,7 @@
         </p:nvSpPr>
         <p:spPr>
           <a:xfrm>
-            <a:off x="4846320" y="2491740"/>
+            <a:off x="4846320" y="2586626"/>
             <a:ext cx="1920240" cy="640080"/>
           </a:xfrm>
           <a:prstGeom prst="rect">
@@ -4780,7 +4941,7 @@
         </p:nvSpPr>
         <p:spPr>
           <a:xfrm>
-            <a:off x="4846320" y="3131820"/>
+            <a:off x="4846320" y="3226706"/>
             <a:ext cx="1920240" cy="457200"/>
           </a:xfrm>
           <a:prstGeom prst="rect">
@@ -4819,7 +4980,7 @@
         </p:nvSpPr>
         <p:spPr>
           <a:xfrm>
-            <a:off x="6995160" y="2400300"/>
+            <a:off x="6995160" y="2495186"/>
             <a:ext cx="1920240" cy="1371600"/>
           </a:xfrm>
           <a:prstGeom prst="rect">
@@ -4858,7 +5019,7 @@
         </p:nvSpPr>
         <p:spPr>
           <a:xfrm>
-            <a:off x="6995160" y="2491740"/>
+            <a:off x="6995160" y="2586626"/>
             <a:ext cx="1920240" cy="640080"/>
           </a:xfrm>
           <a:prstGeom prst="rect">
@@ -4897,7 +5058,7 @@
         </p:nvSpPr>
         <p:spPr>
           <a:xfrm>
-            <a:off x="6995160" y="3131820"/>
+            <a:off x="6995160" y="3226706"/>
             <a:ext cx="1920240" cy="457200"/>
           </a:xfrm>
           <a:prstGeom prst="rect">
@@ -4914,7 +5075,7 @@
               <a:buNone/>
             </a:pPr>
             <a:r>
-              <a:rPr lang="en-US" sz="1100" dirty="0">
+              <a:rPr lang="en-US" sz="1100" dirty="0" err="1">
                 <a:solidFill>
                   <a:srgbClr val="7A5C3A"/>
                 </a:solidFill>
@@ -4922,7 +5083,7 @@
                 <a:ea typeface="Calibri" pitchFamily="34" charset="-122"/>
                 <a:cs typeface="Calibri" pitchFamily="34" charset="-120"/>
               </a:rPr>
-              <a:t>Usabilidad Kaggle</a:t>
+              <a:t>Usabilidad</a:t>
             </a:r>
             <a:endParaRPr lang="en-US" sz="1100" dirty="0"/>
           </a:p>
@@ -4936,7 +5097,7 @@
         </p:nvSpPr>
         <p:spPr>
           <a:xfrm>
-            <a:off x="548640" y="3977640"/>
+            <a:off x="548640" y="4091940"/>
             <a:ext cx="8412480" cy="640080"/>
           </a:xfrm>
           <a:prstGeom prst="rect">
@@ -4953,7 +5114,7 @@
               <a:buNone/>
             </a:pPr>
             <a:r>
-              <a:rPr lang="en-US" sz="1100" i="1" dirty="0">
+              <a:rPr lang="en-US" sz="1200" i="1" dirty="0">
                 <a:solidFill>
                   <a:srgbClr val="7A5C3A"/>
                 </a:solidFill>
@@ -4963,7 +5124,7 @@
               </a:rPr>
               <a:t>Variables principales: title · author · rating · numRatings · genres · pages · bookFormat · awards · language · likedPercent · bbeScore</a:t>
             </a:r>
-            <a:endParaRPr lang="en-US" sz="1100" dirty="0"/>
+            <a:endParaRPr lang="en-US" sz="1200" dirty="0"/>
           </a:p>
         </p:txBody>
       </p:sp>

--- a/Presentacion/EDA_Goodreads.pptx
+++ b/Presentacion/EDA_Goodreads.pptx
@@ -4591,7 +4591,7 @@
         <p:spPr>
           <a:xfrm>
             <a:off x="502920" y="1188720"/>
-            <a:ext cx="8412480" cy="1005840"/>
+            <a:ext cx="8412480" cy="1169306"/>
           </a:xfrm>
           <a:prstGeom prst="rect">
             <a:avLst/>
@@ -4603,11 +4603,40 @@
           <a:bodyPr wrap="square" rtlCol="0" anchor="ctr"/>
           <a:lstStyle/>
           <a:p>
-            <a:pPr marL="0" indent="0" algn="ctr">
-              <a:buNone/>
-            </a:pPr>
-            <a:r>
-              <a:rPr lang="en-US" dirty="0">
+            <a:pPr algn="ctr"/>
+            <a:r>
+              <a:rPr lang="es-ES" dirty="0"/>
+              <a:t>El </a:t>
+            </a:r>
+            <a:r>
+              <a:rPr lang="es-ES" dirty="0" err="1"/>
+              <a:t>dataset</a:t>
+            </a:r>
+            <a:r>
+              <a:rPr lang="es-ES" dirty="0"/>
+              <a:t> fue construido por Lorena Casanova Lozano y Sergio Costa Planells en 2020 mediante técnicas de web </a:t>
+            </a:r>
+            <a:r>
+              <a:rPr lang="es-ES" dirty="0" err="1"/>
+              <a:t>scraping</a:t>
+            </a:r>
+            <a:r>
+              <a:rPr lang="es-ES" dirty="0"/>
+              <a:t> sobre la lista Best Books Ever de </a:t>
+            </a:r>
+            <a:r>
+              <a:rPr lang="es-ES" dirty="0" err="1"/>
+              <a:t>Goodreads.com</a:t>
+            </a:r>
+            <a:r>
+              <a:rPr lang="es-ES" dirty="0"/>
+              <a:t>.</a:t>
+            </a:r>
+          </a:p>
+          <a:p>
+            <a:pPr algn="ctr"/>
+            <a:r>
+              <a:rPr lang="en-US" dirty="0" err="1">
                 <a:solidFill>
                   <a:srgbClr val="1A0F00"/>
                 </a:solidFill>
@@ -4615,7 +4644,18 @@
                 <a:ea typeface="Calibri" pitchFamily="34" charset="-122"/>
                 <a:cs typeface="Calibri" pitchFamily="34" charset="-120"/>
               </a:rPr>
-              <a:t>El dataset utilizado es "Comprehensive Overview of 52.478 GoodReads Best Books". Recoge los mejores libros de Goodreads con ratings, géneros, premios, páginas y más.</a:t>
+              <a:t>Recoge</a:t>
+            </a:r>
+            <a:r>
+              <a:rPr lang="en-US" dirty="0">
+                <a:solidFill>
+                  <a:srgbClr val="1A0F00"/>
+                </a:solidFill>
+                <a:latin typeface="Calibri" pitchFamily="34" charset="0"/>
+                <a:ea typeface="Calibri" pitchFamily="34" charset="-122"/>
+                <a:cs typeface="Calibri" pitchFamily="34" charset="-120"/>
+              </a:rPr>
+              <a:t> los mejores libros de Goodreads con ratings, géneros, premios, páginas y más.</a:t>
             </a:r>
             <a:endParaRPr lang="en-US" dirty="0"/>
           </a:p>
